--- a/U1-Frames-of-Reference/figures/all-figs.pptx
+++ b/U1-Frames-of-Reference/figures/all-figs.pptx
@@ -6,6 +6,7 @@
   </p:sldMasterIdLst>
   <p:sldIdLst>
     <p:sldId id="256" r:id="rId2"/>
+    <p:sldId id="257" r:id="rId3"/>
   </p:sldIdLst>
   <p:sldSz cx="12192000" cy="6858000"/>
   <p:notesSz cx="6858000" cy="9144000"/>
@@ -2966,6 +2967,151 @@
       </p:grpSpPr>
       <p:cxnSp>
         <p:nvCxnSpPr>
+          <p:cNvPr id="55" name="Straight Arrow Connector 54"/>
+          <p:cNvCxnSpPr/>
+          <p:nvPr/>
+        </p:nvCxnSpPr>
+        <p:spPr>
+          <a:xfrm>
+            <a:off x="2659380" y="4899660"/>
+            <a:ext cx="3253740" cy="0"/>
+          </a:xfrm>
+          <a:prstGeom prst="straightConnector1">
+            <a:avLst/>
+          </a:prstGeom>
+          <a:ln w="19050">
+            <a:solidFill>
+              <a:schemeClr val="tx1"/>
+            </a:solidFill>
+            <a:headEnd type="triangle" w="lg" len="lg"/>
+            <a:tailEnd type="triangle" w="lg" len="lg"/>
+          </a:ln>
+        </p:spPr>
+        <p:style>
+          <a:lnRef idx="1">
+            <a:schemeClr val="accent1"/>
+          </a:lnRef>
+          <a:fillRef idx="0">
+            <a:schemeClr val="accent1"/>
+          </a:fillRef>
+          <a:effectRef idx="0">
+            <a:schemeClr val="accent1"/>
+          </a:effectRef>
+          <a:fontRef idx="minor">
+            <a:schemeClr val="tx1"/>
+          </a:fontRef>
+        </p:style>
+      </p:cxnSp>
+      <p:cxnSp>
+        <p:nvCxnSpPr>
+          <p:cNvPr id="49" name="Straight Connector 48"/>
+          <p:cNvCxnSpPr/>
+          <p:nvPr/>
+        </p:nvCxnSpPr>
+        <p:spPr>
+          <a:xfrm>
+            <a:off x="2657348" y="4094480"/>
+            <a:ext cx="0" cy="842264"/>
+          </a:xfrm>
+          <a:prstGeom prst="line">
+            <a:avLst/>
+          </a:prstGeom>
+          <a:ln w="19050">
+            <a:solidFill>
+              <a:schemeClr val="tx1"/>
+            </a:solidFill>
+            <a:prstDash val="dash"/>
+          </a:ln>
+        </p:spPr>
+        <p:style>
+          <a:lnRef idx="1">
+            <a:schemeClr val="accent1"/>
+          </a:lnRef>
+          <a:fillRef idx="0">
+            <a:schemeClr val="accent1"/>
+          </a:fillRef>
+          <a:effectRef idx="0">
+            <a:schemeClr val="accent1"/>
+          </a:effectRef>
+          <a:fontRef idx="minor">
+            <a:schemeClr val="tx1"/>
+          </a:fontRef>
+        </p:style>
+      </p:cxnSp>
+      <p:cxnSp>
+        <p:nvCxnSpPr>
+          <p:cNvPr id="48" name="Straight Connector 47"/>
+          <p:cNvCxnSpPr/>
+          <p:nvPr/>
+        </p:nvCxnSpPr>
+        <p:spPr>
+          <a:xfrm>
+            <a:off x="4549648" y="4099560"/>
+            <a:ext cx="0" cy="480060"/>
+          </a:xfrm>
+          <a:prstGeom prst="line">
+            <a:avLst/>
+          </a:prstGeom>
+          <a:ln w="19050">
+            <a:solidFill>
+              <a:schemeClr val="tx1"/>
+            </a:solidFill>
+            <a:prstDash val="dash"/>
+          </a:ln>
+        </p:spPr>
+        <p:style>
+          <a:lnRef idx="1">
+            <a:schemeClr val="accent1"/>
+          </a:lnRef>
+          <a:fillRef idx="0">
+            <a:schemeClr val="accent1"/>
+          </a:fillRef>
+          <a:effectRef idx="0">
+            <a:schemeClr val="accent1"/>
+          </a:effectRef>
+          <a:fontRef idx="minor">
+            <a:schemeClr val="tx1"/>
+          </a:fontRef>
+        </p:style>
+      </p:cxnSp>
+      <p:cxnSp>
+        <p:nvCxnSpPr>
+          <p:cNvPr id="46" name="Straight Connector 45"/>
+          <p:cNvCxnSpPr/>
+          <p:nvPr/>
+        </p:nvCxnSpPr>
+        <p:spPr>
+          <a:xfrm>
+            <a:off x="5919216" y="2334768"/>
+            <a:ext cx="0" cy="2602992"/>
+          </a:xfrm>
+          <a:prstGeom prst="line">
+            <a:avLst/>
+          </a:prstGeom>
+          <a:ln w="19050">
+            <a:solidFill>
+              <a:schemeClr val="tx1"/>
+            </a:solidFill>
+            <a:prstDash val="dash"/>
+          </a:ln>
+        </p:spPr>
+        <p:style>
+          <a:lnRef idx="1">
+            <a:schemeClr val="accent1"/>
+          </a:lnRef>
+          <a:fillRef idx="0">
+            <a:schemeClr val="accent1"/>
+          </a:fillRef>
+          <a:effectRef idx="0">
+            <a:schemeClr val="accent1"/>
+          </a:effectRef>
+          <a:fontRef idx="minor">
+            <a:schemeClr val="tx1"/>
+          </a:fontRef>
+        </p:style>
+      </p:cxnSp>
+      <p:cxnSp>
+        <p:nvCxnSpPr>
           <p:cNvPr id="30" name="Straight Arrow Connector 29"/>
           <p:cNvCxnSpPr>
             <a:endCxn id="28" idx="3"/>
@@ -3191,7 +3337,7 @@
               </p:nvSpPr>
               <p:spPr>
                 <a:xfrm>
-                  <a:off x="2533650" y="4162425"/>
+                  <a:off x="2323338" y="3787521"/>
                   <a:ext cx="284822" cy="369332"/>
                 </a:xfrm>
                 <a:prstGeom prst="rect">
@@ -3236,7 +3382,7 @@
               </p:nvSpPr>
               <p:spPr>
                 <a:xfrm>
-                  <a:off x="2533650" y="4162425"/>
+                  <a:off x="2323338" y="3787521"/>
                   <a:ext cx="284822" cy="369332"/>
                 </a:xfrm>
                 <a:prstGeom prst="rect">
@@ -3245,7 +3391,7 @@
                 <a:blipFill>
                   <a:blip r:embed="rId2"/>
                   <a:stretch>
-                    <a:fillRect l="-26087" r="-23913" b="-6667"/>
+                    <a:fillRect l="-23404" r="-23404" b="-6557"/>
                   </a:stretch>
                 </a:blipFill>
               </p:spPr>
@@ -3275,7 +3421,7 @@
               <p:spPr>
                 <a:xfrm>
                   <a:off x="6972300" y="4152900"/>
-                  <a:ext cx="241733" cy="369332"/>
+                  <a:ext cx="275204" cy="369332"/>
                 </a:xfrm>
                 <a:prstGeom prst="rect">
                   <a:avLst/>
@@ -3298,7 +3444,7 @@
                           <a:rPr lang="en-US" sz="2400" b="0" i="1" smtClean="0">
                             <a:latin typeface="Cambria Math" panose="02040503050406030204" pitchFamily="18" charset="0"/>
                           </a:rPr>
-                          <m:t>𝑥</m:t>
+                          <m:t>𝑋</m:t>
                         </m:r>
                       </m:oMath>
                     </m:oMathPara>
@@ -3320,7 +3466,7 @@
               <p:spPr>
                 <a:xfrm>
                   <a:off x="6972300" y="4152900"/>
-                  <a:ext cx="241733" cy="369332"/>
+                  <a:ext cx="275204" cy="369332"/>
                 </a:xfrm>
                 <a:prstGeom prst="rect">
                   <a:avLst/>
@@ -3328,7 +3474,7 @@
                 <a:blipFill>
                   <a:blip r:embed="rId3"/>
                   <a:stretch>
-                    <a:fillRect l="-17949" r="-15385"/>
+                    <a:fillRect l="-26667" r="-22222" b="-6557"/>
                   </a:stretch>
                 </a:blipFill>
               </p:spPr>
@@ -3357,8 +3503,8 @@
               </p:nvSpPr>
               <p:spPr>
                 <a:xfrm>
-                  <a:off x="2326005" y="914400"/>
-                  <a:ext cx="245708" cy="369332"/>
+                  <a:off x="2760345" y="914400"/>
+                  <a:ext cx="262380" cy="369332"/>
                 </a:xfrm>
                 <a:prstGeom prst="rect">
                   <a:avLst/>
@@ -3384,7 +3530,7 @@
                             </a:solidFill>
                             <a:latin typeface="Cambria Math" panose="02040503050406030204" pitchFamily="18" charset="0"/>
                           </a:rPr>
-                          <m:t>𝑦</m:t>
+                          <m:t>𝑌</m:t>
                         </m:r>
                       </m:oMath>
                     </m:oMathPara>
@@ -3409,8 +3555,8 @@
               </p:nvSpPr>
               <p:spPr>
                 <a:xfrm>
-                  <a:off x="2326005" y="914400"/>
-                  <a:ext cx="245708" cy="369332"/>
+                  <a:off x="2760345" y="914400"/>
+                  <a:ext cx="262380" cy="369332"/>
                 </a:xfrm>
                 <a:prstGeom prst="rect">
                   <a:avLst/>
@@ -3418,7 +3564,7 @@
                 <a:blipFill>
                   <a:blip r:embed="rId4"/>
                   <a:stretch>
-                    <a:fillRect l="-30000" r="-30000" b="-24590"/>
+                    <a:fillRect l="-27907" r="-23256" b="-4918"/>
                   </a:stretch>
                 </a:blipFill>
               </p:spPr>
@@ -3448,7 +3594,7 @@
               <p:spPr>
                 <a:xfrm>
                   <a:off x="1287780" y="5229225"/>
-                  <a:ext cx="223266" cy="369332"/>
+                  <a:ext cx="259174" cy="369332"/>
                 </a:xfrm>
                 <a:prstGeom prst="rect">
                   <a:avLst/>
@@ -3474,7 +3620,7 @@
                             </a:solidFill>
                             <a:latin typeface="Cambria Math" panose="02040503050406030204" pitchFamily="18" charset="0"/>
                           </a:rPr>
-                          <m:t>𝑧</m:t>
+                          <m:t>𝑍</m:t>
                         </m:r>
                       </m:oMath>
                     </m:oMathPara>
@@ -3500,7 +3646,7 @@
               <p:spPr>
                 <a:xfrm>
                   <a:off x="1287780" y="5229225"/>
-                  <a:ext cx="223266" cy="369332"/>
+                  <a:ext cx="259174" cy="369332"/>
                 </a:xfrm>
                 <a:prstGeom prst="rect">
                   <a:avLst/>
@@ -3508,7 +3654,7 @@
                 <a:blipFill>
                   <a:blip r:embed="rId5"/>
                   <a:stretch>
-                    <a:fillRect l="-16216" r="-16216"/>
+                    <a:fillRect l="-25581" r="-25581" b="-6667"/>
                   </a:stretch>
                 </a:blipFill>
               </p:spPr>
@@ -3536,10 +3682,10 @@
         </p:nvGrpSpPr>
         <p:grpSpPr>
           <a:xfrm>
-            <a:off x="3057525" y="866775"/>
-            <a:ext cx="5205769" cy="4731782"/>
-            <a:chOff x="2722245" y="866775"/>
-            <a:chExt cx="5205769" cy="4731782"/>
+            <a:off x="3057525" y="914400"/>
+            <a:ext cx="5241034" cy="4684157"/>
+            <a:chOff x="2722245" y="914400"/>
+            <a:chExt cx="5241034" cy="4684157"/>
           </a:xfrm>
         </p:grpSpPr>
         <p:cxnSp>
@@ -3550,7 +3696,7 @@
           </p:nvCxnSpPr>
           <p:spPr>
             <a:xfrm>
-              <a:off x="4223655" y="1245324"/>
+              <a:off x="4223655" y="1702524"/>
               <a:ext cx="1062446" cy="0"/>
             </a:xfrm>
             <a:prstGeom prst="straightConnector1">
@@ -3718,7 +3864,7 @@
               </p:nvSpPr>
               <p:spPr>
                 <a:xfrm>
-                  <a:off x="4162425" y="4162425"/>
+                  <a:off x="3851529" y="3778377"/>
                   <a:ext cx="357470" cy="369332"/>
                 </a:xfrm>
                 <a:prstGeom prst="rect">
@@ -3785,7 +3931,7 @@
               </p:nvSpPr>
               <p:spPr>
                 <a:xfrm>
-                  <a:off x="4162425" y="4162425"/>
+                  <a:off x="3851529" y="3778377"/>
                   <a:ext cx="357470" cy="369332"/>
                 </a:xfrm>
                 <a:prstGeom prst="rect">
@@ -3824,7 +3970,7 @@
               <p:spPr>
                 <a:xfrm>
                   <a:off x="7615428" y="4152900"/>
-                  <a:ext cx="312586" cy="369332"/>
+                  <a:ext cx="347851" cy="369332"/>
                 </a:xfrm>
                 <a:prstGeom prst="rect">
                   <a:avLst/>
@@ -3852,7 +3998,7 @@
                             </a:solidFill>
                             <a:latin typeface="Cambria Math" panose="02040503050406030204" pitchFamily="18" charset="0"/>
                           </a:rPr>
-                          <m:t>𝑥</m:t>
+                          <m:t>𝑋</m:t>
                         </m:r>
                         <m:r>
                           <a:rPr lang="en-US" sz="2400" b="0" i="1" smtClean="0">
@@ -3885,7 +4031,7 @@
               <p:spPr>
                 <a:xfrm>
                   <a:off x="7615428" y="4152900"/>
-                  <a:ext cx="312586" cy="369332"/>
+                  <a:ext cx="347851" cy="369332"/>
                 </a:xfrm>
                 <a:prstGeom prst="rect">
                   <a:avLst/>
@@ -3893,7 +4039,7 @@
                 <a:blipFill>
                   <a:blip r:embed="rId7"/>
                   <a:stretch>
-                    <a:fillRect l="-25000" t="-1639" r="-26923" b="-9836"/>
+                    <a:fillRect l="-22807" t="-1639" r="-24561" b="-9836"/>
                   </a:stretch>
                 </a:blipFill>
               </p:spPr>
@@ -3922,8 +4068,8 @@
               </p:nvSpPr>
               <p:spPr>
                 <a:xfrm>
-                  <a:off x="3878580" y="914400"/>
-                  <a:ext cx="320601" cy="369332"/>
+                  <a:off x="4328160" y="914400"/>
+                  <a:ext cx="335027" cy="369332"/>
                 </a:xfrm>
                 <a:prstGeom prst="rect">
                   <a:avLst/>
@@ -3951,7 +4097,7 @@
                             </a:solidFill>
                             <a:latin typeface="Cambria Math" panose="02040503050406030204" pitchFamily="18" charset="0"/>
                           </a:rPr>
-                          <m:t>𝑦</m:t>
+                          <m:t>𝑌</m:t>
                         </m:r>
                         <m:r>
                           <a:rPr lang="en-US" sz="2400" b="0" i="1" smtClean="0">
@@ -3983,8 +4129,8 @@
               </p:nvSpPr>
               <p:spPr>
                 <a:xfrm>
-                  <a:off x="3878580" y="914400"/>
-                  <a:ext cx="320601" cy="369332"/>
+                  <a:off x="4328160" y="914400"/>
+                  <a:ext cx="335027" cy="369332"/>
                 </a:xfrm>
                 <a:prstGeom prst="rect">
                   <a:avLst/>
@@ -3992,7 +4138,7 @@
                 <a:blipFill>
                   <a:blip r:embed="rId8"/>
                   <a:stretch>
-                    <a:fillRect l="-35849" t="-6557" r="-35849" b="-36066"/>
+                    <a:fillRect l="-23636" t="-1639" r="-23636" b="-8197"/>
                   </a:stretch>
                 </a:blipFill>
               </p:spPr>
@@ -4022,7 +4168,7 @@
               <p:spPr>
                 <a:xfrm>
                   <a:off x="2830830" y="5229225"/>
-                  <a:ext cx="298159" cy="369332"/>
+                  <a:ext cx="331821" cy="369332"/>
                 </a:xfrm>
                 <a:prstGeom prst="rect">
                   <a:avLst/>
@@ -4050,7 +4196,7 @@
                             </a:solidFill>
                             <a:latin typeface="Cambria Math" panose="02040503050406030204" pitchFamily="18" charset="0"/>
                           </a:rPr>
-                          <m:t>𝑧</m:t>
+                          <m:t>𝑍</m:t>
                         </m:r>
                         <m:r>
                           <a:rPr lang="en-US" sz="2400" b="0" i="1" smtClean="0">
@@ -4089,7 +4235,7 @@
               <p:spPr>
                 <a:xfrm>
                   <a:off x="2830830" y="5229225"/>
-                  <a:ext cx="298159" cy="369332"/>
+                  <a:ext cx="331821" cy="369332"/>
                 </a:xfrm>
                 <a:prstGeom prst="rect">
                   <a:avLst/>
@@ -4097,7 +4243,7 @@
                 <a:blipFill>
                   <a:blip r:embed="rId9"/>
                   <a:stretch>
-                    <a:fillRect l="-26531" t="-1667" r="-28571" b="-10000"/>
+                    <a:fillRect l="-23636" t="-1667" r="-25455" b="-10000"/>
                   </a:stretch>
                 </a:blipFill>
               </p:spPr>
@@ -4126,7 +4272,7 @@
               </p:nvSpPr>
               <p:spPr>
                 <a:xfrm>
-                  <a:off x="4859655" y="866775"/>
+                  <a:off x="4859655" y="1323975"/>
                   <a:ext cx="245708" cy="369332"/>
                 </a:xfrm>
                 <a:prstGeom prst="rect">
@@ -4178,7 +4324,7 @@
               </p:nvSpPr>
               <p:spPr>
                 <a:xfrm>
-                  <a:off x="4859655" y="866775"/>
+                  <a:off x="4859655" y="1323975"/>
                   <a:ext cx="245708" cy="369332"/>
                 </a:xfrm>
                 <a:prstGeom prst="rect">
@@ -4253,10 +4399,2468 @@
           </a:p>
         </p:txBody>
       </p:sp>
+      <mc:AlternateContent xmlns:mc="http://schemas.openxmlformats.org/markup-compatibility/2006">
+        <mc:Choice xmlns:a14="http://schemas.microsoft.com/office/drawing/2010/main" Requires="a14">
+          <p:sp>
+            <p:nvSpPr>
+              <p:cNvPr id="42" name="TextBox 41"/>
+              <p:cNvSpPr txBox="1"/>
+              <p:nvPr/>
+            </p:nvSpPr>
+            <p:spPr>
+              <a:xfrm>
+                <a:off x="6018530" y="2028825"/>
+                <a:ext cx="267188" cy="369332"/>
+              </a:xfrm>
+              <a:prstGeom prst="rect">
+                <a:avLst/>
+              </a:prstGeom>
+              <a:noFill/>
+            </p:spPr>
+            <p:txBody>
+              <a:bodyPr wrap="none" lIns="0" tIns="0" rIns="0" bIns="0" rtlCol="0">
+                <a:spAutoFit/>
+              </a:bodyPr>
+              <a:lstStyle/>
+              <a:p>
+                <a14:m>
+                  <m:oMathPara xmlns:m="http://schemas.openxmlformats.org/officeDocument/2006/math">
+                    <m:oMathParaPr>
+                      <m:jc m:val="centerGroup"/>
+                    </m:oMathParaPr>
+                    <m:oMath xmlns:m="http://schemas.openxmlformats.org/officeDocument/2006/math">
+                      <m:r>
+                        <a:rPr lang="en-US" sz="2400" b="0" i="1" smtClean="0">
+                          <a:latin typeface="Cambria Math" panose="02040503050406030204" pitchFamily="18" charset="0"/>
+                        </a:rPr>
+                        <m:t>𝑃</m:t>
+                      </m:r>
+                    </m:oMath>
+                  </m:oMathPara>
+                </a14:m>
+                <a:endParaRPr lang="en-US" sz="2400" dirty="0"/>
+              </a:p>
+            </p:txBody>
+          </p:sp>
+        </mc:Choice>
+        <mc:Fallback>
+          <p:sp>
+            <p:nvSpPr>
+              <p:cNvPr id="42" name="TextBox 41"/>
+              <p:cNvSpPr txBox="1">
+                <a:spLocks noRot="1" noChangeAspect="1" noMove="1" noResize="1" noEditPoints="1" noAdjustHandles="1" noChangeArrowheads="1" noChangeShapeType="1" noTextEdit="1"/>
+              </p:cNvSpPr>
+              <p:nvPr/>
+            </p:nvSpPr>
+            <p:spPr>
+              <a:xfrm>
+                <a:off x="6018530" y="2028825"/>
+                <a:ext cx="267188" cy="369332"/>
+              </a:xfrm>
+              <a:prstGeom prst="rect">
+                <a:avLst/>
+              </a:prstGeom>
+              <a:blipFill>
+                <a:blip r:embed="rId11"/>
+                <a:stretch>
+                  <a:fillRect l="-25000" r="-25000" b="-6667"/>
+                </a:stretch>
+              </a:blipFill>
+            </p:spPr>
+            <p:txBody>
+              <a:bodyPr/>
+              <a:lstStyle/>
+              <a:p>
+                <a:r>
+                  <a:rPr lang="en-US">
+                    <a:noFill/>
+                  </a:rPr>
+                  <a:t> </a:t>
+                </a:r>
+              </a:p>
+            </p:txBody>
+          </p:sp>
+        </mc:Fallback>
+      </mc:AlternateContent>
+      <mc:AlternateContent xmlns:mc="http://schemas.openxmlformats.org/markup-compatibility/2006">
+        <mc:Choice xmlns:a14="http://schemas.microsoft.com/office/drawing/2010/main" Requires="a14">
+          <p:sp>
+            <p:nvSpPr>
+              <p:cNvPr id="43" name="TextBox 42"/>
+              <p:cNvSpPr txBox="1"/>
+              <p:nvPr/>
+            </p:nvSpPr>
+            <p:spPr>
+              <a:xfrm>
+                <a:off x="4043680" y="2895600"/>
+                <a:ext cx="234038" cy="369332"/>
+              </a:xfrm>
+              <a:prstGeom prst="rect">
+                <a:avLst/>
+              </a:prstGeom>
+              <a:noFill/>
+            </p:spPr>
+            <p:txBody>
+              <a:bodyPr wrap="none" lIns="0" tIns="0" rIns="0" bIns="0" rtlCol="0">
+                <a:spAutoFit/>
+              </a:bodyPr>
+              <a:lstStyle/>
+              <a:p>
+                <a14:m>
+                  <m:oMathPara xmlns:m="http://schemas.openxmlformats.org/officeDocument/2006/math">
+                    <m:oMathParaPr>
+                      <m:jc m:val="centerGroup"/>
+                    </m:oMathParaPr>
+                    <m:oMath xmlns:m="http://schemas.openxmlformats.org/officeDocument/2006/math">
+                      <m:acc>
+                        <m:accPr>
+                          <m:chr m:val="̅"/>
+                          <m:ctrlPr>
+                            <a:rPr lang="en-US" sz="2400" i="1" smtClean="0">
+                              <a:latin typeface="Cambria Math" panose="02040503050406030204" pitchFamily="18" charset="0"/>
+                            </a:rPr>
+                          </m:ctrlPr>
+                        </m:accPr>
+                        <m:e>
+                          <m:r>
+                            <a:rPr lang="en-US" sz="2400" b="1" i="1" smtClean="0">
+                              <a:latin typeface="Cambria Math" panose="02040503050406030204" pitchFamily="18" charset="0"/>
+                            </a:rPr>
+                            <m:t>𝒓</m:t>
+                          </m:r>
+                        </m:e>
+                      </m:acc>
+                    </m:oMath>
+                  </m:oMathPara>
+                </a14:m>
+                <a:endParaRPr lang="en-US" sz="2400" dirty="0"/>
+              </a:p>
+            </p:txBody>
+          </p:sp>
+        </mc:Choice>
+        <mc:Fallback>
+          <p:sp>
+            <p:nvSpPr>
+              <p:cNvPr id="43" name="TextBox 42"/>
+              <p:cNvSpPr txBox="1">
+                <a:spLocks noRot="1" noChangeAspect="1" noMove="1" noResize="1" noEditPoints="1" noAdjustHandles="1" noChangeArrowheads="1" noChangeShapeType="1" noTextEdit="1"/>
+              </p:cNvSpPr>
+              <p:nvPr/>
+            </p:nvSpPr>
+            <p:spPr>
+              <a:xfrm>
+                <a:off x="4043680" y="2895600"/>
+                <a:ext cx="234038" cy="369332"/>
+              </a:xfrm>
+              <a:prstGeom prst="rect">
+                <a:avLst/>
+              </a:prstGeom>
+              <a:blipFill>
+                <a:blip r:embed="rId12"/>
+                <a:stretch>
+                  <a:fillRect l="-17949" r="-35897"/>
+                </a:stretch>
+              </a:blipFill>
+            </p:spPr>
+            <p:txBody>
+              <a:bodyPr/>
+              <a:lstStyle/>
+              <a:p>
+                <a:r>
+                  <a:rPr lang="en-US">
+                    <a:noFill/>
+                  </a:rPr>
+                  <a:t> </a:t>
+                </a:r>
+              </a:p>
+            </p:txBody>
+          </p:sp>
+        </mc:Fallback>
+      </mc:AlternateContent>
+      <mc:AlternateContent xmlns:mc="http://schemas.openxmlformats.org/markup-compatibility/2006">
+        <mc:Choice xmlns:a14="http://schemas.microsoft.com/office/drawing/2010/main" Requires="a14">
+          <p:sp>
+            <p:nvSpPr>
+              <p:cNvPr id="44" name="TextBox 43"/>
+              <p:cNvSpPr txBox="1"/>
+              <p:nvPr/>
+            </p:nvSpPr>
+            <p:spPr>
+              <a:xfrm>
+                <a:off x="5008880" y="2895600"/>
+                <a:ext cx="314189" cy="369332"/>
+              </a:xfrm>
+              <a:prstGeom prst="rect">
+                <a:avLst/>
+              </a:prstGeom>
+              <a:noFill/>
+            </p:spPr>
+            <p:txBody>
+              <a:bodyPr wrap="none" lIns="0" tIns="0" rIns="0" bIns="0" rtlCol="0">
+                <a:spAutoFit/>
+              </a:bodyPr>
+              <a:lstStyle/>
+              <a:p>
+                <a14:m>
+                  <m:oMathPara xmlns:m="http://schemas.openxmlformats.org/officeDocument/2006/math">
+                    <m:oMathParaPr>
+                      <m:jc m:val="centerGroup"/>
+                    </m:oMathParaPr>
+                    <m:oMath xmlns:m="http://schemas.openxmlformats.org/officeDocument/2006/math">
+                      <m:acc>
+                        <m:accPr>
+                          <m:chr m:val="̅"/>
+                          <m:ctrlPr>
+                            <a:rPr lang="en-US" sz="2400" i="1" smtClean="0">
+                              <a:latin typeface="Cambria Math" panose="02040503050406030204" pitchFamily="18" charset="0"/>
+                            </a:rPr>
+                          </m:ctrlPr>
+                        </m:accPr>
+                        <m:e>
+                          <m:r>
+                            <a:rPr lang="en-US" sz="2400" b="1" i="1" smtClean="0">
+                              <a:latin typeface="Cambria Math" panose="02040503050406030204" pitchFamily="18" charset="0"/>
+                            </a:rPr>
+                            <m:t>𝒓</m:t>
+                          </m:r>
+                        </m:e>
+                      </m:acc>
+                      <m:r>
+                        <a:rPr lang="en-US" sz="2400" b="0" i="1" smtClean="0">
+                          <a:latin typeface="Cambria Math" panose="02040503050406030204" pitchFamily="18" charset="0"/>
+                        </a:rPr>
+                        <m:t>′</m:t>
+                      </m:r>
+                    </m:oMath>
+                  </m:oMathPara>
+                </a14:m>
+                <a:endParaRPr lang="en-US" sz="2400" dirty="0"/>
+              </a:p>
+            </p:txBody>
+          </p:sp>
+        </mc:Choice>
+        <mc:Fallback>
+          <p:sp>
+            <p:nvSpPr>
+              <p:cNvPr id="44" name="TextBox 43"/>
+              <p:cNvSpPr txBox="1">
+                <a:spLocks noRot="1" noChangeAspect="1" noMove="1" noResize="1" noEditPoints="1" noAdjustHandles="1" noChangeArrowheads="1" noChangeShapeType="1" noTextEdit="1"/>
+              </p:cNvSpPr>
+              <p:nvPr/>
+            </p:nvSpPr>
+            <p:spPr>
+              <a:xfrm>
+                <a:off x="5008880" y="2895600"/>
+                <a:ext cx="314189" cy="369332"/>
+              </a:xfrm>
+              <a:prstGeom prst="rect">
+                <a:avLst/>
+              </a:prstGeom>
+              <a:blipFill>
+                <a:blip r:embed="rId13"/>
+                <a:stretch>
+                  <a:fillRect l="-13725" t="-1639" r="-27451" b="-8197"/>
+                </a:stretch>
+              </a:blipFill>
+            </p:spPr>
+            <p:txBody>
+              <a:bodyPr/>
+              <a:lstStyle/>
+              <a:p>
+                <a:r>
+                  <a:rPr lang="en-US">
+                    <a:noFill/>
+                  </a:rPr>
+                  <a:t> </a:t>
+                </a:r>
+              </a:p>
+            </p:txBody>
+          </p:sp>
+        </mc:Fallback>
+      </mc:AlternateContent>
+      <p:cxnSp>
+        <p:nvCxnSpPr>
+          <p:cNvPr id="56" name="Straight Arrow Connector 55"/>
+          <p:cNvCxnSpPr/>
+          <p:nvPr/>
+        </p:nvCxnSpPr>
+        <p:spPr>
+          <a:xfrm>
+            <a:off x="4556760" y="4533900"/>
+            <a:ext cx="1356360" cy="0"/>
+          </a:xfrm>
+          <a:prstGeom prst="straightConnector1">
+            <a:avLst/>
+          </a:prstGeom>
+          <a:ln w="19050">
+            <a:solidFill>
+              <a:schemeClr val="accent1">
+                <a:lumMod val="75000"/>
+              </a:schemeClr>
+            </a:solidFill>
+            <a:headEnd type="triangle" w="lg" len="lg"/>
+            <a:tailEnd type="triangle" w="lg" len="lg"/>
+          </a:ln>
+        </p:spPr>
+        <p:style>
+          <a:lnRef idx="1">
+            <a:schemeClr val="accent1"/>
+          </a:lnRef>
+          <a:fillRef idx="0">
+            <a:schemeClr val="accent1"/>
+          </a:fillRef>
+          <a:effectRef idx="0">
+            <a:schemeClr val="accent1"/>
+          </a:effectRef>
+          <a:fontRef idx="minor">
+            <a:schemeClr val="tx1"/>
+          </a:fontRef>
+        </p:style>
+      </p:cxnSp>
+      <p:cxnSp>
+        <p:nvCxnSpPr>
+          <p:cNvPr id="58" name="Straight Arrow Connector 57"/>
+          <p:cNvCxnSpPr/>
+          <p:nvPr/>
+        </p:nvCxnSpPr>
+        <p:spPr>
+          <a:xfrm>
+            <a:off x="2665095" y="4533900"/>
+            <a:ext cx="1874520" cy="0"/>
+          </a:xfrm>
+          <a:prstGeom prst="straightConnector1">
+            <a:avLst/>
+          </a:prstGeom>
+          <a:ln w="19050">
+            <a:solidFill>
+              <a:schemeClr val="bg2">
+                <a:lumMod val="50000"/>
+              </a:schemeClr>
+            </a:solidFill>
+            <a:headEnd type="triangle" w="lg" len="lg"/>
+            <a:tailEnd type="triangle" w="lg" len="lg"/>
+          </a:ln>
+        </p:spPr>
+        <p:style>
+          <a:lnRef idx="1">
+            <a:schemeClr val="accent1"/>
+          </a:lnRef>
+          <a:fillRef idx="0">
+            <a:schemeClr val="accent1"/>
+          </a:fillRef>
+          <a:effectRef idx="0">
+            <a:schemeClr val="accent1"/>
+          </a:effectRef>
+          <a:fontRef idx="minor">
+            <a:schemeClr val="tx1"/>
+          </a:fontRef>
+        </p:style>
+      </p:cxnSp>
+      <mc:AlternateContent xmlns:mc="http://schemas.openxmlformats.org/markup-compatibility/2006">
+        <mc:Choice xmlns:a14="http://schemas.microsoft.com/office/drawing/2010/main" Requires="a14">
+          <p:sp>
+            <p:nvSpPr>
+              <p:cNvPr id="60" name="TextBox 59"/>
+              <p:cNvSpPr txBox="1"/>
+              <p:nvPr/>
+            </p:nvSpPr>
+            <p:spPr>
+              <a:xfrm>
+                <a:off x="5077968" y="4312920"/>
+                <a:ext cx="339852" cy="369332"/>
+              </a:xfrm>
+              <a:prstGeom prst="rect">
+                <a:avLst/>
+              </a:prstGeom>
+              <a:solidFill>
+                <a:schemeClr val="bg1"/>
+              </a:solidFill>
+            </p:spPr>
+            <p:txBody>
+              <a:bodyPr wrap="square" lIns="0" tIns="0" rIns="0" bIns="0" rtlCol="0">
+                <a:spAutoFit/>
+              </a:bodyPr>
+              <a:lstStyle/>
+              <a:p>
+                <a14:m>
+                  <m:oMathPara xmlns:m="http://schemas.openxmlformats.org/officeDocument/2006/math">
+                    <m:oMathParaPr>
+                      <m:jc m:val="centerGroup"/>
+                    </m:oMathParaPr>
+                    <m:oMath xmlns:m="http://schemas.openxmlformats.org/officeDocument/2006/math">
+                      <m:r>
+                        <a:rPr lang="en-US" sz="2400" b="0" i="1" smtClean="0">
+                          <a:solidFill>
+                            <a:schemeClr val="accent1">
+                              <a:lumMod val="75000"/>
+                            </a:schemeClr>
+                          </a:solidFill>
+                          <a:latin typeface="Cambria Math" panose="02040503050406030204" pitchFamily="18" charset="0"/>
+                        </a:rPr>
+                        <m:t>𝑥</m:t>
+                      </m:r>
+                      <m:r>
+                        <a:rPr lang="en-US" sz="2400" b="0" i="1" smtClean="0">
+                          <a:solidFill>
+                            <a:schemeClr val="accent1">
+                              <a:lumMod val="75000"/>
+                            </a:schemeClr>
+                          </a:solidFill>
+                          <a:latin typeface="Cambria Math" panose="02040503050406030204" pitchFamily="18" charset="0"/>
+                        </a:rPr>
+                        <m:t>′</m:t>
+                      </m:r>
+                    </m:oMath>
+                  </m:oMathPara>
+                </a14:m>
+                <a:endParaRPr lang="en-US" sz="2400" dirty="0"/>
+              </a:p>
+            </p:txBody>
+          </p:sp>
+        </mc:Choice>
+        <mc:Fallback>
+          <p:sp>
+            <p:nvSpPr>
+              <p:cNvPr id="60" name="TextBox 59"/>
+              <p:cNvSpPr txBox="1">
+                <a:spLocks noRot="1" noChangeAspect="1" noMove="1" noResize="1" noEditPoints="1" noAdjustHandles="1" noChangeArrowheads="1" noChangeShapeType="1" noTextEdit="1"/>
+              </p:cNvSpPr>
+              <p:nvPr/>
+            </p:nvSpPr>
+            <p:spPr>
+              <a:xfrm>
+                <a:off x="5077968" y="4312920"/>
+                <a:ext cx="339852" cy="369332"/>
+              </a:xfrm>
+              <a:prstGeom prst="rect">
+                <a:avLst/>
+              </a:prstGeom>
+              <a:blipFill>
+                <a:blip r:embed="rId14"/>
+                <a:stretch>
+                  <a:fillRect l="-19643" t="-1667" r="-19643" b="-10000"/>
+                </a:stretch>
+              </a:blipFill>
+            </p:spPr>
+            <p:txBody>
+              <a:bodyPr/>
+              <a:lstStyle/>
+              <a:p>
+                <a:r>
+                  <a:rPr lang="en-US">
+                    <a:noFill/>
+                  </a:rPr>
+                  <a:t> </a:t>
+                </a:r>
+              </a:p>
+            </p:txBody>
+          </p:sp>
+        </mc:Fallback>
+      </mc:AlternateContent>
+      <mc:AlternateContent xmlns:mc="http://schemas.openxmlformats.org/markup-compatibility/2006">
+        <mc:Choice xmlns:a14="http://schemas.microsoft.com/office/drawing/2010/main" Requires="a14">
+          <p:sp>
+            <p:nvSpPr>
+              <p:cNvPr id="61" name="TextBox 60"/>
+              <p:cNvSpPr txBox="1"/>
+              <p:nvPr/>
+            </p:nvSpPr>
+            <p:spPr>
+              <a:xfrm>
+                <a:off x="4277868" y="4678680"/>
+                <a:ext cx="339852" cy="369332"/>
+              </a:xfrm>
+              <a:prstGeom prst="rect">
+                <a:avLst/>
+              </a:prstGeom>
+              <a:solidFill>
+                <a:schemeClr val="bg1"/>
+              </a:solidFill>
+            </p:spPr>
+            <p:txBody>
+              <a:bodyPr wrap="square" lIns="0" tIns="0" rIns="0" bIns="0" rtlCol="0">
+                <a:spAutoFit/>
+              </a:bodyPr>
+              <a:lstStyle/>
+              <a:p>
+                <a14:m>
+                  <m:oMathPara xmlns:m="http://schemas.openxmlformats.org/officeDocument/2006/math">
+                    <m:oMathParaPr>
+                      <m:jc m:val="centerGroup"/>
+                    </m:oMathParaPr>
+                    <m:oMath xmlns:m="http://schemas.openxmlformats.org/officeDocument/2006/math">
+                      <m:r>
+                        <a:rPr lang="en-US" sz="2400" b="0" i="1" smtClean="0">
+                          <a:solidFill>
+                            <a:schemeClr val="tx1"/>
+                          </a:solidFill>
+                          <a:latin typeface="Cambria Math" panose="02040503050406030204" pitchFamily="18" charset="0"/>
+                        </a:rPr>
+                        <m:t>𝑥</m:t>
+                      </m:r>
+                    </m:oMath>
+                  </m:oMathPara>
+                </a14:m>
+                <a:endParaRPr lang="en-US" sz="2400" dirty="0"/>
+              </a:p>
+            </p:txBody>
+          </p:sp>
+        </mc:Choice>
+        <mc:Fallback>
+          <p:sp>
+            <p:nvSpPr>
+              <p:cNvPr id="61" name="TextBox 60"/>
+              <p:cNvSpPr txBox="1">
+                <a:spLocks noRot="1" noChangeAspect="1" noMove="1" noResize="1" noEditPoints="1" noAdjustHandles="1" noChangeArrowheads="1" noChangeShapeType="1" noTextEdit="1"/>
+              </p:cNvSpPr>
+              <p:nvPr/>
+            </p:nvSpPr>
+            <p:spPr>
+              <a:xfrm>
+                <a:off x="4277868" y="4678680"/>
+                <a:ext cx="339852" cy="369332"/>
+              </a:xfrm>
+              <a:prstGeom prst="rect">
+                <a:avLst/>
+              </a:prstGeom>
+              <a:blipFill>
+                <a:blip r:embed="rId15"/>
+                <a:stretch>
+                  <a:fillRect/>
+                </a:stretch>
+              </a:blipFill>
+            </p:spPr>
+            <p:txBody>
+              <a:bodyPr/>
+              <a:lstStyle/>
+              <a:p>
+                <a:r>
+                  <a:rPr lang="en-US">
+                    <a:noFill/>
+                  </a:rPr>
+                  <a:t> </a:t>
+                </a:r>
+              </a:p>
+            </p:txBody>
+          </p:sp>
+        </mc:Fallback>
+      </mc:AlternateContent>
+      <mc:AlternateContent xmlns:mc="http://schemas.openxmlformats.org/markup-compatibility/2006">
+        <mc:Choice xmlns:a14="http://schemas.microsoft.com/office/drawing/2010/main" Requires="a14">
+          <p:sp>
+            <p:nvSpPr>
+              <p:cNvPr id="62" name="TextBox 61"/>
+              <p:cNvSpPr txBox="1"/>
+              <p:nvPr/>
+            </p:nvSpPr>
+            <p:spPr>
+              <a:xfrm>
+                <a:off x="3332988" y="4312920"/>
+                <a:ext cx="339852" cy="369332"/>
+              </a:xfrm>
+              <a:prstGeom prst="rect">
+                <a:avLst/>
+              </a:prstGeom>
+              <a:solidFill>
+                <a:schemeClr val="bg1"/>
+              </a:solidFill>
+            </p:spPr>
+            <p:txBody>
+              <a:bodyPr wrap="square" lIns="0" tIns="0" rIns="0" bIns="0" rtlCol="0">
+                <a:spAutoFit/>
+              </a:bodyPr>
+              <a:lstStyle/>
+              <a:p>
+                <a14:m>
+                  <m:oMathPara xmlns:m="http://schemas.openxmlformats.org/officeDocument/2006/math">
+                    <m:oMathParaPr>
+                      <m:jc m:val="centerGroup"/>
+                    </m:oMathParaPr>
+                    <m:oMath xmlns:m="http://schemas.openxmlformats.org/officeDocument/2006/math">
+                      <m:r>
+                        <a:rPr lang="en-US" sz="2400" b="0" i="1" smtClean="0">
+                          <a:solidFill>
+                            <a:schemeClr val="bg2">
+                              <a:lumMod val="50000"/>
+                            </a:schemeClr>
+                          </a:solidFill>
+                          <a:latin typeface="Cambria Math" panose="02040503050406030204" pitchFamily="18" charset="0"/>
+                        </a:rPr>
+                        <m:t>𝑣𝑡</m:t>
+                      </m:r>
+                    </m:oMath>
+                  </m:oMathPara>
+                </a14:m>
+                <a:endParaRPr lang="en-US" sz="2400" dirty="0">
+                  <a:solidFill>
+                    <a:schemeClr val="bg2">
+                      <a:lumMod val="50000"/>
+                    </a:schemeClr>
+                  </a:solidFill>
+                </a:endParaRPr>
+              </a:p>
+            </p:txBody>
+          </p:sp>
+        </mc:Choice>
+        <mc:Fallback>
+          <p:sp>
+            <p:nvSpPr>
+              <p:cNvPr id="62" name="TextBox 61"/>
+              <p:cNvSpPr txBox="1">
+                <a:spLocks noRot="1" noChangeAspect="1" noMove="1" noResize="1" noEditPoints="1" noAdjustHandles="1" noChangeArrowheads="1" noChangeShapeType="1" noTextEdit="1"/>
+              </p:cNvSpPr>
+              <p:nvPr/>
+            </p:nvSpPr>
+            <p:spPr>
+              <a:xfrm>
+                <a:off x="3332988" y="4312920"/>
+                <a:ext cx="339852" cy="369332"/>
+              </a:xfrm>
+              <a:prstGeom prst="rect">
+                <a:avLst/>
+              </a:prstGeom>
+              <a:blipFill>
+                <a:blip r:embed="rId16"/>
+                <a:stretch>
+                  <a:fillRect l="-21429" r="-19643" b="-5000"/>
+                </a:stretch>
+              </a:blipFill>
+            </p:spPr>
+            <p:txBody>
+              <a:bodyPr/>
+              <a:lstStyle/>
+              <a:p>
+                <a:r>
+                  <a:rPr lang="en-US">
+                    <a:noFill/>
+                  </a:rPr>
+                  <a:t> </a:t>
+                </a:r>
+              </a:p>
+            </p:txBody>
+          </p:sp>
+        </mc:Fallback>
+      </mc:AlternateContent>
+      <mc:AlternateContent xmlns:mc="http://schemas.openxmlformats.org/markup-compatibility/2006">
+        <mc:Choice xmlns:a14="http://schemas.microsoft.com/office/drawing/2010/main" Requires="a14">
+          <p:sp>
+            <p:nvSpPr>
+              <p:cNvPr id="63" name="TextBox 62"/>
+              <p:cNvSpPr txBox="1"/>
+              <p:nvPr/>
+            </p:nvSpPr>
+            <p:spPr>
+              <a:xfrm>
+                <a:off x="2186178" y="1958340"/>
+                <a:ext cx="229362" cy="369332"/>
+              </a:xfrm>
+              <a:prstGeom prst="rect">
+                <a:avLst/>
+              </a:prstGeom>
+              <a:noFill/>
+            </p:spPr>
+            <p:txBody>
+              <a:bodyPr wrap="square" lIns="0" tIns="0" rIns="0" bIns="0" rtlCol="0">
+                <a:spAutoFit/>
+              </a:bodyPr>
+              <a:lstStyle/>
+              <a:p>
+                <a14:m>
+                  <m:oMathPara xmlns:m="http://schemas.openxmlformats.org/officeDocument/2006/math">
+                    <m:oMathParaPr>
+                      <m:jc m:val="centerGroup"/>
+                    </m:oMathParaPr>
+                    <m:oMath xmlns:m="http://schemas.openxmlformats.org/officeDocument/2006/math">
+                      <m:r>
+                        <m:rPr>
+                          <m:sty m:val="p"/>
+                        </m:rPr>
+                        <a:rPr lang="en-US" sz="2400" b="0" i="0" smtClean="0">
+                          <a:latin typeface="Cambria Math" panose="02040503050406030204" pitchFamily="18" charset="0"/>
+                        </a:rPr>
+                        <m:t>S</m:t>
+                      </m:r>
+                    </m:oMath>
+                  </m:oMathPara>
+                </a14:m>
+                <a:endParaRPr lang="en-US" sz="2400" dirty="0"/>
+              </a:p>
+            </p:txBody>
+          </p:sp>
+        </mc:Choice>
+        <mc:Fallback>
+          <p:sp>
+            <p:nvSpPr>
+              <p:cNvPr id="63" name="TextBox 62"/>
+              <p:cNvSpPr txBox="1">
+                <a:spLocks noRot="1" noChangeAspect="1" noMove="1" noResize="1" noEditPoints="1" noAdjustHandles="1" noChangeArrowheads="1" noChangeShapeType="1" noTextEdit="1"/>
+              </p:cNvSpPr>
+              <p:nvPr/>
+            </p:nvSpPr>
+            <p:spPr>
+              <a:xfrm>
+                <a:off x="2186178" y="1958340"/>
+                <a:ext cx="229362" cy="369332"/>
+              </a:xfrm>
+              <a:prstGeom prst="rect">
+                <a:avLst/>
+              </a:prstGeom>
+              <a:blipFill>
+                <a:blip r:embed="rId17"/>
+                <a:stretch>
+                  <a:fillRect l="-32432" r="-29730" b="-6557"/>
+                </a:stretch>
+              </a:blipFill>
+            </p:spPr>
+            <p:txBody>
+              <a:bodyPr/>
+              <a:lstStyle/>
+              <a:p>
+                <a:r>
+                  <a:rPr lang="en-US">
+                    <a:noFill/>
+                  </a:rPr>
+                  <a:t> </a:t>
+                </a:r>
+              </a:p>
+            </p:txBody>
+          </p:sp>
+        </mc:Fallback>
+      </mc:AlternateContent>
+      <mc:AlternateContent xmlns:mc="http://schemas.openxmlformats.org/markup-compatibility/2006">
+        <mc:Choice xmlns:a14="http://schemas.microsoft.com/office/drawing/2010/main" Requires="a14">
+          <p:sp>
+            <p:nvSpPr>
+              <p:cNvPr id="64" name="TextBox 63"/>
+              <p:cNvSpPr txBox="1"/>
+              <p:nvPr/>
+            </p:nvSpPr>
+            <p:spPr>
+              <a:xfrm>
+                <a:off x="4144518" y="1958340"/>
+                <a:ext cx="229362" cy="369332"/>
+              </a:xfrm>
+              <a:prstGeom prst="rect">
+                <a:avLst/>
+              </a:prstGeom>
+              <a:noFill/>
+            </p:spPr>
+            <p:txBody>
+              <a:bodyPr wrap="square" lIns="0" tIns="0" rIns="0" bIns="0" rtlCol="0">
+                <a:spAutoFit/>
+              </a:bodyPr>
+              <a:lstStyle/>
+              <a:p>
+                <a14:m>
+                  <m:oMathPara xmlns:m="http://schemas.openxmlformats.org/officeDocument/2006/math">
+                    <m:oMathParaPr>
+                      <m:jc m:val="centerGroup"/>
+                    </m:oMathParaPr>
+                    <m:oMath xmlns:m="http://schemas.openxmlformats.org/officeDocument/2006/math">
+                      <m:r>
+                        <m:rPr>
+                          <m:sty m:val="p"/>
+                        </m:rPr>
+                        <a:rPr lang="en-US" sz="2400" b="0" i="0" smtClean="0">
+                          <a:solidFill>
+                            <a:schemeClr val="accent1">
+                              <a:lumMod val="75000"/>
+                            </a:schemeClr>
+                          </a:solidFill>
+                          <a:latin typeface="Cambria Math" panose="02040503050406030204" pitchFamily="18" charset="0"/>
+                        </a:rPr>
+                        <m:t>S</m:t>
+                      </m:r>
+                      <m:r>
+                        <a:rPr lang="en-US" sz="2400" b="0" i="0" smtClean="0">
+                          <a:solidFill>
+                            <a:schemeClr val="accent1">
+                              <a:lumMod val="75000"/>
+                            </a:schemeClr>
+                          </a:solidFill>
+                          <a:latin typeface="Cambria Math" panose="02040503050406030204" pitchFamily="18" charset="0"/>
+                        </a:rPr>
+                        <m:t>′</m:t>
+                      </m:r>
+                    </m:oMath>
+                  </m:oMathPara>
+                </a14:m>
+                <a:endParaRPr lang="en-US" sz="2400" dirty="0"/>
+              </a:p>
+            </p:txBody>
+          </p:sp>
+        </mc:Choice>
+        <mc:Fallback>
+          <p:sp>
+            <p:nvSpPr>
+              <p:cNvPr id="64" name="TextBox 63"/>
+              <p:cNvSpPr txBox="1">
+                <a:spLocks noRot="1" noChangeAspect="1" noMove="1" noResize="1" noEditPoints="1" noAdjustHandles="1" noChangeArrowheads="1" noChangeShapeType="1" noTextEdit="1"/>
+              </p:cNvSpPr>
+              <p:nvPr/>
+            </p:nvSpPr>
+            <p:spPr>
+              <a:xfrm>
+                <a:off x="4144518" y="1958340"/>
+                <a:ext cx="229362" cy="369332"/>
+              </a:xfrm>
+              <a:prstGeom prst="rect">
+                <a:avLst/>
+              </a:prstGeom>
+              <a:blipFill>
+                <a:blip r:embed="rId18"/>
+                <a:stretch>
+                  <a:fillRect l="-52632" t="-1639" r="-50000" b="-9836"/>
+                </a:stretch>
+              </a:blipFill>
+            </p:spPr>
+            <p:txBody>
+              <a:bodyPr/>
+              <a:lstStyle/>
+              <a:p>
+                <a:r>
+                  <a:rPr lang="en-US">
+                    <a:noFill/>
+                  </a:rPr>
+                  <a:t> </a:t>
+                </a:r>
+              </a:p>
+            </p:txBody>
+          </p:sp>
+        </mc:Fallback>
+      </mc:AlternateContent>
     </p:spTree>
     <p:extLst>
       <p:ext uri="{BB962C8B-B14F-4D97-AF65-F5344CB8AC3E}">
         <p14:creationId xmlns:p14="http://schemas.microsoft.com/office/powerpoint/2010/main" val="3326414452"/>
+      </p:ext>
+    </p:extLst>
+  </p:cSld>
+  <p:clrMapOvr>
+    <a:masterClrMapping/>
+  </p:clrMapOvr>
+</p:sld>
+</file>
+
+<file path=ppt/slides/slide2.xml><?xml version="1.0" encoding="utf-8"?>
+<p:sld xmlns:a="http://schemas.openxmlformats.org/drawingml/2006/main" xmlns:r="http://schemas.openxmlformats.org/officeDocument/2006/relationships" xmlns:p="http://schemas.openxmlformats.org/presentationml/2006/main">
+  <p:cSld>
+    <p:spTree>
+      <p:nvGrpSpPr>
+        <p:cNvPr id="1" name=""/>
+        <p:cNvGrpSpPr/>
+        <p:nvPr/>
+      </p:nvGrpSpPr>
+      <p:grpSpPr>
+        <a:xfrm>
+          <a:off x="0" y="0"/>
+          <a:ext cx="0" cy="0"/>
+          <a:chOff x="0" y="0"/>
+          <a:chExt cx="0" cy="0"/>
+        </a:xfrm>
+      </p:grpSpPr>
+      <p:grpSp>
+        <p:nvGrpSpPr>
+          <p:cNvPr id="2" name="Group 1"/>
+          <p:cNvGrpSpPr/>
+          <p:nvPr/>
+        </p:nvGrpSpPr>
+        <p:grpSpPr>
+          <a:xfrm>
+            <a:off x="1167765" y="914400"/>
+            <a:ext cx="5165339" cy="4684157"/>
+            <a:chOff x="1167765" y="914400"/>
+            <a:chExt cx="5165339" cy="4684157"/>
+          </a:xfrm>
+        </p:grpSpPr>
+        <p:grpSp>
+          <p:nvGrpSpPr>
+            <p:cNvPr id="41" name="Group 40"/>
+            <p:cNvGrpSpPr/>
+            <p:nvPr/>
+          </p:nvGrpSpPr>
+          <p:grpSpPr>
+            <a:xfrm>
+              <a:off x="1167765" y="914400"/>
+              <a:ext cx="5165339" cy="4684157"/>
+              <a:chOff x="1167765" y="914400"/>
+              <a:chExt cx="5165339" cy="4684157"/>
+            </a:xfrm>
+          </p:grpSpPr>
+          <p:grpSp>
+            <p:nvGrpSpPr>
+              <p:cNvPr id="10" name="Group 9"/>
+              <p:cNvGrpSpPr/>
+              <p:nvPr/>
+            </p:nvGrpSpPr>
+            <p:grpSpPr>
+              <a:xfrm>
+                <a:off x="1167765" y="1045031"/>
+                <a:ext cx="5114163" cy="4321354"/>
+                <a:chOff x="1167765" y="1045031"/>
+                <a:chExt cx="5114163" cy="4321354"/>
+              </a:xfrm>
+            </p:grpSpPr>
+            <p:cxnSp>
+              <p:nvCxnSpPr>
+                <p:cNvPr id="5" name="Straight Connector 4"/>
+                <p:cNvCxnSpPr/>
+                <p:nvPr/>
+              </p:nvCxnSpPr>
+              <p:spPr>
+                <a:xfrm>
+                  <a:off x="2656115" y="1045031"/>
+                  <a:ext cx="0" cy="3065417"/>
+                </a:xfrm>
+                <a:prstGeom prst="line">
+                  <a:avLst/>
+                </a:prstGeom>
+                <a:ln w="28575" cap="rnd">
+                  <a:solidFill>
+                    <a:schemeClr val="tx1"/>
+                  </a:solidFill>
+                  <a:round/>
+                </a:ln>
+              </p:spPr>
+              <p:style>
+                <a:lnRef idx="1">
+                  <a:schemeClr val="accent1"/>
+                </a:lnRef>
+                <a:fillRef idx="0">
+                  <a:schemeClr val="accent1"/>
+                </a:fillRef>
+                <a:effectRef idx="0">
+                  <a:schemeClr val="accent1"/>
+                </a:effectRef>
+                <a:fontRef idx="minor">
+                  <a:schemeClr val="tx1"/>
+                </a:fontRef>
+              </p:style>
+            </p:cxnSp>
+            <p:cxnSp>
+              <p:nvCxnSpPr>
+                <p:cNvPr id="6" name="Straight Connector 5"/>
+                <p:cNvCxnSpPr/>
+                <p:nvPr/>
+              </p:nvCxnSpPr>
+              <p:spPr>
+                <a:xfrm flipH="1">
+                  <a:off x="2655027" y="4111265"/>
+                  <a:ext cx="3626901" cy="0"/>
+                </a:xfrm>
+                <a:prstGeom prst="line">
+                  <a:avLst/>
+                </a:prstGeom>
+                <a:ln w="28575" cap="rnd">
+                  <a:solidFill>
+                    <a:schemeClr val="tx1"/>
+                  </a:solidFill>
+                  <a:round/>
+                </a:ln>
+              </p:spPr>
+              <p:style>
+                <a:lnRef idx="1">
+                  <a:schemeClr val="accent1"/>
+                </a:lnRef>
+                <a:fillRef idx="0">
+                  <a:schemeClr val="accent1"/>
+                </a:fillRef>
+                <a:effectRef idx="0">
+                  <a:schemeClr val="accent1"/>
+                </a:effectRef>
+                <a:fontRef idx="minor">
+                  <a:schemeClr val="tx1"/>
+                </a:fontRef>
+              </p:style>
+            </p:cxnSp>
+            <p:cxnSp>
+              <p:nvCxnSpPr>
+                <p:cNvPr id="8" name="Straight Connector 7"/>
+                <p:cNvCxnSpPr/>
+                <p:nvPr/>
+              </p:nvCxnSpPr>
+              <p:spPr>
+                <a:xfrm flipV="1">
+                  <a:off x="1167765" y="4114258"/>
+                  <a:ext cx="1484540" cy="1252127"/>
+                </a:xfrm>
+                <a:prstGeom prst="line">
+                  <a:avLst/>
+                </a:prstGeom>
+                <a:ln w="28575" cap="rnd">
+                  <a:solidFill>
+                    <a:schemeClr val="tx1"/>
+                  </a:solidFill>
+                  <a:round/>
+                </a:ln>
+              </p:spPr>
+              <p:style>
+                <a:lnRef idx="1">
+                  <a:schemeClr val="accent1"/>
+                </a:lnRef>
+                <a:fillRef idx="0">
+                  <a:schemeClr val="accent1"/>
+                </a:fillRef>
+                <a:effectRef idx="0">
+                  <a:schemeClr val="accent1"/>
+                </a:effectRef>
+                <a:fontRef idx="minor">
+                  <a:schemeClr val="tx1"/>
+                </a:fontRef>
+              </p:style>
+            </p:cxnSp>
+          </p:grpSp>
+          <mc:AlternateContent xmlns:mc="http://schemas.openxmlformats.org/markup-compatibility/2006">
+            <mc:Choice xmlns:a14="http://schemas.microsoft.com/office/drawing/2010/main" Requires="a14">
+              <p:sp>
+                <p:nvSpPr>
+                  <p:cNvPr id="17" name="TextBox 16"/>
+                  <p:cNvSpPr txBox="1"/>
+                  <p:nvPr/>
+                </p:nvSpPr>
+                <p:spPr>
+                  <a:xfrm>
+                    <a:off x="2323338" y="3787521"/>
+                    <a:ext cx="284822" cy="369332"/>
+                  </a:xfrm>
+                  <a:prstGeom prst="rect">
+                    <a:avLst/>
+                  </a:prstGeom>
+                  <a:noFill/>
+                </p:spPr>
+                <p:txBody>
+                  <a:bodyPr wrap="none" lIns="0" tIns="0" rIns="0" bIns="0" rtlCol="0">
+                    <a:spAutoFit/>
+                  </a:bodyPr>
+                  <a:lstStyle/>
+                  <a:p>
+                    <a14:m>
+                      <m:oMathPara xmlns:m="http://schemas.openxmlformats.org/officeDocument/2006/math">
+                        <m:oMathParaPr>
+                          <m:jc m:val="centerGroup"/>
+                        </m:oMathParaPr>
+                        <m:oMath xmlns:m="http://schemas.openxmlformats.org/officeDocument/2006/math">
+                          <m:r>
+                            <a:rPr lang="en-US" sz="2400" b="0" i="1" smtClean="0">
+                              <a:latin typeface="Cambria Math" panose="02040503050406030204" pitchFamily="18" charset="0"/>
+                            </a:rPr>
+                            <m:t>𝑂</m:t>
+                          </m:r>
+                        </m:oMath>
+                      </m:oMathPara>
+                    </a14:m>
+                    <a:endParaRPr lang="en-US" sz="2400" dirty="0"/>
+                  </a:p>
+                </p:txBody>
+              </p:sp>
+            </mc:Choice>
+            <mc:Fallback>
+              <p:sp>
+                <p:nvSpPr>
+                  <p:cNvPr id="17" name="TextBox 16"/>
+                  <p:cNvSpPr txBox="1">
+                    <a:spLocks noRot="1" noChangeAspect="1" noMove="1" noResize="1" noEditPoints="1" noAdjustHandles="1" noChangeArrowheads="1" noChangeShapeType="1" noTextEdit="1"/>
+                  </p:cNvSpPr>
+                  <p:nvPr/>
+                </p:nvSpPr>
+                <p:spPr>
+                  <a:xfrm>
+                    <a:off x="2323338" y="3787521"/>
+                    <a:ext cx="284822" cy="369332"/>
+                  </a:xfrm>
+                  <a:prstGeom prst="rect">
+                    <a:avLst/>
+                  </a:prstGeom>
+                  <a:blipFill>
+                    <a:blip r:embed="rId2"/>
+                    <a:stretch>
+                      <a:fillRect l="-23404" r="-23404" b="-6557"/>
+                    </a:stretch>
+                  </a:blipFill>
+                </p:spPr>
+                <p:txBody>
+                  <a:bodyPr/>
+                  <a:lstStyle/>
+                  <a:p>
+                    <a:r>
+                      <a:rPr lang="en-US">
+                        <a:noFill/>
+                      </a:rPr>
+                      <a:t> </a:t>
+                    </a:r>
+                  </a:p>
+                </p:txBody>
+              </p:sp>
+            </mc:Fallback>
+          </mc:AlternateContent>
+          <mc:AlternateContent xmlns:mc="http://schemas.openxmlformats.org/markup-compatibility/2006">
+            <mc:Choice xmlns:a14="http://schemas.microsoft.com/office/drawing/2010/main" Requires="a14">
+              <p:sp>
+                <p:nvSpPr>
+                  <p:cNvPr id="19" name="TextBox 18"/>
+                  <p:cNvSpPr txBox="1"/>
+                  <p:nvPr/>
+                </p:nvSpPr>
+                <p:spPr>
+                  <a:xfrm>
+                    <a:off x="6057900" y="4152900"/>
+                    <a:ext cx="275204" cy="369332"/>
+                  </a:xfrm>
+                  <a:prstGeom prst="rect">
+                    <a:avLst/>
+                  </a:prstGeom>
+                  <a:noFill/>
+                </p:spPr>
+                <p:txBody>
+                  <a:bodyPr wrap="none" lIns="0" tIns="0" rIns="0" bIns="0" rtlCol="0">
+                    <a:spAutoFit/>
+                  </a:bodyPr>
+                  <a:lstStyle/>
+                  <a:p>
+                    <a14:m>
+                      <m:oMathPara xmlns:m="http://schemas.openxmlformats.org/officeDocument/2006/math">
+                        <m:oMathParaPr>
+                          <m:jc m:val="centerGroup"/>
+                        </m:oMathParaPr>
+                        <m:oMath xmlns:m="http://schemas.openxmlformats.org/officeDocument/2006/math">
+                          <m:r>
+                            <a:rPr lang="en-US" sz="2400" b="0" i="1" smtClean="0">
+                              <a:latin typeface="Cambria Math" panose="02040503050406030204" pitchFamily="18" charset="0"/>
+                            </a:rPr>
+                            <m:t>𝑋</m:t>
+                          </m:r>
+                        </m:oMath>
+                      </m:oMathPara>
+                    </a14:m>
+                    <a:endParaRPr lang="en-US" sz="2400" dirty="0"/>
+                  </a:p>
+                </p:txBody>
+              </p:sp>
+            </mc:Choice>
+            <mc:Fallback>
+              <p:sp>
+                <p:nvSpPr>
+                  <p:cNvPr id="19" name="TextBox 18"/>
+                  <p:cNvSpPr txBox="1">
+                    <a:spLocks noRot="1" noChangeAspect="1" noMove="1" noResize="1" noEditPoints="1" noAdjustHandles="1" noChangeArrowheads="1" noChangeShapeType="1" noTextEdit="1"/>
+                  </p:cNvSpPr>
+                  <p:nvPr/>
+                </p:nvSpPr>
+                <p:spPr>
+                  <a:xfrm>
+                    <a:off x="6057900" y="4152900"/>
+                    <a:ext cx="275204" cy="369332"/>
+                  </a:xfrm>
+                  <a:prstGeom prst="rect">
+                    <a:avLst/>
+                  </a:prstGeom>
+                  <a:blipFill>
+                    <a:blip r:embed="rId3"/>
+                    <a:stretch>
+                      <a:fillRect l="-26667" r="-22222" b="-6557"/>
+                    </a:stretch>
+                  </a:blipFill>
+                </p:spPr>
+                <p:txBody>
+                  <a:bodyPr/>
+                  <a:lstStyle/>
+                  <a:p>
+                    <a:r>
+                      <a:rPr lang="en-US">
+                        <a:noFill/>
+                      </a:rPr>
+                      <a:t> </a:t>
+                    </a:r>
+                  </a:p>
+                </p:txBody>
+              </p:sp>
+            </mc:Fallback>
+          </mc:AlternateContent>
+          <mc:AlternateContent xmlns:mc="http://schemas.openxmlformats.org/markup-compatibility/2006">
+            <mc:Choice xmlns:a14="http://schemas.microsoft.com/office/drawing/2010/main" Requires="a14">
+              <p:sp>
+                <p:nvSpPr>
+                  <p:cNvPr id="22" name="TextBox 21"/>
+                  <p:cNvSpPr txBox="1"/>
+                  <p:nvPr/>
+                </p:nvSpPr>
+                <p:spPr>
+                  <a:xfrm>
+                    <a:off x="2760345" y="914400"/>
+                    <a:ext cx="262380" cy="369332"/>
+                  </a:xfrm>
+                  <a:prstGeom prst="rect">
+                    <a:avLst/>
+                  </a:prstGeom>
+                  <a:noFill/>
+                </p:spPr>
+                <p:txBody>
+                  <a:bodyPr wrap="none" lIns="0" tIns="0" rIns="0" bIns="0" rtlCol="0">
+                    <a:spAutoFit/>
+                  </a:bodyPr>
+                  <a:lstStyle/>
+                  <a:p>
+                    <a14:m>
+                      <m:oMathPara xmlns:m="http://schemas.openxmlformats.org/officeDocument/2006/math">
+                        <m:oMathParaPr>
+                          <m:jc m:val="centerGroup"/>
+                        </m:oMathParaPr>
+                        <m:oMath xmlns:m="http://schemas.openxmlformats.org/officeDocument/2006/math">
+                          <m:r>
+                            <a:rPr lang="en-US" sz="2400" b="0" i="1" smtClean="0">
+                              <a:solidFill>
+                                <a:schemeClr val="tx1"/>
+                              </a:solidFill>
+                              <a:latin typeface="Cambria Math" panose="02040503050406030204" pitchFamily="18" charset="0"/>
+                            </a:rPr>
+                            <m:t>𝑌</m:t>
+                          </m:r>
+                        </m:oMath>
+                      </m:oMathPara>
+                    </a14:m>
+                    <a:endParaRPr lang="en-US" sz="2400" dirty="0">
+                      <a:solidFill>
+                        <a:schemeClr val="tx1"/>
+                      </a:solidFill>
+                    </a:endParaRPr>
+                  </a:p>
+                </p:txBody>
+              </p:sp>
+            </mc:Choice>
+            <mc:Fallback>
+              <p:sp>
+                <p:nvSpPr>
+                  <p:cNvPr id="22" name="TextBox 21"/>
+                  <p:cNvSpPr txBox="1">
+                    <a:spLocks noRot="1" noChangeAspect="1" noMove="1" noResize="1" noEditPoints="1" noAdjustHandles="1" noChangeArrowheads="1" noChangeShapeType="1" noTextEdit="1"/>
+                  </p:cNvSpPr>
+                  <p:nvPr/>
+                </p:nvSpPr>
+                <p:spPr>
+                  <a:xfrm>
+                    <a:off x="2760345" y="914400"/>
+                    <a:ext cx="262380" cy="369332"/>
+                  </a:xfrm>
+                  <a:prstGeom prst="rect">
+                    <a:avLst/>
+                  </a:prstGeom>
+                  <a:blipFill>
+                    <a:blip r:embed="rId4"/>
+                    <a:stretch>
+                      <a:fillRect l="-27907" r="-23256" b="-4918"/>
+                    </a:stretch>
+                  </a:blipFill>
+                </p:spPr>
+                <p:txBody>
+                  <a:bodyPr/>
+                  <a:lstStyle/>
+                  <a:p>
+                    <a:r>
+                      <a:rPr lang="en-US">
+                        <a:noFill/>
+                      </a:rPr>
+                      <a:t> </a:t>
+                    </a:r>
+                  </a:p>
+                </p:txBody>
+              </p:sp>
+            </mc:Fallback>
+          </mc:AlternateContent>
+          <mc:AlternateContent xmlns:mc="http://schemas.openxmlformats.org/markup-compatibility/2006">
+            <mc:Choice xmlns:a14="http://schemas.microsoft.com/office/drawing/2010/main" Requires="a14">
+              <p:sp>
+                <p:nvSpPr>
+                  <p:cNvPr id="23" name="TextBox 22"/>
+                  <p:cNvSpPr txBox="1"/>
+                  <p:nvPr/>
+                </p:nvSpPr>
+                <p:spPr>
+                  <a:xfrm>
+                    <a:off x="1287780" y="5229225"/>
+                    <a:ext cx="259174" cy="369332"/>
+                  </a:xfrm>
+                  <a:prstGeom prst="rect">
+                    <a:avLst/>
+                  </a:prstGeom>
+                  <a:noFill/>
+                </p:spPr>
+                <p:txBody>
+                  <a:bodyPr wrap="none" lIns="0" tIns="0" rIns="0" bIns="0" rtlCol="0">
+                    <a:spAutoFit/>
+                  </a:bodyPr>
+                  <a:lstStyle/>
+                  <a:p>
+                    <a14:m>
+                      <m:oMathPara xmlns:m="http://schemas.openxmlformats.org/officeDocument/2006/math">
+                        <m:oMathParaPr>
+                          <m:jc m:val="centerGroup"/>
+                        </m:oMathParaPr>
+                        <m:oMath xmlns:m="http://schemas.openxmlformats.org/officeDocument/2006/math">
+                          <m:r>
+                            <a:rPr lang="en-US" sz="2400" b="0" i="1" smtClean="0">
+                              <a:solidFill>
+                                <a:schemeClr val="tx1"/>
+                              </a:solidFill>
+                              <a:latin typeface="Cambria Math" panose="02040503050406030204" pitchFamily="18" charset="0"/>
+                            </a:rPr>
+                            <m:t>𝑍</m:t>
+                          </m:r>
+                        </m:oMath>
+                      </m:oMathPara>
+                    </a14:m>
+                    <a:endParaRPr lang="en-US" sz="2400" dirty="0">
+                      <a:solidFill>
+                        <a:schemeClr val="tx1"/>
+                      </a:solidFill>
+                    </a:endParaRPr>
+                  </a:p>
+                </p:txBody>
+              </p:sp>
+            </mc:Choice>
+            <mc:Fallback>
+              <p:sp>
+                <p:nvSpPr>
+                  <p:cNvPr id="23" name="TextBox 22"/>
+                  <p:cNvSpPr txBox="1">
+                    <a:spLocks noRot="1" noChangeAspect="1" noMove="1" noResize="1" noEditPoints="1" noAdjustHandles="1" noChangeArrowheads="1" noChangeShapeType="1" noTextEdit="1"/>
+                  </p:cNvSpPr>
+                  <p:nvPr/>
+                </p:nvSpPr>
+                <p:spPr>
+                  <a:xfrm>
+                    <a:off x="1287780" y="5229225"/>
+                    <a:ext cx="259174" cy="369332"/>
+                  </a:xfrm>
+                  <a:prstGeom prst="rect">
+                    <a:avLst/>
+                  </a:prstGeom>
+                  <a:blipFill>
+                    <a:blip r:embed="rId5"/>
+                    <a:stretch>
+                      <a:fillRect l="-25581" r="-25581" b="-6667"/>
+                    </a:stretch>
+                  </a:blipFill>
+                </p:spPr>
+                <p:txBody>
+                  <a:bodyPr/>
+                  <a:lstStyle/>
+                  <a:p>
+                    <a:r>
+                      <a:rPr lang="en-US">
+                        <a:noFill/>
+                      </a:rPr>
+                      <a:t> </a:t>
+                    </a:r>
+                  </a:p>
+                </p:txBody>
+              </p:sp>
+            </mc:Fallback>
+          </mc:AlternateContent>
+        </p:grpSp>
+        <mc:AlternateContent xmlns:mc="http://schemas.openxmlformats.org/markup-compatibility/2006">
+          <mc:Choice xmlns:a14="http://schemas.microsoft.com/office/drawing/2010/main" Requires="a14">
+            <p:sp>
+              <p:nvSpPr>
+                <p:cNvPr id="63" name="TextBox 62"/>
+                <p:cNvSpPr txBox="1"/>
+                <p:nvPr/>
+              </p:nvSpPr>
+              <p:spPr>
+                <a:xfrm>
+                  <a:off x="2186178" y="1958340"/>
+                  <a:ext cx="229362" cy="369332"/>
+                </a:xfrm>
+                <a:prstGeom prst="rect">
+                  <a:avLst/>
+                </a:prstGeom>
+                <a:noFill/>
+              </p:spPr>
+              <p:txBody>
+                <a:bodyPr wrap="square" lIns="0" tIns="0" rIns="0" bIns="0" rtlCol="0">
+                  <a:spAutoFit/>
+                </a:bodyPr>
+                <a:lstStyle/>
+                <a:p>
+                  <a14:m>
+                    <m:oMathPara xmlns:m="http://schemas.openxmlformats.org/officeDocument/2006/math">
+                      <m:oMathParaPr>
+                        <m:jc m:val="centerGroup"/>
+                      </m:oMathParaPr>
+                      <m:oMath xmlns:m="http://schemas.openxmlformats.org/officeDocument/2006/math">
+                        <m:r>
+                          <m:rPr>
+                            <m:sty m:val="p"/>
+                          </m:rPr>
+                          <a:rPr lang="en-US" sz="2400" b="0" i="0" smtClean="0">
+                            <a:latin typeface="Cambria Math" panose="02040503050406030204" pitchFamily="18" charset="0"/>
+                          </a:rPr>
+                          <m:t>S</m:t>
+                        </m:r>
+                      </m:oMath>
+                    </m:oMathPara>
+                  </a14:m>
+                  <a:endParaRPr lang="en-US" sz="2400" dirty="0"/>
+                </a:p>
+              </p:txBody>
+            </p:sp>
+          </mc:Choice>
+          <mc:Fallback>
+            <p:sp>
+              <p:nvSpPr>
+                <p:cNvPr id="63" name="TextBox 62"/>
+                <p:cNvSpPr txBox="1">
+                  <a:spLocks noRot="1" noChangeAspect="1" noMove="1" noResize="1" noEditPoints="1" noAdjustHandles="1" noChangeArrowheads="1" noChangeShapeType="1" noTextEdit="1"/>
+                </p:cNvSpPr>
+                <p:nvPr/>
+              </p:nvSpPr>
+              <p:spPr>
+                <a:xfrm>
+                  <a:off x="2186178" y="1958340"/>
+                  <a:ext cx="229362" cy="369332"/>
+                </a:xfrm>
+                <a:prstGeom prst="rect">
+                  <a:avLst/>
+                </a:prstGeom>
+                <a:blipFill>
+                  <a:blip r:embed="rId6"/>
+                  <a:stretch>
+                    <a:fillRect l="-32432" r="-29730" b="-6557"/>
+                  </a:stretch>
+                </a:blipFill>
+              </p:spPr>
+              <p:txBody>
+                <a:bodyPr/>
+                <a:lstStyle/>
+                <a:p>
+                  <a:r>
+                    <a:rPr lang="en-US">
+                      <a:noFill/>
+                    </a:rPr>
+                    <a:t> </a:t>
+                  </a:r>
+                </a:p>
+              </p:txBody>
+            </p:sp>
+          </mc:Fallback>
+        </mc:AlternateContent>
+      </p:grpSp>
+      <p:grpSp>
+        <p:nvGrpSpPr>
+          <p:cNvPr id="3" name="Group 2"/>
+          <p:cNvGrpSpPr/>
+          <p:nvPr/>
+        </p:nvGrpSpPr>
+        <p:grpSpPr>
+          <a:xfrm>
+            <a:off x="2111121" y="914400"/>
+            <a:ext cx="5241034" cy="4684157"/>
+            <a:chOff x="3057525" y="914400"/>
+            <a:chExt cx="5241034" cy="4684157"/>
+          </a:xfrm>
+        </p:grpSpPr>
+        <p:grpSp>
+          <p:nvGrpSpPr>
+            <p:cNvPr id="37" name="Group 36"/>
+            <p:cNvGrpSpPr/>
+            <p:nvPr/>
+          </p:nvGrpSpPr>
+          <p:grpSpPr>
+            <a:xfrm>
+              <a:off x="3057525" y="914400"/>
+              <a:ext cx="5241034" cy="4684157"/>
+              <a:chOff x="2722245" y="914400"/>
+              <a:chExt cx="5241034" cy="4684157"/>
+            </a:xfrm>
+          </p:grpSpPr>
+          <p:cxnSp>
+            <p:nvCxnSpPr>
+              <p:cNvPr id="16" name="Straight Arrow Connector 15"/>
+              <p:cNvCxnSpPr/>
+              <p:nvPr/>
+            </p:nvCxnSpPr>
+            <p:spPr>
+              <a:xfrm>
+                <a:off x="4223655" y="1702524"/>
+                <a:ext cx="1062446" cy="0"/>
+              </a:xfrm>
+              <a:prstGeom prst="straightConnector1">
+                <a:avLst/>
+              </a:prstGeom>
+              <a:ln w="28575" cap="rnd">
+                <a:solidFill>
+                  <a:srgbClr val="FF0000"/>
+                </a:solidFill>
+                <a:round/>
+                <a:tailEnd type="triangle" w="lg" len="lg"/>
+              </a:ln>
+            </p:spPr>
+            <p:style>
+              <a:lnRef idx="1">
+                <a:schemeClr val="accent1"/>
+              </a:lnRef>
+              <a:fillRef idx="0">
+                <a:schemeClr val="accent1"/>
+              </a:fillRef>
+              <a:effectRef idx="0">
+                <a:schemeClr val="accent1"/>
+              </a:effectRef>
+              <a:fontRef idx="minor">
+                <a:schemeClr val="tx1"/>
+              </a:fontRef>
+            </p:style>
+          </p:cxnSp>
+          <p:grpSp>
+            <p:nvGrpSpPr>
+              <p:cNvPr id="11" name="Group 10"/>
+              <p:cNvGrpSpPr/>
+              <p:nvPr/>
+            </p:nvGrpSpPr>
+            <p:grpSpPr>
+              <a:xfrm>
+                <a:off x="2722245" y="1014552"/>
+                <a:ext cx="5172075" cy="4321354"/>
+                <a:chOff x="1167765" y="1045031"/>
+                <a:chExt cx="5172075" cy="4321354"/>
+              </a:xfrm>
+            </p:grpSpPr>
+            <p:cxnSp>
+              <p:nvCxnSpPr>
+                <p:cNvPr id="12" name="Straight Connector 11"/>
+                <p:cNvCxnSpPr/>
+                <p:nvPr/>
+              </p:nvCxnSpPr>
+              <p:spPr>
+                <a:xfrm>
+                  <a:off x="2656115" y="1045031"/>
+                  <a:ext cx="0" cy="3065417"/>
+                </a:xfrm>
+                <a:prstGeom prst="line">
+                  <a:avLst/>
+                </a:prstGeom>
+                <a:ln w="28575" cap="rnd">
+                  <a:solidFill>
+                    <a:schemeClr val="accent1">
+                      <a:lumMod val="75000"/>
+                    </a:schemeClr>
+                  </a:solidFill>
+                  <a:round/>
+                </a:ln>
+              </p:spPr>
+              <p:style>
+                <a:lnRef idx="1">
+                  <a:schemeClr val="accent1"/>
+                </a:lnRef>
+                <a:fillRef idx="0">
+                  <a:schemeClr val="accent1"/>
+                </a:fillRef>
+                <a:effectRef idx="0">
+                  <a:schemeClr val="accent1"/>
+                </a:effectRef>
+                <a:fontRef idx="minor">
+                  <a:schemeClr val="tx1"/>
+                </a:fontRef>
+              </p:style>
+            </p:cxnSp>
+            <p:cxnSp>
+              <p:nvCxnSpPr>
+                <p:cNvPr id="13" name="Straight Connector 12"/>
+                <p:cNvCxnSpPr/>
+                <p:nvPr/>
+              </p:nvCxnSpPr>
+              <p:spPr>
+                <a:xfrm flipH="1">
+                  <a:off x="2655027" y="4111265"/>
+                  <a:ext cx="3684813" cy="0"/>
+                </a:xfrm>
+                <a:prstGeom prst="line">
+                  <a:avLst/>
+                </a:prstGeom>
+                <a:ln w="28575" cap="rnd">
+                  <a:solidFill>
+                    <a:schemeClr val="accent1">
+                      <a:lumMod val="75000"/>
+                    </a:schemeClr>
+                  </a:solidFill>
+                  <a:round/>
+                </a:ln>
+              </p:spPr>
+              <p:style>
+                <a:lnRef idx="1">
+                  <a:schemeClr val="accent1"/>
+                </a:lnRef>
+                <a:fillRef idx="0">
+                  <a:schemeClr val="accent1"/>
+                </a:fillRef>
+                <a:effectRef idx="0">
+                  <a:schemeClr val="accent1"/>
+                </a:effectRef>
+                <a:fontRef idx="minor">
+                  <a:schemeClr val="tx1"/>
+                </a:fontRef>
+              </p:style>
+            </p:cxnSp>
+            <p:cxnSp>
+              <p:nvCxnSpPr>
+                <p:cNvPr id="14" name="Straight Connector 13"/>
+                <p:cNvCxnSpPr/>
+                <p:nvPr/>
+              </p:nvCxnSpPr>
+              <p:spPr>
+                <a:xfrm flipV="1">
+                  <a:off x="1167765" y="4114258"/>
+                  <a:ext cx="1484540" cy="1252127"/>
+                </a:xfrm>
+                <a:prstGeom prst="line">
+                  <a:avLst/>
+                </a:prstGeom>
+                <a:ln w="28575" cap="rnd">
+                  <a:solidFill>
+                    <a:schemeClr val="accent1">
+                      <a:lumMod val="75000"/>
+                    </a:schemeClr>
+                  </a:solidFill>
+                  <a:round/>
+                </a:ln>
+              </p:spPr>
+              <p:style>
+                <a:lnRef idx="1">
+                  <a:schemeClr val="accent1"/>
+                </a:lnRef>
+                <a:fillRef idx="0">
+                  <a:schemeClr val="accent1"/>
+                </a:fillRef>
+                <a:effectRef idx="0">
+                  <a:schemeClr val="accent1"/>
+                </a:effectRef>
+                <a:fontRef idx="minor">
+                  <a:schemeClr val="tx1"/>
+                </a:fontRef>
+              </p:style>
+            </p:cxnSp>
+          </p:grpSp>
+          <mc:AlternateContent xmlns:mc="http://schemas.openxmlformats.org/markup-compatibility/2006">
+            <mc:Choice xmlns:a14="http://schemas.microsoft.com/office/drawing/2010/main" Requires="a14">
+              <p:sp>
+                <p:nvSpPr>
+                  <p:cNvPr id="18" name="TextBox 17"/>
+                  <p:cNvSpPr txBox="1"/>
+                  <p:nvPr/>
+                </p:nvSpPr>
+                <p:spPr>
+                  <a:xfrm>
+                    <a:off x="3851529" y="3778377"/>
+                    <a:ext cx="357470" cy="369332"/>
+                  </a:xfrm>
+                  <a:prstGeom prst="rect">
+                    <a:avLst/>
+                  </a:prstGeom>
+                  <a:noFill/>
+                </p:spPr>
+                <p:txBody>
+                  <a:bodyPr wrap="none" lIns="0" tIns="0" rIns="0" bIns="0" rtlCol="0">
+                    <a:spAutoFit/>
+                  </a:bodyPr>
+                  <a:lstStyle/>
+                  <a:p>
+                    <a14:m>
+                      <m:oMathPara xmlns:m="http://schemas.openxmlformats.org/officeDocument/2006/math">
+                        <m:oMathParaPr>
+                          <m:jc m:val="centerGroup"/>
+                        </m:oMathParaPr>
+                        <m:oMath xmlns:m="http://schemas.openxmlformats.org/officeDocument/2006/math">
+                          <m:r>
+                            <a:rPr lang="en-US" sz="2400" b="0" i="1" smtClean="0">
+                              <a:solidFill>
+                                <a:schemeClr val="accent1">
+                                  <a:lumMod val="75000"/>
+                                </a:schemeClr>
+                              </a:solidFill>
+                              <a:latin typeface="Cambria Math" panose="02040503050406030204" pitchFamily="18" charset="0"/>
+                            </a:rPr>
+                            <m:t>𝑂</m:t>
+                          </m:r>
+                          <m:r>
+                            <a:rPr lang="en-US" sz="2400" b="0" i="1" smtClean="0">
+                              <a:solidFill>
+                                <a:schemeClr val="accent1">
+                                  <a:lumMod val="75000"/>
+                                </a:schemeClr>
+                              </a:solidFill>
+                              <a:latin typeface="Cambria Math" panose="02040503050406030204" pitchFamily="18" charset="0"/>
+                            </a:rPr>
+                            <m:t>′</m:t>
+                          </m:r>
+                        </m:oMath>
+                      </m:oMathPara>
+                    </a14:m>
+                    <a:endParaRPr lang="en-US" sz="2400" dirty="0">
+                      <a:solidFill>
+                        <a:schemeClr val="accent1">
+                          <a:lumMod val="75000"/>
+                        </a:schemeClr>
+                      </a:solidFill>
+                    </a:endParaRPr>
+                  </a:p>
+                </p:txBody>
+              </p:sp>
+            </mc:Choice>
+            <mc:Fallback>
+              <p:sp>
+                <p:nvSpPr>
+                  <p:cNvPr id="18" name="TextBox 17"/>
+                  <p:cNvSpPr txBox="1">
+                    <a:spLocks noRot="1" noChangeAspect="1" noMove="1" noResize="1" noEditPoints="1" noAdjustHandles="1" noChangeArrowheads="1" noChangeShapeType="1" noTextEdit="1"/>
+                  </p:cNvSpPr>
+                  <p:nvPr/>
+                </p:nvSpPr>
+                <p:spPr>
+                  <a:xfrm>
+                    <a:off x="3851529" y="3778377"/>
+                    <a:ext cx="357470" cy="369332"/>
+                  </a:xfrm>
+                  <a:prstGeom prst="rect">
+                    <a:avLst/>
+                  </a:prstGeom>
+                  <a:blipFill>
+                    <a:blip r:embed="rId7"/>
+                    <a:stretch>
+                      <a:fillRect l="-24138" t="-1667" r="-24138" b="-10000"/>
+                    </a:stretch>
+                  </a:blipFill>
+                </p:spPr>
+                <p:txBody>
+                  <a:bodyPr/>
+                  <a:lstStyle/>
+                  <a:p>
+                    <a:r>
+                      <a:rPr lang="en-US">
+                        <a:noFill/>
+                      </a:rPr>
+                      <a:t> </a:t>
+                    </a:r>
+                  </a:p>
+                </p:txBody>
+              </p:sp>
+            </mc:Fallback>
+          </mc:AlternateContent>
+          <mc:AlternateContent xmlns:mc="http://schemas.openxmlformats.org/markup-compatibility/2006">
+            <mc:Choice xmlns:a14="http://schemas.microsoft.com/office/drawing/2010/main" Requires="a14">
+              <p:sp>
+                <p:nvSpPr>
+                  <p:cNvPr id="20" name="TextBox 19"/>
+                  <p:cNvSpPr txBox="1"/>
+                  <p:nvPr/>
+                </p:nvSpPr>
+                <p:spPr>
+                  <a:xfrm>
+                    <a:off x="7615428" y="4152900"/>
+                    <a:ext cx="347851" cy="369332"/>
+                  </a:xfrm>
+                  <a:prstGeom prst="rect">
+                    <a:avLst/>
+                  </a:prstGeom>
+                  <a:noFill/>
+                </p:spPr>
+                <p:txBody>
+                  <a:bodyPr wrap="none" lIns="0" tIns="0" rIns="0" bIns="0" rtlCol="0">
+                    <a:spAutoFit/>
+                  </a:bodyPr>
+                  <a:lstStyle/>
+                  <a:p>
+                    <a14:m>
+                      <m:oMathPara xmlns:m="http://schemas.openxmlformats.org/officeDocument/2006/math">
+                        <m:oMathParaPr>
+                          <m:jc m:val="centerGroup"/>
+                        </m:oMathParaPr>
+                        <m:oMath xmlns:m="http://schemas.openxmlformats.org/officeDocument/2006/math">
+                          <m:r>
+                            <a:rPr lang="en-US" sz="2400" b="0" i="1" smtClean="0">
+                              <a:solidFill>
+                                <a:schemeClr val="accent1">
+                                  <a:lumMod val="75000"/>
+                                </a:schemeClr>
+                              </a:solidFill>
+                              <a:latin typeface="Cambria Math" panose="02040503050406030204" pitchFamily="18" charset="0"/>
+                            </a:rPr>
+                            <m:t>𝑋</m:t>
+                          </m:r>
+                          <m:r>
+                            <a:rPr lang="en-US" sz="2400" b="0" i="1" smtClean="0">
+                              <a:solidFill>
+                                <a:schemeClr val="accent1">
+                                  <a:lumMod val="75000"/>
+                                </a:schemeClr>
+                              </a:solidFill>
+                              <a:latin typeface="Cambria Math" panose="02040503050406030204" pitchFamily="18" charset="0"/>
+                            </a:rPr>
+                            <m:t>′</m:t>
+                          </m:r>
+                        </m:oMath>
+                      </m:oMathPara>
+                    </a14:m>
+                    <a:endParaRPr lang="en-US" sz="2400" dirty="0"/>
+                  </a:p>
+                </p:txBody>
+              </p:sp>
+            </mc:Choice>
+            <mc:Fallback>
+              <p:sp>
+                <p:nvSpPr>
+                  <p:cNvPr id="20" name="TextBox 19"/>
+                  <p:cNvSpPr txBox="1">
+                    <a:spLocks noRot="1" noChangeAspect="1" noMove="1" noResize="1" noEditPoints="1" noAdjustHandles="1" noChangeArrowheads="1" noChangeShapeType="1" noTextEdit="1"/>
+                  </p:cNvSpPr>
+                  <p:nvPr/>
+                </p:nvSpPr>
+                <p:spPr>
+                  <a:xfrm>
+                    <a:off x="7615428" y="4152900"/>
+                    <a:ext cx="347851" cy="369332"/>
+                  </a:xfrm>
+                  <a:prstGeom prst="rect">
+                    <a:avLst/>
+                  </a:prstGeom>
+                  <a:blipFill>
+                    <a:blip r:embed="rId8"/>
+                    <a:stretch>
+                      <a:fillRect l="-22807" t="-1639" r="-22807" b="-9836"/>
+                    </a:stretch>
+                  </a:blipFill>
+                </p:spPr>
+                <p:txBody>
+                  <a:bodyPr/>
+                  <a:lstStyle/>
+                  <a:p>
+                    <a:r>
+                      <a:rPr lang="en-US">
+                        <a:noFill/>
+                      </a:rPr>
+                      <a:t> </a:t>
+                    </a:r>
+                  </a:p>
+                </p:txBody>
+              </p:sp>
+            </mc:Fallback>
+          </mc:AlternateContent>
+          <mc:AlternateContent xmlns:mc="http://schemas.openxmlformats.org/markup-compatibility/2006">
+            <mc:Choice xmlns:a14="http://schemas.microsoft.com/office/drawing/2010/main" Requires="a14">
+              <p:sp>
+                <p:nvSpPr>
+                  <p:cNvPr id="21" name="TextBox 20"/>
+                  <p:cNvSpPr txBox="1"/>
+                  <p:nvPr/>
+                </p:nvSpPr>
+                <p:spPr>
+                  <a:xfrm>
+                    <a:off x="4328160" y="914400"/>
+                    <a:ext cx="335027" cy="369332"/>
+                  </a:xfrm>
+                  <a:prstGeom prst="rect">
+                    <a:avLst/>
+                  </a:prstGeom>
+                  <a:noFill/>
+                </p:spPr>
+                <p:txBody>
+                  <a:bodyPr wrap="none" lIns="0" tIns="0" rIns="0" bIns="0" rtlCol="0">
+                    <a:spAutoFit/>
+                  </a:bodyPr>
+                  <a:lstStyle/>
+                  <a:p>
+                    <a14:m>
+                      <m:oMathPara xmlns:m="http://schemas.openxmlformats.org/officeDocument/2006/math">
+                        <m:oMathParaPr>
+                          <m:jc m:val="centerGroup"/>
+                        </m:oMathParaPr>
+                        <m:oMath xmlns:m="http://schemas.openxmlformats.org/officeDocument/2006/math">
+                          <m:r>
+                            <a:rPr lang="en-US" sz="2400" b="0" i="1" smtClean="0">
+                              <a:solidFill>
+                                <a:schemeClr val="accent1">
+                                  <a:lumMod val="75000"/>
+                                </a:schemeClr>
+                              </a:solidFill>
+                              <a:latin typeface="Cambria Math" panose="02040503050406030204" pitchFamily="18" charset="0"/>
+                            </a:rPr>
+                            <m:t>𝑌</m:t>
+                          </m:r>
+                          <m:r>
+                            <a:rPr lang="en-US" sz="2400" b="0" i="1" smtClean="0">
+                              <a:solidFill>
+                                <a:schemeClr val="accent1">
+                                  <a:lumMod val="75000"/>
+                                </a:schemeClr>
+                              </a:solidFill>
+                              <a:latin typeface="Cambria Math" panose="02040503050406030204" pitchFamily="18" charset="0"/>
+                            </a:rPr>
+                            <m:t>′</m:t>
+                          </m:r>
+                        </m:oMath>
+                      </m:oMathPara>
+                    </a14:m>
+                    <a:endParaRPr lang="en-US" sz="2400" dirty="0"/>
+                  </a:p>
+                </p:txBody>
+              </p:sp>
+            </mc:Choice>
+            <mc:Fallback>
+              <p:sp>
+                <p:nvSpPr>
+                  <p:cNvPr id="21" name="TextBox 20"/>
+                  <p:cNvSpPr txBox="1">
+                    <a:spLocks noRot="1" noChangeAspect="1" noMove="1" noResize="1" noEditPoints="1" noAdjustHandles="1" noChangeArrowheads="1" noChangeShapeType="1" noTextEdit="1"/>
+                  </p:cNvSpPr>
+                  <p:nvPr/>
+                </p:nvSpPr>
+                <p:spPr>
+                  <a:xfrm>
+                    <a:off x="4328160" y="914400"/>
+                    <a:ext cx="335027" cy="369332"/>
+                  </a:xfrm>
+                  <a:prstGeom prst="rect">
+                    <a:avLst/>
+                  </a:prstGeom>
+                  <a:blipFill>
+                    <a:blip r:embed="rId9"/>
+                    <a:stretch>
+                      <a:fillRect l="-25455" t="-1639" r="-23636" b="-8197"/>
+                    </a:stretch>
+                  </a:blipFill>
+                </p:spPr>
+                <p:txBody>
+                  <a:bodyPr/>
+                  <a:lstStyle/>
+                  <a:p>
+                    <a:r>
+                      <a:rPr lang="en-US">
+                        <a:noFill/>
+                      </a:rPr>
+                      <a:t> </a:t>
+                    </a:r>
+                  </a:p>
+                </p:txBody>
+              </p:sp>
+            </mc:Fallback>
+          </mc:AlternateContent>
+          <mc:AlternateContent xmlns:mc="http://schemas.openxmlformats.org/markup-compatibility/2006">
+            <mc:Choice xmlns:a14="http://schemas.microsoft.com/office/drawing/2010/main" Requires="a14">
+              <p:sp>
+                <p:nvSpPr>
+                  <p:cNvPr id="24" name="TextBox 23"/>
+                  <p:cNvSpPr txBox="1"/>
+                  <p:nvPr/>
+                </p:nvSpPr>
+                <p:spPr>
+                  <a:xfrm>
+                    <a:off x="2830830" y="5229225"/>
+                    <a:ext cx="331821" cy="369332"/>
+                  </a:xfrm>
+                  <a:prstGeom prst="rect">
+                    <a:avLst/>
+                  </a:prstGeom>
+                  <a:noFill/>
+                </p:spPr>
+                <p:txBody>
+                  <a:bodyPr wrap="none" lIns="0" tIns="0" rIns="0" bIns="0" rtlCol="0">
+                    <a:spAutoFit/>
+                  </a:bodyPr>
+                  <a:lstStyle/>
+                  <a:p>
+                    <a14:m>
+                      <m:oMathPara xmlns:m="http://schemas.openxmlformats.org/officeDocument/2006/math">
+                        <m:oMathParaPr>
+                          <m:jc m:val="centerGroup"/>
+                        </m:oMathParaPr>
+                        <m:oMath xmlns:m="http://schemas.openxmlformats.org/officeDocument/2006/math">
+                          <m:r>
+                            <a:rPr lang="en-US" sz="2400" b="0" i="1" smtClean="0">
+                              <a:solidFill>
+                                <a:schemeClr val="accent1">
+                                  <a:lumMod val="75000"/>
+                                </a:schemeClr>
+                              </a:solidFill>
+                              <a:latin typeface="Cambria Math" panose="02040503050406030204" pitchFamily="18" charset="0"/>
+                            </a:rPr>
+                            <m:t>𝑍</m:t>
+                          </m:r>
+                          <m:r>
+                            <a:rPr lang="en-US" sz="2400" b="0" i="1" smtClean="0">
+                              <a:solidFill>
+                                <a:schemeClr val="accent1">
+                                  <a:lumMod val="75000"/>
+                                </a:schemeClr>
+                              </a:solidFill>
+                              <a:latin typeface="Cambria Math" panose="02040503050406030204" pitchFamily="18" charset="0"/>
+                            </a:rPr>
+                            <m:t>′</m:t>
+                          </m:r>
+                        </m:oMath>
+                      </m:oMathPara>
+                    </a14:m>
+                    <a:endParaRPr lang="en-US" sz="2400" dirty="0">
+                      <a:solidFill>
+                        <a:schemeClr val="accent1">
+                          <a:lumMod val="75000"/>
+                        </a:schemeClr>
+                      </a:solidFill>
+                    </a:endParaRPr>
+                  </a:p>
+                </p:txBody>
+              </p:sp>
+            </mc:Choice>
+            <mc:Fallback>
+              <p:sp>
+                <p:nvSpPr>
+                  <p:cNvPr id="24" name="TextBox 23"/>
+                  <p:cNvSpPr txBox="1">
+                    <a:spLocks noRot="1" noChangeAspect="1" noMove="1" noResize="1" noEditPoints="1" noAdjustHandles="1" noChangeArrowheads="1" noChangeShapeType="1" noTextEdit="1"/>
+                  </p:cNvSpPr>
+                  <p:nvPr/>
+                </p:nvSpPr>
+                <p:spPr>
+                  <a:xfrm>
+                    <a:off x="2830830" y="5229225"/>
+                    <a:ext cx="331821" cy="369332"/>
+                  </a:xfrm>
+                  <a:prstGeom prst="rect">
+                    <a:avLst/>
+                  </a:prstGeom>
+                  <a:blipFill>
+                    <a:blip r:embed="rId10"/>
+                    <a:stretch>
+                      <a:fillRect l="-23636" t="-1667" r="-25455" b="-10000"/>
+                    </a:stretch>
+                  </a:blipFill>
+                </p:spPr>
+                <p:txBody>
+                  <a:bodyPr/>
+                  <a:lstStyle/>
+                  <a:p>
+                    <a:r>
+                      <a:rPr lang="en-US">
+                        <a:noFill/>
+                      </a:rPr>
+                      <a:t> </a:t>
+                    </a:r>
+                  </a:p>
+                </p:txBody>
+              </p:sp>
+            </mc:Fallback>
+          </mc:AlternateContent>
+          <mc:AlternateContent xmlns:mc="http://schemas.openxmlformats.org/markup-compatibility/2006">
+            <mc:Choice xmlns:a14="http://schemas.microsoft.com/office/drawing/2010/main" Requires="a14">
+              <p:sp>
+                <p:nvSpPr>
+                  <p:cNvPr id="25" name="TextBox 24"/>
+                  <p:cNvSpPr txBox="1"/>
+                  <p:nvPr/>
+                </p:nvSpPr>
+                <p:spPr>
+                  <a:xfrm>
+                    <a:off x="4859655" y="1323975"/>
+                    <a:ext cx="245708" cy="369332"/>
+                  </a:xfrm>
+                  <a:prstGeom prst="rect">
+                    <a:avLst/>
+                  </a:prstGeom>
+                  <a:noFill/>
+                </p:spPr>
+                <p:txBody>
+                  <a:bodyPr wrap="none" lIns="0" tIns="0" rIns="0" bIns="0" rtlCol="0">
+                    <a:spAutoFit/>
+                  </a:bodyPr>
+                  <a:lstStyle/>
+                  <a:p>
+                    <a14:m>
+                      <m:oMathPara xmlns:m="http://schemas.openxmlformats.org/officeDocument/2006/math">
+                        <m:oMathParaPr>
+                          <m:jc m:val="centerGroup"/>
+                        </m:oMathParaPr>
+                        <m:oMath xmlns:m="http://schemas.openxmlformats.org/officeDocument/2006/math">
+                          <m:r>
+                            <a:rPr lang="en-US" sz="2400" b="0" i="1" smtClean="0">
+                              <a:solidFill>
+                                <a:srgbClr val="FF0000"/>
+                              </a:solidFill>
+                              <a:latin typeface="Cambria Math" panose="02040503050406030204" pitchFamily="18" charset="0"/>
+                            </a:rPr>
+                            <m:t>𝑣</m:t>
+                          </m:r>
+                        </m:oMath>
+                      </m:oMathPara>
+                    </a14:m>
+                    <a:endParaRPr lang="en-US" sz="2400" dirty="0">
+                      <a:solidFill>
+                        <a:schemeClr val="tx1"/>
+                      </a:solidFill>
+                    </a:endParaRPr>
+                  </a:p>
+                </p:txBody>
+              </p:sp>
+            </mc:Choice>
+            <mc:Fallback>
+              <p:sp>
+                <p:nvSpPr>
+                  <p:cNvPr id="25" name="TextBox 24"/>
+                  <p:cNvSpPr txBox="1">
+                    <a:spLocks noRot="1" noChangeAspect="1" noMove="1" noResize="1" noEditPoints="1" noAdjustHandles="1" noChangeArrowheads="1" noChangeShapeType="1" noTextEdit="1"/>
+                  </p:cNvSpPr>
+                  <p:nvPr/>
+                </p:nvSpPr>
+                <p:spPr>
+                  <a:xfrm>
+                    <a:off x="4859655" y="1323975"/>
+                    <a:ext cx="245708" cy="369332"/>
+                  </a:xfrm>
+                  <a:prstGeom prst="rect">
+                    <a:avLst/>
+                  </a:prstGeom>
+                  <a:blipFill>
+                    <a:blip r:embed="rId11"/>
+                    <a:stretch>
+                      <a:fillRect l="-17500" r="-15000"/>
+                    </a:stretch>
+                  </a:blipFill>
+                </p:spPr>
+                <p:txBody>
+                  <a:bodyPr/>
+                  <a:lstStyle/>
+                  <a:p>
+                    <a:r>
+                      <a:rPr lang="en-US">
+                        <a:noFill/>
+                      </a:rPr>
+                      <a:t> </a:t>
+                    </a:r>
+                  </a:p>
+                </p:txBody>
+              </p:sp>
+            </mc:Fallback>
+          </mc:AlternateContent>
+        </p:grpSp>
+        <mc:AlternateContent xmlns:mc="http://schemas.openxmlformats.org/markup-compatibility/2006">
+          <mc:Choice xmlns:a14="http://schemas.microsoft.com/office/drawing/2010/main" Requires="a14">
+            <p:sp>
+              <p:nvSpPr>
+                <p:cNvPr id="64" name="TextBox 63"/>
+                <p:cNvSpPr txBox="1"/>
+                <p:nvPr/>
+              </p:nvSpPr>
+              <p:spPr>
+                <a:xfrm>
+                  <a:off x="4144518" y="1958340"/>
+                  <a:ext cx="229362" cy="369332"/>
+                </a:xfrm>
+                <a:prstGeom prst="rect">
+                  <a:avLst/>
+                </a:prstGeom>
+                <a:noFill/>
+              </p:spPr>
+              <p:txBody>
+                <a:bodyPr wrap="square" lIns="0" tIns="0" rIns="0" bIns="0" rtlCol="0">
+                  <a:spAutoFit/>
+                </a:bodyPr>
+                <a:lstStyle/>
+                <a:p>
+                  <a14:m>
+                    <m:oMathPara xmlns:m="http://schemas.openxmlformats.org/officeDocument/2006/math">
+                      <m:oMathParaPr>
+                        <m:jc m:val="centerGroup"/>
+                      </m:oMathParaPr>
+                      <m:oMath xmlns:m="http://schemas.openxmlformats.org/officeDocument/2006/math">
+                        <m:r>
+                          <m:rPr>
+                            <m:sty m:val="p"/>
+                          </m:rPr>
+                          <a:rPr lang="en-US" sz="2400" b="0" i="0" smtClean="0">
+                            <a:solidFill>
+                              <a:schemeClr val="accent1">
+                                <a:lumMod val="75000"/>
+                              </a:schemeClr>
+                            </a:solidFill>
+                            <a:latin typeface="Cambria Math" panose="02040503050406030204" pitchFamily="18" charset="0"/>
+                          </a:rPr>
+                          <m:t>S</m:t>
+                        </m:r>
+                        <m:r>
+                          <a:rPr lang="en-US" sz="2400" b="0" i="0" smtClean="0">
+                            <a:solidFill>
+                              <a:schemeClr val="accent1">
+                                <a:lumMod val="75000"/>
+                              </a:schemeClr>
+                            </a:solidFill>
+                            <a:latin typeface="Cambria Math" panose="02040503050406030204" pitchFamily="18" charset="0"/>
+                          </a:rPr>
+                          <m:t>′</m:t>
+                        </m:r>
+                      </m:oMath>
+                    </m:oMathPara>
+                  </a14:m>
+                  <a:endParaRPr lang="en-US" sz="2400" dirty="0"/>
+                </a:p>
+              </p:txBody>
+            </p:sp>
+          </mc:Choice>
+          <mc:Fallback>
+            <p:sp>
+              <p:nvSpPr>
+                <p:cNvPr id="64" name="TextBox 63"/>
+                <p:cNvSpPr txBox="1">
+                  <a:spLocks noRot="1" noChangeAspect="1" noMove="1" noResize="1" noEditPoints="1" noAdjustHandles="1" noChangeArrowheads="1" noChangeShapeType="1" noTextEdit="1"/>
+                </p:cNvSpPr>
+                <p:nvPr/>
+              </p:nvSpPr>
+              <p:spPr>
+                <a:xfrm>
+                  <a:off x="4144518" y="1958340"/>
+                  <a:ext cx="229362" cy="369332"/>
+                </a:xfrm>
+                <a:prstGeom prst="rect">
+                  <a:avLst/>
+                </a:prstGeom>
+                <a:blipFill>
+                  <a:blip r:embed="rId12"/>
+                  <a:stretch>
+                    <a:fillRect l="-54054" t="-1639" r="-54054" b="-9836"/>
+                  </a:stretch>
+                </a:blipFill>
+              </p:spPr>
+              <p:txBody>
+                <a:bodyPr/>
+                <a:lstStyle/>
+                <a:p>
+                  <a:r>
+                    <a:rPr lang="en-US">
+                      <a:noFill/>
+                    </a:rPr>
+                    <a:t> </a:t>
+                  </a:r>
+                </a:p>
+              </p:txBody>
+            </p:sp>
+          </mc:Fallback>
+        </mc:AlternateContent>
+      </p:grpSp>
+      <p:sp>
+        <p:nvSpPr>
+          <p:cNvPr id="4" name="Can 3"/>
+          <p:cNvSpPr/>
+          <p:nvPr/>
+        </p:nvSpPr>
+        <p:spPr>
+          <a:xfrm rot="-3360000">
+            <a:off x="5501639" y="2136141"/>
+            <a:ext cx="152400" cy="1668780"/>
+          </a:xfrm>
+          <a:prstGeom prst="can">
+            <a:avLst>
+              <a:gd name="adj" fmla="val 54402"/>
+            </a:avLst>
+          </a:prstGeom>
+          <a:blipFill>
+            <a:blip r:embed="rId13"/>
+            <a:tile tx="0" ty="0" sx="100000" sy="100000" flip="none" algn="tl"/>
+          </a:blipFill>
+          <a:ln>
+            <a:solidFill>
+              <a:schemeClr val="tx1"/>
+            </a:solidFill>
+          </a:ln>
+        </p:spPr>
+        <p:style>
+          <a:lnRef idx="2">
+            <a:schemeClr val="accent1">
+              <a:shade val="50000"/>
+            </a:schemeClr>
+          </a:lnRef>
+          <a:fillRef idx="1">
+            <a:schemeClr val="accent1"/>
+          </a:fillRef>
+          <a:effectRef idx="0">
+            <a:schemeClr val="accent1"/>
+          </a:effectRef>
+          <a:fontRef idx="minor">
+            <a:schemeClr val="lt1"/>
+          </a:fontRef>
+        </p:style>
+        <p:txBody>
+          <a:bodyPr rtlCol="0" anchor="ctr"/>
+          <a:lstStyle/>
+          <a:p>
+            <a:pPr algn="ctr"/>
+            <a:endParaRPr lang="en-US"/>
+          </a:p>
+        </p:txBody>
+      </p:sp>
+      <mc:AlternateContent xmlns:mc="http://schemas.openxmlformats.org/markup-compatibility/2006">
+        <mc:Choice xmlns:a14="http://schemas.microsoft.com/office/drawing/2010/main" Requires="a14">
+          <p:sp>
+            <p:nvSpPr>
+              <p:cNvPr id="45" name="TextBox 44"/>
+              <p:cNvSpPr txBox="1"/>
+              <p:nvPr/>
+            </p:nvSpPr>
+            <p:spPr>
+              <a:xfrm>
+                <a:off x="4630674" y="2147316"/>
+                <a:ext cx="229362" cy="369332"/>
+              </a:xfrm>
+              <a:prstGeom prst="rect">
+                <a:avLst/>
+              </a:prstGeom>
+              <a:noFill/>
+            </p:spPr>
+            <p:txBody>
+              <a:bodyPr wrap="square" lIns="0" tIns="0" rIns="0" bIns="0" rtlCol="0">
+                <a:spAutoFit/>
+              </a:bodyPr>
+              <a:lstStyle/>
+              <a:p>
+                <a14:m>
+                  <m:oMathPara xmlns:m="http://schemas.openxmlformats.org/officeDocument/2006/math">
+                    <m:oMathParaPr>
+                      <m:jc m:val="centerGroup"/>
+                    </m:oMathParaPr>
+                    <m:oMath xmlns:m="http://schemas.openxmlformats.org/officeDocument/2006/math">
+                      <m:r>
+                        <a:rPr lang="en-US" sz="2400" b="0" i="1" smtClean="0">
+                          <a:latin typeface="Cambria Math" panose="02040503050406030204" pitchFamily="18" charset="0"/>
+                        </a:rPr>
+                        <m:t>𝐴</m:t>
+                      </m:r>
+                    </m:oMath>
+                  </m:oMathPara>
+                </a14:m>
+                <a:endParaRPr lang="en-US" sz="2400" i="1" dirty="0"/>
+              </a:p>
+            </p:txBody>
+          </p:sp>
+        </mc:Choice>
+        <mc:Fallback>
+          <p:sp>
+            <p:nvSpPr>
+              <p:cNvPr id="45" name="TextBox 44"/>
+              <p:cNvSpPr txBox="1">
+                <a:spLocks noRot="1" noChangeAspect="1" noMove="1" noResize="1" noEditPoints="1" noAdjustHandles="1" noChangeArrowheads="1" noChangeShapeType="1" noTextEdit="1"/>
+              </p:cNvSpPr>
+              <p:nvPr/>
+            </p:nvSpPr>
+            <p:spPr>
+              <a:xfrm>
+                <a:off x="4630674" y="2147316"/>
+                <a:ext cx="229362" cy="369332"/>
+              </a:xfrm>
+              <a:prstGeom prst="rect">
+                <a:avLst/>
+              </a:prstGeom>
+              <a:blipFill>
+                <a:blip r:embed="rId14"/>
+                <a:stretch>
+                  <a:fillRect l="-40541" r="-40541" b="-6557"/>
+                </a:stretch>
+              </a:blipFill>
+            </p:spPr>
+            <p:txBody>
+              <a:bodyPr/>
+              <a:lstStyle/>
+              <a:p>
+                <a:r>
+                  <a:rPr lang="en-US">
+                    <a:noFill/>
+                  </a:rPr>
+                  <a:t> </a:t>
+                </a:r>
+              </a:p>
+            </p:txBody>
+          </p:sp>
+        </mc:Fallback>
+      </mc:AlternateContent>
+      <mc:AlternateContent xmlns:mc="http://schemas.openxmlformats.org/markup-compatibility/2006">
+        <mc:Choice xmlns:a14="http://schemas.microsoft.com/office/drawing/2010/main" Requires="a14">
+          <p:sp>
+            <p:nvSpPr>
+              <p:cNvPr id="47" name="TextBox 46"/>
+              <p:cNvSpPr txBox="1"/>
+              <p:nvPr/>
+            </p:nvSpPr>
+            <p:spPr>
+              <a:xfrm>
+                <a:off x="6319266" y="3323844"/>
+                <a:ext cx="229362" cy="369332"/>
+              </a:xfrm>
+              <a:prstGeom prst="rect">
+                <a:avLst/>
+              </a:prstGeom>
+              <a:noFill/>
+            </p:spPr>
+            <p:txBody>
+              <a:bodyPr wrap="square" lIns="0" tIns="0" rIns="0" bIns="0" rtlCol="0">
+                <a:spAutoFit/>
+              </a:bodyPr>
+              <a:lstStyle/>
+              <a:p>
+                <a14:m>
+                  <m:oMathPara xmlns:m="http://schemas.openxmlformats.org/officeDocument/2006/math">
+                    <m:oMathParaPr>
+                      <m:jc m:val="centerGroup"/>
+                    </m:oMathParaPr>
+                    <m:oMath xmlns:m="http://schemas.openxmlformats.org/officeDocument/2006/math">
+                      <m:r>
+                        <a:rPr lang="en-US" sz="2400" b="0" i="1" smtClean="0">
+                          <a:latin typeface="Cambria Math" panose="02040503050406030204" pitchFamily="18" charset="0"/>
+                        </a:rPr>
+                        <m:t>𝐵</m:t>
+                      </m:r>
+                    </m:oMath>
+                  </m:oMathPara>
+                </a14:m>
+                <a:endParaRPr lang="en-US" sz="2400" i="1" dirty="0"/>
+              </a:p>
+            </p:txBody>
+          </p:sp>
+        </mc:Choice>
+        <mc:Fallback>
+          <p:sp>
+            <p:nvSpPr>
+              <p:cNvPr id="47" name="TextBox 46"/>
+              <p:cNvSpPr txBox="1">
+                <a:spLocks noRot="1" noChangeAspect="1" noMove="1" noResize="1" noEditPoints="1" noAdjustHandles="1" noChangeArrowheads="1" noChangeShapeType="1" noTextEdit="1"/>
+              </p:cNvSpPr>
+              <p:nvPr/>
+            </p:nvSpPr>
+            <p:spPr>
+              <a:xfrm>
+                <a:off x="6319266" y="3323844"/>
+                <a:ext cx="229362" cy="369332"/>
+              </a:xfrm>
+              <a:prstGeom prst="rect">
+                <a:avLst/>
+              </a:prstGeom>
+              <a:blipFill>
+                <a:blip r:embed="rId15"/>
+                <a:stretch>
+                  <a:fillRect l="-43243" r="-40541" b="-6557"/>
+                </a:stretch>
+              </a:blipFill>
+            </p:spPr>
+            <p:txBody>
+              <a:bodyPr/>
+              <a:lstStyle/>
+              <a:p>
+                <a:r>
+                  <a:rPr lang="en-US">
+                    <a:noFill/>
+                  </a:rPr>
+                  <a:t> </a:t>
+                </a:r>
+              </a:p>
+            </p:txBody>
+          </p:sp>
+        </mc:Fallback>
+      </mc:AlternateContent>
+    </p:spTree>
+    <p:extLst>
+      <p:ext uri="{BB962C8B-B14F-4D97-AF65-F5344CB8AC3E}">
+        <p14:creationId xmlns:p14="http://schemas.microsoft.com/office/powerpoint/2010/main" val="3495371544"/>
       </p:ext>
     </p:extLst>
   </p:cSld>

--- a/U1-Frames-of-Reference/figures/all-figs.pptx
+++ b/U1-Frames-of-Reference/figures/all-figs.pptx
@@ -7,6 +7,7 @@
   <p:sldIdLst>
     <p:sldId id="256" r:id="rId2"/>
     <p:sldId id="257" r:id="rId3"/>
+    <p:sldId id="258" r:id="rId4"/>
   </p:sldIdLst>
   <p:sldSz cx="12192000" cy="6858000"/>
   <p:notesSz cx="6858000" cy="9144000"/>
@@ -105,6 +106,11 @@
       </a:defRPr>
     </a:lvl9pPr>
   </p:defaultTextStyle>
+  <p:extLst>
+    <p:ext uri="{EFAFB233-063F-42B5-8137-9DF3F51BA10A}">
+      <p15:sldGuideLst xmlns:p15="http://schemas.microsoft.com/office/powerpoint/2012/main"/>
+    </p:ext>
+  </p:extLst>
 </p:presentation>
 </file>
 
@@ -150,10 +156,9 @@
           </a:lstStyle>
           <a:p>
             <a:r>
-              <a:rPr lang="en-US" smtClean="0"/>
+              <a:rPr lang="en-US"/>
               <a:t>Click to edit Master title style</a:t>
             </a:r>
-            <a:endParaRPr lang="en-US"/>
           </a:p>
         </p:txBody>
       </p:sp>
@@ -215,10 +220,9 @@
           </a:lstStyle>
           <a:p>
             <a:r>
-              <a:rPr lang="en-US" smtClean="0"/>
+              <a:rPr lang="en-US"/>
               <a:t>Click to edit Master subtitle style</a:t>
             </a:r>
-            <a:endParaRPr lang="en-US"/>
           </a:p>
         </p:txBody>
       </p:sp>
@@ -239,7 +243,7 @@
           <a:p>
             <a:fld id="{ED22BB23-F442-40A7-A37A-0DE665FB7F05}" type="datetimeFigureOut">
               <a:rPr lang="en-US" smtClean="0"/>
-              <a:t>10/3/2026</a:t>
+              <a:t>10/4/2026</a:t>
             </a:fld>
             <a:endParaRPr lang="en-US"/>
           </a:p>
@@ -333,10 +337,9 @@
           <a:lstStyle/>
           <a:p>
             <a:r>
-              <a:rPr lang="en-US" smtClean="0"/>
+              <a:rPr lang="en-US"/>
               <a:t>Click to edit Master title style</a:t>
             </a:r>
-            <a:endParaRPr lang="en-US"/>
           </a:p>
         </p:txBody>
       </p:sp>
@@ -357,38 +360,37 @@
           <a:p>
             <a:pPr lvl="0"/>
             <a:r>
-              <a:rPr lang="en-US" smtClean="0"/>
+              <a:rPr lang="en-US"/>
               <a:t>Edit Master text styles</a:t>
             </a:r>
           </a:p>
           <a:p>
             <a:pPr lvl="1"/>
             <a:r>
-              <a:rPr lang="en-US" smtClean="0"/>
+              <a:rPr lang="en-US"/>
               <a:t>Second level</a:t>
             </a:r>
           </a:p>
           <a:p>
             <a:pPr lvl="2"/>
             <a:r>
-              <a:rPr lang="en-US" smtClean="0"/>
+              <a:rPr lang="en-US"/>
               <a:t>Third level</a:t>
             </a:r>
           </a:p>
           <a:p>
             <a:pPr lvl="3"/>
             <a:r>
-              <a:rPr lang="en-US" smtClean="0"/>
+              <a:rPr lang="en-US"/>
               <a:t>Fourth level</a:t>
             </a:r>
           </a:p>
           <a:p>
             <a:pPr lvl="4"/>
             <a:r>
-              <a:rPr lang="en-US" smtClean="0"/>
+              <a:rPr lang="en-US"/>
               <a:t>Fifth level</a:t>
             </a:r>
-            <a:endParaRPr lang="en-US"/>
           </a:p>
         </p:txBody>
       </p:sp>
@@ -409,7 +411,7 @@
           <a:p>
             <a:fld id="{ED22BB23-F442-40A7-A37A-0DE665FB7F05}" type="datetimeFigureOut">
               <a:rPr lang="en-US" smtClean="0"/>
-              <a:t>10/3/2026</a:t>
+              <a:t>10/4/2026</a:t>
             </a:fld>
             <a:endParaRPr lang="en-US"/>
           </a:p>
@@ -508,10 +510,9 @@
           <a:lstStyle/>
           <a:p>
             <a:r>
-              <a:rPr lang="en-US" smtClean="0"/>
+              <a:rPr lang="en-US"/>
               <a:t>Click to edit Master title style</a:t>
             </a:r>
-            <a:endParaRPr lang="en-US"/>
           </a:p>
         </p:txBody>
       </p:sp>
@@ -537,38 +538,37 @@
           <a:p>
             <a:pPr lvl="0"/>
             <a:r>
-              <a:rPr lang="en-US" smtClean="0"/>
+              <a:rPr lang="en-US"/>
               <a:t>Edit Master text styles</a:t>
             </a:r>
           </a:p>
           <a:p>
             <a:pPr lvl="1"/>
             <a:r>
-              <a:rPr lang="en-US" smtClean="0"/>
+              <a:rPr lang="en-US"/>
               <a:t>Second level</a:t>
             </a:r>
           </a:p>
           <a:p>
             <a:pPr lvl="2"/>
             <a:r>
-              <a:rPr lang="en-US" smtClean="0"/>
+              <a:rPr lang="en-US"/>
               <a:t>Third level</a:t>
             </a:r>
           </a:p>
           <a:p>
             <a:pPr lvl="3"/>
             <a:r>
-              <a:rPr lang="en-US" smtClean="0"/>
+              <a:rPr lang="en-US"/>
               <a:t>Fourth level</a:t>
             </a:r>
           </a:p>
           <a:p>
             <a:pPr lvl="4"/>
             <a:r>
-              <a:rPr lang="en-US" smtClean="0"/>
+              <a:rPr lang="en-US"/>
               <a:t>Fifth level</a:t>
             </a:r>
-            <a:endParaRPr lang="en-US"/>
           </a:p>
         </p:txBody>
       </p:sp>
@@ -589,7 +589,7 @@
           <a:p>
             <a:fld id="{ED22BB23-F442-40A7-A37A-0DE665FB7F05}" type="datetimeFigureOut">
               <a:rPr lang="en-US" smtClean="0"/>
-              <a:t>10/3/2026</a:t>
+              <a:t>10/4/2026</a:t>
             </a:fld>
             <a:endParaRPr lang="en-US"/>
           </a:p>
@@ -683,10 +683,9 @@
           <a:lstStyle/>
           <a:p>
             <a:r>
-              <a:rPr lang="en-US" smtClean="0"/>
+              <a:rPr lang="en-US"/>
               <a:t>Click to edit Master title style</a:t>
             </a:r>
-            <a:endParaRPr lang="en-US"/>
           </a:p>
         </p:txBody>
       </p:sp>
@@ -707,38 +706,37 @@
           <a:p>
             <a:pPr lvl="0"/>
             <a:r>
-              <a:rPr lang="en-US" smtClean="0"/>
+              <a:rPr lang="en-US"/>
               <a:t>Edit Master text styles</a:t>
             </a:r>
           </a:p>
           <a:p>
             <a:pPr lvl="1"/>
             <a:r>
-              <a:rPr lang="en-US" smtClean="0"/>
+              <a:rPr lang="en-US"/>
               <a:t>Second level</a:t>
             </a:r>
           </a:p>
           <a:p>
             <a:pPr lvl="2"/>
             <a:r>
-              <a:rPr lang="en-US" smtClean="0"/>
+              <a:rPr lang="en-US"/>
               <a:t>Third level</a:t>
             </a:r>
           </a:p>
           <a:p>
             <a:pPr lvl="3"/>
             <a:r>
-              <a:rPr lang="en-US" smtClean="0"/>
+              <a:rPr lang="en-US"/>
               <a:t>Fourth level</a:t>
             </a:r>
           </a:p>
           <a:p>
             <a:pPr lvl="4"/>
             <a:r>
-              <a:rPr lang="en-US" smtClean="0"/>
+              <a:rPr lang="en-US"/>
               <a:t>Fifth level</a:t>
             </a:r>
-            <a:endParaRPr lang="en-US"/>
           </a:p>
         </p:txBody>
       </p:sp>
@@ -759,7 +757,7 @@
           <a:p>
             <a:fld id="{ED22BB23-F442-40A7-A37A-0DE665FB7F05}" type="datetimeFigureOut">
               <a:rPr lang="en-US" smtClean="0"/>
-              <a:t>10/3/2026</a:t>
+              <a:t>10/4/2026</a:t>
             </a:fld>
             <a:endParaRPr lang="en-US"/>
           </a:p>
@@ -862,10 +860,9 @@
           </a:lstStyle>
           <a:p>
             <a:r>
-              <a:rPr lang="en-US" smtClean="0"/>
+              <a:rPr lang="en-US"/>
               <a:t>Click to edit Master title style</a:t>
             </a:r>
-            <a:endParaRPr lang="en-US"/>
           </a:p>
         </p:txBody>
       </p:sp>
@@ -982,7 +979,7 @@
           <a:p>
             <a:pPr lvl="0"/>
             <a:r>
-              <a:rPr lang="en-US" smtClean="0"/>
+              <a:rPr lang="en-US"/>
               <a:t>Edit Master text styles</a:t>
             </a:r>
           </a:p>
@@ -1005,7 +1002,7 @@
           <a:p>
             <a:fld id="{ED22BB23-F442-40A7-A37A-0DE665FB7F05}" type="datetimeFigureOut">
               <a:rPr lang="en-US" smtClean="0"/>
-              <a:t>10/3/2026</a:t>
+              <a:t>10/4/2026</a:t>
             </a:fld>
             <a:endParaRPr lang="en-US"/>
           </a:p>
@@ -1099,10 +1096,9 @@
           <a:lstStyle/>
           <a:p>
             <a:r>
-              <a:rPr lang="en-US" smtClean="0"/>
+              <a:rPr lang="en-US"/>
               <a:t>Click to edit Master title style</a:t>
             </a:r>
-            <a:endParaRPr lang="en-US"/>
           </a:p>
         </p:txBody>
       </p:sp>
@@ -1128,38 +1124,37 @@
           <a:p>
             <a:pPr lvl="0"/>
             <a:r>
-              <a:rPr lang="en-US" smtClean="0"/>
+              <a:rPr lang="en-US"/>
               <a:t>Edit Master text styles</a:t>
             </a:r>
           </a:p>
           <a:p>
             <a:pPr lvl="1"/>
             <a:r>
-              <a:rPr lang="en-US" smtClean="0"/>
+              <a:rPr lang="en-US"/>
               <a:t>Second level</a:t>
             </a:r>
           </a:p>
           <a:p>
             <a:pPr lvl="2"/>
             <a:r>
-              <a:rPr lang="en-US" smtClean="0"/>
+              <a:rPr lang="en-US"/>
               <a:t>Third level</a:t>
             </a:r>
           </a:p>
           <a:p>
             <a:pPr lvl="3"/>
             <a:r>
-              <a:rPr lang="en-US" smtClean="0"/>
+              <a:rPr lang="en-US"/>
               <a:t>Fourth level</a:t>
             </a:r>
           </a:p>
           <a:p>
             <a:pPr lvl="4"/>
             <a:r>
-              <a:rPr lang="en-US" smtClean="0"/>
+              <a:rPr lang="en-US"/>
               <a:t>Fifth level</a:t>
             </a:r>
-            <a:endParaRPr lang="en-US"/>
           </a:p>
         </p:txBody>
       </p:sp>
@@ -1185,38 +1180,37 @@
           <a:p>
             <a:pPr lvl="0"/>
             <a:r>
-              <a:rPr lang="en-US" smtClean="0"/>
+              <a:rPr lang="en-US"/>
               <a:t>Edit Master text styles</a:t>
             </a:r>
           </a:p>
           <a:p>
             <a:pPr lvl="1"/>
             <a:r>
-              <a:rPr lang="en-US" smtClean="0"/>
+              <a:rPr lang="en-US"/>
               <a:t>Second level</a:t>
             </a:r>
           </a:p>
           <a:p>
             <a:pPr lvl="2"/>
             <a:r>
-              <a:rPr lang="en-US" smtClean="0"/>
+              <a:rPr lang="en-US"/>
               <a:t>Third level</a:t>
             </a:r>
           </a:p>
           <a:p>
             <a:pPr lvl="3"/>
             <a:r>
-              <a:rPr lang="en-US" smtClean="0"/>
+              <a:rPr lang="en-US"/>
               <a:t>Fourth level</a:t>
             </a:r>
           </a:p>
           <a:p>
             <a:pPr lvl="4"/>
             <a:r>
-              <a:rPr lang="en-US" smtClean="0"/>
+              <a:rPr lang="en-US"/>
               <a:t>Fifth level</a:t>
             </a:r>
-            <a:endParaRPr lang="en-US"/>
           </a:p>
         </p:txBody>
       </p:sp>
@@ -1237,7 +1231,7 @@
           <a:p>
             <a:fld id="{ED22BB23-F442-40A7-A37A-0DE665FB7F05}" type="datetimeFigureOut">
               <a:rPr lang="en-US" smtClean="0"/>
-              <a:t>10/3/2026</a:t>
+              <a:t>10/4/2026</a:t>
             </a:fld>
             <a:endParaRPr lang="en-US"/>
           </a:p>
@@ -1336,10 +1330,9 @@
           <a:lstStyle/>
           <a:p>
             <a:r>
-              <a:rPr lang="en-US" smtClean="0"/>
+              <a:rPr lang="en-US"/>
               <a:t>Click to edit Master title style</a:t>
             </a:r>
-            <a:endParaRPr lang="en-US"/>
           </a:p>
         </p:txBody>
       </p:sp>
@@ -1402,7 +1395,7 @@
           <a:p>
             <a:pPr lvl="0"/>
             <a:r>
-              <a:rPr lang="en-US" smtClean="0"/>
+              <a:rPr lang="en-US"/>
               <a:t>Edit Master text styles</a:t>
             </a:r>
           </a:p>
@@ -1430,38 +1423,37 @@
           <a:p>
             <a:pPr lvl="0"/>
             <a:r>
-              <a:rPr lang="en-US" smtClean="0"/>
+              <a:rPr lang="en-US"/>
               <a:t>Edit Master text styles</a:t>
             </a:r>
           </a:p>
           <a:p>
             <a:pPr lvl="1"/>
             <a:r>
-              <a:rPr lang="en-US" smtClean="0"/>
+              <a:rPr lang="en-US"/>
               <a:t>Second level</a:t>
             </a:r>
           </a:p>
           <a:p>
             <a:pPr lvl="2"/>
             <a:r>
-              <a:rPr lang="en-US" smtClean="0"/>
+              <a:rPr lang="en-US"/>
               <a:t>Third level</a:t>
             </a:r>
           </a:p>
           <a:p>
             <a:pPr lvl="3"/>
             <a:r>
-              <a:rPr lang="en-US" smtClean="0"/>
+              <a:rPr lang="en-US"/>
               <a:t>Fourth level</a:t>
             </a:r>
           </a:p>
           <a:p>
             <a:pPr lvl="4"/>
             <a:r>
-              <a:rPr lang="en-US" smtClean="0"/>
+              <a:rPr lang="en-US"/>
               <a:t>Fifth level</a:t>
             </a:r>
-            <a:endParaRPr lang="en-US"/>
           </a:p>
         </p:txBody>
       </p:sp>
@@ -1524,7 +1516,7 @@
           <a:p>
             <a:pPr lvl="0"/>
             <a:r>
-              <a:rPr lang="en-US" smtClean="0"/>
+              <a:rPr lang="en-US"/>
               <a:t>Edit Master text styles</a:t>
             </a:r>
           </a:p>
@@ -1552,38 +1544,37 @@
           <a:p>
             <a:pPr lvl="0"/>
             <a:r>
-              <a:rPr lang="en-US" smtClean="0"/>
+              <a:rPr lang="en-US"/>
               <a:t>Edit Master text styles</a:t>
             </a:r>
           </a:p>
           <a:p>
             <a:pPr lvl="1"/>
             <a:r>
-              <a:rPr lang="en-US" smtClean="0"/>
+              <a:rPr lang="en-US"/>
               <a:t>Second level</a:t>
             </a:r>
           </a:p>
           <a:p>
             <a:pPr lvl="2"/>
             <a:r>
-              <a:rPr lang="en-US" smtClean="0"/>
+              <a:rPr lang="en-US"/>
               <a:t>Third level</a:t>
             </a:r>
           </a:p>
           <a:p>
             <a:pPr lvl="3"/>
             <a:r>
-              <a:rPr lang="en-US" smtClean="0"/>
+              <a:rPr lang="en-US"/>
               <a:t>Fourth level</a:t>
             </a:r>
           </a:p>
           <a:p>
             <a:pPr lvl="4"/>
             <a:r>
-              <a:rPr lang="en-US" smtClean="0"/>
+              <a:rPr lang="en-US"/>
               <a:t>Fifth level</a:t>
             </a:r>
-            <a:endParaRPr lang="en-US"/>
           </a:p>
         </p:txBody>
       </p:sp>
@@ -1604,7 +1595,7 @@
           <a:p>
             <a:fld id="{ED22BB23-F442-40A7-A37A-0DE665FB7F05}" type="datetimeFigureOut">
               <a:rPr lang="en-US" smtClean="0"/>
-              <a:t>10/3/2026</a:t>
+              <a:t>10/4/2026</a:t>
             </a:fld>
             <a:endParaRPr lang="en-US"/>
           </a:p>
@@ -1698,10 +1689,9 @@
           <a:lstStyle/>
           <a:p>
             <a:r>
-              <a:rPr lang="en-US" smtClean="0"/>
+              <a:rPr lang="en-US"/>
               <a:t>Click to edit Master title style</a:t>
             </a:r>
-            <a:endParaRPr lang="en-US"/>
           </a:p>
         </p:txBody>
       </p:sp>
@@ -1722,7 +1712,7 @@
           <a:p>
             <a:fld id="{ED22BB23-F442-40A7-A37A-0DE665FB7F05}" type="datetimeFigureOut">
               <a:rPr lang="en-US" smtClean="0"/>
-              <a:t>10/3/2026</a:t>
+              <a:t>10/4/2026</a:t>
             </a:fld>
             <a:endParaRPr lang="en-US"/>
           </a:p>
@@ -1817,7 +1807,7 @@
           <a:p>
             <a:fld id="{ED22BB23-F442-40A7-A37A-0DE665FB7F05}" type="datetimeFigureOut">
               <a:rPr lang="en-US" smtClean="0"/>
-              <a:t>10/3/2026</a:t>
+              <a:t>10/4/2026</a:t>
             </a:fld>
             <a:endParaRPr lang="en-US"/>
           </a:p>
@@ -1920,10 +1910,9 @@
           </a:lstStyle>
           <a:p>
             <a:r>
-              <a:rPr lang="en-US" smtClean="0"/>
+              <a:rPr lang="en-US"/>
               <a:t>Click to edit Master title style</a:t>
             </a:r>
-            <a:endParaRPr lang="en-US"/>
           </a:p>
         </p:txBody>
       </p:sp>
@@ -1977,38 +1966,37 @@
           <a:p>
             <a:pPr lvl="0"/>
             <a:r>
-              <a:rPr lang="en-US" smtClean="0"/>
+              <a:rPr lang="en-US"/>
               <a:t>Edit Master text styles</a:t>
             </a:r>
           </a:p>
           <a:p>
             <a:pPr lvl="1"/>
             <a:r>
-              <a:rPr lang="en-US" smtClean="0"/>
+              <a:rPr lang="en-US"/>
               <a:t>Second level</a:t>
             </a:r>
           </a:p>
           <a:p>
             <a:pPr lvl="2"/>
             <a:r>
-              <a:rPr lang="en-US" smtClean="0"/>
+              <a:rPr lang="en-US"/>
               <a:t>Third level</a:t>
             </a:r>
           </a:p>
           <a:p>
             <a:pPr lvl="3"/>
             <a:r>
-              <a:rPr lang="en-US" smtClean="0"/>
+              <a:rPr lang="en-US"/>
               <a:t>Fourth level</a:t>
             </a:r>
           </a:p>
           <a:p>
             <a:pPr lvl="4"/>
             <a:r>
-              <a:rPr lang="en-US" smtClean="0"/>
+              <a:rPr lang="en-US"/>
               <a:t>Fifth level</a:t>
             </a:r>
-            <a:endParaRPr lang="en-US"/>
           </a:p>
         </p:txBody>
       </p:sp>
@@ -2071,7 +2059,7 @@
           <a:p>
             <a:pPr lvl="0"/>
             <a:r>
-              <a:rPr lang="en-US" smtClean="0"/>
+              <a:rPr lang="en-US"/>
               <a:t>Edit Master text styles</a:t>
             </a:r>
           </a:p>
@@ -2094,7 +2082,7 @@
           <a:p>
             <a:fld id="{ED22BB23-F442-40A7-A37A-0DE665FB7F05}" type="datetimeFigureOut">
               <a:rPr lang="en-US" smtClean="0"/>
-              <a:t>10/3/2026</a:t>
+              <a:t>10/4/2026</a:t>
             </a:fld>
             <a:endParaRPr lang="en-US"/>
           </a:p>
@@ -2197,10 +2185,9 @@
           </a:lstStyle>
           <a:p>
             <a:r>
-              <a:rPr lang="en-US" smtClean="0"/>
+              <a:rPr lang="en-US"/>
               <a:t>Click to edit Master title style</a:t>
             </a:r>
-            <a:endParaRPr lang="en-US"/>
           </a:p>
         </p:txBody>
       </p:sp>
@@ -2324,7 +2311,7 @@
           <a:p>
             <a:pPr lvl="0"/>
             <a:r>
-              <a:rPr lang="en-US" smtClean="0"/>
+              <a:rPr lang="en-US"/>
               <a:t>Edit Master text styles</a:t>
             </a:r>
           </a:p>
@@ -2347,7 +2334,7 @@
           <a:p>
             <a:fld id="{ED22BB23-F442-40A7-A37A-0DE665FB7F05}" type="datetimeFigureOut">
               <a:rPr lang="en-US" smtClean="0"/>
-              <a:t>10/3/2026</a:t>
+              <a:t>10/4/2026</a:t>
             </a:fld>
             <a:endParaRPr lang="en-US"/>
           </a:p>
@@ -2456,10 +2443,9 @@
           <a:lstStyle/>
           <a:p>
             <a:r>
-              <a:rPr lang="en-US" smtClean="0"/>
+              <a:rPr lang="en-US"/>
               <a:t>Click to edit Master title style</a:t>
             </a:r>
-            <a:endParaRPr lang="en-US"/>
           </a:p>
         </p:txBody>
       </p:sp>
@@ -2490,38 +2476,37 @@
           <a:p>
             <a:pPr lvl="0"/>
             <a:r>
-              <a:rPr lang="en-US" smtClean="0"/>
+              <a:rPr lang="en-US"/>
               <a:t>Edit Master text styles</a:t>
             </a:r>
           </a:p>
           <a:p>
             <a:pPr lvl="1"/>
             <a:r>
-              <a:rPr lang="en-US" smtClean="0"/>
+              <a:rPr lang="en-US"/>
               <a:t>Second level</a:t>
             </a:r>
           </a:p>
           <a:p>
             <a:pPr lvl="2"/>
             <a:r>
-              <a:rPr lang="en-US" smtClean="0"/>
+              <a:rPr lang="en-US"/>
               <a:t>Third level</a:t>
             </a:r>
           </a:p>
           <a:p>
             <a:pPr lvl="3"/>
             <a:r>
-              <a:rPr lang="en-US" smtClean="0"/>
+              <a:rPr lang="en-US"/>
               <a:t>Fourth level</a:t>
             </a:r>
           </a:p>
           <a:p>
             <a:pPr lvl="4"/>
             <a:r>
-              <a:rPr lang="en-US" smtClean="0"/>
+              <a:rPr lang="en-US"/>
               <a:t>Fifth level</a:t>
             </a:r>
-            <a:endParaRPr lang="en-US"/>
           </a:p>
         </p:txBody>
       </p:sp>
@@ -2560,7 +2545,7 @@
           <a:p>
             <a:fld id="{ED22BB23-F442-40A7-A37A-0DE665FB7F05}" type="datetimeFigureOut">
               <a:rPr lang="en-US" smtClean="0"/>
-              <a:t>10/3/2026</a:t>
+              <a:t>10/4/2026</a:t>
             </a:fld>
             <a:endParaRPr lang="en-US"/>
           </a:p>
@@ -3327,8 +3312,8 @@
             </p:style>
           </p:cxnSp>
         </p:grpSp>
-        <mc:AlternateContent xmlns:mc="http://schemas.openxmlformats.org/markup-compatibility/2006">
-          <mc:Choice xmlns:a14="http://schemas.microsoft.com/office/drawing/2010/main" Requires="a14">
+        <mc:AlternateContent xmlns:mc="http://schemas.openxmlformats.org/markup-compatibility/2006" xmlns:a14="http://schemas.microsoft.com/office/drawing/2010/main">
+          <mc:Choice Requires="a14">
             <p:sp>
               <p:nvSpPr>
                 <p:cNvPr id="17" name="TextBox 16"/>
@@ -3351,12 +3336,10 @@
                 </a:bodyPr>
                 <a:lstStyle/>
                 <a:p>
+                  <a:pPr/>
                   <a14:m>
                     <m:oMathPara xmlns:m="http://schemas.openxmlformats.org/officeDocument/2006/math">
-                      <m:oMathParaPr>
-                        <m:jc m:val="centerGroup"/>
-                      </m:oMathParaPr>
-                      <m:oMath xmlns:m="http://schemas.openxmlformats.org/officeDocument/2006/math">
+                      <m:oMath>
                         <m:r>
                           <a:rPr lang="en-US" sz="2400" b="0" i="1" smtClean="0">
                             <a:latin typeface="Cambria Math" panose="02040503050406030204" pitchFamily="18" charset="0"/>
@@ -3371,7 +3354,7 @@
               </p:txBody>
             </p:sp>
           </mc:Choice>
-          <mc:Fallback>
+          <mc:Fallback xmlns="">
             <p:sp>
               <p:nvSpPr>
                 <p:cNvPr id="17" name="TextBox 16"/>
@@ -3410,8 +3393,8 @@
             </p:sp>
           </mc:Fallback>
         </mc:AlternateContent>
-        <mc:AlternateContent xmlns:mc="http://schemas.openxmlformats.org/markup-compatibility/2006">
-          <mc:Choice xmlns:a14="http://schemas.microsoft.com/office/drawing/2010/main" Requires="a14">
+        <mc:AlternateContent xmlns:mc="http://schemas.openxmlformats.org/markup-compatibility/2006" xmlns:a14="http://schemas.microsoft.com/office/drawing/2010/main">
+          <mc:Choice Requires="a14">
             <p:sp>
               <p:nvSpPr>
                 <p:cNvPr id="19" name="TextBox 18"/>
@@ -3434,12 +3417,10 @@
                 </a:bodyPr>
                 <a:lstStyle/>
                 <a:p>
+                  <a:pPr/>
                   <a14:m>
                     <m:oMathPara xmlns:m="http://schemas.openxmlformats.org/officeDocument/2006/math">
-                      <m:oMathParaPr>
-                        <m:jc m:val="centerGroup"/>
-                      </m:oMathParaPr>
-                      <m:oMath xmlns:m="http://schemas.openxmlformats.org/officeDocument/2006/math">
+                      <m:oMath>
                         <m:r>
                           <a:rPr lang="en-US" sz="2400" b="0" i="1" smtClean="0">
                             <a:latin typeface="Cambria Math" panose="02040503050406030204" pitchFamily="18" charset="0"/>
@@ -3454,7 +3435,7 @@
               </p:txBody>
             </p:sp>
           </mc:Choice>
-          <mc:Fallback>
+          <mc:Fallback xmlns="">
             <p:sp>
               <p:nvSpPr>
                 <p:cNvPr id="19" name="TextBox 18"/>
@@ -3493,8 +3474,8 @@
             </p:sp>
           </mc:Fallback>
         </mc:AlternateContent>
-        <mc:AlternateContent xmlns:mc="http://schemas.openxmlformats.org/markup-compatibility/2006">
-          <mc:Choice xmlns:a14="http://schemas.microsoft.com/office/drawing/2010/main" Requires="a14">
+        <mc:AlternateContent xmlns:mc="http://schemas.openxmlformats.org/markup-compatibility/2006" xmlns:a14="http://schemas.microsoft.com/office/drawing/2010/main">
+          <mc:Choice Requires="a14">
             <p:sp>
               <p:nvSpPr>
                 <p:cNvPr id="22" name="TextBox 21"/>
@@ -3517,12 +3498,10 @@
                 </a:bodyPr>
                 <a:lstStyle/>
                 <a:p>
+                  <a:pPr/>
                   <a14:m>
                     <m:oMathPara xmlns:m="http://schemas.openxmlformats.org/officeDocument/2006/math">
-                      <m:oMathParaPr>
-                        <m:jc m:val="centerGroup"/>
-                      </m:oMathParaPr>
-                      <m:oMath xmlns:m="http://schemas.openxmlformats.org/officeDocument/2006/math">
+                      <m:oMath>
                         <m:r>
                           <a:rPr lang="en-US" sz="2400" b="0" i="1" smtClean="0">
                             <a:solidFill>
@@ -3544,7 +3523,7 @@
               </p:txBody>
             </p:sp>
           </mc:Choice>
-          <mc:Fallback>
+          <mc:Fallback xmlns="">
             <p:sp>
               <p:nvSpPr>
                 <p:cNvPr id="22" name="TextBox 21"/>
@@ -3583,8 +3562,8 @@
             </p:sp>
           </mc:Fallback>
         </mc:AlternateContent>
-        <mc:AlternateContent xmlns:mc="http://schemas.openxmlformats.org/markup-compatibility/2006">
-          <mc:Choice xmlns:a14="http://schemas.microsoft.com/office/drawing/2010/main" Requires="a14">
+        <mc:AlternateContent xmlns:mc="http://schemas.openxmlformats.org/markup-compatibility/2006" xmlns:a14="http://schemas.microsoft.com/office/drawing/2010/main">
+          <mc:Choice Requires="a14">
             <p:sp>
               <p:nvSpPr>
                 <p:cNvPr id="23" name="TextBox 22"/>
@@ -3607,12 +3586,10 @@
                 </a:bodyPr>
                 <a:lstStyle/>
                 <a:p>
+                  <a:pPr/>
                   <a14:m>
                     <m:oMathPara xmlns:m="http://schemas.openxmlformats.org/officeDocument/2006/math">
-                      <m:oMathParaPr>
-                        <m:jc m:val="centerGroup"/>
-                      </m:oMathParaPr>
-                      <m:oMath xmlns:m="http://schemas.openxmlformats.org/officeDocument/2006/math">
+                      <m:oMath>
                         <m:r>
                           <a:rPr lang="en-US" sz="2400" b="0" i="1" smtClean="0">
                             <a:solidFill>
@@ -3634,7 +3611,7 @@
               </p:txBody>
             </p:sp>
           </mc:Choice>
-          <mc:Fallback>
+          <mc:Fallback xmlns="">
             <p:sp>
               <p:nvSpPr>
                 <p:cNvPr id="23" name="TextBox 22"/>
@@ -3854,8 +3831,8 @@
             </p:style>
           </p:cxnSp>
         </p:grpSp>
-        <mc:AlternateContent xmlns:mc="http://schemas.openxmlformats.org/markup-compatibility/2006">
-          <mc:Choice xmlns:a14="http://schemas.microsoft.com/office/drawing/2010/main" Requires="a14">
+        <mc:AlternateContent xmlns:mc="http://schemas.openxmlformats.org/markup-compatibility/2006" xmlns:a14="http://schemas.microsoft.com/office/drawing/2010/main">
+          <mc:Choice Requires="a14">
             <p:sp>
               <p:nvSpPr>
                 <p:cNvPr id="18" name="TextBox 17"/>
@@ -3878,12 +3855,10 @@
                 </a:bodyPr>
                 <a:lstStyle/>
                 <a:p>
+                  <a:pPr/>
                   <a14:m>
                     <m:oMathPara xmlns:m="http://schemas.openxmlformats.org/officeDocument/2006/math">
-                      <m:oMathParaPr>
-                        <m:jc m:val="centerGroup"/>
-                      </m:oMathParaPr>
-                      <m:oMath xmlns:m="http://schemas.openxmlformats.org/officeDocument/2006/math">
+                      <m:oMath>
                         <m:r>
                           <a:rPr lang="en-US" sz="2400" b="0" i="1" smtClean="0">
                             <a:solidFill>
@@ -3920,7 +3895,7 @@
               </p:txBody>
             </p:sp>
           </mc:Choice>
-          <mc:Fallback>
+          <mc:Fallback xmlns="">
             <p:sp>
               <p:nvSpPr>
                 <p:cNvPr id="18" name="TextBox 17"/>
@@ -3959,8 +3934,8 @@
             </p:sp>
           </mc:Fallback>
         </mc:AlternateContent>
-        <mc:AlternateContent xmlns:mc="http://schemas.openxmlformats.org/markup-compatibility/2006">
-          <mc:Choice xmlns:a14="http://schemas.microsoft.com/office/drawing/2010/main" Requires="a14">
+        <mc:AlternateContent xmlns:mc="http://schemas.openxmlformats.org/markup-compatibility/2006" xmlns:a14="http://schemas.microsoft.com/office/drawing/2010/main">
+          <mc:Choice Requires="a14">
             <p:sp>
               <p:nvSpPr>
                 <p:cNvPr id="20" name="TextBox 19"/>
@@ -3983,12 +3958,10 @@
                 </a:bodyPr>
                 <a:lstStyle/>
                 <a:p>
+                  <a:pPr/>
                   <a14:m>
                     <m:oMathPara xmlns:m="http://schemas.openxmlformats.org/officeDocument/2006/math">
-                      <m:oMathParaPr>
-                        <m:jc m:val="centerGroup"/>
-                      </m:oMathParaPr>
-                      <m:oMath xmlns:m="http://schemas.openxmlformats.org/officeDocument/2006/math">
+                      <m:oMath>
                         <m:r>
                           <a:rPr lang="en-US" sz="2400" b="0" i="1" smtClean="0">
                             <a:solidFill>
@@ -4019,7 +3992,7 @@
               </p:txBody>
             </p:sp>
           </mc:Choice>
-          <mc:Fallback>
+          <mc:Fallback xmlns="">
             <p:sp>
               <p:nvSpPr>
                 <p:cNvPr id="20" name="TextBox 19"/>
@@ -4058,8 +4031,8 @@
             </p:sp>
           </mc:Fallback>
         </mc:AlternateContent>
-        <mc:AlternateContent xmlns:mc="http://schemas.openxmlformats.org/markup-compatibility/2006">
-          <mc:Choice xmlns:a14="http://schemas.microsoft.com/office/drawing/2010/main" Requires="a14">
+        <mc:AlternateContent xmlns:mc="http://schemas.openxmlformats.org/markup-compatibility/2006" xmlns:a14="http://schemas.microsoft.com/office/drawing/2010/main">
+          <mc:Choice Requires="a14">
             <p:sp>
               <p:nvSpPr>
                 <p:cNvPr id="21" name="TextBox 20"/>
@@ -4082,12 +4055,10 @@
                 </a:bodyPr>
                 <a:lstStyle/>
                 <a:p>
+                  <a:pPr/>
                   <a14:m>
                     <m:oMathPara xmlns:m="http://schemas.openxmlformats.org/officeDocument/2006/math">
-                      <m:oMathParaPr>
-                        <m:jc m:val="centerGroup"/>
-                      </m:oMathParaPr>
-                      <m:oMath xmlns:m="http://schemas.openxmlformats.org/officeDocument/2006/math">
+                      <m:oMath>
                         <m:r>
                           <a:rPr lang="en-US" sz="2400" b="0" i="1" smtClean="0">
                             <a:solidFill>
@@ -4118,7 +4089,7 @@
               </p:txBody>
             </p:sp>
           </mc:Choice>
-          <mc:Fallback>
+          <mc:Fallback xmlns="">
             <p:sp>
               <p:nvSpPr>
                 <p:cNvPr id="21" name="TextBox 20"/>
@@ -4157,8 +4128,8 @@
             </p:sp>
           </mc:Fallback>
         </mc:AlternateContent>
-        <mc:AlternateContent xmlns:mc="http://schemas.openxmlformats.org/markup-compatibility/2006">
-          <mc:Choice xmlns:a14="http://schemas.microsoft.com/office/drawing/2010/main" Requires="a14">
+        <mc:AlternateContent xmlns:mc="http://schemas.openxmlformats.org/markup-compatibility/2006" xmlns:a14="http://schemas.microsoft.com/office/drawing/2010/main">
+          <mc:Choice Requires="a14">
             <p:sp>
               <p:nvSpPr>
                 <p:cNvPr id="24" name="TextBox 23"/>
@@ -4181,12 +4152,10 @@
                 </a:bodyPr>
                 <a:lstStyle/>
                 <a:p>
+                  <a:pPr/>
                   <a14:m>
                     <m:oMathPara xmlns:m="http://schemas.openxmlformats.org/officeDocument/2006/math">
-                      <m:oMathParaPr>
-                        <m:jc m:val="centerGroup"/>
-                      </m:oMathParaPr>
-                      <m:oMath xmlns:m="http://schemas.openxmlformats.org/officeDocument/2006/math">
+                      <m:oMath>
                         <m:r>
                           <a:rPr lang="en-US" sz="2400" b="0" i="1" smtClean="0">
                             <a:solidFill>
@@ -4223,7 +4192,7 @@
               </p:txBody>
             </p:sp>
           </mc:Choice>
-          <mc:Fallback>
+          <mc:Fallback xmlns="">
             <p:sp>
               <p:nvSpPr>
                 <p:cNvPr id="24" name="TextBox 23"/>
@@ -4262,8 +4231,8 @@
             </p:sp>
           </mc:Fallback>
         </mc:AlternateContent>
-        <mc:AlternateContent xmlns:mc="http://schemas.openxmlformats.org/markup-compatibility/2006">
-          <mc:Choice xmlns:a14="http://schemas.microsoft.com/office/drawing/2010/main" Requires="a14">
+        <mc:AlternateContent xmlns:mc="http://schemas.openxmlformats.org/markup-compatibility/2006" xmlns:a14="http://schemas.microsoft.com/office/drawing/2010/main">
+          <mc:Choice Requires="a14">
             <p:sp>
               <p:nvSpPr>
                 <p:cNvPr id="25" name="TextBox 24"/>
@@ -4286,12 +4255,10 @@
                 </a:bodyPr>
                 <a:lstStyle/>
                 <a:p>
+                  <a:pPr/>
                   <a14:m>
                     <m:oMathPara xmlns:m="http://schemas.openxmlformats.org/officeDocument/2006/math">
-                      <m:oMathParaPr>
-                        <m:jc m:val="centerGroup"/>
-                      </m:oMathParaPr>
-                      <m:oMath xmlns:m="http://schemas.openxmlformats.org/officeDocument/2006/math">
+                      <m:oMath>
                         <m:r>
                           <a:rPr lang="en-US" sz="2400" b="0" i="1" smtClean="0">
                             <a:solidFill>
@@ -4313,7 +4280,7 @@
               </p:txBody>
             </p:sp>
           </mc:Choice>
-          <mc:Fallback>
+          <mc:Fallback xmlns="">
             <p:sp>
               <p:nvSpPr>
                 <p:cNvPr id="25" name="TextBox 24"/>
@@ -4399,8 +4366,8 @@
           </a:p>
         </p:txBody>
       </p:sp>
-      <mc:AlternateContent xmlns:mc="http://schemas.openxmlformats.org/markup-compatibility/2006">
-        <mc:Choice xmlns:a14="http://schemas.microsoft.com/office/drawing/2010/main" Requires="a14">
+      <mc:AlternateContent xmlns:mc="http://schemas.openxmlformats.org/markup-compatibility/2006" xmlns:a14="http://schemas.microsoft.com/office/drawing/2010/main">
+        <mc:Choice Requires="a14">
           <p:sp>
             <p:nvSpPr>
               <p:cNvPr id="42" name="TextBox 41"/>
@@ -4423,12 +4390,10 @@
               </a:bodyPr>
               <a:lstStyle/>
               <a:p>
+                <a:pPr/>
                 <a14:m>
                   <m:oMathPara xmlns:m="http://schemas.openxmlformats.org/officeDocument/2006/math">
-                    <m:oMathParaPr>
-                      <m:jc m:val="centerGroup"/>
-                    </m:oMathParaPr>
-                    <m:oMath xmlns:m="http://schemas.openxmlformats.org/officeDocument/2006/math">
+                    <m:oMath>
                       <m:r>
                         <a:rPr lang="en-US" sz="2400" b="0" i="1" smtClean="0">
                           <a:latin typeface="Cambria Math" panose="02040503050406030204" pitchFamily="18" charset="0"/>
@@ -4443,7 +4408,7 @@
             </p:txBody>
           </p:sp>
         </mc:Choice>
-        <mc:Fallback>
+        <mc:Fallback xmlns="">
           <p:sp>
             <p:nvSpPr>
               <p:cNvPr id="42" name="TextBox 41"/>
@@ -4482,8 +4447,8 @@
           </p:sp>
         </mc:Fallback>
       </mc:AlternateContent>
-      <mc:AlternateContent xmlns:mc="http://schemas.openxmlformats.org/markup-compatibility/2006">
-        <mc:Choice xmlns:a14="http://schemas.microsoft.com/office/drawing/2010/main" Requires="a14">
+      <mc:AlternateContent xmlns:mc="http://schemas.openxmlformats.org/markup-compatibility/2006" xmlns:a14="http://schemas.microsoft.com/office/drawing/2010/main">
+        <mc:Choice Requires="a14">
           <p:sp>
             <p:nvSpPr>
               <p:cNvPr id="43" name="TextBox 42"/>
@@ -4506,17 +4471,15 @@
               </a:bodyPr>
               <a:lstStyle/>
               <a:p>
+                <a:pPr/>
                 <a14:m>
                   <m:oMathPara xmlns:m="http://schemas.openxmlformats.org/officeDocument/2006/math">
-                    <m:oMathParaPr>
-                      <m:jc m:val="centerGroup"/>
-                    </m:oMathParaPr>
-                    <m:oMath xmlns:m="http://schemas.openxmlformats.org/officeDocument/2006/math">
+                    <m:oMath>
                       <m:acc>
                         <m:accPr>
                           <m:chr m:val="̅"/>
                           <m:ctrlPr>
-                            <a:rPr lang="en-US" sz="2400" i="1" smtClean="0">
+                            <a:rPr lang="en-US" sz="2400" b="1" i="1" smtClean="0">
                               <a:latin typeface="Cambria Math" panose="02040503050406030204" pitchFamily="18" charset="0"/>
                             </a:rPr>
                           </m:ctrlPr>
@@ -4538,7 +4501,7 @@
             </p:txBody>
           </p:sp>
         </mc:Choice>
-        <mc:Fallback>
+        <mc:Fallback xmlns="">
           <p:sp>
             <p:nvSpPr>
               <p:cNvPr id="43" name="TextBox 42"/>
@@ -4577,8 +4540,8 @@
           </p:sp>
         </mc:Fallback>
       </mc:AlternateContent>
-      <mc:AlternateContent xmlns:mc="http://schemas.openxmlformats.org/markup-compatibility/2006">
-        <mc:Choice xmlns:a14="http://schemas.microsoft.com/office/drawing/2010/main" Requires="a14">
+      <mc:AlternateContent xmlns:mc="http://schemas.openxmlformats.org/markup-compatibility/2006" xmlns:a14="http://schemas.microsoft.com/office/drawing/2010/main">
+        <mc:Choice Requires="a14">
           <p:sp>
             <p:nvSpPr>
               <p:cNvPr id="44" name="TextBox 43"/>
@@ -4601,17 +4564,15 @@
               </a:bodyPr>
               <a:lstStyle/>
               <a:p>
+                <a:pPr/>
                 <a14:m>
                   <m:oMathPara xmlns:m="http://schemas.openxmlformats.org/officeDocument/2006/math">
-                    <m:oMathParaPr>
-                      <m:jc m:val="centerGroup"/>
-                    </m:oMathParaPr>
-                    <m:oMath xmlns:m="http://schemas.openxmlformats.org/officeDocument/2006/math">
+                    <m:oMath>
                       <m:acc>
                         <m:accPr>
                           <m:chr m:val="̅"/>
                           <m:ctrlPr>
-                            <a:rPr lang="en-US" sz="2400" i="1" smtClean="0">
+                            <a:rPr lang="en-US" sz="2400" b="1" i="1" smtClean="0">
                               <a:latin typeface="Cambria Math" panose="02040503050406030204" pitchFamily="18" charset="0"/>
                             </a:rPr>
                           </m:ctrlPr>
@@ -4639,7 +4600,7 @@
             </p:txBody>
           </p:sp>
         </mc:Choice>
-        <mc:Fallback>
+        <mc:Fallback xmlns="">
           <p:sp>
             <p:nvSpPr>
               <p:cNvPr id="44" name="TextBox 43"/>
@@ -4756,8 +4717,8 @@
           </a:fontRef>
         </p:style>
       </p:cxnSp>
-      <mc:AlternateContent xmlns:mc="http://schemas.openxmlformats.org/markup-compatibility/2006">
-        <mc:Choice xmlns:a14="http://schemas.microsoft.com/office/drawing/2010/main" Requires="a14">
+      <mc:AlternateContent xmlns:mc="http://schemas.openxmlformats.org/markup-compatibility/2006" xmlns:a14="http://schemas.microsoft.com/office/drawing/2010/main">
+        <mc:Choice Requires="a14">
           <p:sp>
             <p:nvSpPr>
               <p:cNvPr id="60" name="TextBox 59"/>
@@ -4782,12 +4743,10 @@
               </a:bodyPr>
               <a:lstStyle/>
               <a:p>
+                <a:pPr/>
                 <a14:m>
                   <m:oMathPara xmlns:m="http://schemas.openxmlformats.org/officeDocument/2006/math">
-                    <m:oMathParaPr>
-                      <m:jc m:val="centerGroup"/>
-                    </m:oMathParaPr>
-                    <m:oMath xmlns:m="http://schemas.openxmlformats.org/officeDocument/2006/math">
+                    <m:oMath>
                       <m:r>
                         <a:rPr lang="en-US" sz="2400" b="0" i="1" smtClean="0">
                           <a:solidFill>
@@ -4818,7 +4777,7 @@
             </p:txBody>
           </p:sp>
         </mc:Choice>
-        <mc:Fallback>
+        <mc:Fallback xmlns="">
           <p:sp>
             <p:nvSpPr>
               <p:cNvPr id="60" name="TextBox 59"/>
@@ -4857,8 +4816,8 @@
           </p:sp>
         </mc:Fallback>
       </mc:AlternateContent>
-      <mc:AlternateContent xmlns:mc="http://schemas.openxmlformats.org/markup-compatibility/2006">
-        <mc:Choice xmlns:a14="http://schemas.microsoft.com/office/drawing/2010/main" Requires="a14">
+      <mc:AlternateContent xmlns:mc="http://schemas.openxmlformats.org/markup-compatibility/2006" xmlns:a14="http://schemas.microsoft.com/office/drawing/2010/main">
+        <mc:Choice Requires="a14">
           <p:sp>
             <p:nvSpPr>
               <p:cNvPr id="61" name="TextBox 60"/>
@@ -4883,12 +4842,10 @@
               </a:bodyPr>
               <a:lstStyle/>
               <a:p>
+                <a:pPr/>
                 <a14:m>
                   <m:oMathPara xmlns:m="http://schemas.openxmlformats.org/officeDocument/2006/math">
-                    <m:oMathParaPr>
-                      <m:jc m:val="centerGroup"/>
-                    </m:oMathParaPr>
-                    <m:oMath xmlns:m="http://schemas.openxmlformats.org/officeDocument/2006/math">
+                    <m:oMath>
                       <m:r>
                         <a:rPr lang="en-US" sz="2400" b="0" i="1" smtClean="0">
                           <a:solidFill>
@@ -4906,7 +4863,7 @@
             </p:txBody>
           </p:sp>
         </mc:Choice>
-        <mc:Fallback>
+        <mc:Fallback xmlns="">
           <p:sp>
             <p:nvSpPr>
               <p:cNvPr id="61" name="TextBox 60"/>
@@ -4945,8 +4902,8 @@
           </p:sp>
         </mc:Fallback>
       </mc:AlternateContent>
-      <mc:AlternateContent xmlns:mc="http://schemas.openxmlformats.org/markup-compatibility/2006">
-        <mc:Choice xmlns:a14="http://schemas.microsoft.com/office/drawing/2010/main" Requires="a14">
+      <mc:AlternateContent xmlns:mc="http://schemas.openxmlformats.org/markup-compatibility/2006" xmlns:a14="http://schemas.microsoft.com/office/drawing/2010/main">
+        <mc:Choice Requires="a14">
           <p:sp>
             <p:nvSpPr>
               <p:cNvPr id="62" name="TextBox 61"/>
@@ -4971,12 +4928,10 @@
               </a:bodyPr>
               <a:lstStyle/>
               <a:p>
+                <a:pPr/>
                 <a14:m>
                   <m:oMathPara xmlns:m="http://schemas.openxmlformats.org/officeDocument/2006/math">
-                    <m:oMathParaPr>
-                      <m:jc m:val="centerGroup"/>
-                    </m:oMathParaPr>
-                    <m:oMath xmlns:m="http://schemas.openxmlformats.org/officeDocument/2006/math">
+                    <m:oMath>
                       <m:r>
                         <a:rPr lang="en-US" sz="2400" b="0" i="1" smtClean="0">
                           <a:solidFill>
@@ -5002,7 +4957,7 @@
             </p:txBody>
           </p:sp>
         </mc:Choice>
-        <mc:Fallback>
+        <mc:Fallback xmlns="">
           <p:sp>
             <p:nvSpPr>
               <p:cNvPr id="62" name="TextBox 61"/>
@@ -5041,8 +4996,8 @@
           </p:sp>
         </mc:Fallback>
       </mc:AlternateContent>
-      <mc:AlternateContent xmlns:mc="http://schemas.openxmlformats.org/markup-compatibility/2006">
-        <mc:Choice xmlns:a14="http://schemas.microsoft.com/office/drawing/2010/main" Requires="a14">
+      <mc:AlternateContent xmlns:mc="http://schemas.openxmlformats.org/markup-compatibility/2006" xmlns:a14="http://schemas.microsoft.com/office/drawing/2010/main">
+        <mc:Choice Requires="a14">
           <p:sp>
             <p:nvSpPr>
               <p:cNvPr id="63" name="TextBox 62"/>
@@ -5065,12 +5020,10 @@
               </a:bodyPr>
               <a:lstStyle/>
               <a:p>
+                <a:pPr/>
                 <a14:m>
                   <m:oMathPara xmlns:m="http://schemas.openxmlformats.org/officeDocument/2006/math">
-                    <m:oMathParaPr>
-                      <m:jc m:val="centerGroup"/>
-                    </m:oMathParaPr>
-                    <m:oMath xmlns:m="http://schemas.openxmlformats.org/officeDocument/2006/math">
+                    <m:oMath>
                       <m:r>
                         <m:rPr>
                           <m:sty m:val="p"/>
@@ -5088,7 +5041,7 @@
             </p:txBody>
           </p:sp>
         </mc:Choice>
-        <mc:Fallback>
+        <mc:Fallback xmlns="">
           <p:sp>
             <p:nvSpPr>
               <p:cNvPr id="63" name="TextBox 62"/>
@@ -5127,8 +5080,8 @@
           </p:sp>
         </mc:Fallback>
       </mc:AlternateContent>
-      <mc:AlternateContent xmlns:mc="http://schemas.openxmlformats.org/markup-compatibility/2006">
-        <mc:Choice xmlns:a14="http://schemas.microsoft.com/office/drawing/2010/main" Requires="a14">
+      <mc:AlternateContent xmlns:mc="http://schemas.openxmlformats.org/markup-compatibility/2006" xmlns:a14="http://schemas.microsoft.com/office/drawing/2010/main">
+        <mc:Choice Requires="a14">
           <p:sp>
             <p:nvSpPr>
               <p:cNvPr id="64" name="TextBox 63"/>
@@ -5151,12 +5104,10 @@
               </a:bodyPr>
               <a:lstStyle/>
               <a:p>
+                <a:pPr/>
                 <a14:m>
                   <m:oMathPara xmlns:m="http://schemas.openxmlformats.org/officeDocument/2006/math">
-                    <m:oMathParaPr>
-                      <m:jc m:val="centerGroup"/>
-                    </m:oMathParaPr>
-                    <m:oMath xmlns:m="http://schemas.openxmlformats.org/officeDocument/2006/math">
+                    <m:oMath>
                       <m:r>
                         <m:rPr>
                           <m:sty m:val="p"/>
@@ -5190,7 +5141,7 @@
             </p:txBody>
           </p:sp>
         </mc:Choice>
-        <mc:Fallback>
+        <mc:Fallback xmlns="">
           <p:sp>
             <p:nvSpPr>
               <p:cNvPr id="64" name="TextBox 63"/>
@@ -5410,8 +5361,8 @@
               </p:style>
             </p:cxnSp>
           </p:grpSp>
-          <mc:AlternateContent xmlns:mc="http://schemas.openxmlformats.org/markup-compatibility/2006">
-            <mc:Choice xmlns:a14="http://schemas.microsoft.com/office/drawing/2010/main" Requires="a14">
+          <mc:AlternateContent xmlns:mc="http://schemas.openxmlformats.org/markup-compatibility/2006" xmlns:a14="http://schemas.microsoft.com/office/drawing/2010/main">
+            <mc:Choice Requires="a14">
               <p:sp>
                 <p:nvSpPr>
                   <p:cNvPr id="17" name="TextBox 16"/>
@@ -5434,12 +5385,10 @@
                   </a:bodyPr>
                   <a:lstStyle/>
                   <a:p>
+                    <a:pPr/>
                     <a14:m>
                       <m:oMathPara xmlns:m="http://schemas.openxmlformats.org/officeDocument/2006/math">
-                        <m:oMathParaPr>
-                          <m:jc m:val="centerGroup"/>
-                        </m:oMathParaPr>
-                        <m:oMath xmlns:m="http://schemas.openxmlformats.org/officeDocument/2006/math">
+                        <m:oMath>
                           <m:r>
                             <a:rPr lang="en-US" sz="2400" b="0" i="1" smtClean="0">
                               <a:latin typeface="Cambria Math" panose="02040503050406030204" pitchFamily="18" charset="0"/>
@@ -5454,7 +5403,7 @@
                 </p:txBody>
               </p:sp>
             </mc:Choice>
-            <mc:Fallback>
+            <mc:Fallback xmlns="">
               <p:sp>
                 <p:nvSpPr>
                   <p:cNvPr id="17" name="TextBox 16"/>
@@ -5493,8 +5442,8 @@
               </p:sp>
             </mc:Fallback>
           </mc:AlternateContent>
-          <mc:AlternateContent xmlns:mc="http://schemas.openxmlformats.org/markup-compatibility/2006">
-            <mc:Choice xmlns:a14="http://schemas.microsoft.com/office/drawing/2010/main" Requires="a14">
+          <mc:AlternateContent xmlns:mc="http://schemas.openxmlformats.org/markup-compatibility/2006" xmlns:a14="http://schemas.microsoft.com/office/drawing/2010/main">
+            <mc:Choice Requires="a14">
               <p:sp>
                 <p:nvSpPr>
                   <p:cNvPr id="19" name="TextBox 18"/>
@@ -5517,12 +5466,10 @@
                   </a:bodyPr>
                   <a:lstStyle/>
                   <a:p>
+                    <a:pPr/>
                     <a14:m>
                       <m:oMathPara xmlns:m="http://schemas.openxmlformats.org/officeDocument/2006/math">
-                        <m:oMathParaPr>
-                          <m:jc m:val="centerGroup"/>
-                        </m:oMathParaPr>
-                        <m:oMath xmlns:m="http://schemas.openxmlformats.org/officeDocument/2006/math">
+                        <m:oMath>
                           <m:r>
                             <a:rPr lang="en-US" sz="2400" b="0" i="1" smtClean="0">
                               <a:latin typeface="Cambria Math" panose="02040503050406030204" pitchFamily="18" charset="0"/>
@@ -5537,7 +5484,7 @@
                 </p:txBody>
               </p:sp>
             </mc:Choice>
-            <mc:Fallback>
+            <mc:Fallback xmlns="">
               <p:sp>
                 <p:nvSpPr>
                   <p:cNvPr id="19" name="TextBox 18"/>
@@ -5576,8 +5523,8 @@
               </p:sp>
             </mc:Fallback>
           </mc:AlternateContent>
-          <mc:AlternateContent xmlns:mc="http://schemas.openxmlformats.org/markup-compatibility/2006">
-            <mc:Choice xmlns:a14="http://schemas.microsoft.com/office/drawing/2010/main" Requires="a14">
+          <mc:AlternateContent xmlns:mc="http://schemas.openxmlformats.org/markup-compatibility/2006" xmlns:a14="http://schemas.microsoft.com/office/drawing/2010/main">
+            <mc:Choice Requires="a14">
               <p:sp>
                 <p:nvSpPr>
                   <p:cNvPr id="22" name="TextBox 21"/>
@@ -5600,12 +5547,10 @@
                   </a:bodyPr>
                   <a:lstStyle/>
                   <a:p>
+                    <a:pPr/>
                     <a14:m>
                       <m:oMathPara xmlns:m="http://schemas.openxmlformats.org/officeDocument/2006/math">
-                        <m:oMathParaPr>
-                          <m:jc m:val="centerGroup"/>
-                        </m:oMathParaPr>
-                        <m:oMath xmlns:m="http://schemas.openxmlformats.org/officeDocument/2006/math">
+                        <m:oMath>
                           <m:r>
                             <a:rPr lang="en-US" sz="2400" b="0" i="1" smtClean="0">
                               <a:solidFill>
@@ -5627,7 +5572,7 @@
                 </p:txBody>
               </p:sp>
             </mc:Choice>
-            <mc:Fallback>
+            <mc:Fallback xmlns="">
               <p:sp>
                 <p:nvSpPr>
                   <p:cNvPr id="22" name="TextBox 21"/>
@@ -5666,8 +5611,8 @@
               </p:sp>
             </mc:Fallback>
           </mc:AlternateContent>
-          <mc:AlternateContent xmlns:mc="http://schemas.openxmlformats.org/markup-compatibility/2006">
-            <mc:Choice xmlns:a14="http://schemas.microsoft.com/office/drawing/2010/main" Requires="a14">
+          <mc:AlternateContent xmlns:mc="http://schemas.openxmlformats.org/markup-compatibility/2006" xmlns:a14="http://schemas.microsoft.com/office/drawing/2010/main">
+            <mc:Choice Requires="a14">
               <p:sp>
                 <p:nvSpPr>
                   <p:cNvPr id="23" name="TextBox 22"/>
@@ -5690,12 +5635,10 @@
                   </a:bodyPr>
                   <a:lstStyle/>
                   <a:p>
+                    <a:pPr/>
                     <a14:m>
                       <m:oMathPara xmlns:m="http://schemas.openxmlformats.org/officeDocument/2006/math">
-                        <m:oMathParaPr>
-                          <m:jc m:val="centerGroup"/>
-                        </m:oMathParaPr>
-                        <m:oMath xmlns:m="http://schemas.openxmlformats.org/officeDocument/2006/math">
+                        <m:oMath>
                           <m:r>
                             <a:rPr lang="en-US" sz="2400" b="0" i="1" smtClean="0">
                               <a:solidFill>
@@ -5717,7 +5660,7 @@
                 </p:txBody>
               </p:sp>
             </mc:Choice>
-            <mc:Fallback>
+            <mc:Fallback xmlns="">
               <p:sp>
                 <p:nvSpPr>
                   <p:cNvPr id="23" name="TextBox 22"/>
@@ -5757,8 +5700,8 @@
             </mc:Fallback>
           </mc:AlternateContent>
         </p:grpSp>
-        <mc:AlternateContent xmlns:mc="http://schemas.openxmlformats.org/markup-compatibility/2006">
-          <mc:Choice xmlns:a14="http://schemas.microsoft.com/office/drawing/2010/main" Requires="a14">
+        <mc:AlternateContent xmlns:mc="http://schemas.openxmlformats.org/markup-compatibility/2006" xmlns:a14="http://schemas.microsoft.com/office/drawing/2010/main">
+          <mc:Choice Requires="a14">
             <p:sp>
               <p:nvSpPr>
                 <p:cNvPr id="63" name="TextBox 62"/>
@@ -5781,12 +5724,10 @@
                 </a:bodyPr>
                 <a:lstStyle/>
                 <a:p>
+                  <a:pPr/>
                   <a14:m>
                     <m:oMathPara xmlns:m="http://schemas.openxmlformats.org/officeDocument/2006/math">
-                      <m:oMathParaPr>
-                        <m:jc m:val="centerGroup"/>
-                      </m:oMathParaPr>
-                      <m:oMath xmlns:m="http://schemas.openxmlformats.org/officeDocument/2006/math">
+                      <m:oMath>
                         <m:r>
                           <m:rPr>
                             <m:sty m:val="p"/>
@@ -5804,7 +5745,7 @@
               </p:txBody>
             </p:sp>
           </mc:Choice>
-          <mc:Fallback>
+          <mc:Fallback xmlns="">
             <p:sp>
               <p:nvSpPr>
                 <p:cNvPr id="63" name="TextBox 62"/>
@@ -6038,8 +5979,8 @@
               </p:style>
             </p:cxnSp>
           </p:grpSp>
-          <mc:AlternateContent xmlns:mc="http://schemas.openxmlformats.org/markup-compatibility/2006">
-            <mc:Choice xmlns:a14="http://schemas.microsoft.com/office/drawing/2010/main" Requires="a14">
+          <mc:AlternateContent xmlns:mc="http://schemas.openxmlformats.org/markup-compatibility/2006" xmlns:a14="http://schemas.microsoft.com/office/drawing/2010/main">
+            <mc:Choice Requires="a14">
               <p:sp>
                 <p:nvSpPr>
                   <p:cNvPr id="18" name="TextBox 17"/>
@@ -6062,12 +6003,10 @@
                   </a:bodyPr>
                   <a:lstStyle/>
                   <a:p>
+                    <a:pPr/>
                     <a14:m>
                       <m:oMathPara xmlns:m="http://schemas.openxmlformats.org/officeDocument/2006/math">
-                        <m:oMathParaPr>
-                          <m:jc m:val="centerGroup"/>
-                        </m:oMathParaPr>
-                        <m:oMath xmlns:m="http://schemas.openxmlformats.org/officeDocument/2006/math">
+                        <m:oMath>
                           <m:r>
                             <a:rPr lang="en-US" sz="2400" b="0" i="1" smtClean="0">
                               <a:solidFill>
@@ -6104,7 +6043,7 @@
                 </p:txBody>
               </p:sp>
             </mc:Choice>
-            <mc:Fallback>
+            <mc:Fallback xmlns="">
               <p:sp>
                 <p:nvSpPr>
                   <p:cNvPr id="18" name="TextBox 17"/>
@@ -6143,8 +6082,8 @@
               </p:sp>
             </mc:Fallback>
           </mc:AlternateContent>
-          <mc:AlternateContent xmlns:mc="http://schemas.openxmlformats.org/markup-compatibility/2006">
-            <mc:Choice xmlns:a14="http://schemas.microsoft.com/office/drawing/2010/main" Requires="a14">
+          <mc:AlternateContent xmlns:mc="http://schemas.openxmlformats.org/markup-compatibility/2006" xmlns:a14="http://schemas.microsoft.com/office/drawing/2010/main">
+            <mc:Choice Requires="a14">
               <p:sp>
                 <p:nvSpPr>
                   <p:cNvPr id="20" name="TextBox 19"/>
@@ -6167,12 +6106,10 @@
                   </a:bodyPr>
                   <a:lstStyle/>
                   <a:p>
+                    <a:pPr/>
                     <a14:m>
                       <m:oMathPara xmlns:m="http://schemas.openxmlformats.org/officeDocument/2006/math">
-                        <m:oMathParaPr>
-                          <m:jc m:val="centerGroup"/>
-                        </m:oMathParaPr>
-                        <m:oMath xmlns:m="http://schemas.openxmlformats.org/officeDocument/2006/math">
+                        <m:oMath>
                           <m:r>
                             <a:rPr lang="en-US" sz="2400" b="0" i="1" smtClean="0">
                               <a:solidFill>
@@ -6203,7 +6140,7 @@
                 </p:txBody>
               </p:sp>
             </mc:Choice>
-            <mc:Fallback>
+            <mc:Fallback xmlns="">
               <p:sp>
                 <p:nvSpPr>
                   <p:cNvPr id="20" name="TextBox 19"/>
@@ -6242,8 +6179,8 @@
               </p:sp>
             </mc:Fallback>
           </mc:AlternateContent>
-          <mc:AlternateContent xmlns:mc="http://schemas.openxmlformats.org/markup-compatibility/2006">
-            <mc:Choice xmlns:a14="http://schemas.microsoft.com/office/drawing/2010/main" Requires="a14">
+          <mc:AlternateContent xmlns:mc="http://schemas.openxmlformats.org/markup-compatibility/2006" xmlns:a14="http://schemas.microsoft.com/office/drawing/2010/main">
+            <mc:Choice Requires="a14">
               <p:sp>
                 <p:nvSpPr>
                   <p:cNvPr id="21" name="TextBox 20"/>
@@ -6266,12 +6203,10 @@
                   </a:bodyPr>
                   <a:lstStyle/>
                   <a:p>
+                    <a:pPr/>
                     <a14:m>
                       <m:oMathPara xmlns:m="http://schemas.openxmlformats.org/officeDocument/2006/math">
-                        <m:oMathParaPr>
-                          <m:jc m:val="centerGroup"/>
-                        </m:oMathParaPr>
-                        <m:oMath xmlns:m="http://schemas.openxmlformats.org/officeDocument/2006/math">
+                        <m:oMath>
                           <m:r>
                             <a:rPr lang="en-US" sz="2400" b="0" i="1" smtClean="0">
                               <a:solidFill>
@@ -6302,7 +6237,7 @@
                 </p:txBody>
               </p:sp>
             </mc:Choice>
-            <mc:Fallback>
+            <mc:Fallback xmlns="">
               <p:sp>
                 <p:nvSpPr>
                   <p:cNvPr id="21" name="TextBox 20"/>
@@ -6341,8 +6276,8 @@
               </p:sp>
             </mc:Fallback>
           </mc:AlternateContent>
-          <mc:AlternateContent xmlns:mc="http://schemas.openxmlformats.org/markup-compatibility/2006">
-            <mc:Choice xmlns:a14="http://schemas.microsoft.com/office/drawing/2010/main" Requires="a14">
+          <mc:AlternateContent xmlns:mc="http://schemas.openxmlformats.org/markup-compatibility/2006" xmlns:a14="http://schemas.microsoft.com/office/drawing/2010/main">
+            <mc:Choice Requires="a14">
               <p:sp>
                 <p:nvSpPr>
                   <p:cNvPr id="24" name="TextBox 23"/>
@@ -6365,12 +6300,10 @@
                   </a:bodyPr>
                   <a:lstStyle/>
                   <a:p>
+                    <a:pPr/>
                     <a14:m>
                       <m:oMathPara xmlns:m="http://schemas.openxmlformats.org/officeDocument/2006/math">
-                        <m:oMathParaPr>
-                          <m:jc m:val="centerGroup"/>
-                        </m:oMathParaPr>
-                        <m:oMath xmlns:m="http://schemas.openxmlformats.org/officeDocument/2006/math">
+                        <m:oMath>
                           <m:r>
                             <a:rPr lang="en-US" sz="2400" b="0" i="1" smtClean="0">
                               <a:solidFill>
@@ -6407,7 +6340,7 @@
                 </p:txBody>
               </p:sp>
             </mc:Choice>
-            <mc:Fallback>
+            <mc:Fallback xmlns="">
               <p:sp>
                 <p:nvSpPr>
                   <p:cNvPr id="24" name="TextBox 23"/>
@@ -6446,8 +6379,8 @@
               </p:sp>
             </mc:Fallback>
           </mc:AlternateContent>
-          <mc:AlternateContent xmlns:mc="http://schemas.openxmlformats.org/markup-compatibility/2006">
-            <mc:Choice xmlns:a14="http://schemas.microsoft.com/office/drawing/2010/main" Requires="a14">
+          <mc:AlternateContent xmlns:mc="http://schemas.openxmlformats.org/markup-compatibility/2006" xmlns:a14="http://schemas.microsoft.com/office/drawing/2010/main">
+            <mc:Choice Requires="a14">
               <p:sp>
                 <p:nvSpPr>
                   <p:cNvPr id="25" name="TextBox 24"/>
@@ -6470,12 +6403,10 @@
                   </a:bodyPr>
                   <a:lstStyle/>
                   <a:p>
+                    <a:pPr/>
                     <a14:m>
                       <m:oMathPara xmlns:m="http://schemas.openxmlformats.org/officeDocument/2006/math">
-                        <m:oMathParaPr>
-                          <m:jc m:val="centerGroup"/>
-                        </m:oMathParaPr>
-                        <m:oMath xmlns:m="http://schemas.openxmlformats.org/officeDocument/2006/math">
+                        <m:oMath>
                           <m:r>
                             <a:rPr lang="en-US" sz="2400" b="0" i="1" smtClean="0">
                               <a:solidFill>
@@ -6497,7 +6428,7 @@
                 </p:txBody>
               </p:sp>
             </mc:Choice>
-            <mc:Fallback>
+            <mc:Fallback xmlns="">
               <p:sp>
                 <p:nvSpPr>
                   <p:cNvPr id="25" name="TextBox 24"/>
@@ -6537,8 +6468,8 @@
             </mc:Fallback>
           </mc:AlternateContent>
         </p:grpSp>
-        <mc:AlternateContent xmlns:mc="http://schemas.openxmlformats.org/markup-compatibility/2006">
-          <mc:Choice xmlns:a14="http://schemas.microsoft.com/office/drawing/2010/main" Requires="a14">
+        <mc:AlternateContent xmlns:mc="http://schemas.openxmlformats.org/markup-compatibility/2006" xmlns:a14="http://schemas.microsoft.com/office/drawing/2010/main">
+          <mc:Choice Requires="a14">
             <p:sp>
               <p:nvSpPr>
                 <p:cNvPr id="64" name="TextBox 63"/>
@@ -6561,12 +6492,10 @@
                 </a:bodyPr>
                 <a:lstStyle/>
                 <a:p>
+                  <a:pPr/>
                   <a14:m>
                     <m:oMathPara xmlns:m="http://schemas.openxmlformats.org/officeDocument/2006/math">
-                      <m:oMathParaPr>
-                        <m:jc m:val="centerGroup"/>
-                      </m:oMathParaPr>
-                      <m:oMath xmlns:m="http://schemas.openxmlformats.org/officeDocument/2006/math">
+                      <m:oMath>
                         <m:r>
                           <m:rPr>
                             <m:sty m:val="p"/>
@@ -6600,7 +6529,7 @@
               </p:txBody>
             </p:sp>
           </mc:Choice>
-          <mc:Fallback>
+          <mc:Fallback xmlns="">
             <p:sp>
               <p:nvSpPr>
                 <p:cNvPr id="64" name="TextBox 63"/>
@@ -6691,8 +6620,8 @@
           </a:p>
         </p:txBody>
       </p:sp>
-      <mc:AlternateContent xmlns:mc="http://schemas.openxmlformats.org/markup-compatibility/2006">
-        <mc:Choice xmlns:a14="http://schemas.microsoft.com/office/drawing/2010/main" Requires="a14">
+      <mc:AlternateContent xmlns:mc="http://schemas.openxmlformats.org/markup-compatibility/2006" xmlns:a14="http://schemas.microsoft.com/office/drawing/2010/main">
+        <mc:Choice Requires="a14">
           <p:sp>
             <p:nvSpPr>
               <p:cNvPr id="45" name="TextBox 44"/>
@@ -6715,12 +6644,10 @@
               </a:bodyPr>
               <a:lstStyle/>
               <a:p>
+                <a:pPr/>
                 <a14:m>
                   <m:oMathPara xmlns:m="http://schemas.openxmlformats.org/officeDocument/2006/math">
-                    <m:oMathParaPr>
-                      <m:jc m:val="centerGroup"/>
-                    </m:oMathParaPr>
-                    <m:oMath xmlns:m="http://schemas.openxmlformats.org/officeDocument/2006/math">
+                    <m:oMath>
                       <m:r>
                         <a:rPr lang="en-US" sz="2400" b="0" i="1" smtClean="0">
                           <a:latin typeface="Cambria Math" panose="02040503050406030204" pitchFamily="18" charset="0"/>
@@ -6735,7 +6662,7 @@
             </p:txBody>
           </p:sp>
         </mc:Choice>
-        <mc:Fallback>
+        <mc:Fallback xmlns="">
           <p:sp>
             <p:nvSpPr>
               <p:cNvPr id="45" name="TextBox 44"/>
@@ -6774,8 +6701,8 @@
           </p:sp>
         </mc:Fallback>
       </mc:AlternateContent>
-      <mc:AlternateContent xmlns:mc="http://schemas.openxmlformats.org/markup-compatibility/2006">
-        <mc:Choice xmlns:a14="http://schemas.microsoft.com/office/drawing/2010/main" Requires="a14">
+      <mc:AlternateContent xmlns:mc="http://schemas.openxmlformats.org/markup-compatibility/2006" xmlns:a14="http://schemas.microsoft.com/office/drawing/2010/main">
+        <mc:Choice Requires="a14">
           <p:sp>
             <p:nvSpPr>
               <p:cNvPr id="47" name="TextBox 46"/>
@@ -6798,12 +6725,10 @@
               </a:bodyPr>
               <a:lstStyle/>
               <a:p>
+                <a:pPr/>
                 <a14:m>
                   <m:oMathPara xmlns:m="http://schemas.openxmlformats.org/officeDocument/2006/math">
-                    <m:oMathParaPr>
-                      <m:jc m:val="centerGroup"/>
-                    </m:oMathParaPr>
-                    <m:oMath xmlns:m="http://schemas.openxmlformats.org/officeDocument/2006/math">
+                    <m:oMath>
                       <m:r>
                         <a:rPr lang="en-US" sz="2400" b="0" i="1" smtClean="0">
                           <a:latin typeface="Cambria Math" panose="02040503050406030204" pitchFamily="18" charset="0"/>
@@ -6818,7 +6743,7 @@
             </p:txBody>
           </p:sp>
         </mc:Choice>
-        <mc:Fallback>
+        <mc:Fallback xmlns="">
           <p:sp>
             <p:nvSpPr>
               <p:cNvPr id="47" name="TextBox 46"/>
@@ -6861,6 +6786,2955 @@
     <p:extLst>
       <p:ext uri="{BB962C8B-B14F-4D97-AF65-F5344CB8AC3E}">
         <p14:creationId xmlns:p14="http://schemas.microsoft.com/office/powerpoint/2010/main" val="3495371544"/>
+      </p:ext>
+    </p:extLst>
+  </p:cSld>
+  <p:clrMapOvr>
+    <a:masterClrMapping/>
+  </p:clrMapOvr>
+</p:sld>
+</file>
+
+<file path=ppt/slides/slide3.xml><?xml version="1.0" encoding="utf-8"?>
+<p:sld xmlns:a="http://schemas.openxmlformats.org/drawingml/2006/main" xmlns:r="http://schemas.openxmlformats.org/officeDocument/2006/relationships" xmlns:p="http://schemas.openxmlformats.org/presentationml/2006/main">
+  <p:cSld>
+    <p:spTree>
+      <p:nvGrpSpPr>
+        <p:cNvPr id="1" name="">
+          <a:extLst>
+            <a:ext uri="{FF2B5EF4-FFF2-40B4-BE49-F238E27FC236}">
+              <a16:creationId xmlns:a16="http://schemas.microsoft.com/office/drawing/2014/main" id="{1AF9C346-5792-7D0C-002A-8924987E8694}"/>
+            </a:ext>
+          </a:extLst>
+        </p:cNvPr>
+        <p:cNvGrpSpPr/>
+        <p:nvPr/>
+      </p:nvGrpSpPr>
+      <p:grpSpPr>
+        <a:xfrm>
+          <a:off x="0" y="0"/>
+          <a:ext cx="0" cy="0"/>
+          <a:chOff x="0" y="0"/>
+          <a:chExt cx="0" cy="0"/>
+        </a:xfrm>
+      </p:grpSpPr>
+      <p:grpSp>
+        <p:nvGrpSpPr>
+          <p:cNvPr id="2" name="Group 1">
+            <a:extLst>
+              <a:ext uri="{FF2B5EF4-FFF2-40B4-BE49-F238E27FC236}">
+                <a16:creationId xmlns:a16="http://schemas.microsoft.com/office/drawing/2014/main" id="{AEDB7B7F-193E-F7A0-C7E2-EC6EE3AE0E72}"/>
+              </a:ext>
+            </a:extLst>
+          </p:cNvPr>
+          <p:cNvGrpSpPr/>
+          <p:nvPr/>
+        </p:nvGrpSpPr>
+        <p:grpSpPr>
+          <a:xfrm>
+            <a:off x="1167765" y="914400"/>
+            <a:ext cx="5165339" cy="4684157"/>
+            <a:chOff x="1167765" y="914400"/>
+            <a:chExt cx="5165339" cy="4684157"/>
+          </a:xfrm>
+        </p:grpSpPr>
+        <p:grpSp>
+          <p:nvGrpSpPr>
+            <p:cNvPr id="41" name="Group 40">
+              <a:extLst>
+                <a:ext uri="{FF2B5EF4-FFF2-40B4-BE49-F238E27FC236}">
+                  <a16:creationId xmlns:a16="http://schemas.microsoft.com/office/drawing/2014/main" id="{DF63EAE6-ECDA-6176-5249-CDF597F8A1E3}"/>
+                </a:ext>
+              </a:extLst>
+            </p:cNvPr>
+            <p:cNvGrpSpPr/>
+            <p:nvPr/>
+          </p:nvGrpSpPr>
+          <p:grpSpPr>
+            <a:xfrm>
+              <a:off x="1167765" y="914400"/>
+              <a:ext cx="5165339" cy="4684157"/>
+              <a:chOff x="1167765" y="914400"/>
+              <a:chExt cx="5165339" cy="4684157"/>
+            </a:xfrm>
+          </p:grpSpPr>
+          <p:grpSp>
+            <p:nvGrpSpPr>
+              <p:cNvPr id="10" name="Group 9">
+                <a:extLst>
+                  <a:ext uri="{FF2B5EF4-FFF2-40B4-BE49-F238E27FC236}">
+                    <a16:creationId xmlns:a16="http://schemas.microsoft.com/office/drawing/2014/main" id="{A98AC938-976C-2482-C25E-92663045F437}"/>
+                  </a:ext>
+                </a:extLst>
+              </p:cNvPr>
+              <p:cNvGrpSpPr/>
+              <p:nvPr/>
+            </p:nvGrpSpPr>
+            <p:grpSpPr>
+              <a:xfrm>
+                <a:off x="1167765" y="1045031"/>
+                <a:ext cx="5114163" cy="4321354"/>
+                <a:chOff x="1167765" y="1045031"/>
+                <a:chExt cx="5114163" cy="4321354"/>
+              </a:xfrm>
+            </p:grpSpPr>
+            <p:cxnSp>
+              <p:nvCxnSpPr>
+                <p:cNvPr id="5" name="Straight Connector 4">
+                  <a:extLst>
+                    <a:ext uri="{FF2B5EF4-FFF2-40B4-BE49-F238E27FC236}">
+                      <a16:creationId xmlns:a16="http://schemas.microsoft.com/office/drawing/2014/main" id="{DA394A0B-9900-D02C-A8C0-7CF3466FFF34}"/>
+                    </a:ext>
+                  </a:extLst>
+                </p:cNvPr>
+                <p:cNvCxnSpPr/>
+                <p:nvPr/>
+              </p:nvCxnSpPr>
+              <p:spPr>
+                <a:xfrm>
+                  <a:off x="2656115" y="1045031"/>
+                  <a:ext cx="0" cy="3065417"/>
+                </a:xfrm>
+                <a:prstGeom prst="line">
+                  <a:avLst/>
+                </a:prstGeom>
+                <a:ln w="28575" cap="rnd">
+                  <a:solidFill>
+                    <a:schemeClr val="tx1">
+                      <a:lumMod val="75000"/>
+                      <a:lumOff val="25000"/>
+                    </a:schemeClr>
+                  </a:solidFill>
+                  <a:round/>
+                </a:ln>
+              </p:spPr>
+              <p:style>
+                <a:lnRef idx="1">
+                  <a:schemeClr val="accent1"/>
+                </a:lnRef>
+                <a:fillRef idx="0">
+                  <a:schemeClr val="accent1"/>
+                </a:fillRef>
+                <a:effectRef idx="0">
+                  <a:schemeClr val="accent1"/>
+                </a:effectRef>
+                <a:fontRef idx="minor">
+                  <a:schemeClr val="tx1"/>
+                </a:fontRef>
+              </p:style>
+            </p:cxnSp>
+            <p:cxnSp>
+              <p:nvCxnSpPr>
+                <p:cNvPr id="6" name="Straight Connector 5">
+                  <a:extLst>
+                    <a:ext uri="{FF2B5EF4-FFF2-40B4-BE49-F238E27FC236}">
+                      <a16:creationId xmlns:a16="http://schemas.microsoft.com/office/drawing/2014/main" id="{A9FFAAF3-EB2C-07B4-52B1-E6251A9690CB}"/>
+                    </a:ext>
+                  </a:extLst>
+                </p:cNvPr>
+                <p:cNvCxnSpPr/>
+                <p:nvPr/>
+              </p:nvCxnSpPr>
+              <p:spPr>
+                <a:xfrm flipH="1">
+                  <a:off x="2655027" y="4111265"/>
+                  <a:ext cx="3626901" cy="0"/>
+                </a:xfrm>
+                <a:prstGeom prst="line">
+                  <a:avLst/>
+                </a:prstGeom>
+                <a:ln w="28575" cap="rnd">
+                  <a:solidFill>
+                    <a:schemeClr val="tx1">
+                      <a:lumMod val="75000"/>
+                      <a:lumOff val="25000"/>
+                    </a:schemeClr>
+                  </a:solidFill>
+                  <a:round/>
+                </a:ln>
+              </p:spPr>
+              <p:style>
+                <a:lnRef idx="1">
+                  <a:schemeClr val="accent1"/>
+                </a:lnRef>
+                <a:fillRef idx="0">
+                  <a:schemeClr val="accent1"/>
+                </a:fillRef>
+                <a:effectRef idx="0">
+                  <a:schemeClr val="accent1"/>
+                </a:effectRef>
+                <a:fontRef idx="minor">
+                  <a:schemeClr val="tx1"/>
+                </a:fontRef>
+              </p:style>
+            </p:cxnSp>
+            <p:cxnSp>
+              <p:nvCxnSpPr>
+                <p:cNvPr id="8" name="Straight Connector 7">
+                  <a:extLst>
+                    <a:ext uri="{FF2B5EF4-FFF2-40B4-BE49-F238E27FC236}">
+                      <a16:creationId xmlns:a16="http://schemas.microsoft.com/office/drawing/2014/main" id="{E9A58765-430B-757E-EE79-24564FB49791}"/>
+                    </a:ext>
+                  </a:extLst>
+                </p:cNvPr>
+                <p:cNvCxnSpPr/>
+                <p:nvPr/>
+              </p:nvCxnSpPr>
+              <p:spPr>
+                <a:xfrm flipV="1">
+                  <a:off x="1167765" y="4114258"/>
+                  <a:ext cx="1484540" cy="1252127"/>
+                </a:xfrm>
+                <a:prstGeom prst="line">
+                  <a:avLst/>
+                </a:prstGeom>
+                <a:ln w="28575" cap="rnd">
+                  <a:solidFill>
+                    <a:schemeClr val="tx1">
+                      <a:lumMod val="75000"/>
+                      <a:lumOff val="25000"/>
+                    </a:schemeClr>
+                  </a:solidFill>
+                  <a:round/>
+                </a:ln>
+              </p:spPr>
+              <p:style>
+                <a:lnRef idx="1">
+                  <a:schemeClr val="accent1"/>
+                </a:lnRef>
+                <a:fillRef idx="0">
+                  <a:schemeClr val="accent1"/>
+                </a:fillRef>
+                <a:effectRef idx="0">
+                  <a:schemeClr val="accent1"/>
+                </a:effectRef>
+                <a:fontRef idx="minor">
+                  <a:schemeClr val="tx1"/>
+                </a:fontRef>
+              </p:style>
+            </p:cxnSp>
+          </p:grpSp>
+          <mc:AlternateContent xmlns:mc="http://schemas.openxmlformats.org/markup-compatibility/2006">
+            <mc:Choice xmlns:a14="http://schemas.microsoft.com/office/drawing/2010/main" Requires="a14">
+              <p:sp>
+                <p:nvSpPr>
+                  <p:cNvPr id="17" name="TextBox 16">
+                    <a:extLst>
+                      <a:ext uri="{FF2B5EF4-FFF2-40B4-BE49-F238E27FC236}">
+                        <a16:creationId xmlns:a16="http://schemas.microsoft.com/office/drawing/2014/main" id="{C37F904C-3186-029E-FBAD-9ADE0EFB3986}"/>
+                      </a:ext>
+                    </a:extLst>
+                  </p:cNvPr>
+                  <p:cNvSpPr txBox="1"/>
+                  <p:nvPr/>
+                </p:nvSpPr>
+                <p:spPr>
+                  <a:xfrm>
+                    <a:off x="2594801" y="4120900"/>
+                    <a:ext cx="284822" cy="369332"/>
+                  </a:xfrm>
+                  <a:prstGeom prst="rect">
+                    <a:avLst/>
+                  </a:prstGeom>
+                  <a:noFill/>
+                  <a:ln>
+                    <a:noFill/>
+                  </a:ln>
+                </p:spPr>
+                <p:txBody>
+                  <a:bodyPr wrap="none" lIns="0" tIns="0" rIns="0" bIns="0" rtlCol="0">
+                    <a:spAutoFit/>
+                  </a:bodyPr>
+                  <a:lstStyle/>
+                  <a:p>
+                    <a:pPr/>
+                    <a14:m>
+                      <m:oMathPara xmlns:m="http://schemas.openxmlformats.org/officeDocument/2006/math">
+                        <m:oMath>
+                          <m:r>
+                            <a:rPr lang="en-US" sz="2400" b="0" i="1" smtClean="0">
+                              <a:solidFill>
+                                <a:schemeClr val="tx1">
+                                  <a:lumMod val="85000"/>
+                                  <a:lumOff val="15000"/>
+                                </a:schemeClr>
+                              </a:solidFill>
+                              <a:latin typeface="Cambria Math" panose="02040503050406030204" pitchFamily="18" charset="0"/>
+                            </a:rPr>
+                            <m:t>𝑂</m:t>
+                          </m:r>
+                        </m:oMath>
+                      </m:oMathPara>
+                    </a14:m>
+                    <a:endParaRPr lang="en-US" sz="2400" dirty="0">
+                      <a:solidFill>
+                        <a:schemeClr val="tx1">
+                          <a:lumMod val="85000"/>
+                          <a:lumOff val="15000"/>
+                        </a:schemeClr>
+                      </a:solidFill>
+                    </a:endParaRPr>
+                  </a:p>
+                </p:txBody>
+              </p:sp>
+            </mc:Choice>
+            <mc:Fallback>
+              <p:sp>
+                <p:nvSpPr>
+                  <p:cNvPr id="17" name="TextBox 16">
+                    <a:extLst>
+                      <a:ext uri="{FF2B5EF4-FFF2-40B4-BE49-F238E27FC236}">
+                        <a16:creationId xmlns:a16="http://schemas.microsoft.com/office/drawing/2014/main" id="{C37F904C-3186-029E-FBAD-9ADE0EFB3986}"/>
+                      </a:ext>
+                    </a:extLst>
+                  </p:cNvPr>
+                  <p:cNvSpPr txBox="1">
+                    <a:spLocks noRot="1" noChangeAspect="1" noMove="1" noResize="1" noEditPoints="1" noAdjustHandles="1" noChangeArrowheads="1" noChangeShapeType="1" noTextEdit="1"/>
+                  </p:cNvSpPr>
+                  <p:nvPr/>
+                </p:nvSpPr>
+                <p:spPr>
+                  <a:xfrm>
+                    <a:off x="2594801" y="4120900"/>
+                    <a:ext cx="284822" cy="369332"/>
+                  </a:xfrm>
+                  <a:prstGeom prst="rect">
+                    <a:avLst/>
+                  </a:prstGeom>
+                  <a:blipFill>
+                    <a:blip r:embed="rId2"/>
+                    <a:stretch>
+                      <a:fillRect l="-26087" r="-23913" b="-4918"/>
+                    </a:stretch>
+                  </a:blipFill>
+                  <a:ln>
+                    <a:noFill/>
+                  </a:ln>
+                </p:spPr>
+                <p:txBody>
+                  <a:bodyPr/>
+                  <a:lstStyle/>
+                  <a:p>
+                    <a:r>
+                      <a:rPr lang="en-IN">
+                        <a:noFill/>
+                      </a:rPr>
+                      <a:t> </a:t>
+                    </a:r>
+                  </a:p>
+                </p:txBody>
+              </p:sp>
+            </mc:Fallback>
+          </mc:AlternateContent>
+          <mc:AlternateContent xmlns:mc="http://schemas.openxmlformats.org/markup-compatibility/2006">
+            <mc:Choice xmlns:a14="http://schemas.microsoft.com/office/drawing/2010/main" Requires="a14">
+              <p:sp>
+                <p:nvSpPr>
+                  <p:cNvPr id="19" name="TextBox 18">
+                    <a:extLst>
+                      <a:ext uri="{FF2B5EF4-FFF2-40B4-BE49-F238E27FC236}">
+                        <a16:creationId xmlns:a16="http://schemas.microsoft.com/office/drawing/2014/main" id="{EE31DF62-0FBF-D92D-A8AF-0F650E35ED9C}"/>
+                      </a:ext>
+                    </a:extLst>
+                  </p:cNvPr>
+                  <p:cNvSpPr txBox="1"/>
+                  <p:nvPr/>
+                </p:nvSpPr>
+                <p:spPr>
+                  <a:xfrm>
+                    <a:off x="6057900" y="4152900"/>
+                    <a:ext cx="275204" cy="369332"/>
+                  </a:xfrm>
+                  <a:prstGeom prst="rect">
+                    <a:avLst/>
+                  </a:prstGeom>
+                  <a:noFill/>
+                  <a:ln>
+                    <a:noFill/>
+                  </a:ln>
+                </p:spPr>
+                <p:txBody>
+                  <a:bodyPr wrap="none" lIns="0" tIns="0" rIns="0" bIns="0" rtlCol="0">
+                    <a:spAutoFit/>
+                  </a:bodyPr>
+                  <a:lstStyle/>
+                  <a:p>
+                    <a:pPr/>
+                    <a14:m>
+                      <m:oMathPara xmlns:m="http://schemas.openxmlformats.org/officeDocument/2006/math">
+                        <m:oMath>
+                          <m:r>
+                            <a:rPr lang="en-US" sz="2400" b="0" i="1" smtClean="0">
+                              <a:solidFill>
+                                <a:schemeClr val="tx1">
+                                  <a:lumMod val="85000"/>
+                                  <a:lumOff val="15000"/>
+                                </a:schemeClr>
+                              </a:solidFill>
+                              <a:latin typeface="Cambria Math" panose="02040503050406030204" pitchFamily="18" charset="0"/>
+                            </a:rPr>
+                            <m:t>𝑋</m:t>
+                          </m:r>
+                        </m:oMath>
+                      </m:oMathPara>
+                    </a14:m>
+                    <a:endParaRPr lang="en-US" sz="2400" dirty="0">
+                      <a:solidFill>
+                        <a:schemeClr val="tx1">
+                          <a:lumMod val="85000"/>
+                          <a:lumOff val="15000"/>
+                        </a:schemeClr>
+                      </a:solidFill>
+                    </a:endParaRPr>
+                  </a:p>
+                </p:txBody>
+              </p:sp>
+            </mc:Choice>
+            <mc:Fallback>
+              <p:sp>
+                <p:nvSpPr>
+                  <p:cNvPr id="19" name="TextBox 18">
+                    <a:extLst>
+                      <a:ext uri="{FF2B5EF4-FFF2-40B4-BE49-F238E27FC236}">
+                        <a16:creationId xmlns:a16="http://schemas.microsoft.com/office/drawing/2014/main" id="{EE31DF62-0FBF-D92D-A8AF-0F650E35ED9C}"/>
+                      </a:ext>
+                    </a:extLst>
+                  </p:cNvPr>
+                  <p:cNvSpPr txBox="1">
+                    <a:spLocks noRot="1" noChangeAspect="1" noMove="1" noResize="1" noEditPoints="1" noAdjustHandles="1" noChangeArrowheads="1" noChangeShapeType="1" noTextEdit="1"/>
+                  </p:cNvSpPr>
+                  <p:nvPr/>
+                </p:nvSpPr>
+                <p:spPr>
+                  <a:xfrm>
+                    <a:off x="6057900" y="4152900"/>
+                    <a:ext cx="275204" cy="369332"/>
+                  </a:xfrm>
+                  <a:prstGeom prst="rect">
+                    <a:avLst/>
+                  </a:prstGeom>
+                  <a:blipFill>
+                    <a:blip r:embed="rId3"/>
+                    <a:stretch>
+                      <a:fillRect l="-26667" r="-22222" b="-6557"/>
+                    </a:stretch>
+                  </a:blipFill>
+                  <a:ln>
+                    <a:noFill/>
+                  </a:ln>
+                </p:spPr>
+                <p:txBody>
+                  <a:bodyPr/>
+                  <a:lstStyle/>
+                  <a:p>
+                    <a:r>
+                      <a:rPr lang="en-IN">
+                        <a:noFill/>
+                      </a:rPr>
+                      <a:t> </a:t>
+                    </a:r>
+                  </a:p>
+                </p:txBody>
+              </p:sp>
+            </mc:Fallback>
+          </mc:AlternateContent>
+          <mc:AlternateContent xmlns:mc="http://schemas.openxmlformats.org/markup-compatibility/2006">
+            <mc:Choice xmlns:a14="http://schemas.microsoft.com/office/drawing/2010/main" Requires="a14">
+              <p:sp>
+                <p:nvSpPr>
+                  <p:cNvPr id="22" name="TextBox 21">
+                    <a:extLst>
+                      <a:ext uri="{FF2B5EF4-FFF2-40B4-BE49-F238E27FC236}">
+                        <a16:creationId xmlns:a16="http://schemas.microsoft.com/office/drawing/2014/main" id="{636648FD-9AEC-AF83-B35F-FC650E6A8EBF}"/>
+                      </a:ext>
+                    </a:extLst>
+                  </p:cNvPr>
+                  <p:cNvSpPr txBox="1"/>
+                  <p:nvPr/>
+                </p:nvSpPr>
+                <p:spPr>
+                  <a:xfrm>
+                    <a:off x="2760345" y="914400"/>
+                    <a:ext cx="262380" cy="369332"/>
+                  </a:xfrm>
+                  <a:prstGeom prst="rect">
+                    <a:avLst/>
+                  </a:prstGeom>
+                  <a:noFill/>
+                  <a:ln>
+                    <a:noFill/>
+                  </a:ln>
+                </p:spPr>
+                <p:txBody>
+                  <a:bodyPr wrap="none" lIns="0" tIns="0" rIns="0" bIns="0" rtlCol="0">
+                    <a:spAutoFit/>
+                  </a:bodyPr>
+                  <a:lstStyle/>
+                  <a:p>
+                    <a:pPr/>
+                    <a14:m>
+                      <m:oMathPara xmlns:m="http://schemas.openxmlformats.org/officeDocument/2006/math">
+                        <m:oMath>
+                          <m:r>
+                            <a:rPr lang="en-US" sz="2400" b="0" i="1" smtClean="0">
+                              <a:solidFill>
+                                <a:schemeClr val="tx1">
+                                  <a:lumMod val="85000"/>
+                                  <a:lumOff val="15000"/>
+                                </a:schemeClr>
+                              </a:solidFill>
+                              <a:latin typeface="Cambria Math" panose="02040503050406030204" pitchFamily="18" charset="0"/>
+                            </a:rPr>
+                            <m:t>𝑌</m:t>
+                          </m:r>
+                        </m:oMath>
+                      </m:oMathPara>
+                    </a14:m>
+                    <a:endParaRPr lang="en-US" sz="2400" dirty="0">
+                      <a:solidFill>
+                        <a:schemeClr val="tx1">
+                          <a:lumMod val="85000"/>
+                          <a:lumOff val="15000"/>
+                        </a:schemeClr>
+                      </a:solidFill>
+                    </a:endParaRPr>
+                  </a:p>
+                </p:txBody>
+              </p:sp>
+            </mc:Choice>
+            <mc:Fallback>
+              <p:sp>
+                <p:nvSpPr>
+                  <p:cNvPr id="22" name="TextBox 21">
+                    <a:extLst>
+                      <a:ext uri="{FF2B5EF4-FFF2-40B4-BE49-F238E27FC236}">
+                        <a16:creationId xmlns:a16="http://schemas.microsoft.com/office/drawing/2014/main" id="{636648FD-9AEC-AF83-B35F-FC650E6A8EBF}"/>
+                      </a:ext>
+                    </a:extLst>
+                  </p:cNvPr>
+                  <p:cNvSpPr txBox="1">
+                    <a:spLocks noRot="1" noChangeAspect="1" noMove="1" noResize="1" noEditPoints="1" noAdjustHandles="1" noChangeArrowheads="1" noChangeShapeType="1" noTextEdit="1"/>
+                  </p:cNvSpPr>
+                  <p:nvPr/>
+                </p:nvSpPr>
+                <p:spPr>
+                  <a:xfrm>
+                    <a:off x="2760345" y="914400"/>
+                    <a:ext cx="262380" cy="369332"/>
+                  </a:xfrm>
+                  <a:prstGeom prst="rect">
+                    <a:avLst/>
+                  </a:prstGeom>
+                  <a:blipFill>
+                    <a:blip r:embed="rId4"/>
+                    <a:stretch>
+                      <a:fillRect l="-27907" r="-23256" b="-4918"/>
+                    </a:stretch>
+                  </a:blipFill>
+                  <a:ln>
+                    <a:noFill/>
+                  </a:ln>
+                </p:spPr>
+                <p:txBody>
+                  <a:bodyPr/>
+                  <a:lstStyle/>
+                  <a:p>
+                    <a:r>
+                      <a:rPr lang="en-IN">
+                        <a:noFill/>
+                      </a:rPr>
+                      <a:t> </a:t>
+                    </a:r>
+                  </a:p>
+                </p:txBody>
+              </p:sp>
+            </mc:Fallback>
+          </mc:AlternateContent>
+          <mc:AlternateContent xmlns:mc="http://schemas.openxmlformats.org/markup-compatibility/2006">
+            <mc:Choice xmlns:a14="http://schemas.microsoft.com/office/drawing/2010/main" Requires="a14">
+              <p:sp>
+                <p:nvSpPr>
+                  <p:cNvPr id="23" name="TextBox 22">
+                    <a:extLst>
+                      <a:ext uri="{FF2B5EF4-FFF2-40B4-BE49-F238E27FC236}">
+                        <a16:creationId xmlns:a16="http://schemas.microsoft.com/office/drawing/2014/main" id="{8A4ED895-32F0-DBD9-1BEC-CA8CBE70468D}"/>
+                      </a:ext>
+                    </a:extLst>
+                  </p:cNvPr>
+                  <p:cNvSpPr txBox="1"/>
+                  <p:nvPr/>
+                </p:nvSpPr>
+                <p:spPr>
+                  <a:xfrm>
+                    <a:off x="1287780" y="5229225"/>
+                    <a:ext cx="259174" cy="369332"/>
+                  </a:xfrm>
+                  <a:prstGeom prst="rect">
+                    <a:avLst/>
+                  </a:prstGeom>
+                  <a:noFill/>
+                  <a:ln>
+                    <a:noFill/>
+                  </a:ln>
+                </p:spPr>
+                <p:txBody>
+                  <a:bodyPr wrap="none" lIns="0" tIns="0" rIns="0" bIns="0" rtlCol="0">
+                    <a:spAutoFit/>
+                  </a:bodyPr>
+                  <a:lstStyle/>
+                  <a:p>
+                    <a:pPr/>
+                    <a14:m>
+                      <m:oMathPara xmlns:m="http://schemas.openxmlformats.org/officeDocument/2006/math">
+                        <m:oMath>
+                          <m:r>
+                            <a:rPr lang="en-US" sz="2400" b="0" i="1" smtClean="0">
+                              <a:solidFill>
+                                <a:schemeClr val="tx1">
+                                  <a:lumMod val="85000"/>
+                                  <a:lumOff val="15000"/>
+                                </a:schemeClr>
+                              </a:solidFill>
+                              <a:latin typeface="Cambria Math" panose="02040503050406030204" pitchFamily="18" charset="0"/>
+                            </a:rPr>
+                            <m:t>𝑍</m:t>
+                          </m:r>
+                        </m:oMath>
+                      </m:oMathPara>
+                    </a14:m>
+                    <a:endParaRPr lang="en-US" sz="2400" dirty="0">
+                      <a:solidFill>
+                        <a:schemeClr val="tx1">
+                          <a:lumMod val="85000"/>
+                          <a:lumOff val="15000"/>
+                        </a:schemeClr>
+                      </a:solidFill>
+                    </a:endParaRPr>
+                  </a:p>
+                </p:txBody>
+              </p:sp>
+            </mc:Choice>
+            <mc:Fallback>
+              <p:sp>
+                <p:nvSpPr>
+                  <p:cNvPr id="23" name="TextBox 22">
+                    <a:extLst>
+                      <a:ext uri="{FF2B5EF4-FFF2-40B4-BE49-F238E27FC236}">
+                        <a16:creationId xmlns:a16="http://schemas.microsoft.com/office/drawing/2014/main" id="{8A4ED895-32F0-DBD9-1BEC-CA8CBE70468D}"/>
+                      </a:ext>
+                    </a:extLst>
+                  </p:cNvPr>
+                  <p:cNvSpPr txBox="1">
+                    <a:spLocks noRot="1" noChangeAspect="1" noMove="1" noResize="1" noEditPoints="1" noAdjustHandles="1" noChangeArrowheads="1" noChangeShapeType="1" noTextEdit="1"/>
+                  </p:cNvSpPr>
+                  <p:nvPr/>
+                </p:nvSpPr>
+                <p:spPr>
+                  <a:xfrm>
+                    <a:off x="1287780" y="5229225"/>
+                    <a:ext cx="259174" cy="369332"/>
+                  </a:xfrm>
+                  <a:prstGeom prst="rect">
+                    <a:avLst/>
+                  </a:prstGeom>
+                  <a:blipFill>
+                    <a:blip r:embed="rId5"/>
+                    <a:stretch>
+                      <a:fillRect l="-25581" r="-25581" b="-6667"/>
+                    </a:stretch>
+                  </a:blipFill>
+                  <a:ln>
+                    <a:noFill/>
+                  </a:ln>
+                </p:spPr>
+                <p:txBody>
+                  <a:bodyPr/>
+                  <a:lstStyle/>
+                  <a:p>
+                    <a:r>
+                      <a:rPr lang="en-IN">
+                        <a:noFill/>
+                      </a:rPr>
+                      <a:t> </a:t>
+                    </a:r>
+                  </a:p>
+                </p:txBody>
+              </p:sp>
+            </mc:Fallback>
+          </mc:AlternateContent>
+        </p:grpSp>
+        <mc:AlternateContent xmlns:mc="http://schemas.openxmlformats.org/markup-compatibility/2006">
+          <mc:Choice xmlns:a14="http://schemas.microsoft.com/office/drawing/2010/main" Requires="a14">
+            <p:sp>
+              <p:nvSpPr>
+                <p:cNvPr id="63" name="TextBox 62">
+                  <a:extLst>
+                    <a:ext uri="{FF2B5EF4-FFF2-40B4-BE49-F238E27FC236}">
+                      <a16:creationId xmlns:a16="http://schemas.microsoft.com/office/drawing/2014/main" id="{51047548-CE4B-AC41-DD75-857735707EEF}"/>
+                    </a:ext>
+                  </a:extLst>
+                </p:cNvPr>
+                <p:cNvSpPr txBox="1"/>
+                <p:nvPr/>
+              </p:nvSpPr>
+              <p:spPr>
+                <a:xfrm>
+                  <a:off x="2186178" y="1958340"/>
+                  <a:ext cx="229362" cy="369332"/>
+                </a:xfrm>
+                <a:prstGeom prst="rect">
+                  <a:avLst/>
+                </a:prstGeom>
+                <a:noFill/>
+                <a:ln>
+                  <a:noFill/>
+                </a:ln>
+              </p:spPr>
+              <p:txBody>
+                <a:bodyPr wrap="square" lIns="0" tIns="0" rIns="0" bIns="0" rtlCol="0">
+                  <a:spAutoFit/>
+                </a:bodyPr>
+                <a:lstStyle/>
+                <a:p>
+                  <a:pPr/>
+                  <a14:m>
+                    <m:oMathPara xmlns:m="http://schemas.openxmlformats.org/officeDocument/2006/math">
+                      <m:oMath>
+                        <m:r>
+                          <m:rPr>
+                            <m:sty m:val="p"/>
+                          </m:rPr>
+                          <a:rPr lang="en-US" sz="2400" b="0" i="0" smtClean="0">
+                            <a:solidFill>
+                              <a:schemeClr val="tx1">
+                                <a:lumMod val="85000"/>
+                                <a:lumOff val="15000"/>
+                              </a:schemeClr>
+                            </a:solidFill>
+                            <a:latin typeface="Cambria Math" panose="02040503050406030204" pitchFamily="18" charset="0"/>
+                          </a:rPr>
+                          <m:t>S</m:t>
+                        </m:r>
+                      </m:oMath>
+                    </m:oMathPara>
+                  </a14:m>
+                  <a:endParaRPr lang="en-US" sz="2400" dirty="0">
+                    <a:solidFill>
+                      <a:schemeClr val="tx1">
+                        <a:lumMod val="85000"/>
+                        <a:lumOff val="15000"/>
+                      </a:schemeClr>
+                    </a:solidFill>
+                  </a:endParaRPr>
+                </a:p>
+              </p:txBody>
+            </p:sp>
+          </mc:Choice>
+          <mc:Fallback>
+            <p:sp>
+              <p:nvSpPr>
+                <p:cNvPr id="63" name="TextBox 62">
+                  <a:extLst>
+                    <a:ext uri="{FF2B5EF4-FFF2-40B4-BE49-F238E27FC236}">
+                      <a16:creationId xmlns:a16="http://schemas.microsoft.com/office/drawing/2014/main" id="{51047548-CE4B-AC41-DD75-857735707EEF}"/>
+                    </a:ext>
+                  </a:extLst>
+                </p:cNvPr>
+                <p:cNvSpPr txBox="1">
+                  <a:spLocks noRot="1" noChangeAspect="1" noMove="1" noResize="1" noEditPoints="1" noAdjustHandles="1" noChangeArrowheads="1" noChangeShapeType="1" noTextEdit="1"/>
+                </p:cNvSpPr>
+                <p:nvPr/>
+              </p:nvSpPr>
+              <p:spPr>
+                <a:xfrm>
+                  <a:off x="2186178" y="1958340"/>
+                  <a:ext cx="229362" cy="369332"/>
+                </a:xfrm>
+                <a:prstGeom prst="rect">
+                  <a:avLst/>
+                </a:prstGeom>
+                <a:blipFill>
+                  <a:blip r:embed="rId6"/>
+                  <a:stretch>
+                    <a:fillRect l="-32432" r="-29730" b="-6557"/>
+                  </a:stretch>
+                </a:blipFill>
+                <a:ln>
+                  <a:noFill/>
+                </a:ln>
+              </p:spPr>
+              <p:txBody>
+                <a:bodyPr/>
+                <a:lstStyle/>
+                <a:p>
+                  <a:r>
+                    <a:rPr lang="en-IN">
+                      <a:noFill/>
+                    </a:rPr>
+                    <a:t> </a:t>
+                  </a:r>
+                </a:p>
+              </p:txBody>
+            </p:sp>
+          </mc:Fallback>
+        </mc:AlternateContent>
+      </p:grpSp>
+      <p:grpSp>
+        <p:nvGrpSpPr>
+          <p:cNvPr id="3" name="Group 2">
+            <a:extLst>
+              <a:ext uri="{FF2B5EF4-FFF2-40B4-BE49-F238E27FC236}">
+                <a16:creationId xmlns:a16="http://schemas.microsoft.com/office/drawing/2014/main" id="{9A8001DD-A58E-5BC7-92E8-F3AC6A742235}"/>
+              </a:ext>
+            </a:extLst>
+          </p:cNvPr>
+          <p:cNvGrpSpPr/>
+          <p:nvPr/>
+        </p:nvGrpSpPr>
+        <p:grpSpPr>
+          <a:xfrm>
+            <a:off x="2481521" y="914400"/>
+            <a:ext cx="5241034" cy="4684157"/>
+            <a:chOff x="3057525" y="914400"/>
+            <a:chExt cx="5241034" cy="4684157"/>
+          </a:xfrm>
+        </p:grpSpPr>
+        <p:grpSp>
+          <p:nvGrpSpPr>
+            <p:cNvPr id="37" name="Group 36">
+              <a:extLst>
+                <a:ext uri="{FF2B5EF4-FFF2-40B4-BE49-F238E27FC236}">
+                  <a16:creationId xmlns:a16="http://schemas.microsoft.com/office/drawing/2014/main" id="{2FCF7633-E67B-3597-2E81-2FF710E5F178}"/>
+                </a:ext>
+              </a:extLst>
+            </p:cNvPr>
+            <p:cNvGrpSpPr/>
+            <p:nvPr/>
+          </p:nvGrpSpPr>
+          <p:grpSpPr>
+            <a:xfrm>
+              <a:off x="3057525" y="914400"/>
+              <a:ext cx="5241034" cy="4684157"/>
+              <a:chOff x="2722245" y="914400"/>
+              <a:chExt cx="5241034" cy="4684157"/>
+            </a:xfrm>
+          </p:grpSpPr>
+          <p:cxnSp>
+            <p:nvCxnSpPr>
+              <p:cNvPr id="16" name="Straight Arrow Connector 15">
+                <a:extLst>
+                  <a:ext uri="{FF2B5EF4-FFF2-40B4-BE49-F238E27FC236}">
+                    <a16:creationId xmlns:a16="http://schemas.microsoft.com/office/drawing/2014/main" id="{EC2C40E2-FB76-D811-520A-84A248F06681}"/>
+                  </a:ext>
+                </a:extLst>
+              </p:cNvPr>
+              <p:cNvCxnSpPr/>
+              <p:nvPr/>
+            </p:nvCxnSpPr>
+            <p:spPr>
+              <a:xfrm>
+                <a:off x="4223655" y="1702524"/>
+                <a:ext cx="1062446" cy="0"/>
+              </a:xfrm>
+              <a:prstGeom prst="straightConnector1">
+                <a:avLst/>
+              </a:prstGeom>
+              <a:ln w="28575" cap="rnd">
+                <a:solidFill>
+                  <a:srgbClr val="FF0000"/>
+                </a:solidFill>
+                <a:round/>
+                <a:tailEnd type="triangle" w="lg" len="lg"/>
+              </a:ln>
+            </p:spPr>
+            <p:style>
+              <a:lnRef idx="1">
+                <a:schemeClr val="accent1"/>
+              </a:lnRef>
+              <a:fillRef idx="0">
+                <a:schemeClr val="accent1"/>
+              </a:fillRef>
+              <a:effectRef idx="0">
+                <a:schemeClr val="accent1"/>
+              </a:effectRef>
+              <a:fontRef idx="minor">
+                <a:schemeClr val="tx1"/>
+              </a:fontRef>
+            </p:style>
+          </p:cxnSp>
+          <p:grpSp>
+            <p:nvGrpSpPr>
+              <p:cNvPr id="11" name="Group 10">
+                <a:extLst>
+                  <a:ext uri="{FF2B5EF4-FFF2-40B4-BE49-F238E27FC236}">
+                    <a16:creationId xmlns:a16="http://schemas.microsoft.com/office/drawing/2014/main" id="{5727D00F-412A-FF24-F903-B91A9F98DDAD}"/>
+                  </a:ext>
+                </a:extLst>
+              </p:cNvPr>
+              <p:cNvGrpSpPr/>
+              <p:nvPr/>
+            </p:nvGrpSpPr>
+            <p:grpSpPr>
+              <a:xfrm>
+                <a:off x="2722245" y="1014552"/>
+                <a:ext cx="5172075" cy="4321354"/>
+                <a:chOff x="1167765" y="1045031"/>
+                <a:chExt cx="5172075" cy="4321354"/>
+              </a:xfrm>
+            </p:grpSpPr>
+            <p:cxnSp>
+              <p:nvCxnSpPr>
+                <p:cNvPr id="12" name="Straight Connector 11">
+                  <a:extLst>
+                    <a:ext uri="{FF2B5EF4-FFF2-40B4-BE49-F238E27FC236}">
+                      <a16:creationId xmlns:a16="http://schemas.microsoft.com/office/drawing/2014/main" id="{84D5D3FE-75CF-55C6-F387-C36A59313014}"/>
+                    </a:ext>
+                  </a:extLst>
+                </p:cNvPr>
+                <p:cNvCxnSpPr/>
+                <p:nvPr/>
+              </p:nvCxnSpPr>
+              <p:spPr>
+                <a:xfrm>
+                  <a:off x="2656115" y="1045031"/>
+                  <a:ext cx="0" cy="3065417"/>
+                </a:xfrm>
+                <a:prstGeom prst="line">
+                  <a:avLst/>
+                </a:prstGeom>
+                <a:ln w="28575" cap="rnd">
+                  <a:solidFill>
+                    <a:schemeClr val="accent1">
+                      <a:lumMod val="75000"/>
+                    </a:schemeClr>
+                  </a:solidFill>
+                  <a:round/>
+                </a:ln>
+              </p:spPr>
+              <p:style>
+                <a:lnRef idx="1">
+                  <a:schemeClr val="accent1"/>
+                </a:lnRef>
+                <a:fillRef idx="0">
+                  <a:schemeClr val="accent1"/>
+                </a:fillRef>
+                <a:effectRef idx="0">
+                  <a:schemeClr val="accent1"/>
+                </a:effectRef>
+                <a:fontRef idx="minor">
+                  <a:schemeClr val="tx1"/>
+                </a:fontRef>
+              </p:style>
+            </p:cxnSp>
+            <p:cxnSp>
+              <p:nvCxnSpPr>
+                <p:cNvPr id="13" name="Straight Connector 12">
+                  <a:extLst>
+                    <a:ext uri="{FF2B5EF4-FFF2-40B4-BE49-F238E27FC236}">
+                      <a16:creationId xmlns:a16="http://schemas.microsoft.com/office/drawing/2014/main" id="{5B2F9110-A469-B4E3-4702-751F8AA2E92A}"/>
+                    </a:ext>
+                  </a:extLst>
+                </p:cNvPr>
+                <p:cNvCxnSpPr/>
+                <p:nvPr/>
+              </p:nvCxnSpPr>
+              <p:spPr>
+                <a:xfrm flipH="1">
+                  <a:off x="2655027" y="4111265"/>
+                  <a:ext cx="3684813" cy="0"/>
+                </a:xfrm>
+                <a:prstGeom prst="line">
+                  <a:avLst/>
+                </a:prstGeom>
+                <a:ln w="28575" cap="rnd">
+                  <a:solidFill>
+                    <a:schemeClr val="accent1">
+                      <a:lumMod val="75000"/>
+                    </a:schemeClr>
+                  </a:solidFill>
+                  <a:round/>
+                </a:ln>
+              </p:spPr>
+              <p:style>
+                <a:lnRef idx="1">
+                  <a:schemeClr val="accent1"/>
+                </a:lnRef>
+                <a:fillRef idx="0">
+                  <a:schemeClr val="accent1"/>
+                </a:fillRef>
+                <a:effectRef idx="0">
+                  <a:schemeClr val="accent1"/>
+                </a:effectRef>
+                <a:fontRef idx="minor">
+                  <a:schemeClr val="tx1"/>
+                </a:fontRef>
+              </p:style>
+            </p:cxnSp>
+            <p:cxnSp>
+              <p:nvCxnSpPr>
+                <p:cNvPr id="14" name="Straight Connector 13">
+                  <a:extLst>
+                    <a:ext uri="{FF2B5EF4-FFF2-40B4-BE49-F238E27FC236}">
+                      <a16:creationId xmlns:a16="http://schemas.microsoft.com/office/drawing/2014/main" id="{C2A1E375-BF28-9ADF-CBD1-90DA8CC25E33}"/>
+                    </a:ext>
+                  </a:extLst>
+                </p:cNvPr>
+                <p:cNvCxnSpPr/>
+                <p:nvPr/>
+              </p:nvCxnSpPr>
+              <p:spPr>
+                <a:xfrm flipV="1">
+                  <a:off x="1167765" y="4114258"/>
+                  <a:ext cx="1484540" cy="1252127"/>
+                </a:xfrm>
+                <a:prstGeom prst="line">
+                  <a:avLst/>
+                </a:prstGeom>
+                <a:ln w="28575" cap="rnd">
+                  <a:solidFill>
+                    <a:schemeClr val="accent1">
+                      <a:lumMod val="75000"/>
+                    </a:schemeClr>
+                  </a:solidFill>
+                  <a:round/>
+                </a:ln>
+              </p:spPr>
+              <p:style>
+                <a:lnRef idx="1">
+                  <a:schemeClr val="accent1"/>
+                </a:lnRef>
+                <a:fillRef idx="0">
+                  <a:schemeClr val="accent1"/>
+                </a:fillRef>
+                <a:effectRef idx="0">
+                  <a:schemeClr val="accent1"/>
+                </a:effectRef>
+                <a:fontRef idx="minor">
+                  <a:schemeClr val="tx1"/>
+                </a:fontRef>
+              </p:style>
+            </p:cxnSp>
+          </p:grpSp>
+          <mc:AlternateContent xmlns:mc="http://schemas.openxmlformats.org/markup-compatibility/2006">
+            <mc:Choice xmlns:a14="http://schemas.microsoft.com/office/drawing/2010/main" Requires="a14">
+              <p:sp>
+                <p:nvSpPr>
+                  <p:cNvPr id="18" name="TextBox 17">
+                    <a:extLst>
+                      <a:ext uri="{FF2B5EF4-FFF2-40B4-BE49-F238E27FC236}">
+                        <a16:creationId xmlns:a16="http://schemas.microsoft.com/office/drawing/2014/main" id="{411BD51C-D983-B8E3-D2CD-495E0357DFDC}"/>
+                      </a:ext>
+                    </a:extLst>
+                  </p:cNvPr>
+                  <p:cNvSpPr txBox="1"/>
+                  <p:nvPr/>
+                </p:nvSpPr>
+                <p:spPr>
+                  <a:xfrm>
+                    <a:off x="4145852" y="4124134"/>
+                    <a:ext cx="357470" cy="369332"/>
+                  </a:xfrm>
+                  <a:prstGeom prst="rect">
+                    <a:avLst/>
+                  </a:prstGeom>
+                  <a:noFill/>
+                </p:spPr>
+                <p:txBody>
+                  <a:bodyPr wrap="none" lIns="0" tIns="0" rIns="0" bIns="0" rtlCol="0">
+                    <a:spAutoFit/>
+                  </a:bodyPr>
+                  <a:lstStyle/>
+                  <a:p>
+                    <a:pPr/>
+                    <a14:m>
+                      <m:oMathPara xmlns:m="http://schemas.openxmlformats.org/officeDocument/2006/math">
+                        <m:oMath>
+                          <m:r>
+                            <a:rPr lang="en-US" sz="2400" b="0" i="1" smtClean="0">
+                              <a:solidFill>
+                                <a:schemeClr val="accent1">
+                                  <a:lumMod val="75000"/>
+                                </a:schemeClr>
+                              </a:solidFill>
+                              <a:latin typeface="Cambria Math" panose="02040503050406030204" pitchFamily="18" charset="0"/>
+                            </a:rPr>
+                            <m:t>𝑂</m:t>
+                          </m:r>
+                          <m:r>
+                            <a:rPr lang="en-US" sz="2400" b="0" i="1" smtClean="0">
+                              <a:solidFill>
+                                <a:schemeClr val="accent1">
+                                  <a:lumMod val="75000"/>
+                                </a:schemeClr>
+                              </a:solidFill>
+                              <a:latin typeface="Cambria Math" panose="02040503050406030204" pitchFamily="18" charset="0"/>
+                            </a:rPr>
+                            <m:t>′</m:t>
+                          </m:r>
+                        </m:oMath>
+                      </m:oMathPara>
+                    </a14:m>
+                    <a:endParaRPr lang="en-US" sz="2400" dirty="0">
+                      <a:solidFill>
+                        <a:schemeClr val="accent1">
+                          <a:lumMod val="75000"/>
+                        </a:schemeClr>
+                      </a:solidFill>
+                    </a:endParaRPr>
+                  </a:p>
+                </p:txBody>
+              </p:sp>
+            </mc:Choice>
+            <mc:Fallback>
+              <p:sp>
+                <p:nvSpPr>
+                  <p:cNvPr id="18" name="TextBox 17">
+                    <a:extLst>
+                      <a:ext uri="{FF2B5EF4-FFF2-40B4-BE49-F238E27FC236}">
+                        <a16:creationId xmlns:a16="http://schemas.microsoft.com/office/drawing/2014/main" id="{411BD51C-D983-B8E3-D2CD-495E0357DFDC}"/>
+                      </a:ext>
+                    </a:extLst>
+                  </p:cNvPr>
+                  <p:cNvSpPr txBox="1">
+                    <a:spLocks noRot="1" noChangeAspect="1" noMove="1" noResize="1" noEditPoints="1" noAdjustHandles="1" noChangeArrowheads="1" noChangeShapeType="1" noTextEdit="1"/>
+                  </p:cNvSpPr>
+                  <p:nvPr/>
+                </p:nvSpPr>
+                <p:spPr>
+                  <a:xfrm>
+                    <a:off x="4145852" y="4124134"/>
+                    <a:ext cx="357470" cy="369332"/>
+                  </a:xfrm>
+                  <a:prstGeom prst="rect">
+                    <a:avLst/>
+                  </a:prstGeom>
+                  <a:blipFill>
+                    <a:blip r:embed="rId7"/>
+                    <a:stretch>
+                      <a:fillRect l="-24138" t="-1667" r="-24138" b="-10000"/>
+                    </a:stretch>
+                  </a:blipFill>
+                </p:spPr>
+                <p:txBody>
+                  <a:bodyPr/>
+                  <a:lstStyle/>
+                  <a:p>
+                    <a:r>
+                      <a:rPr lang="en-IN">
+                        <a:noFill/>
+                      </a:rPr>
+                      <a:t> </a:t>
+                    </a:r>
+                  </a:p>
+                </p:txBody>
+              </p:sp>
+            </mc:Fallback>
+          </mc:AlternateContent>
+          <mc:AlternateContent xmlns:mc="http://schemas.openxmlformats.org/markup-compatibility/2006">
+            <mc:Choice xmlns:a14="http://schemas.microsoft.com/office/drawing/2010/main" Requires="a14">
+              <p:sp>
+                <p:nvSpPr>
+                  <p:cNvPr id="20" name="TextBox 19">
+                    <a:extLst>
+                      <a:ext uri="{FF2B5EF4-FFF2-40B4-BE49-F238E27FC236}">
+                        <a16:creationId xmlns:a16="http://schemas.microsoft.com/office/drawing/2014/main" id="{2356A1E3-27DA-C405-2B36-4ECB7D862D1F}"/>
+                      </a:ext>
+                    </a:extLst>
+                  </p:cNvPr>
+                  <p:cNvSpPr txBox="1"/>
+                  <p:nvPr/>
+                </p:nvSpPr>
+                <p:spPr>
+                  <a:xfrm>
+                    <a:off x="7615428" y="4152900"/>
+                    <a:ext cx="347851" cy="369332"/>
+                  </a:xfrm>
+                  <a:prstGeom prst="rect">
+                    <a:avLst/>
+                  </a:prstGeom>
+                  <a:noFill/>
+                </p:spPr>
+                <p:txBody>
+                  <a:bodyPr wrap="none" lIns="0" tIns="0" rIns="0" bIns="0" rtlCol="0">
+                    <a:spAutoFit/>
+                  </a:bodyPr>
+                  <a:lstStyle/>
+                  <a:p>
+                    <a:pPr/>
+                    <a14:m>
+                      <m:oMathPara xmlns:m="http://schemas.openxmlformats.org/officeDocument/2006/math">
+                        <m:oMath>
+                          <m:r>
+                            <a:rPr lang="en-US" sz="2400" b="0" i="1" smtClean="0">
+                              <a:solidFill>
+                                <a:schemeClr val="accent1">
+                                  <a:lumMod val="75000"/>
+                                </a:schemeClr>
+                              </a:solidFill>
+                              <a:latin typeface="Cambria Math" panose="02040503050406030204" pitchFamily="18" charset="0"/>
+                            </a:rPr>
+                            <m:t>𝑋</m:t>
+                          </m:r>
+                          <m:r>
+                            <a:rPr lang="en-US" sz="2400" b="0" i="1" smtClean="0">
+                              <a:solidFill>
+                                <a:schemeClr val="accent1">
+                                  <a:lumMod val="75000"/>
+                                </a:schemeClr>
+                              </a:solidFill>
+                              <a:latin typeface="Cambria Math" panose="02040503050406030204" pitchFamily="18" charset="0"/>
+                            </a:rPr>
+                            <m:t>′</m:t>
+                          </m:r>
+                        </m:oMath>
+                      </m:oMathPara>
+                    </a14:m>
+                    <a:endParaRPr lang="en-US" sz="2400" dirty="0"/>
+                  </a:p>
+                </p:txBody>
+              </p:sp>
+            </mc:Choice>
+            <mc:Fallback>
+              <p:sp>
+                <p:nvSpPr>
+                  <p:cNvPr id="20" name="TextBox 19">
+                    <a:extLst>
+                      <a:ext uri="{FF2B5EF4-FFF2-40B4-BE49-F238E27FC236}">
+                        <a16:creationId xmlns:a16="http://schemas.microsoft.com/office/drawing/2014/main" id="{2356A1E3-27DA-C405-2B36-4ECB7D862D1F}"/>
+                      </a:ext>
+                    </a:extLst>
+                  </p:cNvPr>
+                  <p:cNvSpPr txBox="1">
+                    <a:spLocks noRot="1" noChangeAspect="1" noMove="1" noResize="1" noEditPoints="1" noAdjustHandles="1" noChangeArrowheads="1" noChangeShapeType="1" noTextEdit="1"/>
+                  </p:cNvSpPr>
+                  <p:nvPr/>
+                </p:nvSpPr>
+                <p:spPr>
+                  <a:xfrm>
+                    <a:off x="7615428" y="4152900"/>
+                    <a:ext cx="347851" cy="369332"/>
+                  </a:xfrm>
+                  <a:prstGeom prst="rect">
+                    <a:avLst/>
+                  </a:prstGeom>
+                  <a:blipFill>
+                    <a:blip r:embed="rId8"/>
+                    <a:stretch>
+                      <a:fillRect l="-24561" t="-1639" r="-22807" b="-9836"/>
+                    </a:stretch>
+                  </a:blipFill>
+                </p:spPr>
+                <p:txBody>
+                  <a:bodyPr/>
+                  <a:lstStyle/>
+                  <a:p>
+                    <a:r>
+                      <a:rPr lang="en-IN">
+                        <a:noFill/>
+                      </a:rPr>
+                      <a:t> </a:t>
+                    </a:r>
+                  </a:p>
+                </p:txBody>
+              </p:sp>
+            </mc:Fallback>
+          </mc:AlternateContent>
+          <mc:AlternateContent xmlns:mc="http://schemas.openxmlformats.org/markup-compatibility/2006">
+            <mc:Choice xmlns:a14="http://schemas.microsoft.com/office/drawing/2010/main" Requires="a14">
+              <p:sp>
+                <p:nvSpPr>
+                  <p:cNvPr id="21" name="TextBox 20">
+                    <a:extLst>
+                      <a:ext uri="{FF2B5EF4-FFF2-40B4-BE49-F238E27FC236}">
+                        <a16:creationId xmlns:a16="http://schemas.microsoft.com/office/drawing/2014/main" id="{80317FD9-B67C-60E6-3E9A-4D528119CBF3}"/>
+                      </a:ext>
+                    </a:extLst>
+                  </p:cNvPr>
+                  <p:cNvSpPr txBox="1"/>
+                  <p:nvPr/>
+                </p:nvSpPr>
+                <p:spPr>
+                  <a:xfrm>
+                    <a:off x="4328160" y="914400"/>
+                    <a:ext cx="335027" cy="369332"/>
+                  </a:xfrm>
+                  <a:prstGeom prst="rect">
+                    <a:avLst/>
+                  </a:prstGeom>
+                  <a:noFill/>
+                </p:spPr>
+                <p:txBody>
+                  <a:bodyPr wrap="none" lIns="0" tIns="0" rIns="0" bIns="0" rtlCol="0">
+                    <a:spAutoFit/>
+                  </a:bodyPr>
+                  <a:lstStyle/>
+                  <a:p>
+                    <a:pPr/>
+                    <a14:m>
+                      <m:oMathPara xmlns:m="http://schemas.openxmlformats.org/officeDocument/2006/math">
+                        <m:oMath>
+                          <m:r>
+                            <a:rPr lang="en-US" sz="2400" b="0" i="1" smtClean="0">
+                              <a:solidFill>
+                                <a:schemeClr val="accent1">
+                                  <a:lumMod val="75000"/>
+                                </a:schemeClr>
+                              </a:solidFill>
+                              <a:latin typeface="Cambria Math" panose="02040503050406030204" pitchFamily="18" charset="0"/>
+                            </a:rPr>
+                            <m:t>𝑌</m:t>
+                          </m:r>
+                          <m:r>
+                            <a:rPr lang="en-US" sz="2400" b="0" i="1" smtClean="0">
+                              <a:solidFill>
+                                <a:schemeClr val="accent1">
+                                  <a:lumMod val="75000"/>
+                                </a:schemeClr>
+                              </a:solidFill>
+                              <a:latin typeface="Cambria Math" panose="02040503050406030204" pitchFamily="18" charset="0"/>
+                            </a:rPr>
+                            <m:t>′</m:t>
+                          </m:r>
+                        </m:oMath>
+                      </m:oMathPara>
+                    </a14:m>
+                    <a:endParaRPr lang="en-US" sz="2400" dirty="0"/>
+                  </a:p>
+                </p:txBody>
+              </p:sp>
+            </mc:Choice>
+            <mc:Fallback>
+              <p:sp>
+                <p:nvSpPr>
+                  <p:cNvPr id="21" name="TextBox 20">
+                    <a:extLst>
+                      <a:ext uri="{FF2B5EF4-FFF2-40B4-BE49-F238E27FC236}">
+                        <a16:creationId xmlns:a16="http://schemas.microsoft.com/office/drawing/2014/main" id="{80317FD9-B67C-60E6-3E9A-4D528119CBF3}"/>
+                      </a:ext>
+                    </a:extLst>
+                  </p:cNvPr>
+                  <p:cNvSpPr txBox="1">
+                    <a:spLocks noRot="1" noChangeAspect="1" noMove="1" noResize="1" noEditPoints="1" noAdjustHandles="1" noChangeArrowheads="1" noChangeShapeType="1" noTextEdit="1"/>
+                  </p:cNvSpPr>
+                  <p:nvPr/>
+                </p:nvSpPr>
+                <p:spPr>
+                  <a:xfrm>
+                    <a:off x="4328160" y="914400"/>
+                    <a:ext cx="335027" cy="369332"/>
+                  </a:xfrm>
+                  <a:prstGeom prst="rect">
+                    <a:avLst/>
+                  </a:prstGeom>
+                  <a:blipFill>
+                    <a:blip r:embed="rId9"/>
+                    <a:stretch>
+                      <a:fillRect l="-25926" t="-1639" r="-25926" b="-8197"/>
+                    </a:stretch>
+                  </a:blipFill>
+                </p:spPr>
+                <p:txBody>
+                  <a:bodyPr/>
+                  <a:lstStyle/>
+                  <a:p>
+                    <a:r>
+                      <a:rPr lang="en-IN">
+                        <a:noFill/>
+                      </a:rPr>
+                      <a:t> </a:t>
+                    </a:r>
+                  </a:p>
+                </p:txBody>
+              </p:sp>
+            </mc:Fallback>
+          </mc:AlternateContent>
+          <mc:AlternateContent xmlns:mc="http://schemas.openxmlformats.org/markup-compatibility/2006">
+            <mc:Choice xmlns:a14="http://schemas.microsoft.com/office/drawing/2010/main" Requires="a14">
+              <p:sp>
+                <p:nvSpPr>
+                  <p:cNvPr id="24" name="TextBox 23">
+                    <a:extLst>
+                      <a:ext uri="{FF2B5EF4-FFF2-40B4-BE49-F238E27FC236}">
+                        <a16:creationId xmlns:a16="http://schemas.microsoft.com/office/drawing/2014/main" id="{257C3A3F-26A4-5FF4-BB70-6C68F338FEC6}"/>
+                      </a:ext>
+                    </a:extLst>
+                  </p:cNvPr>
+                  <p:cNvSpPr txBox="1"/>
+                  <p:nvPr/>
+                </p:nvSpPr>
+                <p:spPr>
+                  <a:xfrm>
+                    <a:off x="2830830" y="5229225"/>
+                    <a:ext cx="331821" cy="369332"/>
+                  </a:xfrm>
+                  <a:prstGeom prst="rect">
+                    <a:avLst/>
+                  </a:prstGeom>
+                  <a:noFill/>
+                </p:spPr>
+                <p:txBody>
+                  <a:bodyPr wrap="none" lIns="0" tIns="0" rIns="0" bIns="0" rtlCol="0">
+                    <a:spAutoFit/>
+                  </a:bodyPr>
+                  <a:lstStyle/>
+                  <a:p>
+                    <a:pPr/>
+                    <a14:m>
+                      <m:oMathPara xmlns:m="http://schemas.openxmlformats.org/officeDocument/2006/math">
+                        <m:oMath>
+                          <m:r>
+                            <a:rPr lang="en-US" sz="2400" b="0" i="1" smtClean="0">
+                              <a:solidFill>
+                                <a:schemeClr val="accent1">
+                                  <a:lumMod val="75000"/>
+                                </a:schemeClr>
+                              </a:solidFill>
+                              <a:latin typeface="Cambria Math" panose="02040503050406030204" pitchFamily="18" charset="0"/>
+                            </a:rPr>
+                            <m:t>𝑍</m:t>
+                          </m:r>
+                          <m:r>
+                            <a:rPr lang="en-US" sz="2400" b="0" i="1" smtClean="0">
+                              <a:solidFill>
+                                <a:schemeClr val="accent1">
+                                  <a:lumMod val="75000"/>
+                                </a:schemeClr>
+                              </a:solidFill>
+                              <a:latin typeface="Cambria Math" panose="02040503050406030204" pitchFamily="18" charset="0"/>
+                            </a:rPr>
+                            <m:t>′</m:t>
+                          </m:r>
+                        </m:oMath>
+                      </m:oMathPara>
+                    </a14:m>
+                    <a:endParaRPr lang="en-US" sz="2400" dirty="0">
+                      <a:solidFill>
+                        <a:schemeClr val="accent1">
+                          <a:lumMod val="75000"/>
+                        </a:schemeClr>
+                      </a:solidFill>
+                    </a:endParaRPr>
+                  </a:p>
+                </p:txBody>
+              </p:sp>
+            </mc:Choice>
+            <mc:Fallback>
+              <p:sp>
+                <p:nvSpPr>
+                  <p:cNvPr id="24" name="TextBox 23">
+                    <a:extLst>
+                      <a:ext uri="{FF2B5EF4-FFF2-40B4-BE49-F238E27FC236}">
+                        <a16:creationId xmlns:a16="http://schemas.microsoft.com/office/drawing/2014/main" id="{257C3A3F-26A4-5FF4-BB70-6C68F338FEC6}"/>
+                      </a:ext>
+                    </a:extLst>
+                  </p:cNvPr>
+                  <p:cNvSpPr txBox="1">
+                    <a:spLocks noRot="1" noChangeAspect="1" noMove="1" noResize="1" noEditPoints="1" noAdjustHandles="1" noChangeArrowheads="1" noChangeShapeType="1" noTextEdit="1"/>
+                  </p:cNvSpPr>
+                  <p:nvPr/>
+                </p:nvSpPr>
+                <p:spPr>
+                  <a:xfrm>
+                    <a:off x="2830830" y="5229225"/>
+                    <a:ext cx="331821" cy="369332"/>
+                  </a:xfrm>
+                  <a:prstGeom prst="rect">
+                    <a:avLst/>
+                  </a:prstGeom>
+                  <a:blipFill>
+                    <a:blip r:embed="rId10"/>
+                    <a:stretch>
+                      <a:fillRect l="-25926" t="-1667" r="-25926" b="-10000"/>
+                    </a:stretch>
+                  </a:blipFill>
+                </p:spPr>
+                <p:txBody>
+                  <a:bodyPr/>
+                  <a:lstStyle/>
+                  <a:p>
+                    <a:r>
+                      <a:rPr lang="en-IN">
+                        <a:noFill/>
+                      </a:rPr>
+                      <a:t> </a:t>
+                    </a:r>
+                  </a:p>
+                </p:txBody>
+              </p:sp>
+            </mc:Fallback>
+          </mc:AlternateContent>
+          <mc:AlternateContent xmlns:mc="http://schemas.openxmlformats.org/markup-compatibility/2006">
+            <mc:Choice xmlns:a14="http://schemas.microsoft.com/office/drawing/2010/main" Requires="a14">
+              <p:sp>
+                <p:nvSpPr>
+                  <p:cNvPr id="25" name="TextBox 24">
+                    <a:extLst>
+                      <a:ext uri="{FF2B5EF4-FFF2-40B4-BE49-F238E27FC236}">
+                        <a16:creationId xmlns:a16="http://schemas.microsoft.com/office/drawing/2014/main" id="{51BE2E83-CEEA-4C84-9B2F-99461ECE73E4}"/>
+                      </a:ext>
+                    </a:extLst>
+                  </p:cNvPr>
+                  <p:cNvSpPr txBox="1"/>
+                  <p:nvPr/>
+                </p:nvSpPr>
+                <p:spPr>
+                  <a:xfrm>
+                    <a:off x="4859655" y="1323975"/>
+                    <a:ext cx="245708" cy="369332"/>
+                  </a:xfrm>
+                  <a:prstGeom prst="rect">
+                    <a:avLst/>
+                  </a:prstGeom>
+                  <a:noFill/>
+                </p:spPr>
+                <p:txBody>
+                  <a:bodyPr wrap="none" lIns="0" tIns="0" rIns="0" bIns="0" rtlCol="0">
+                    <a:spAutoFit/>
+                  </a:bodyPr>
+                  <a:lstStyle/>
+                  <a:p>
+                    <a:pPr/>
+                    <a14:m>
+                      <m:oMathPara xmlns:m="http://schemas.openxmlformats.org/officeDocument/2006/math">
+                        <m:oMath>
+                          <m:r>
+                            <a:rPr lang="en-US" sz="2400" b="0" i="1" smtClean="0">
+                              <a:solidFill>
+                                <a:srgbClr val="FF0000"/>
+                              </a:solidFill>
+                              <a:latin typeface="Cambria Math" panose="02040503050406030204" pitchFamily="18" charset="0"/>
+                            </a:rPr>
+                            <m:t>𝑣</m:t>
+                          </m:r>
+                        </m:oMath>
+                      </m:oMathPara>
+                    </a14:m>
+                    <a:endParaRPr lang="en-US" sz="2400" dirty="0">
+                      <a:solidFill>
+                        <a:schemeClr val="tx1"/>
+                      </a:solidFill>
+                    </a:endParaRPr>
+                  </a:p>
+                </p:txBody>
+              </p:sp>
+            </mc:Choice>
+            <mc:Fallback>
+              <p:sp>
+                <p:nvSpPr>
+                  <p:cNvPr id="25" name="TextBox 24">
+                    <a:extLst>
+                      <a:ext uri="{FF2B5EF4-FFF2-40B4-BE49-F238E27FC236}">
+                        <a16:creationId xmlns:a16="http://schemas.microsoft.com/office/drawing/2014/main" id="{51BE2E83-CEEA-4C84-9B2F-99461ECE73E4}"/>
+                      </a:ext>
+                    </a:extLst>
+                  </p:cNvPr>
+                  <p:cNvSpPr txBox="1">
+                    <a:spLocks noRot="1" noChangeAspect="1" noMove="1" noResize="1" noEditPoints="1" noAdjustHandles="1" noChangeArrowheads="1" noChangeShapeType="1" noTextEdit="1"/>
+                  </p:cNvSpPr>
+                  <p:nvPr/>
+                </p:nvSpPr>
+                <p:spPr>
+                  <a:xfrm>
+                    <a:off x="4859655" y="1323975"/>
+                    <a:ext cx="245708" cy="369332"/>
+                  </a:xfrm>
+                  <a:prstGeom prst="rect">
+                    <a:avLst/>
+                  </a:prstGeom>
+                  <a:blipFill>
+                    <a:blip r:embed="rId11"/>
+                    <a:stretch>
+                      <a:fillRect l="-17500" r="-15000"/>
+                    </a:stretch>
+                  </a:blipFill>
+                </p:spPr>
+                <p:txBody>
+                  <a:bodyPr/>
+                  <a:lstStyle/>
+                  <a:p>
+                    <a:r>
+                      <a:rPr lang="en-IN">
+                        <a:noFill/>
+                      </a:rPr>
+                      <a:t> </a:t>
+                    </a:r>
+                  </a:p>
+                </p:txBody>
+              </p:sp>
+            </mc:Fallback>
+          </mc:AlternateContent>
+        </p:grpSp>
+        <mc:AlternateContent xmlns:mc="http://schemas.openxmlformats.org/markup-compatibility/2006">
+          <mc:Choice xmlns:a14="http://schemas.microsoft.com/office/drawing/2010/main" Requires="a14">
+            <p:sp>
+              <p:nvSpPr>
+                <p:cNvPr id="64" name="TextBox 63">
+                  <a:extLst>
+                    <a:ext uri="{FF2B5EF4-FFF2-40B4-BE49-F238E27FC236}">
+                      <a16:creationId xmlns:a16="http://schemas.microsoft.com/office/drawing/2014/main" id="{E79290D8-DCC5-09DC-2BF7-1E9CC4E25514}"/>
+                    </a:ext>
+                  </a:extLst>
+                </p:cNvPr>
+                <p:cNvSpPr txBox="1"/>
+                <p:nvPr/>
+              </p:nvSpPr>
+              <p:spPr>
+                <a:xfrm>
+                  <a:off x="4144518" y="1958340"/>
+                  <a:ext cx="229362" cy="369332"/>
+                </a:xfrm>
+                <a:prstGeom prst="rect">
+                  <a:avLst/>
+                </a:prstGeom>
+                <a:noFill/>
+              </p:spPr>
+              <p:txBody>
+                <a:bodyPr wrap="square" lIns="0" tIns="0" rIns="0" bIns="0" rtlCol="0">
+                  <a:spAutoFit/>
+                </a:bodyPr>
+                <a:lstStyle/>
+                <a:p>
+                  <a:pPr/>
+                  <a14:m>
+                    <m:oMathPara xmlns:m="http://schemas.openxmlformats.org/officeDocument/2006/math">
+                      <m:oMath>
+                        <m:r>
+                          <m:rPr>
+                            <m:sty m:val="p"/>
+                          </m:rPr>
+                          <a:rPr lang="en-US" sz="2400" b="0" i="0" smtClean="0">
+                            <a:solidFill>
+                              <a:schemeClr val="accent1">
+                                <a:lumMod val="75000"/>
+                              </a:schemeClr>
+                            </a:solidFill>
+                            <a:latin typeface="Cambria Math" panose="02040503050406030204" pitchFamily="18" charset="0"/>
+                          </a:rPr>
+                          <m:t>S</m:t>
+                        </m:r>
+                        <m:r>
+                          <a:rPr lang="en-US" sz="2400" b="0" i="0" smtClean="0">
+                            <a:solidFill>
+                              <a:schemeClr val="accent1">
+                                <a:lumMod val="75000"/>
+                              </a:schemeClr>
+                            </a:solidFill>
+                            <a:latin typeface="Cambria Math" panose="02040503050406030204" pitchFamily="18" charset="0"/>
+                          </a:rPr>
+                          <m:t>′</m:t>
+                        </m:r>
+                      </m:oMath>
+                    </m:oMathPara>
+                  </a14:m>
+                  <a:endParaRPr lang="en-US" sz="2400" dirty="0"/>
+                </a:p>
+              </p:txBody>
+            </p:sp>
+          </mc:Choice>
+          <mc:Fallback>
+            <p:sp>
+              <p:nvSpPr>
+                <p:cNvPr id="64" name="TextBox 63">
+                  <a:extLst>
+                    <a:ext uri="{FF2B5EF4-FFF2-40B4-BE49-F238E27FC236}">
+                      <a16:creationId xmlns:a16="http://schemas.microsoft.com/office/drawing/2014/main" id="{E79290D8-DCC5-09DC-2BF7-1E9CC4E25514}"/>
+                    </a:ext>
+                  </a:extLst>
+                </p:cNvPr>
+                <p:cNvSpPr txBox="1">
+                  <a:spLocks noRot="1" noChangeAspect="1" noMove="1" noResize="1" noEditPoints="1" noAdjustHandles="1" noChangeArrowheads="1" noChangeShapeType="1" noTextEdit="1"/>
+                </p:cNvSpPr>
+                <p:nvPr/>
+              </p:nvSpPr>
+              <p:spPr>
+                <a:xfrm>
+                  <a:off x="4144518" y="1958340"/>
+                  <a:ext cx="229362" cy="369332"/>
+                </a:xfrm>
+                <a:prstGeom prst="rect">
+                  <a:avLst/>
+                </a:prstGeom>
+                <a:blipFill>
+                  <a:blip r:embed="rId12"/>
+                  <a:stretch>
+                    <a:fillRect l="-50000" t="-1639" r="-52632" b="-9836"/>
+                  </a:stretch>
+                </a:blipFill>
+              </p:spPr>
+              <p:txBody>
+                <a:bodyPr/>
+                <a:lstStyle/>
+                <a:p>
+                  <a:r>
+                    <a:rPr lang="en-IN">
+                      <a:noFill/>
+                    </a:rPr>
+                    <a:t> </a:t>
+                  </a:r>
+                </a:p>
+              </p:txBody>
+            </p:sp>
+          </mc:Fallback>
+        </mc:AlternateContent>
+      </p:grpSp>
+      <p:grpSp>
+        <p:nvGrpSpPr>
+          <p:cNvPr id="35" name="Group 34">
+            <a:extLst>
+              <a:ext uri="{FF2B5EF4-FFF2-40B4-BE49-F238E27FC236}">
+                <a16:creationId xmlns:a16="http://schemas.microsoft.com/office/drawing/2014/main" id="{4BAC6538-5088-5680-5581-9B1E973B6052}"/>
+              </a:ext>
+            </a:extLst>
+          </p:cNvPr>
+          <p:cNvGrpSpPr/>
+          <p:nvPr/>
+        </p:nvGrpSpPr>
+        <p:grpSpPr>
+          <a:xfrm rot="20675807">
+            <a:off x="4876531" y="2478065"/>
+            <a:ext cx="1276668" cy="1066545"/>
+            <a:chOff x="4324032" y="2886625"/>
+            <a:chExt cx="1276668" cy="1066545"/>
+          </a:xfrm>
+        </p:grpSpPr>
+        <p:cxnSp>
+          <p:nvCxnSpPr>
+            <p:cNvPr id="28" name="Straight Arrow Connector 27">
+              <a:extLst>
+                <a:ext uri="{FF2B5EF4-FFF2-40B4-BE49-F238E27FC236}">
+                  <a16:creationId xmlns:a16="http://schemas.microsoft.com/office/drawing/2014/main" id="{D4DCD885-4BD6-FF2B-98C1-E6E1FF9189AD}"/>
+                </a:ext>
+              </a:extLst>
+            </p:cNvPr>
+            <p:cNvCxnSpPr>
+              <a:cxnSpLocks/>
+              <a:stCxn id="9" idx="5"/>
+            </p:cNvCxnSpPr>
+            <p:nvPr/>
+          </p:nvCxnSpPr>
+          <p:spPr>
+            <a:xfrm>
+              <a:off x="4507841" y="3070434"/>
+              <a:ext cx="1092859" cy="882736"/>
+            </a:xfrm>
+            <a:prstGeom prst="straightConnector1">
+              <a:avLst/>
+            </a:prstGeom>
+            <a:ln w="28575" cap="rnd">
+              <a:solidFill>
+                <a:schemeClr val="tx1"/>
+              </a:solidFill>
+              <a:round/>
+              <a:tailEnd type="triangle" w="lg" len="lg"/>
+            </a:ln>
+          </p:spPr>
+          <p:style>
+            <a:lnRef idx="1">
+              <a:schemeClr val="accent1"/>
+            </a:lnRef>
+            <a:fillRef idx="0">
+              <a:schemeClr val="accent1"/>
+            </a:fillRef>
+            <a:effectRef idx="0">
+              <a:schemeClr val="accent1"/>
+            </a:effectRef>
+            <a:fontRef idx="minor">
+              <a:schemeClr val="tx1"/>
+            </a:fontRef>
+          </p:style>
+        </p:cxnSp>
+        <p:sp>
+          <p:nvSpPr>
+            <p:cNvPr id="9" name="Oval 8">
+              <a:extLst>
+                <a:ext uri="{FF2B5EF4-FFF2-40B4-BE49-F238E27FC236}">
+                  <a16:creationId xmlns:a16="http://schemas.microsoft.com/office/drawing/2014/main" id="{44BC4753-ED5A-ABEB-8B41-B9506AC8A628}"/>
+                </a:ext>
+              </a:extLst>
+            </p:cNvPr>
+            <p:cNvSpPr/>
+            <p:nvPr/>
+          </p:nvSpPr>
+          <p:spPr>
+            <a:xfrm>
+              <a:off x="4324032" y="2886625"/>
+              <a:ext cx="215346" cy="215346"/>
+            </a:xfrm>
+            <a:prstGeom prst="ellipse">
+              <a:avLst/>
+            </a:prstGeom>
+            <a:gradFill flip="none" rotWithShape="1">
+              <a:gsLst>
+                <a:gs pos="12000">
+                  <a:schemeClr val="bg1"/>
+                </a:gs>
+                <a:gs pos="51000">
+                  <a:schemeClr val="accent5">
+                    <a:lumMod val="95000"/>
+                    <a:lumOff val="5000"/>
+                  </a:schemeClr>
+                </a:gs>
+                <a:gs pos="77000">
+                  <a:srgbClr val="1D345D"/>
+                </a:gs>
+              </a:gsLst>
+              <a:path path="circle">
+                <a:fillToRect r="100000" b="100000"/>
+              </a:path>
+              <a:tileRect l="-100000" t="-100000"/>
+            </a:gradFill>
+            <a:ln w="3175">
+              <a:solidFill>
+                <a:schemeClr val="tx1"/>
+              </a:solidFill>
+            </a:ln>
+          </p:spPr>
+          <p:style>
+            <a:lnRef idx="2">
+              <a:schemeClr val="accent1">
+                <a:shade val="50000"/>
+              </a:schemeClr>
+            </a:lnRef>
+            <a:fillRef idx="1">
+              <a:schemeClr val="accent1"/>
+            </a:fillRef>
+            <a:effectRef idx="0">
+              <a:schemeClr val="accent1"/>
+            </a:effectRef>
+            <a:fontRef idx="minor">
+              <a:schemeClr val="lt1"/>
+            </a:fontRef>
+          </p:style>
+          <p:txBody>
+            <a:bodyPr rtlCol="0" anchor="ctr"/>
+            <a:lstStyle/>
+            <a:p>
+              <a:pPr algn="ctr"/>
+              <a:endParaRPr lang="en-US"/>
+            </a:p>
+          </p:txBody>
+        </p:sp>
+      </p:grpSp>
+      <p:grpSp>
+        <p:nvGrpSpPr>
+          <p:cNvPr id="40" name="Group 39">
+            <a:extLst>
+              <a:ext uri="{FF2B5EF4-FFF2-40B4-BE49-F238E27FC236}">
+                <a16:creationId xmlns:a16="http://schemas.microsoft.com/office/drawing/2014/main" id="{01AD44EE-1940-823D-DF55-1F0DD91C8DFD}"/>
+              </a:ext>
+            </a:extLst>
+          </p:cNvPr>
+          <p:cNvGrpSpPr/>
+          <p:nvPr/>
+        </p:nvGrpSpPr>
+        <p:grpSpPr>
+          <a:xfrm>
+            <a:off x="2276856" y="3444864"/>
+            <a:ext cx="1048368" cy="983479"/>
+            <a:chOff x="2276856" y="3444864"/>
+            <a:chExt cx="1048368" cy="983479"/>
+          </a:xfrm>
+        </p:grpSpPr>
+        <p:cxnSp>
+          <p:nvCxnSpPr>
+            <p:cNvPr id="29" name="Straight Arrow Connector 28">
+              <a:extLst>
+                <a:ext uri="{FF2B5EF4-FFF2-40B4-BE49-F238E27FC236}">
+                  <a16:creationId xmlns:a16="http://schemas.microsoft.com/office/drawing/2014/main" id="{5009C445-42CD-FC69-5EEE-3BE07C6B04AA}"/>
+                </a:ext>
+              </a:extLst>
+            </p:cNvPr>
+            <p:cNvCxnSpPr>
+              <a:cxnSpLocks/>
+            </p:cNvCxnSpPr>
+            <p:nvPr/>
+          </p:nvCxnSpPr>
+          <p:spPr>
+            <a:xfrm flipV="1">
+              <a:off x="2655911" y="3444864"/>
+              <a:ext cx="0" cy="667026"/>
+            </a:xfrm>
+            <a:prstGeom prst="straightConnector1">
+              <a:avLst/>
+            </a:prstGeom>
+            <a:ln w="38100" cap="rnd">
+              <a:solidFill>
+                <a:schemeClr val="tx1"/>
+              </a:solidFill>
+              <a:round/>
+              <a:tailEnd type="triangle" w="med" len="lg"/>
+            </a:ln>
+          </p:spPr>
+          <p:style>
+            <a:lnRef idx="1">
+              <a:schemeClr val="accent1"/>
+            </a:lnRef>
+            <a:fillRef idx="0">
+              <a:schemeClr val="accent1"/>
+            </a:fillRef>
+            <a:effectRef idx="0">
+              <a:schemeClr val="accent1"/>
+            </a:effectRef>
+            <a:fontRef idx="minor">
+              <a:schemeClr val="tx1"/>
+            </a:fontRef>
+          </p:style>
+        </p:cxnSp>
+        <p:cxnSp>
+          <p:nvCxnSpPr>
+            <p:cNvPr id="36" name="Straight Arrow Connector 35">
+              <a:extLst>
+                <a:ext uri="{FF2B5EF4-FFF2-40B4-BE49-F238E27FC236}">
+                  <a16:creationId xmlns:a16="http://schemas.microsoft.com/office/drawing/2014/main" id="{D9D5C32C-E9AA-2D3F-5AE3-E3491DA03CA3}"/>
+                </a:ext>
+              </a:extLst>
+            </p:cNvPr>
+            <p:cNvCxnSpPr>
+              <a:cxnSpLocks/>
+            </p:cNvCxnSpPr>
+            <p:nvPr/>
+          </p:nvCxnSpPr>
+          <p:spPr>
+            <a:xfrm rot="5400000" flipV="1">
+              <a:off x="2991711" y="3779522"/>
+              <a:ext cx="0" cy="667026"/>
+            </a:xfrm>
+            <a:prstGeom prst="straightConnector1">
+              <a:avLst/>
+            </a:prstGeom>
+            <a:ln w="38100" cap="rnd">
+              <a:solidFill>
+                <a:schemeClr val="tx1"/>
+              </a:solidFill>
+              <a:round/>
+              <a:tailEnd type="triangle" w="med" len="lg"/>
+            </a:ln>
+          </p:spPr>
+          <p:style>
+            <a:lnRef idx="1">
+              <a:schemeClr val="accent1"/>
+            </a:lnRef>
+            <a:fillRef idx="0">
+              <a:schemeClr val="accent1"/>
+            </a:fillRef>
+            <a:effectRef idx="0">
+              <a:schemeClr val="accent1"/>
+            </a:effectRef>
+            <a:fontRef idx="minor">
+              <a:schemeClr val="tx1"/>
+            </a:fontRef>
+          </p:style>
+        </p:cxnSp>
+        <p:cxnSp>
+          <p:nvCxnSpPr>
+            <p:cNvPr id="38" name="Straight Arrow Connector 37">
+              <a:extLst>
+                <a:ext uri="{FF2B5EF4-FFF2-40B4-BE49-F238E27FC236}">
+                  <a16:creationId xmlns:a16="http://schemas.microsoft.com/office/drawing/2014/main" id="{1CEC1E49-0FA2-8438-A6B8-A8E21C7E5EBD}"/>
+                </a:ext>
+              </a:extLst>
+            </p:cNvPr>
+            <p:cNvCxnSpPr>
+              <a:cxnSpLocks/>
+            </p:cNvCxnSpPr>
+            <p:nvPr/>
+          </p:nvCxnSpPr>
+          <p:spPr>
+            <a:xfrm flipH="1">
+              <a:off x="2276856" y="4110448"/>
+              <a:ext cx="378853" cy="317895"/>
+            </a:xfrm>
+            <a:prstGeom prst="straightConnector1">
+              <a:avLst/>
+            </a:prstGeom>
+            <a:ln w="38100" cap="rnd">
+              <a:solidFill>
+                <a:schemeClr val="tx1"/>
+              </a:solidFill>
+              <a:round/>
+              <a:tailEnd type="triangle" w="med" len="lg"/>
+            </a:ln>
+          </p:spPr>
+          <p:style>
+            <a:lnRef idx="1">
+              <a:schemeClr val="accent1"/>
+            </a:lnRef>
+            <a:fillRef idx="0">
+              <a:schemeClr val="accent1"/>
+            </a:fillRef>
+            <a:effectRef idx="0">
+              <a:schemeClr val="accent1"/>
+            </a:effectRef>
+            <a:fontRef idx="minor">
+              <a:schemeClr val="tx1"/>
+            </a:fontRef>
+          </p:style>
+        </p:cxnSp>
+      </p:grpSp>
+      <p:grpSp>
+        <p:nvGrpSpPr>
+          <p:cNvPr id="42" name="Group 41">
+            <a:extLst>
+              <a:ext uri="{FF2B5EF4-FFF2-40B4-BE49-F238E27FC236}">
+                <a16:creationId xmlns:a16="http://schemas.microsoft.com/office/drawing/2014/main" id="{8F38CD48-69EC-CFA0-3EE6-19F53C6F8874}"/>
+              </a:ext>
+            </a:extLst>
+          </p:cNvPr>
+          <p:cNvGrpSpPr/>
+          <p:nvPr/>
+        </p:nvGrpSpPr>
+        <p:grpSpPr>
+          <a:xfrm>
+            <a:off x="3598087" y="3414973"/>
+            <a:ext cx="1048368" cy="983479"/>
+            <a:chOff x="2276856" y="3444864"/>
+            <a:chExt cx="1048368" cy="983479"/>
+          </a:xfrm>
+        </p:grpSpPr>
+        <p:cxnSp>
+          <p:nvCxnSpPr>
+            <p:cNvPr id="43" name="Straight Arrow Connector 42">
+              <a:extLst>
+                <a:ext uri="{FF2B5EF4-FFF2-40B4-BE49-F238E27FC236}">
+                  <a16:creationId xmlns:a16="http://schemas.microsoft.com/office/drawing/2014/main" id="{013D1556-3398-F2C2-4505-7A3D4E1DC1EA}"/>
+                </a:ext>
+              </a:extLst>
+            </p:cNvPr>
+            <p:cNvCxnSpPr>
+              <a:cxnSpLocks/>
+            </p:cNvCxnSpPr>
+            <p:nvPr/>
+          </p:nvCxnSpPr>
+          <p:spPr>
+            <a:xfrm flipV="1">
+              <a:off x="2655911" y="3444864"/>
+              <a:ext cx="0" cy="667026"/>
+            </a:xfrm>
+            <a:prstGeom prst="straightConnector1">
+              <a:avLst/>
+            </a:prstGeom>
+            <a:ln w="38100" cap="rnd">
+              <a:solidFill>
+                <a:srgbClr val="08088E"/>
+              </a:solidFill>
+              <a:round/>
+              <a:tailEnd type="triangle" w="med" len="lg"/>
+            </a:ln>
+          </p:spPr>
+          <p:style>
+            <a:lnRef idx="1">
+              <a:schemeClr val="accent1"/>
+            </a:lnRef>
+            <a:fillRef idx="0">
+              <a:schemeClr val="accent1"/>
+            </a:fillRef>
+            <a:effectRef idx="0">
+              <a:schemeClr val="accent1"/>
+            </a:effectRef>
+            <a:fontRef idx="minor">
+              <a:schemeClr val="tx1"/>
+            </a:fontRef>
+          </p:style>
+        </p:cxnSp>
+        <p:cxnSp>
+          <p:nvCxnSpPr>
+            <p:cNvPr id="44" name="Straight Arrow Connector 43">
+              <a:extLst>
+                <a:ext uri="{FF2B5EF4-FFF2-40B4-BE49-F238E27FC236}">
+                  <a16:creationId xmlns:a16="http://schemas.microsoft.com/office/drawing/2014/main" id="{27A4A9FE-BA5A-4AA4-8B05-B113A51C7756}"/>
+                </a:ext>
+              </a:extLst>
+            </p:cNvPr>
+            <p:cNvCxnSpPr>
+              <a:cxnSpLocks/>
+            </p:cNvCxnSpPr>
+            <p:nvPr/>
+          </p:nvCxnSpPr>
+          <p:spPr>
+            <a:xfrm rot="5400000" flipV="1">
+              <a:off x="2991711" y="3779522"/>
+              <a:ext cx="0" cy="667026"/>
+            </a:xfrm>
+            <a:prstGeom prst="straightConnector1">
+              <a:avLst/>
+            </a:prstGeom>
+            <a:ln w="38100" cap="rnd">
+              <a:solidFill>
+                <a:srgbClr val="08088E"/>
+              </a:solidFill>
+              <a:round/>
+              <a:tailEnd type="triangle" w="med" len="lg"/>
+            </a:ln>
+          </p:spPr>
+          <p:style>
+            <a:lnRef idx="1">
+              <a:schemeClr val="accent1"/>
+            </a:lnRef>
+            <a:fillRef idx="0">
+              <a:schemeClr val="accent1"/>
+            </a:fillRef>
+            <a:effectRef idx="0">
+              <a:schemeClr val="accent1"/>
+            </a:effectRef>
+            <a:fontRef idx="minor">
+              <a:schemeClr val="tx1"/>
+            </a:fontRef>
+          </p:style>
+        </p:cxnSp>
+        <p:cxnSp>
+          <p:nvCxnSpPr>
+            <p:cNvPr id="46" name="Straight Arrow Connector 45">
+              <a:extLst>
+                <a:ext uri="{FF2B5EF4-FFF2-40B4-BE49-F238E27FC236}">
+                  <a16:creationId xmlns:a16="http://schemas.microsoft.com/office/drawing/2014/main" id="{72105C04-F9F9-ADBE-EC4F-28B1FAA7DC4D}"/>
+                </a:ext>
+              </a:extLst>
+            </p:cNvPr>
+            <p:cNvCxnSpPr>
+              <a:cxnSpLocks/>
+            </p:cNvCxnSpPr>
+            <p:nvPr/>
+          </p:nvCxnSpPr>
+          <p:spPr>
+            <a:xfrm flipH="1">
+              <a:off x="2276856" y="4110448"/>
+              <a:ext cx="378853" cy="317895"/>
+            </a:xfrm>
+            <a:prstGeom prst="straightConnector1">
+              <a:avLst/>
+            </a:prstGeom>
+            <a:ln w="38100" cap="rnd">
+              <a:solidFill>
+                <a:srgbClr val="08088E"/>
+              </a:solidFill>
+              <a:round/>
+              <a:tailEnd type="triangle" w="med" len="lg"/>
+            </a:ln>
+          </p:spPr>
+          <p:style>
+            <a:lnRef idx="1">
+              <a:schemeClr val="accent1"/>
+            </a:lnRef>
+            <a:fillRef idx="0">
+              <a:schemeClr val="accent1"/>
+            </a:fillRef>
+            <a:effectRef idx="0">
+              <a:schemeClr val="accent1"/>
+            </a:effectRef>
+            <a:fontRef idx="minor">
+              <a:schemeClr val="tx1"/>
+            </a:fontRef>
+          </p:style>
+        </p:cxnSp>
+      </p:grpSp>
+      <mc:AlternateContent xmlns:mc="http://schemas.openxmlformats.org/markup-compatibility/2006">
+        <mc:Choice xmlns:a14="http://schemas.microsoft.com/office/drawing/2010/main" Requires="a14">
+          <p:sp>
+            <p:nvSpPr>
+              <p:cNvPr id="49" name="TextBox 48">
+                <a:extLst>
+                  <a:ext uri="{FF2B5EF4-FFF2-40B4-BE49-F238E27FC236}">
+                    <a16:creationId xmlns:a16="http://schemas.microsoft.com/office/drawing/2014/main" id="{176324FF-0C2C-7B67-3318-DB0137AB6E4F}"/>
+                  </a:ext>
+                </a:extLst>
+              </p:cNvPr>
+              <p:cNvSpPr txBox="1"/>
+              <p:nvPr/>
+            </p:nvSpPr>
+            <p:spPr>
+              <a:xfrm>
+                <a:off x="3093594" y="3709324"/>
+                <a:ext cx="241733" cy="369332"/>
+              </a:xfrm>
+              <a:prstGeom prst="rect">
+                <a:avLst/>
+              </a:prstGeom>
+              <a:noFill/>
+              <a:ln>
+                <a:noFill/>
+              </a:ln>
+            </p:spPr>
+            <p:txBody>
+              <a:bodyPr wrap="none" lIns="0" tIns="0" rIns="0" bIns="0" rtlCol="0">
+                <a:spAutoFit/>
+              </a:bodyPr>
+              <a:lstStyle/>
+              <a:p>
+                <a:pPr/>
+                <a14:m>
+                  <m:oMathPara xmlns:m="http://schemas.openxmlformats.org/officeDocument/2006/math">
+                    <m:oMath>
+                      <m:acc>
+                        <m:accPr>
+                          <m:chr m:val="̂"/>
+                          <m:ctrlPr>
+                            <a:rPr lang="en-US" sz="2400" b="0" i="1" smtClean="0">
+                              <a:solidFill>
+                                <a:schemeClr val="tx1">
+                                  <a:lumMod val="85000"/>
+                                  <a:lumOff val="15000"/>
+                                </a:schemeClr>
+                              </a:solidFill>
+                              <a:latin typeface="Cambria Math" panose="02040503050406030204" pitchFamily="18" charset="0"/>
+                            </a:rPr>
+                          </m:ctrlPr>
+                        </m:accPr>
+                        <m:e>
+                          <m:r>
+                            <a:rPr lang="en-US" sz="2400" b="0" i="1" smtClean="0">
+                              <a:solidFill>
+                                <a:schemeClr val="tx1">
+                                  <a:lumMod val="85000"/>
+                                  <a:lumOff val="15000"/>
+                                </a:schemeClr>
+                              </a:solidFill>
+                              <a:latin typeface="Cambria Math" panose="02040503050406030204" pitchFamily="18" charset="0"/>
+                            </a:rPr>
+                            <m:t>𝑥</m:t>
+                          </m:r>
+                        </m:e>
+                      </m:acc>
+                    </m:oMath>
+                  </m:oMathPara>
+                </a14:m>
+                <a:endParaRPr lang="en-US" sz="2400" dirty="0">
+                  <a:solidFill>
+                    <a:schemeClr val="tx1">
+                      <a:lumMod val="85000"/>
+                      <a:lumOff val="15000"/>
+                    </a:schemeClr>
+                  </a:solidFill>
+                </a:endParaRPr>
+              </a:p>
+            </p:txBody>
+          </p:sp>
+        </mc:Choice>
+        <mc:Fallback>
+          <p:sp>
+            <p:nvSpPr>
+              <p:cNvPr id="49" name="TextBox 48">
+                <a:extLst>
+                  <a:ext uri="{FF2B5EF4-FFF2-40B4-BE49-F238E27FC236}">
+                    <a16:creationId xmlns:a16="http://schemas.microsoft.com/office/drawing/2014/main" id="{176324FF-0C2C-7B67-3318-DB0137AB6E4F}"/>
+                  </a:ext>
+                </a:extLst>
+              </p:cNvPr>
+              <p:cNvSpPr txBox="1">
+                <a:spLocks noRot="1" noChangeAspect="1" noMove="1" noResize="1" noEditPoints="1" noAdjustHandles="1" noChangeArrowheads="1" noChangeShapeType="1" noTextEdit="1"/>
+              </p:cNvSpPr>
+              <p:nvPr/>
+            </p:nvSpPr>
+            <p:spPr>
+              <a:xfrm>
+                <a:off x="3093594" y="3709324"/>
+                <a:ext cx="241733" cy="369332"/>
+              </a:xfrm>
+              <a:prstGeom prst="rect">
+                <a:avLst/>
+              </a:prstGeom>
+              <a:blipFill>
+                <a:blip r:embed="rId13"/>
+                <a:stretch>
+                  <a:fillRect l="-15000" t="-16393" r="-77500"/>
+                </a:stretch>
+              </a:blipFill>
+              <a:ln>
+                <a:noFill/>
+              </a:ln>
+            </p:spPr>
+            <p:txBody>
+              <a:bodyPr/>
+              <a:lstStyle/>
+              <a:p>
+                <a:r>
+                  <a:rPr lang="en-IN">
+                    <a:noFill/>
+                  </a:rPr>
+                  <a:t> </a:t>
+                </a:r>
+              </a:p>
+            </p:txBody>
+          </p:sp>
+        </mc:Fallback>
+      </mc:AlternateContent>
+      <mc:AlternateContent xmlns:mc="http://schemas.openxmlformats.org/markup-compatibility/2006">
+        <mc:Choice xmlns:a14="http://schemas.microsoft.com/office/drawing/2010/main" Requires="a14">
+          <p:sp>
+            <p:nvSpPr>
+              <p:cNvPr id="51" name="TextBox 50">
+                <a:extLst>
+                  <a:ext uri="{FF2B5EF4-FFF2-40B4-BE49-F238E27FC236}">
+                    <a16:creationId xmlns:a16="http://schemas.microsoft.com/office/drawing/2014/main" id="{A1DF7251-B024-E05C-D944-4E352E00662B}"/>
+                  </a:ext>
+                </a:extLst>
+              </p:cNvPr>
+              <p:cNvSpPr txBox="1"/>
+              <p:nvPr/>
+            </p:nvSpPr>
+            <p:spPr>
+              <a:xfrm>
+                <a:off x="2107745" y="4042710"/>
+                <a:ext cx="223266" cy="369332"/>
+              </a:xfrm>
+              <a:prstGeom prst="rect">
+                <a:avLst/>
+              </a:prstGeom>
+              <a:noFill/>
+              <a:ln>
+                <a:noFill/>
+              </a:ln>
+            </p:spPr>
+            <p:txBody>
+              <a:bodyPr wrap="none" lIns="0" tIns="0" rIns="0" bIns="0" rtlCol="0">
+                <a:spAutoFit/>
+              </a:bodyPr>
+              <a:lstStyle/>
+              <a:p>
+                <a:pPr/>
+                <a14:m>
+                  <m:oMathPara xmlns:m="http://schemas.openxmlformats.org/officeDocument/2006/math">
+                    <m:oMath>
+                      <m:acc>
+                        <m:accPr>
+                          <m:chr m:val="̂"/>
+                          <m:ctrlPr>
+                            <a:rPr lang="en-US" sz="2400" b="0" i="1" smtClean="0">
+                              <a:solidFill>
+                                <a:schemeClr val="tx1">
+                                  <a:lumMod val="85000"/>
+                                  <a:lumOff val="15000"/>
+                                </a:schemeClr>
+                              </a:solidFill>
+                              <a:latin typeface="Cambria Math" panose="02040503050406030204" pitchFamily="18" charset="0"/>
+                            </a:rPr>
+                          </m:ctrlPr>
+                        </m:accPr>
+                        <m:e>
+                          <m:r>
+                            <a:rPr lang="en-US" sz="2400" b="0" i="1" smtClean="0">
+                              <a:solidFill>
+                                <a:schemeClr val="tx1">
+                                  <a:lumMod val="85000"/>
+                                  <a:lumOff val="15000"/>
+                                </a:schemeClr>
+                              </a:solidFill>
+                              <a:latin typeface="Cambria Math" panose="02040503050406030204" pitchFamily="18" charset="0"/>
+                            </a:rPr>
+                            <m:t>𝑧</m:t>
+                          </m:r>
+                        </m:e>
+                      </m:acc>
+                    </m:oMath>
+                  </m:oMathPara>
+                </a14:m>
+                <a:endParaRPr lang="en-US" sz="2400" dirty="0">
+                  <a:solidFill>
+                    <a:schemeClr val="tx1">
+                      <a:lumMod val="85000"/>
+                      <a:lumOff val="15000"/>
+                    </a:schemeClr>
+                  </a:solidFill>
+                </a:endParaRPr>
+              </a:p>
+            </p:txBody>
+          </p:sp>
+        </mc:Choice>
+        <mc:Fallback>
+          <p:sp>
+            <p:nvSpPr>
+              <p:cNvPr id="51" name="TextBox 50">
+                <a:extLst>
+                  <a:ext uri="{FF2B5EF4-FFF2-40B4-BE49-F238E27FC236}">
+                    <a16:creationId xmlns:a16="http://schemas.microsoft.com/office/drawing/2014/main" id="{A1DF7251-B024-E05C-D944-4E352E00662B}"/>
+                  </a:ext>
+                </a:extLst>
+              </p:cNvPr>
+              <p:cNvSpPr txBox="1">
+                <a:spLocks noRot="1" noChangeAspect="1" noMove="1" noResize="1" noEditPoints="1" noAdjustHandles="1" noChangeArrowheads="1" noChangeShapeType="1" noTextEdit="1"/>
+              </p:cNvSpPr>
+              <p:nvPr/>
+            </p:nvSpPr>
+            <p:spPr>
+              <a:xfrm>
+                <a:off x="2107745" y="4042710"/>
+                <a:ext cx="223266" cy="369332"/>
+              </a:xfrm>
+              <a:prstGeom prst="rect">
+                <a:avLst/>
+              </a:prstGeom>
+              <a:blipFill>
+                <a:blip r:embed="rId14"/>
+                <a:stretch>
+                  <a:fillRect l="-19444" t="-16393" r="-130556"/>
+                </a:stretch>
+              </a:blipFill>
+              <a:ln>
+                <a:noFill/>
+              </a:ln>
+            </p:spPr>
+            <p:txBody>
+              <a:bodyPr/>
+              <a:lstStyle/>
+              <a:p>
+                <a:r>
+                  <a:rPr lang="en-IN">
+                    <a:noFill/>
+                  </a:rPr>
+                  <a:t> </a:t>
+                </a:r>
+              </a:p>
+            </p:txBody>
+          </p:sp>
+        </mc:Fallback>
+      </mc:AlternateContent>
+      <mc:AlternateContent xmlns:mc="http://schemas.openxmlformats.org/markup-compatibility/2006">
+        <mc:Choice xmlns:a14="http://schemas.microsoft.com/office/drawing/2010/main" Requires="a14">
+          <p:sp>
+            <p:nvSpPr>
+              <p:cNvPr id="53" name="TextBox 52">
+                <a:extLst>
+                  <a:ext uri="{FF2B5EF4-FFF2-40B4-BE49-F238E27FC236}">
+                    <a16:creationId xmlns:a16="http://schemas.microsoft.com/office/drawing/2014/main" id="{EE3AE221-CD0F-0523-CC90-66833C290F53}"/>
+                  </a:ext>
+                </a:extLst>
+              </p:cNvPr>
+              <p:cNvSpPr txBox="1"/>
+              <p:nvPr/>
+            </p:nvSpPr>
+            <p:spPr>
+              <a:xfrm>
+                <a:off x="2383978" y="3256884"/>
+                <a:ext cx="245708" cy="369332"/>
+              </a:xfrm>
+              <a:prstGeom prst="rect">
+                <a:avLst/>
+              </a:prstGeom>
+              <a:noFill/>
+              <a:ln>
+                <a:noFill/>
+              </a:ln>
+            </p:spPr>
+            <p:txBody>
+              <a:bodyPr wrap="none" lIns="0" tIns="0" rIns="0" bIns="0" rtlCol="0">
+                <a:spAutoFit/>
+              </a:bodyPr>
+              <a:lstStyle/>
+              <a:p>
+                <a:pPr/>
+                <a14:m>
+                  <m:oMathPara xmlns:m="http://schemas.openxmlformats.org/officeDocument/2006/math">
+                    <m:oMath>
+                      <m:acc>
+                        <m:accPr>
+                          <m:chr m:val="̂"/>
+                          <m:ctrlPr>
+                            <a:rPr lang="en-US" sz="2400" b="0" i="1" smtClean="0">
+                              <a:solidFill>
+                                <a:schemeClr val="tx1">
+                                  <a:lumMod val="85000"/>
+                                  <a:lumOff val="15000"/>
+                                </a:schemeClr>
+                              </a:solidFill>
+                              <a:latin typeface="Cambria Math" panose="02040503050406030204" pitchFamily="18" charset="0"/>
+                            </a:rPr>
+                          </m:ctrlPr>
+                        </m:accPr>
+                        <m:e>
+                          <m:r>
+                            <a:rPr lang="en-US" sz="2400" b="0" i="1" smtClean="0">
+                              <a:solidFill>
+                                <a:schemeClr val="tx1">
+                                  <a:lumMod val="85000"/>
+                                  <a:lumOff val="15000"/>
+                                </a:schemeClr>
+                              </a:solidFill>
+                              <a:latin typeface="Cambria Math" panose="02040503050406030204" pitchFamily="18" charset="0"/>
+                            </a:rPr>
+                            <m:t>𝑦</m:t>
+                          </m:r>
+                        </m:e>
+                      </m:acc>
+                    </m:oMath>
+                  </m:oMathPara>
+                </a14:m>
+                <a:endParaRPr lang="en-US" sz="2400" dirty="0">
+                  <a:solidFill>
+                    <a:schemeClr val="tx1">
+                      <a:lumMod val="85000"/>
+                      <a:lumOff val="15000"/>
+                    </a:schemeClr>
+                  </a:solidFill>
+                </a:endParaRPr>
+              </a:p>
+            </p:txBody>
+          </p:sp>
+        </mc:Choice>
+        <mc:Fallback>
+          <p:sp>
+            <p:nvSpPr>
+              <p:cNvPr id="53" name="TextBox 52">
+                <a:extLst>
+                  <a:ext uri="{FF2B5EF4-FFF2-40B4-BE49-F238E27FC236}">
+                    <a16:creationId xmlns:a16="http://schemas.microsoft.com/office/drawing/2014/main" id="{EE3AE221-CD0F-0523-CC90-66833C290F53}"/>
+                  </a:ext>
+                </a:extLst>
+              </p:cNvPr>
+              <p:cNvSpPr txBox="1">
+                <a:spLocks noRot="1" noChangeAspect="1" noMove="1" noResize="1" noEditPoints="1" noAdjustHandles="1" noChangeArrowheads="1" noChangeShapeType="1" noTextEdit="1"/>
+              </p:cNvSpPr>
+              <p:nvPr/>
+            </p:nvSpPr>
+            <p:spPr>
+              <a:xfrm>
+                <a:off x="2383978" y="3256884"/>
+                <a:ext cx="245708" cy="369332"/>
+              </a:xfrm>
+              <a:prstGeom prst="rect">
+                <a:avLst/>
+              </a:prstGeom>
+              <a:blipFill>
+                <a:blip r:embed="rId15"/>
+                <a:stretch>
+                  <a:fillRect l="-30000" t="-16393" r="-80000" b="-24590"/>
+                </a:stretch>
+              </a:blipFill>
+              <a:ln>
+                <a:noFill/>
+              </a:ln>
+            </p:spPr>
+            <p:txBody>
+              <a:bodyPr/>
+              <a:lstStyle/>
+              <a:p>
+                <a:r>
+                  <a:rPr lang="en-IN">
+                    <a:noFill/>
+                  </a:rPr>
+                  <a:t> </a:t>
+                </a:r>
+              </a:p>
+            </p:txBody>
+          </p:sp>
+        </mc:Fallback>
+      </mc:AlternateContent>
+      <mc:AlternateContent xmlns:mc="http://schemas.openxmlformats.org/markup-compatibility/2006">
+        <mc:Choice xmlns:a14="http://schemas.microsoft.com/office/drawing/2010/main" Requires="a14">
+          <p:sp>
+            <p:nvSpPr>
+              <p:cNvPr id="61" name="TextBox 60">
+                <a:extLst>
+                  <a:ext uri="{FF2B5EF4-FFF2-40B4-BE49-F238E27FC236}">
+                    <a16:creationId xmlns:a16="http://schemas.microsoft.com/office/drawing/2014/main" id="{510E71D4-2D89-6639-317D-BBD324E4A68C}"/>
+                  </a:ext>
+                </a:extLst>
+              </p:cNvPr>
+              <p:cNvSpPr txBox="1"/>
+              <p:nvPr/>
+            </p:nvSpPr>
+            <p:spPr>
+              <a:xfrm>
+                <a:off x="4397013" y="3667940"/>
+                <a:ext cx="321883" cy="369332"/>
+              </a:xfrm>
+              <a:prstGeom prst="rect">
+                <a:avLst/>
+              </a:prstGeom>
+              <a:noFill/>
+              <a:ln>
+                <a:noFill/>
+              </a:ln>
+            </p:spPr>
+            <p:txBody>
+              <a:bodyPr wrap="none" lIns="0" tIns="0" rIns="0" bIns="0" rtlCol="0">
+                <a:spAutoFit/>
+              </a:bodyPr>
+              <a:lstStyle/>
+              <a:p>
+                <a:pPr/>
+                <a14:m>
+                  <m:oMathPara xmlns:m="http://schemas.openxmlformats.org/officeDocument/2006/math">
+                    <m:oMath>
+                      <m:acc>
+                        <m:accPr>
+                          <m:chr m:val="̂"/>
+                          <m:ctrlPr>
+                            <a:rPr lang="en-US" sz="2400" b="0" i="1" smtClean="0">
+                              <a:solidFill>
+                                <a:schemeClr val="accent1">
+                                  <a:lumMod val="75000"/>
+                                </a:schemeClr>
+                              </a:solidFill>
+                              <a:latin typeface="Cambria Math" panose="02040503050406030204" pitchFamily="18" charset="0"/>
+                            </a:rPr>
+                          </m:ctrlPr>
+                        </m:accPr>
+                        <m:e>
+                          <m:r>
+                            <a:rPr lang="en-US" sz="2400" b="0" i="1" smtClean="0">
+                              <a:solidFill>
+                                <a:schemeClr val="accent1">
+                                  <a:lumMod val="75000"/>
+                                </a:schemeClr>
+                              </a:solidFill>
+                              <a:latin typeface="Cambria Math" panose="02040503050406030204" pitchFamily="18" charset="0"/>
+                            </a:rPr>
+                            <m:t>𝑥</m:t>
+                          </m:r>
+                        </m:e>
+                      </m:acc>
+                      <m:r>
+                        <a:rPr lang="en-US" sz="2400" b="0" i="1" smtClean="0">
+                          <a:solidFill>
+                            <a:schemeClr val="accent1">
+                              <a:lumMod val="75000"/>
+                            </a:schemeClr>
+                          </a:solidFill>
+                          <a:latin typeface="Cambria Math" panose="02040503050406030204" pitchFamily="18" charset="0"/>
+                        </a:rPr>
+                        <m:t>′</m:t>
+                      </m:r>
+                    </m:oMath>
+                  </m:oMathPara>
+                </a14:m>
+                <a:endParaRPr lang="en-US" sz="2400" dirty="0">
+                  <a:solidFill>
+                    <a:schemeClr val="accent1">
+                      <a:lumMod val="75000"/>
+                    </a:schemeClr>
+                  </a:solidFill>
+                </a:endParaRPr>
+              </a:p>
+            </p:txBody>
+          </p:sp>
+        </mc:Choice>
+        <mc:Fallback>
+          <p:sp>
+            <p:nvSpPr>
+              <p:cNvPr id="61" name="TextBox 60">
+                <a:extLst>
+                  <a:ext uri="{FF2B5EF4-FFF2-40B4-BE49-F238E27FC236}">
+                    <a16:creationId xmlns:a16="http://schemas.microsoft.com/office/drawing/2014/main" id="{510E71D4-2D89-6639-317D-BBD324E4A68C}"/>
+                  </a:ext>
+                </a:extLst>
+              </p:cNvPr>
+              <p:cNvSpPr txBox="1">
+                <a:spLocks noRot="1" noChangeAspect="1" noMove="1" noResize="1" noEditPoints="1" noAdjustHandles="1" noChangeArrowheads="1" noChangeShapeType="1" noTextEdit="1"/>
+              </p:cNvSpPr>
+              <p:nvPr/>
+            </p:nvSpPr>
+            <p:spPr>
+              <a:xfrm>
+                <a:off x="4397013" y="3667940"/>
+                <a:ext cx="321883" cy="369332"/>
+              </a:xfrm>
+              <a:prstGeom prst="rect">
+                <a:avLst/>
+              </a:prstGeom>
+              <a:blipFill>
+                <a:blip r:embed="rId16"/>
+                <a:stretch>
+                  <a:fillRect l="-11321" t="-18333" r="-58491" b="-10000"/>
+                </a:stretch>
+              </a:blipFill>
+              <a:ln>
+                <a:noFill/>
+              </a:ln>
+            </p:spPr>
+            <p:txBody>
+              <a:bodyPr/>
+              <a:lstStyle/>
+              <a:p>
+                <a:r>
+                  <a:rPr lang="en-IN">
+                    <a:noFill/>
+                  </a:rPr>
+                  <a:t> </a:t>
+                </a:r>
+              </a:p>
+            </p:txBody>
+          </p:sp>
+        </mc:Fallback>
+      </mc:AlternateContent>
+      <mc:AlternateContent xmlns:mc="http://schemas.openxmlformats.org/markup-compatibility/2006">
+        <mc:Choice xmlns:a14="http://schemas.microsoft.com/office/drawing/2010/main" Requires="a14">
+          <p:sp>
+            <p:nvSpPr>
+              <p:cNvPr id="65" name="TextBox 64">
+                <a:extLst>
+                  <a:ext uri="{FF2B5EF4-FFF2-40B4-BE49-F238E27FC236}">
+                    <a16:creationId xmlns:a16="http://schemas.microsoft.com/office/drawing/2014/main" id="{2181F2F0-172A-0723-5CD7-AFD21F495469}"/>
+                  </a:ext>
+                </a:extLst>
+              </p:cNvPr>
+              <p:cNvSpPr txBox="1"/>
+              <p:nvPr/>
+            </p:nvSpPr>
+            <p:spPr>
+              <a:xfrm>
+                <a:off x="3328614" y="4121984"/>
+                <a:ext cx="303416" cy="369332"/>
+              </a:xfrm>
+              <a:prstGeom prst="rect">
+                <a:avLst/>
+              </a:prstGeom>
+              <a:noFill/>
+              <a:ln>
+                <a:noFill/>
+              </a:ln>
+            </p:spPr>
+            <p:txBody>
+              <a:bodyPr wrap="none" lIns="0" tIns="0" rIns="0" bIns="0" rtlCol="0">
+                <a:spAutoFit/>
+              </a:bodyPr>
+              <a:lstStyle/>
+              <a:p>
+                <a:pPr/>
+                <a14:m>
+                  <m:oMathPara xmlns:m="http://schemas.openxmlformats.org/officeDocument/2006/math">
+                    <m:oMath>
+                      <m:acc>
+                        <m:accPr>
+                          <m:chr m:val="̂"/>
+                          <m:ctrlPr>
+                            <a:rPr lang="en-US" sz="2400" b="0" i="1" smtClean="0">
+                              <a:solidFill>
+                                <a:schemeClr val="accent1">
+                                  <a:lumMod val="75000"/>
+                                </a:schemeClr>
+                              </a:solidFill>
+                              <a:latin typeface="Cambria Math" panose="02040503050406030204" pitchFamily="18" charset="0"/>
+                            </a:rPr>
+                          </m:ctrlPr>
+                        </m:accPr>
+                        <m:e>
+                          <m:r>
+                            <a:rPr lang="en-US" sz="2400" b="0" i="1" smtClean="0">
+                              <a:solidFill>
+                                <a:schemeClr val="accent1">
+                                  <a:lumMod val="75000"/>
+                                </a:schemeClr>
+                              </a:solidFill>
+                              <a:latin typeface="Cambria Math" panose="02040503050406030204" pitchFamily="18" charset="0"/>
+                            </a:rPr>
+                            <m:t>𝑧</m:t>
+                          </m:r>
+                        </m:e>
+                      </m:acc>
+                      <m:r>
+                        <a:rPr lang="en-US" sz="2400" b="0" i="1" smtClean="0">
+                          <a:solidFill>
+                            <a:schemeClr val="accent1">
+                              <a:lumMod val="75000"/>
+                            </a:schemeClr>
+                          </a:solidFill>
+                          <a:latin typeface="Cambria Math" panose="02040503050406030204" pitchFamily="18" charset="0"/>
+                        </a:rPr>
+                        <m:t>′</m:t>
+                      </m:r>
+                    </m:oMath>
+                  </m:oMathPara>
+                </a14:m>
+                <a:endParaRPr lang="en-US" sz="2400" dirty="0">
+                  <a:solidFill>
+                    <a:schemeClr val="accent1">
+                      <a:lumMod val="75000"/>
+                    </a:schemeClr>
+                  </a:solidFill>
+                </a:endParaRPr>
+              </a:p>
+            </p:txBody>
+          </p:sp>
+        </mc:Choice>
+        <mc:Fallback>
+          <p:sp>
+            <p:nvSpPr>
+              <p:cNvPr id="65" name="TextBox 64">
+                <a:extLst>
+                  <a:ext uri="{FF2B5EF4-FFF2-40B4-BE49-F238E27FC236}">
+                    <a16:creationId xmlns:a16="http://schemas.microsoft.com/office/drawing/2014/main" id="{2181F2F0-172A-0723-5CD7-AFD21F495469}"/>
+                  </a:ext>
+                </a:extLst>
+              </p:cNvPr>
+              <p:cNvSpPr txBox="1">
+                <a:spLocks noRot="1" noChangeAspect="1" noMove="1" noResize="1" noEditPoints="1" noAdjustHandles="1" noChangeArrowheads="1" noChangeShapeType="1" noTextEdit="1"/>
+              </p:cNvSpPr>
+              <p:nvPr/>
+            </p:nvSpPr>
+            <p:spPr>
+              <a:xfrm>
+                <a:off x="3328614" y="4121984"/>
+                <a:ext cx="303416" cy="369332"/>
+              </a:xfrm>
+              <a:prstGeom prst="rect">
+                <a:avLst/>
+              </a:prstGeom>
+              <a:blipFill>
+                <a:blip r:embed="rId17"/>
+                <a:stretch>
+                  <a:fillRect l="-12000" t="-16393" r="-96000" b="-9836"/>
+                </a:stretch>
+              </a:blipFill>
+              <a:ln>
+                <a:noFill/>
+              </a:ln>
+            </p:spPr>
+            <p:txBody>
+              <a:bodyPr/>
+              <a:lstStyle/>
+              <a:p>
+                <a:r>
+                  <a:rPr lang="en-IN">
+                    <a:noFill/>
+                  </a:rPr>
+                  <a:t> </a:t>
+                </a:r>
+              </a:p>
+            </p:txBody>
+          </p:sp>
+        </mc:Fallback>
+      </mc:AlternateContent>
+      <mc:AlternateContent xmlns:mc="http://schemas.openxmlformats.org/markup-compatibility/2006">
+        <mc:Choice xmlns:a14="http://schemas.microsoft.com/office/drawing/2010/main" Requires="a14">
+          <p:sp>
+            <p:nvSpPr>
+              <p:cNvPr id="67" name="TextBox 66">
+                <a:extLst>
+                  <a:ext uri="{FF2B5EF4-FFF2-40B4-BE49-F238E27FC236}">
+                    <a16:creationId xmlns:a16="http://schemas.microsoft.com/office/drawing/2014/main" id="{EE30F5BE-669A-F146-9710-C6A00BAE7FC6}"/>
+                  </a:ext>
+                </a:extLst>
+              </p:cNvPr>
+              <p:cNvSpPr txBox="1"/>
+              <p:nvPr/>
+            </p:nvSpPr>
+            <p:spPr>
+              <a:xfrm>
+                <a:off x="3649297" y="3244078"/>
+                <a:ext cx="325858" cy="369332"/>
+              </a:xfrm>
+              <a:prstGeom prst="rect">
+                <a:avLst/>
+              </a:prstGeom>
+              <a:noFill/>
+              <a:ln>
+                <a:noFill/>
+              </a:ln>
+            </p:spPr>
+            <p:txBody>
+              <a:bodyPr wrap="none" lIns="0" tIns="0" rIns="0" bIns="0" rtlCol="0">
+                <a:spAutoFit/>
+              </a:bodyPr>
+              <a:lstStyle/>
+              <a:p>
+                <a:pPr/>
+                <a14:m>
+                  <m:oMathPara xmlns:m="http://schemas.openxmlformats.org/officeDocument/2006/math">
+                    <m:oMath>
+                      <m:acc>
+                        <m:accPr>
+                          <m:chr m:val="̂"/>
+                          <m:ctrlPr>
+                            <a:rPr lang="en-US" sz="2400" b="0" i="1" smtClean="0">
+                              <a:solidFill>
+                                <a:schemeClr val="accent1">
+                                  <a:lumMod val="75000"/>
+                                </a:schemeClr>
+                              </a:solidFill>
+                              <a:latin typeface="Cambria Math" panose="02040503050406030204" pitchFamily="18" charset="0"/>
+                            </a:rPr>
+                          </m:ctrlPr>
+                        </m:accPr>
+                        <m:e>
+                          <m:r>
+                            <a:rPr lang="en-US" sz="2400" b="0" i="1" smtClean="0">
+                              <a:solidFill>
+                                <a:schemeClr val="accent1">
+                                  <a:lumMod val="75000"/>
+                                </a:schemeClr>
+                              </a:solidFill>
+                              <a:latin typeface="Cambria Math" panose="02040503050406030204" pitchFamily="18" charset="0"/>
+                            </a:rPr>
+                            <m:t>𝑦</m:t>
+                          </m:r>
+                        </m:e>
+                      </m:acc>
+                      <m:r>
+                        <a:rPr lang="en-US" sz="2400" b="0" i="1" smtClean="0">
+                          <a:solidFill>
+                            <a:schemeClr val="accent1">
+                              <a:lumMod val="75000"/>
+                            </a:schemeClr>
+                          </a:solidFill>
+                          <a:latin typeface="Cambria Math" panose="02040503050406030204" pitchFamily="18" charset="0"/>
+                        </a:rPr>
+                        <m:t>′</m:t>
+                      </m:r>
+                    </m:oMath>
+                  </m:oMathPara>
+                </a14:m>
+                <a:endParaRPr lang="en-US" sz="2400" dirty="0">
+                  <a:solidFill>
+                    <a:schemeClr val="accent1">
+                      <a:lumMod val="75000"/>
+                    </a:schemeClr>
+                  </a:solidFill>
+                </a:endParaRPr>
+              </a:p>
+            </p:txBody>
+          </p:sp>
+        </mc:Choice>
+        <mc:Fallback>
+          <p:sp>
+            <p:nvSpPr>
+              <p:cNvPr id="67" name="TextBox 66">
+                <a:extLst>
+                  <a:ext uri="{FF2B5EF4-FFF2-40B4-BE49-F238E27FC236}">
+                    <a16:creationId xmlns:a16="http://schemas.microsoft.com/office/drawing/2014/main" id="{EE30F5BE-669A-F146-9710-C6A00BAE7FC6}"/>
+                  </a:ext>
+                </a:extLst>
+              </p:cNvPr>
+              <p:cNvSpPr txBox="1">
+                <a:spLocks noRot="1" noChangeAspect="1" noMove="1" noResize="1" noEditPoints="1" noAdjustHandles="1" noChangeArrowheads="1" noChangeShapeType="1" noTextEdit="1"/>
+              </p:cNvSpPr>
+              <p:nvPr/>
+            </p:nvSpPr>
+            <p:spPr>
+              <a:xfrm>
+                <a:off x="3649297" y="3244078"/>
+                <a:ext cx="325858" cy="369332"/>
+              </a:xfrm>
+              <a:prstGeom prst="rect">
+                <a:avLst/>
+              </a:prstGeom>
+              <a:blipFill>
+                <a:blip r:embed="rId18"/>
+                <a:stretch>
+                  <a:fillRect l="-22642" t="-16393" r="-58491" b="-24590"/>
+                </a:stretch>
+              </a:blipFill>
+              <a:ln>
+                <a:noFill/>
+              </a:ln>
+            </p:spPr>
+            <p:txBody>
+              <a:bodyPr/>
+              <a:lstStyle/>
+              <a:p>
+                <a:r>
+                  <a:rPr lang="en-IN">
+                    <a:noFill/>
+                  </a:rPr>
+                  <a:t> </a:t>
+                </a:r>
+              </a:p>
+            </p:txBody>
+          </p:sp>
+        </mc:Fallback>
+      </mc:AlternateContent>
+    </p:spTree>
+    <p:extLst>
+      <p:ext uri="{BB962C8B-B14F-4D97-AF65-F5344CB8AC3E}">
+        <p14:creationId xmlns:p14="http://schemas.microsoft.com/office/powerpoint/2010/main" val="2234448007"/>
       </p:ext>
     </p:extLst>
   </p:cSld>

--- a/U1-Frames-of-Reference/figures/all-figs.pptx
+++ b/U1-Frames-of-Reference/figures/all-figs.pptx
@@ -8,6 +8,8 @@
     <p:sldId id="256" r:id="rId2"/>
     <p:sldId id="257" r:id="rId3"/>
     <p:sldId id="258" r:id="rId4"/>
+    <p:sldId id="259" r:id="rId5"/>
+    <p:sldId id="260" r:id="rId6"/>
   </p:sldIdLst>
   <p:sldSz cx="12192000" cy="6858000"/>
   <p:notesSz cx="6858000" cy="9144000"/>
@@ -243,7 +245,7 @@
           <a:p>
             <a:fld id="{ED22BB23-F442-40A7-A37A-0DE665FB7F05}" type="datetimeFigureOut">
               <a:rPr lang="en-US" smtClean="0"/>
-              <a:t>10/4/2026</a:t>
+              <a:t>10/5/2026</a:t>
             </a:fld>
             <a:endParaRPr lang="en-US"/>
           </a:p>
@@ -411,7 +413,7 @@
           <a:p>
             <a:fld id="{ED22BB23-F442-40A7-A37A-0DE665FB7F05}" type="datetimeFigureOut">
               <a:rPr lang="en-US" smtClean="0"/>
-              <a:t>10/4/2026</a:t>
+              <a:t>10/5/2026</a:t>
             </a:fld>
             <a:endParaRPr lang="en-US"/>
           </a:p>
@@ -589,7 +591,7 @@
           <a:p>
             <a:fld id="{ED22BB23-F442-40A7-A37A-0DE665FB7F05}" type="datetimeFigureOut">
               <a:rPr lang="en-US" smtClean="0"/>
-              <a:t>10/4/2026</a:t>
+              <a:t>10/5/2026</a:t>
             </a:fld>
             <a:endParaRPr lang="en-US"/>
           </a:p>
@@ -757,7 +759,7 @@
           <a:p>
             <a:fld id="{ED22BB23-F442-40A7-A37A-0DE665FB7F05}" type="datetimeFigureOut">
               <a:rPr lang="en-US" smtClean="0"/>
-              <a:t>10/4/2026</a:t>
+              <a:t>10/5/2026</a:t>
             </a:fld>
             <a:endParaRPr lang="en-US"/>
           </a:p>
@@ -1002,7 +1004,7 @@
           <a:p>
             <a:fld id="{ED22BB23-F442-40A7-A37A-0DE665FB7F05}" type="datetimeFigureOut">
               <a:rPr lang="en-US" smtClean="0"/>
-              <a:t>10/4/2026</a:t>
+              <a:t>10/5/2026</a:t>
             </a:fld>
             <a:endParaRPr lang="en-US"/>
           </a:p>
@@ -1231,7 +1233,7 @@
           <a:p>
             <a:fld id="{ED22BB23-F442-40A7-A37A-0DE665FB7F05}" type="datetimeFigureOut">
               <a:rPr lang="en-US" smtClean="0"/>
-              <a:t>10/4/2026</a:t>
+              <a:t>10/5/2026</a:t>
             </a:fld>
             <a:endParaRPr lang="en-US"/>
           </a:p>
@@ -1595,7 +1597,7 @@
           <a:p>
             <a:fld id="{ED22BB23-F442-40A7-A37A-0DE665FB7F05}" type="datetimeFigureOut">
               <a:rPr lang="en-US" smtClean="0"/>
-              <a:t>10/4/2026</a:t>
+              <a:t>10/5/2026</a:t>
             </a:fld>
             <a:endParaRPr lang="en-US"/>
           </a:p>
@@ -1712,7 +1714,7 @@
           <a:p>
             <a:fld id="{ED22BB23-F442-40A7-A37A-0DE665FB7F05}" type="datetimeFigureOut">
               <a:rPr lang="en-US" smtClean="0"/>
-              <a:t>10/4/2026</a:t>
+              <a:t>10/5/2026</a:t>
             </a:fld>
             <a:endParaRPr lang="en-US"/>
           </a:p>
@@ -1807,7 +1809,7 @@
           <a:p>
             <a:fld id="{ED22BB23-F442-40A7-A37A-0DE665FB7F05}" type="datetimeFigureOut">
               <a:rPr lang="en-US" smtClean="0"/>
-              <a:t>10/4/2026</a:t>
+              <a:t>10/5/2026</a:t>
             </a:fld>
             <a:endParaRPr lang="en-US"/>
           </a:p>
@@ -2082,7 +2084,7 @@
           <a:p>
             <a:fld id="{ED22BB23-F442-40A7-A37A-0DE665FB7F05}" type="datetimeFigureOut">
               <a:rPr lang="en-US" smtClean="0"/>
-              <a:t>10/4/2026</a:t>
+              <a:t>10/5/2026</a:t>
             </a:fld>
             <a:endParaRPr lang="en-US"/>
           </a:p>
@@ -2334,7 +2336,7 @@
           <a:p>
             <a:fld id="{ED22BB23-F442-40A7-A37A-0DE665FB7F05}" type="datetimeFigureOut">
               <a:rPr lang="en-US" smtClean="0"/>
-              <a:t>10/4/2026</a:t>
+              <a:t>10/5/2026</a:t>
             </a:fld>
             <a:endParaRPr lang="en-US"/>
           </a:p>
@@ -2545,7 +2547,7 @@
           <a:p>
             <a:fld id="{ED22BB23-F442-40A7-A37A-0DE665FB7F05}" type="datetimeFigureOut">
               <a:rPr lang="en-US" smtClean="0"/>
-              <a:t>10/4/2026</a:t>
+              <a:t>10/5/2026</a:t>
             </a:fld>
             <a:endParaRPr lang="en-US"/>
           </a:p>
@@ -3339,7 +3341,10 @@
                   <a:pPr/>
                   <a14:m>
                     <m:oMathPara xmlns:m="http://schemas.openxmlformats.org/officeDocument/2006/math">
-                      <m:oMath>
+                      <m:oMathParaPr>
+                        <m:jc m:val="centerGroup"/>
+                      </m:oMathParaPr>
+                      <m:oMath xmlns:m="http://schemas.openxmlformats.org/officeDocument/2006/math">
                         <m:r>
                           <a:rPr lang="en-US" sz="2400" b="0" i="1" smtClean="0">
                             <a:latin typeface="Cambria Math" panose="02040503050406030204" pitchFamily="18" charset="0"/>
@@ -3420,7 +3425,10 @@
                   <a:pPr/>
                   <a14:m>
                     <m:oMathPara xmlns:m="http://schemas.openxmlformats.org/officeDocument/2006/math">
-                      <m:oMath>
+                      <m:oMathParaPr>
+                        <m:jc m:val="centerGroup"/>
+                      </m:oMathParaPr>
+                      <m:oMath xmlns:m="http://schemas.openxmlformats.org/officeDocument/2006/math">
                         <m:r>
                           <a:rPr lang="en-US" sz="2400" b="0" i="1" smtClean="0">
                             <a:latin typeface="Cambria Math" panose="02040503050406030204" pitchFamily="18" charset="0"/>
@@ -3501,7 +3509,10 @@
                   <a:pPr/>
                   <a14:m>
                     <m:oMathPara xmlns:m="http://schemas.openxmlformats.org/officeDocument/2006/math">
-                      <m:oMath>
+                      <m:oMathParaPr>
+                        <m:jc m:val="centerGroup"/>
+                      </m:oMathParaPr>
+                      <m:oMath xmlns:m="http://schemas.openxmlformats.org/officeDocument/2006/math">
                         <m:r>
                           <a:rPr lang="en-US" sz="2400" b="0" i="1" smtClean="0">
                             <a:solidFill>
@@ -3589,7 +3600,10 @@
                   <a:pPr/>
                   <a14:m>
                     <m:oMathPara xmlns:m="http://schemas.openxmlformats.org/officeDocument/2006/math">
-                      <m:oMath>
+                      <m:oMathParaPr>
+                        <m:jc m:val="centerGroup"/>
+                      </m:oMathParaPr>
+                      <m:oMath xmlns:m="http://schemas.openxmlformats.org/officeDocument/2006/math">
                         <m:r>
                           <a:rPr lang="en-US" sz="2400" b="0" i="1" smtClean="0">
                             <a:solidFill>
@@ -3858,7 +3872,10 @@
                   <a:pPr/>
                   <a14:m>
                     <m:oMathPara xmlns:m="http://schemas.openxmlformats.org/officeDocument/2006/math">
-                      <m:oMath>
+                      <m:oMathParaPr>
+                        <m:jc m:val="centerGroup"/>
+                      </m:oMathParaPr>
+                      <m:oMath xmlns:m="http://schemas.openxmlformats.org/officeDocument/2006/math">
                         <m:r>
                           <a:rPr lang="en-US" sz="2400" b="0" i="1" smtClean="0">
                             <a:solidFill>
@@ -3961,7 +3978,10 @@
                   <a:pPr/>
                   <a14:m>
                     <m:oMathPara xmlns:m="http://schemas.openxmlformats.org/officeDocument/2006/math">
-                      <m:oMath>
+                      <m:oMathParaPr>
+                        <m:jc m:val="centerGroup"/>
+                      </m:oMathParaPr>
+                      <m:oMath xmlns:m="http://schemas.openxmlformats.org/officeDocument/2006/math">
                         <m:r>
                           <a:rPr lang="en-US" sz="2400" b="0" i="1" smtClean="0">
                             <a:solidFill>
@@ -4058,7 +4078,10 @@
                   <a:pPr/>
                   <a14:m>
                     <m:oMathPara xmlns:m="http://schemas.openxmlformats.org/officeDocument/2006/math">
-                      <m:oMath>
+                      <m:oMathParaPr>
+                        <m:jc m:val="centerGroup"/>
+                      </m:oMathParaPr>
+                      <m:oMath xmlns:m="http://schemas.openxmlformats.org/officeDocument/2006/math">
                         <m:r>
                           <a:rPr lang="en-US" sz="2400" b="0" i="1" smtClean="0">
                             <a:solidFill>
@@ -4155,7 +4178,10 @@
                   <a:pPr/>
                   <a14:m>
                     <m:oMathPara xmlns:m="http://schemas.openxmlformats.org/officeDocument/2006/math">
-                      <m:oMath>
+                      <m:oMathParaPr>
+                        <m:jc m:val="centerGroup"/>
+                      </m:oMathParaPr>
+                      <m:oMath xmlns:m="http://schemas.openxmlformats.org/officeDocument/2006/math">
                         <m:r>
                           <a:rPr lang="en-US" sz="2400" b="0" i="1" smtClean="0">
                             <a:solidFill>
@@ -4258,7 +4284,10 @@
                   <a:pPr/>
                   <a14:m>
                     <m:oMathPara xmlns:m="http://schemas.openxmlformats.org/officeDocument/2006/math">
-                      <m:oMath>
+                      <m:oMathParaPr>
+                        <m:jc m:val="centerGroup"/>
+                      </m:oMathParaPr>
+                      <m:oMath xmlns:m="http://schemas.openxmlformats.org/officeDocument/2006/math">
                         <m:r>
                           <a:rPr lang="en-US" sz="2400" b="0" i="1" smtClean="0">
                             <a:solidFill>
@@ -4393,7 +4422,10 @@
                 <a:pPr/>
                 <a14:m>
                   <m:oMathPara xmlns:m="http://schemas.openxmlformats.org/officeDocument/2006/math">
-                    <m:oMath>
+                    <m:oMathParaPr>
+                      <m:jc m:val="centerGroup"/>
+                    </m:oMathParaPr>
+                    <m:oMath xmlns:m="http://schemas.openxmlformats.org/officeDocument/2006/math">
                       <m:r>
                         <a:rPr lang="en-US" sz="2400" b="0" i="1" smtClean="0">
                           <a:latin typeface="Cambria Math" panose="02040503050406030204" pitchFamily="18" charset="0"/>
@@ -4474,7 +4506,10 @@
                 <a:pPr/>
                 <a14:m>
                   <m:oMathPara xmlns:m="http://schemas.openxmlformats.org/officeDocument/2006/math">
-                    <m:oMath>
+                    <m:oMathParaPr>
+                      <m:jc m:val="centerGroup"/>
+                    </m:oMathParaPr>
+                    <m:oMath xmlns:m="http://schemas.openxmlformats.org/officeDocument/2006/math">
                       <m:acc>
                         <m:accPr>
                           <m:chr m:val="̅"/>
@@ -4567,7 +4602,10 @@
                 <a:pPr/>
                 <a14:m>
                   <m:oMathPara xmlns:m="http://schemas.openxmlformats.org/officeDocument/2006/math">
-                    <m:oMath>
+                    <m:oMathParaPr>
+                      <m:jc m:val="centerGroup"/>
+                    </m:oMathParaPr>
+                    <m:oMath xmlns:m="http://schemas.openxmlformats.org/officeDocument/2006/math">
                       <m:acc>
                         <m:accPr>
                           <m:chr m:val="̅"/>
@@ -4746,7 +4784,10 @@
                 <a:pPr/>
                 <a14:m>
                   <m:oMathPara xmlns:m="http://schemas.openxmlformats.org/officeDocument/2006/math">
-                    <m:oMath>
+                    <m:oMathParaPr>
+                      <m:jc m:val="centerGroup"/>
+                    </m:oMathParaPr>
+                    <m:oMath xmlns:m="http://schemas.openxmlformats.org/officeDocument/2006/math">
                       <m:r>
                         <a:rPr lang="en-US" sz="2400" b="0" i="1" smtClean="0">
                           <a:solidFill>
@@ -4845,7 +4886,10 @@
                 <a:pPr/>
                 <a14:m>
                   <m:oMathPara xmlns:m="http://schemas.openxmlformats.org/officeDocument/2006/math">
-                    <m:oMath>
+                    <m:oMathParaPr>
+                      <m:jc m:val="centerGroup"/>
+                    </m:oMathParaPr>
+                    <m:oMath xmlns:m="http://schemas.openxmlformats.org/officeDocument/2006/math">
                       <m:r>
                         <a:rPr lang="en-US" sz="2400" b="0" i="1" smtClean="0">
                           <a:solidFill>
@@ -4931,7 +4975,10 @@
                 <a:pPr/>
                 <a14:m>
                   <m:oMathPara xmlns:m="http://schemas.openxmlformats.org/officeDocument/2006/math">
-                    <m:oMath>
+                    <m:oMathParaPr>
+                      <m:jc m:val="centerGroup"/>
+                    </m:oMathParaPr>
+                    <m:oMath xmlns:m="http://schemas.openxmlformats.org/officeDocument/2006/math">
                       <m:r>
                         <a:rPr lang="en-US" sz="2400" b="0" i="1" smtClean="0">
                           <a:solidFill>
@@ -5023,7 +5070,10 @@
                 <a:pPr/>
                 <a14:m>
                   <m:oMathPara xmlns:m="http://schemas.openxmlformats.org/officeDocument/2006/math">
-                    <m:oMath>
+                    <m:oMathParaPr>
+                      <m:jc m:val="centerGroup"/>
+                    </m:oMathParaPr>
+                    <m:oMath xmlns:m="http://schemas.openxmlformats.org/officeDocument/2006/math">
                       <m:r>
                         <m:rPr>
                           <m:sty m:val="p"/>
@@ -5107,7 +5157,10 @@
                 <a:pPr/>
                 <a14:m>
                   <m:oMathPara xmlns:m="http://schemas.openxmlformats.org/officeDocument/2006/math">
-                    <m:oMath>
+                    <m:oMathParaPr>
+                      <m:jc m:val="centerGroup"/>
+                    </m:oMathParaPr>
+                    <m:oMath xmlns:m="http://schemas.openxmlformats.org/officeDocument/2006/math">
                       <m:r>
                         <m:rPr>
                           <m:sty m:val="p"/>
@@ -5388,7 +5441,10 @@
                     <a:pPr/>
                     <a14:m>
                       <m:oMathPara xmlns:m="http://schemas.openxmlformats.org/officeDocument/2006/math">
-                        <m:oMath>
+                        <m:oMathParaPr>
+                          <m:jc m:val="centerGroup"/>
+                        </m:oMathParaPr>
+                        <m:oMath xmlns:m="http://schemas.openxmlformats.org/officeDocument/2006/math">
                           <m:r>
                             <a:rPr lang="en-US" sz="2400" b="0" i="1" smtClean="0">
                               <a:latin typeface="Cambria Math" panose="02040503050406030204" pitchFamily="18" charset="0"/>
@@ -5469,7 +5525,10 @@
                     <a:pPr/>
                     <a14:m>
                       <m:oMathPara xmlns:m="http://schemas.openxmlformats.org/officeDocument/2006/math">
-                        <m:oMath>
+                        <m:oMathParaPr>
+                          <m:jc m:val="centerGroup"/>
+                        </m:oMathParaPr>
+                        <m:oMath xmlns:m="http://schemas.openxmlformats.org/officeDocument/2006/math">
                           <m:r>
                             <a:rPr lang="en-US" sz="2400" b="0" i="1" smtClean="0">
                               <a:latin typeface="Cambria Math" panose="02040503050406030204" pitchFamily="18" charset="0"/>
@@ -5550,7 +5609,10 @@
                     <a:pPr/>
                     <a14:m>
                       <m:oMathPara xmlns:m="http://schemas.openxmlformats.org/officeDocument/2006/math">
-                        <m:oMath>
+                        <m:oMathParaPr>
+                          <m:jc m:val="centerGroup"/>
+                        </m:oMathParaPr>
+                        <m:oMath xmlns:m="http://schemas.openxmlformats.org/officeDocument/2006/math">
                           <m:r>
                             <a:rPr lang="en-US" sz="2400" b="0" i="1" smtClean="0">
                               <a:solidFill>
@@ -5638,7 +5700,10 @@
                     <a:pPr/>
                     <a14:m>
                       <m:oMathPara xmlns:m="http://schemas.openxmlformats.org/officeDocument/2006/math">
-                        <m:oMath>
+                        <m:oMathParaPr>
+                          <m:jc m:val="centerGroup"/>
+                        </m:oMathParaPr>
+                        <m:oMath xmlns:m="http://schemas.openxmlformats.org/officeDocument/2006/math">
                           <m:r>
                             <a:rPr lang="en-US" sz="2400" b="0" i="1" smtClean="0">
                               <a:solidFill>
@@ -5727,7 +5792,10 @@
                   <a:pPr/>
                   <a14:m>
                     <m:oMathPara xmlns:m="http://schemas.openxmlformats.org/officeDocument/2006/math">
-                      <m:oMath>
+                      <m:oMathParaPr>
+                        <m:jc m:val="centerGroup"/>
+                      </m:oMathParaPr>
+                      <m:oMath xmlns:m="http://schemas.openxmlformats.org/officeDocument/2006/math">
                         <m:r>
                           <m:rPr>
                             <m:sty m:val="p"/>
@@ -6006,7 +6074,10 @@
                     <a:pPr/>
                     <a14:m>
                       <m:oMathPara xmlns:m="http://schemas.openxmlformats.org/officeDocument/2006/math">
-                        <m:oMath>
+                        <m:oMathParaPr>
+                          <m:jc m:val="centerGroup"/>
+                        </m:oMathParaPr>
+                        <m:oMath xmlns:m="http://schemas.openxmlformats.org/officeDocument/2006/math">
                           <m:r>
                             <a:rPr lang="en-US" sz="2400" b="0" i="1" smtClean="0">
                               <a:solidFill>
@@ -6109,7 +6180,10 @@
                     <a:pPr/>
                     <a14:m>
                       <m:oMathPara xmlns:m="http://schemas.openxmlformats.org/officeDocument/2006/math">
-                        <m:oMath>
+                        <m:oMathParaPr>
+                          <m:jc m:val="centerGroup"/>
+                        </m:oMathParaPr>
+                        <m:oMath xmlns:m="http://schemas.openxmlformats.org/officeDocument/2006/math">
                           <m:r>
                             <a:rPr lang="en-US" sz="2400" b="0" i="1" smtClean="0">
                               <a:solidFill>
@@ -6206,7 +6280,10 @@
                     <a:pPr/>
                     <a14:m>
                       <m:oMathPara xmlns:m="http://schemas.openxmlformats.org/officeDocument/2006/math">
-                        <m:oMath>
+                        <m:oMathParaPr>
+                          <m:jc m:val="centerGroup"/>
+                        </m:oMathParaPr>
+                        <m:oMath xmlns:m="http://schemas.openxmlformats.org/officeDocument/2006/math">
                           <m:r>
                             <a:rPr lang="en-US" sz="2400" b="0" i="1" smtClean="0">
                               <a:solidFill>
@@ -6303,7 +6380,10 @@
                     <a:pPr/>
                     <a14:m>
                       <m:oMathPara xmlns:m="http://schemas.openxmlformats.org/officeDocument/2006/math">
-                        <m:oMath>
+                        <m:oMathParaPr>
+                          <m:jc m:val="centerGroup"/>
+                        </m:oMathParaPr>
+                        <m:oMath xmlns:m="http://schemas.openxmlformats.org/officeDocument/2006/math">
                           <m:r>
                             <a:rPr lang="en-US" sz="2400" b="0" i="1" smtClean="0">
                               <a:solidFill>
@@ -6406,7 +6486,10 @@
                     <a:pPr/>
                     <a14:m>
                       <m:oMathPara xmlns:m="http://schemas.openxmlformats.org/officeDocument/2006/math">
-                        <m:oMath>
+                        <m:oMathParaPr>
+                          <m:jc m:val="centerGroup"/>
+                        </m:oMathParaPr>
+                        <m:oMath xmlns:m="http://schemas.openxmlformats.org/officeDocument/2006/math">
                           <m:r>
                             <a:rPr lang="en-US" sz="2400" b="0" i="1" smtClean="0">
                               <a:solidFill>
@@ -6495,7 +6578,10 @@
                   <a:pPr/>
                   <a14:m>
                     <m:oMathPara xmlns:m="http://schemas.openxmlformats.org/officeDocument/2006/math">
-                      <m:oMath>
+                      <m:oMathParaPr>
+                        <m:jc m:val="centerGroup"/>
+                      </m:oMathParaPr>
+                      <m:oMath xmlns:m="http://schemas.openxmlformats.org/officeDocument/2006/math">
                         <m:r>
                           <m:rPr>
                             <m:sty m:val="p"/>
@@ -6647,7 +6733,10 @@
                 <a:pPr/>
                 <a14:m>
                   <m:oMathPara xmlns:m="http://schemas.openxmlformats.org/officeDocument/2006/math">
-                    <m:oMath>
+                    <m:oMathParaPr>
+                      <m:jc m:val="centerGroup"/>
+                    </m:oMathParaPr>
+                    <m:oMath xmlns:m="http://schemas.openxmlformats.org/officeDocument/2006/math">
                       <m:r>
                         <a:rPr lang="en-US" sz="2400" b="0" i="1" smtClean="0">
                           <a:latin typeface="Cambria Math" panose="02040503050406030204" pitchFamily="18" charset="0"/>
@@ -6728,7 +6817,10 @@
                 <a:pPr/>
                 <a14:m>
                   <m:oMathPara xmlns:m="http://schemas.openxmlformats.org/officeDocument/2006/math">
-                    <m:oMath>
+                    <m:oMathParaPr>
+                      <m:jc m:val="centerGroup"/>
+                    </m:oMathParaPr>
+                    <m:oMath xmlns:m="http://schemas.openxmlformats.org/officeDocument/2006/math">
                       <m:r>
                         <a:rPr lang="en-US" sz="2400" b="0" i="1" smtClean="0">
                           <a:latin typeface="Cambria Math" panose="02040503050406030204" pitchFamily="18" charset="0"/>
@@ -7014,8 +7106,8 @@
               </p:style>
             </p:cxnSp>
           </p:grpSp>
-          <mc:AlternateContent xmlns:mc="http://schemas.openxmlformats.org/markup-compatibility/2006">
-            <mc:Choice xmlns:a14="http://schemas.microsoft.com/office/drawing/2010/main" Requires="a14">
+          <mc:AlternateContent xmlns:mc="http://schemas.openxmlformats.org/markup-compatibility/2006" xmlns:a14="http://schemas.microsoft.com/office/drawing/2010/main">
+            <mc:Choice Requires="a14">
               <p:sp>
                 <p:nvSpPr>
                   <p:cNvPr id="17" name="TextBox 16">
@@ -7050,7 +7142,10 @@
                     <a:pPr/>
                     <a14:m>
                       <m:oMathPara xmlns:m="http://schemas.openxmlformats.org/officeDocument/2006/math">
-                        <m:oMath>
+                        <m:oMathParaPr>
+                          <m:jc m:val="centerGroup"/>
+                        </m:oMathParaPr>
+                        <m:oMath xmlns:m="http://schemas.openxmlformats.org/officeDocument/2006/math">
                           <m:r>
                             <a:rPr lang="en-US" sz="2400" b="0" i="1" smtClean="0">
                               <a:solidFill>
@@ -7078,7 +7173,7 @@
                 </p:txBody>
               </p:sp>
             </mc:Choice>
-            <mc:Fallback>
+            <mc:Fallback xmlns="">
               <p:sp>
                 <p:nvSpPr>
                   <p:cNvPr id="17" name="TextBox 16">
@@ -7126,8 +7221,8 @@
               </p:sp>
             </mc:Fallback>
           </mc:AlternateContent>
-          <mc:AlternateContent xmlns:mc="http://schemas.openxmlformats.org/markup-compatibility/2006">
-            <mc:Choice xmlns:a14="http://schemas.microsoft.com/office/drawing/2010/main" Requires="a14">
+          <mc:AlternateContent xmlns:mc="http://schemas.openxmlformats.org/markup-compatibility/2006" xmlns:a14="http://schemas.microsoft.com/office/drawing/2010/main">
+            <mc:Choice Requires="a14">
               <p:sp>
                 <p:nvSpPr>
                   <p:cNvPr id="19" name="TextBox 18">
@@ -7162,7 +7257,10 @@
                     <a:pPr/>
                     <a14:m>
                       <m:oMathPara xmlns:m="http://schemas.openxmlformats.org/officeDocument/2006/math">
-                        <m:oMath>
+                        <m:oMathParaPr>
+                          <m:jc m:val="centerGroup"/>
+                        </m:oMathParaPr>
+                        <m:oMath xmlns:m="http://schemas.openxmlformats.org/officeDocument/2006/math">
                           <m:r>
                             <a:rPr lang="en-US" sz="2400" b="0" i="1" smtClean="0">
                               <a:solidFill>
@@ -7190,7 +7288,7 @@
                 </p:txBody>
               </p:sp>
             </mc:Choice>
-            <mc:Fallback>
+            <mc:Fallback xmlns="">
               <p:sp>
                 <p:nvSpPr>
                   <p:cNvPr id="19" name="TextBox 18">
@@ -7238,8 +7336,8 @@
               </p:sp>
             </mc:Fallback>
           </mc:AlternateContent>
-          <mc:AlternateContent xmlns:mc="http://schemas.openxmlformats.org/markup-compatibility/2006">
-            <mc:Choice xmlns:a14="http://schemas.microsoft.com/office/drawing/2010/main" Requires="a14">
+          <mc:AlternateContent xmlns:mc="http://schemas.openxmlformats.org/markup-compatibility/2006" xmlns:a14="http://schemas.microsoft.com/office/drawing/2010/main">
+            <mc:Choice Requires="a14">
               <p:sp>
                 <p:nvSpPr>
                   <p:cNvPr id="22" name="TextBox 21">
@@ -7274,7 +7372,10 @@
                     <a:pPr/>
                     <a14:m>
                       <m:oMathPara xmlns:m="http://schemas.openxmlformats.org/officeDocument/2006/math">
-                        <m:oMath>
+                        <m:oMathParaPr>
+                          <m:jc m:val="centerGroup"/>
+                        </m:oMathParaPr>
+                        <m:oMath xmlns:m="http://schemas.openxmlformats.org/officeDocument/2006/math">
                           <m:r>
                             <a:rPr lang="en-US" sz="2400" b="0" i="1" smtClean="0">
                               <a:solidFill>
@@ -7302,7 +7403,7 @@
                 </p:txBody>
               </p:sp>
             </mc:Choice>
-            <mc:Fallback>
+            <mc:Fallback xmlns="">
               <p:sp>
                 <p:nvSpPr>
                   <p:cNvPr id="22" name="TextBox 21">
@@ -7350,8 +7451,8 @@
               </p:sp>
             </mc:Fallback>
           </mc:AlternateContent>
-          <mc:AlternateContent xmlns:mc="http://schemas.openxmlformats.org/markup-compatibility/2006">
-            <mc:Choice xmlns:a14="http://schemas.microsoft.com/office/drawing/2010/main" Requires="a14">
+          <mc:AlternateContent xmlns:mc="http://schemas.openxmlformats.org/markup-compatibility/2006" xmlns:a14="http://schemas.microsoft.com/office/drawing/2010/main">
+            <mc:Choice Requires="a14">
               <p:sp>
                 <p:nvSpPr>
                   <p:cNvPr id="23" name="TextBox 22">
@@ -7386,7 +7487,10 @@
                     <a:pPr/>
                     <a14:m>
                       <m:oMathPara xmlns:m="http://schemas.openxmlformats.org/officeDocument/2006/math">
-                        <m:oMath>
+                        <m:oMathParaPr>
+                          <m:jc m:val="centerGroup"/>
+                        </m:oMathParaPr>
+                        <m:oMath xmlns:m="http://schemas.openxmlformats.org/officeDocument/2006/math">
                           <m:r>
                             <a:rPr lang="en-US" sz="2400" b="0" i="1" smtClean="0">
                               <a:solidFill>
@@ -7414,7 +7518,7 @@
                 </p:txBody>
               </p:sp>
             </mc:Choice>
-            <mc:Fallback>
+            <mc:Fallback xmlns="">
               <p:sp>
                 <p:nvSpPr>
                   <p:cNvPr id="23" name="TextBox 22">
@@ -7463,8 +7567,8 @@
             </mc:Fallback>
           </mc:AlternateContent>
         </p:grpSp>
-        <mc:AlternateContent xmlns:mc="http://schemas.openxmlformats.org/markup-compatibility/2006">
-          <mc:Choice xmlns:a14="http://schemas.microsoft.com/office/drawing/2010/main" Requires="a14">
+        <mc:AlternateContent xmlns:mc="http://schemas.openxmlformats.org/markup-compatibility/2006" xmlns:a14="http://schemas.microsoft.com/office/drawing/2010/main">
+          <mc:Choice Requires="a14">
             <p:sp>
               <p:nvSpPr>
                 <p:cNvPr id="63" name="TextBox 62">
@@ -7499,7 +7603,10 @@
                   <a:pPr/>
                   <a14:m>
                     <m:oMathPara xmlns:m="http://schemas.openxmlformats.org/officeDocument/2006/math">
-                      <m:oMath>
+                      <m:oMathParaPr>
+                        <m:jc m:val="centerGroup"/>
+                      </m:oMathParaPr>
+                      <m:oMath xmlns:m="http://schemas.openxmlformats.org/officeDocument/2006/math">
                         <m:r>
                           <m:rPr>
                             <m:sty m:val="p"/>
@@ -7530,7 +7637,7 @@
               </p:txBody>
             </p:sp>
           </mc:Choice>
-          <mc:Fallback>
+          <mc:Fallback xmlns="">
             <p:sp>
               <p:nvSpPr>
                 <p:cNvPr id="63" name="TextBox 62">
@@ -7815,8 +7922,8 @@
               </p:style>
             </p:cxnSp>
           </p:grpSp>
-          <mc:AlternateContent xmlns:mc="http://schemas.openxmlformats.org/markup-compatibility/2006">
-            <mc:Choice xmlns:a14="http://schemas.microsoft.com/office/drawing/2010/main" Requires="a14">
+          <mc:AlternateContent xmlns:mc="http://schemas.openxmlformats.org/markup-compatibility/2006" xmlns:a14="http://schemas.microsoft.com/office/drawing/2010/main">
+            <mc:Choice Requires="a14">
               <p:sp>
                 <p:nvSpPr>
                   <p:cNvPr id="18" name="TextBox 17">
@@ -7848,7 +7955,10 @@
                     <a:pPr/>
                     <a14:m>
                       <m:oMathPara xmlns:m="http://schemas.openxmlformats.org/officeDocument/2006/math">
-                        <m:oMath>
+                        <m:oMathParaPr>
+                          <m:jc m:val="centerGroup"/>
+                        </m:oMathParaPr>
+                        <m:oMath xmlns:m="http://schemas.openxmlformats.org/officeDocument/2006/math">
                           <m:r>
                             <a:rPr lang="en-US" sz="2400" b="0" i="1" smtClean="0">
                               <a:solidFill>
@@ -7885,7 +7995,7 @@
                 </p:txBody>
               </p:sp>
             </mc:Choice>
-            <mc:Fallback>
+            <mc:Fallback xmlns="">
               <p:sp>
                 <p:nvSpPr>
                   <p:cNvPr id="18" name="TextBox 17">
@@ -7930,8 +8040,8 @@
               </p:sp>
             </mc:Fallback>
           </mc:AlternateContent>
-          <mc:AlternateContent xmlns:mc="http://schemas.openxmlformats.org/markup-compatibility/2006">
-            <mc:Choice xmlns:a14="http://schemas.microsoft.com/office/drawing/2010/main" Requires="a14">
+          <mc:AlternateContent xmlns:mc="http://schemas.openxmlformats.org/markup-compatibility/2006" xmlns:a14="http://schemas.microsoft.com/office/drawing/2010/main">
+            <mc:Choice Requires="a14">
               <p:sp>
                 <p:nvSpPr>
                   <p:cNvPr id="20" name="TextBox 19">
@@ -7963,7 +8073,10 @@
                     <a:pPr/>
                     <a14:m>
                       <m:oMathPara xmlns:m="http://schemas.openxmlformats.org/officeDocument/2006/math">
-                        <m:oMath>
+                        <m:oMathParaPr>
+                          <m:jc m:val="centerGroup"/>
+                        </m:oMathParaPr>
+                        <m:oMath xmlns:m="http://schemas.openxmlformats.org/officeDocument/2006/math">
                           <m:r>
                             <a:rPr lang="en-US" sz="2400" b="0" i="1" smtClean="0">
                               <a:solidFill>
@@ -7994,7 +8107,7 @@
                 </p:txBody>
               </p:sp>
             </mc:Choice>
-            <mc:Fallback>
+            <mc:Fallback xmlns="">
               <p:sp>
                 <p:nvSpPr>
                   <p:cNvPr id="20" name="TextBox 19">
@@ -8039,8 +8152,8 @@
               </p:sp>
             </mc:Fallback>
           </mc:AlternateContent>
-          <mc:AlternateContent xmlns:mc="http://schemas.openxmlformats.org/markup-compatibility/2006">
-            <mc:Choice xmlns:a14="http://schemas.microsoft.com/office/drawing/2010/main" Requires="a14">
+          <mc:AlternateContent xmlns:mc="http://schemas.openxmlformats.org/markup-compatibility/2006" xmlns:a14="http://schemas.microsoft.com/office/drawing/2010/main">
+            <mc:Choice Requires="a14">
               <p:sp>
                 <p:nvSpPr>
                   <p:cNvPr id="21" name="TextBox 20">
@@ -8072,7 +8185,10 @@
                     <a:pPr/>
                     <a14:m>
                       <m:oMathPara xmlns:m="http://schemas.openxmlformats.org/officeDocument/2006/math">
-                        <m:oMath>
+                        <m:oMathParaPr>
+                          <m:jc m:val="centerGroup"/>
+                        </m:oMathParaPr>
+                        <m:oMath xmlns:m="http://schemas.openxmlformats.org/officeDocument/2006/math">
                           <m:r>
                             <a:rPr lang="en-US" sz="2400" b="0" i="1" smtClean="0">
                               <a:solidFill>
@@ -8103,7 +8219,7 @@
                 </p:txBody>
               </p:sp>
             </mc:Choice>
-            <mc:Fallback>
+            <mc:Fallback xmlns="">
               <p:sp>
                 <p:nvSpPr>
                   <p:cNvPr id="21" name="TextBox 20">
@@ -8148,8 +8264,8 @@
               </p:sp>
             </mc:Fallback>
           </mc:AlternateContent>
-          <mc:AlternateContent xmlns:mc="http://schemas.openxmlformats.org/markup-compatibility/2006">
-            <mc:Choice xmlns:a14="http://schemas.microsoft.com/office/drawing/2010/main" Requires="a14">
+          <mc:AlternateContent xmlns:mc="http://schemas.openxmlformats.org/markup-compatibility/2006" xmlns:a14="http://schemas.microsoft.com/office/drawing/2010/main">
+            <mc:Choice Requires="a14">
               <p:sp>
                 <p:nvSpPr>
                   <p:cNvPr id="24" name="TextBox 23">
@@ -8181,7 +8297,10 @@
                     <a:pPr/>
                     <a14:m>
                       <m:oMathPara xmlns:m="http://schemas.openxmlformats.org/officeDocument/2006/math">
-                        <m:oMath>
+                        <m:oMathParaPr>
+                          <m:jc m:val="centerGroup"/>
+                        </m:oMathParaPr>
+                        <m:oMath xmlns:m="http://schemas.openxmlformats.org/officeDocument/2006/math">
                           <m:r>
                             <a:rPr lang="en-US" sz="2400" b="0" i="1" smtClean="0">
                               <a:solidFill>
@@ -8218,7 +8337,7 @@
                 </p:txBody>
               </p:sp>
             </mc:Choice>
-            <mc:Fallback>
+            <mc:Fallback xmlns="">
               <p:sp>
                 <p:nvSpPr>
                   <p:cNvPr id="24" name="TextBox 23">
@@ -8263,8 +8382,8 @@
               </p:sp>
             </mc:Fallback>
           </mc:AlternateContent>
-          <mc:AlternateContent xmlns:mc="http://schemas.openxmlformats.org/markup-compatibility/2006">
-            <mc:Choice xmlns:a14="http://schemas.microsoft.com/office/drawing/2010/main" Requires="a14">
+          <mc:AlternateContent xmlns:mc="http://schemas.openxmlformats.org/markup-compatibility/2006" xmlns:a14="http://schemas.microsoft.com/office/drawing/2010/main">
+            <mc:Choice Requires="a14">
               <p:sp>
                 <p:nvSpPr>
                   <p:cNvPr id="25" name="TextBox 24">
@@ -8296,7 +8415,10 @@
                     <a:pPr/>
                     <a14:m>
                       <m:oMathPara xmlns:m="http://schemas.openxmlformats.org/officeDocument/2006/math">
-                        <m:oMath>
+                        <m:oMathParaPr>
+                          <m:jc m:val="centerGroup"/>
+                        </m:oMathParaPr>
+                        <m:oMath xmlns:m="http://schemas.openxmlformats.org/officeDocument/2006/math">
                           <m:r>
                             <a:rPr lang="en-US" sz="2400" b="0" i="1" smtClean="0">
                               <a:solidFill>
@@ -8318,7 +8440,7 @@
                 </p:txBody>
               </p:sp>
             </mc:Choice>
-            <mc:Fallback>
+            <mc:Fallback xmlns="">
               <p:sp>
                 <p:nvSpPr>
                   <p:cNvPr id="25" name="TextBox 24">
@@ -8364,8 +8486,8 @@
             </mc:Fallback>
           </mc:AlternateContent>
         </p:grpSp>
-        <mc:AlternateContent xmlns:mc="http://schemas.openxmlformats.org/markup-compatibility/2006">
-          <mc:Choice xmlns:a14="http://schemas.microsoft.com/office/drawing/2010/main" Requires="a14">
+        <mc:AlternateContent xmlns:mc="http://schemas.openxmlformats.org/markup-compatibility/2006" xmlns:a14="http://schemas.microsoft.com/office/drawing/2010/main">
+          <mc:Choice Requires="a14">
             <p:sp>
               <p:nvSpPr>
                 <p:cNvPr id="64" name="TextBox 63">
@@ -8397,7 +8519,10 @@
                   <a:pPr/>
                   <a14:m>
                     <m:oMathPara xmlns:m="http://schemas.openxmlformats.org/officeDocument/2006/math">
-                      <m:oMath>
+                      <m:oMathParaPr>
+                        <m:jc m:val="centerGroup"/>
+                      </m:oMathParaPr>
+                      <m:oMath xmlns:m="http://schemas.openxmlformats.org/officeDocument/2006/math">
                         <m:r>
                           <m:rPr>
                             <m:sty m:val="p"/>
@@ -8431,7 +8556,7 @@
               </p:txBody>
             </p:sp>
           </mc:Choice>
-          <mc:Fallback>
+          <mc:Fallback xmlns="">
             <p:sp>
               <p:nvSpPr>
                 <p:cNvPr id="64" name="TextBox 63">
@@ -8927,8 +9052,8 @@
           </p:style>
         </p:cxnSp>
       </p:grpSp>
-      <mc:AlternateContent xmlns:mc="http://schemas.openxmlformats.org/markup-compatibility/2006">
-        <mc:Choice xmlns:a14="http://schemas.microsoft.com/office/drawing/2010/main" Requires="a14">
+      <mc:AlternateContent xmlns:mc="http://schemas.openxmlformats.org/markup-compatibility/2006" xmlns:a14="http://schemas.microsoft.com/office/drawing/2010/main">
+        <mc:Choice Requires="a14">
           <p:sp>
             <p:nvSpPr>
               <p:cNvPr id="49" name="TextBox 48">
@@ -8963,7 +9088,10 @@
                 <a:pPr/>
                 <a14:m>
                   <m:oMathPara xmlns:m="http://schemas.openxmlformats.org/officeDocument/2006/math">
-                    <m:oMath>
+                    <m:oMathParaPr>
+                      <m:jc m:val="centerGroup"/>
+                    </m:oMathParaPr>
+                    <m:oMath xmlns:m="http://schemas.openxmlformats.org/officeDocument/2006/math">
                       <m:acc>
                         <m:accPr>
                           <m:chr m:val="̂"/>
@@ -9009,7 +9137,7 @@
             </p:txBody>
           </p:sp>
         </mc:Choice>
-        <mc:Fallback>
+        <mc:Fallback xmlns="">
           <p:sp>
             <p:nvSpPr>
               <p:cNvPr id="49" name="TextBox 48">
@@ -9057,8 +9185,8 @@
           </p:sp>
         </mc:Fallback>
       </mc:AlternateContent>
-      <mc:AlternateContent xmlns:mc="http://schemas.openxmlformats.org/markup-compatibility/2006">
-        <mc:Choice xmlns:a14="http://schemas.microsoft.com/office/drawing/2010/main" Requires="a14">
+      <mc:AlternateContent xmlns:mc="http://schemas.openxmlformats.org/markup-compatibility/2006" xmlns:a14="http://schemas.microsoft.com/office/drawing/2010/main">
+        <mc:Choice Requires="a14">
           <p:sp>
             <p:nvSpPr>
               <p:cNvPr id="51" name="TextBox 50">
@@ -9093,7 +9221,10 @@
                 <a:pPr/>
                 <a14:m>
                   <m:oMathPara xmlns:m="http://schemas.openxmlformats.org/officeDocument/2006/math">
-                    <m:oMath>
+                    <m:oMathParaPr>
+                      <m:jc m:val="centerGroup"/>
+                    </m:oMathParaPr>
+                    <m:oMath xmlns:m="http://schemas.openxmlformats.org/officeDocument/2006/math">
                       <m:acc>
                         <m:accPr>
                           <m:chr m:val="̂"/>
@@ -9139,7 +9270,7 @@
             </p:txBody>
           </p:sp>
         </mc:Choice>
-        <mc:Fallback>
+        <mc:Fallback xmlns="">
           <p:sp>
             <p:nvSpPr>
               <p:cNvPr id="51" name="TextBox 50">
@@ -9187,8 +9318,8 @@
           </p:sp>
         </mc:Fallback>
       </mc:AlternateContent>
-      <mc:AlternateContent xmlns:mc="http://schemas.openxmlformats.org/markup-compatibility/2006">
-        <mc:Choice xmlns:a14="http://schemas.microsoft.com/office/drawing/2010/main" Requires="a14">
+      <mc:AlternateContent xmlns:mc="http://schemas.openxmlformats.org/markup-compatibility/2006" xmlns:a14="http://schemas.microsoft.com/office/drawing/2010/main">
+        <mc:Choice Requires="a14">
           <p:sp>
             <p:nvSpPr>
               <p:cNvPr id="53" name="TextBox 52">
@@ -9223,7 +9354,10 @@
                 <a:pPr/>
                 <a14:m>
                   <m:oMathPara xmlns:m="http://schemas.openxmlformats.org/officeDocument/2006/math">
-                    <m:oMath>
+                    <m:oMathParaPr>
+                      <m:jc m:val="centerGroup"/>
+                    </m:oMathParaPr>
+                    <m:oMath xmlns:m="http://schemas.openxmlformats.org/officeDocument/2006/math">
                       <m:acc>
                         <m:accPr>
                           <m:chr m:val="̂"/>
@@ -9269,7 +9403,7 @@
             </p:txBody>
           </p:sp>
         </mc:Choice>
-        <mc:Fallback>
+        <mc:Fallback xmlns="">
           <p:sp>
             <p:nvSpPr>
               <p:cNvPr id="53" name="TextBox 52">
@@ -9317,8 +9451,8 @@
           </p:sp>
         </mc:Fallback>
       </mc:AlternateContent>
-      <mc:AlternateContent xmlns:mc="http://schemas.openxmlformats.org/markup-compatibility/2006">
-        <mc:Choice xmlns:a14="http://schemas.microsoft.com/office/drawing/2010/main" Requires="a14">
+      <mc:AlternateContent xmlns:mc="http://schemas.openxmlformats.org/markup-compatibility/2006" xmlns:a14="http://schemas.microsoft.com/office/drawing/2010/main">
+        <mc:Choice Requires="a14">
           <p:sp>
             <p:nvSpPr>
               <p:cNvPr id="61" name="TextBox 60">
@@ -9353,7 +9487,10 @@
                 <a:pPr/>
                 <a14:m>
                   <m:oMathPara xmlns:m="http://schemas.openxmlformats.org/officeDocument/2006/math">
-                    <m:oMath>
+                    <m:oMathParaPr>
+                      <m:jc m:val="centerGroup"/>
+                    </m:oMathParaPr>
+                    <m:oMath xmlns:m="http://schemas.openxmlformats.org/officeDocument/2006/math">
                       <m:acc>
                         <m:accPr>
                           <m:chr m:val="̂"/>
@@ -9407,7 +9544,7 @@
             </p:txBody>
           </p:sp>
         </mc:Choice>
-        <mc:Fallback>
+        <mc:Fallback xmlns="">
           <p:sp>
             <p:nvSpPr>
               <p:cNvPr id="61" name="TextBox 60">
@@ -9455,8 +9592,8 @@
           </p:sp>
         </mc:Fallback>
       </mc:AlternateContent>
-      <mc:AlternateContent xmlns:mc="http://schemas.openxmlformats.org/markup-compatibility/2006">
-        <mc:Choice xmlns:a14="http://schemas.microsoft.com/office/drawing/2010/main" Requires="a14">
+      <mc:AlternateContent xmlns:mc="http://schemas.openxmlformats.org/markup-compatibility/2006" xmlns:a14="http://schemas.microsoft.com/office/drawing/2010/main">
+        <mc:Choice Requires="a14">
           <p:sp>
             <p:nvSpPr>
               <p:cNvPr id="65" name="TextBox 64">
@@ -9491,7 +9628,10 @@
                 <a:pPr/>
                 <a14:m>
                   <m:oMathPara xmlns:m="http://schemas.openxmlformats.org/officeDocument/2006/math">
-                    <m:oMath>
+                    <m:oMathParaPr>
+                      <m:jc m:val="centerGroup"/>
+                    </m:oMathParaPr>
+                    <m:oMath xmlns:m="http://schemas.openxmlformats.org/officeDocument/2006/math">
                       <m:acc>
                         <m:accPr>
                           <m:chr m:val="̂"/>
@@ -9545,7 +9685,7 @@
             </p:txBody>
           </p:sp>
         </mc:Choice>
-        <mc:Fallback>
+        <mc:Fallback xmlns="">
           <p:sp>
             <p:nvSpPr>
               <p:cNvPr id="65" name="TextBox 64">
@@ -9593,8 +9733,8 @@
           </p:sp>
         </mc:Fallback>
       </mc:AlternateContent>
-      <mc:AlternateContent xmlns:mc="http://schemas.openxmlformats.org/markup-compatibility/2006">
-        <mc:Choice xmlns:a14="http://schemas.microsoft.com/office/drawing/2010/main" Requires="a14">
+      <mc:AlternateContent xmlns:mc="http://schemas.openxmlformats.org/markup-compatibility/2006" xmlns:a14="http://schemas.microsoft.com/office/drawing/2010/main">
+        <mc:Choice Requires="a14">
           <p:sp>
             <p:nvSpPr>
               <p:cNvPr id="67" name="TextBox 66">
@@ -9629,7 +9769,10 @@
                 <a:pPr/>
                 <a14:m>
                   <m:oMathPara xmlns:m="http://schemas.openxmlformats.org/officeDocument/2006/math">
-                    <m:oMath>
+                    <m:oMathParaPr>
+                      <m:jc m:val="centerGroup"/>
+                    </m:oMathParaPr>
+                    <m:oMath xmlns:m="http://schemas.openxmlformats.org/officeDocument/2006/math">
                       <m:acc>
                         <m:accPr>
                           <m:chr m:val="̂"/>
@@ -9683,7 +9826,7 @@
             </p:txBody>
           </p:sp>
         </mc:Choice>
-        <mc:Fallback>
+        <mc:Fallback xmlns="">
           <p:sp>
             <p:nvSpPr>
               <p:cNvPr id="67" name="TextBox 66">
@@ -9735,6 +9878,4305 @@
     <p:extLst>
       <p:ext uri="{BB962C8B-B14F-4D97-AF65-F5344CB8AC3E}">
         <p14:creationId xmlns:p14="http://schemas.microsoft.com/office/powerpoint/2010/main" val="2234448007"/>
+      </p:ext>
+    </p:extLst>
+  </p:cSld>
+  <p:clrMapOvr>
+    <a:masterClrMapping/>
+  </p:clrMapOvr>
+</p:sld>
+</file>
+
+<file path=ppt/slides/slide4.xml><?xml version="1.0" encoding="utf-8"?>
+<p:sld xmlns:a="http://schemas.openxmlformats.org/drawingml/2006/main" xmlns:r="http://schemas.openxmlformats.org/officeDocument/2006/relationships" xmlns:p="http://schemas.openxmlformats.org/presentationml/2006/main">
+  <p:cSld>
+    <p:spTree>
+      <p:nvGrpSpPr>
+        <p:cNvPr id="1" name=""/>
+        <p:cNvGrpSpPr/>
+        <p:nvPr/>
+      </p:nvGrpSpPr>
+      <p:grpSpPr>
+        <a:xfrm>
+          <a:off x="0" y="0"/>
+          <a:ext cx="0" cy="0"/>
+          <a:chOff x="0" y="0"/>
+          <a:chExt cx="0" cy="0"/>
+        </a:xfrm>
+      </p:grpSpPr>
+      <p:grpSp>
+        <p:nvGrpSpPr>
+          <p:cNvPr id="41" name="Group 40"/>
+          <p:cNvGrpSpPr/>
+          <p:nvPr/>
+        </p:nvGrpSpPr>
+        <p:grpSpPr>
+          <a:xfrm>
+            <a:off x="1167765" y="914400"/>
+            <a:ext cx="6088380" cy="4684157"/>
+            <a:chOff x="1167765" y="914400"/>
+            <a:chExt cx="6088380" cy="4684157"/>
+          </a:xfrm>
+        </p:grpSpPr>
+        <p:grpSp>
+          <p:nvGrpSpPr>
+            <p:cNvPr id="10" name="Group 9"/>
+            <p:cNvGrpSpPr/>
+            <p:nvPr/>
+          </p:nvGrpSpPr>
+          <p:grpSpPr>
+            <a:xfrm>
+              <a:off x="1167765" y="1045031"/>
+              <a:ext cx="6088380" cy="4321354"/>
+              <a:chOff x="1167765" y="1045031"/>
+              <a:chExt cx="6088380" cy="4321354"/>
+            </a:xfrm>
+          </p:grpSpPr>
+          <p:cxnSp>
+            <p:nvCxnSpPr>
+              <p:cNvPr id="5" name="Straight Connector 4"/>
+              <p:cNvCxnSpPr/>
+              <p:nvPr/>
+            </p:nvCxnSpPr>
+            <p:spPr>
+              <a:xfrm>
+                <a:off x="2656115" y="1045031"/>
+                <a:ext cx="0" cy="3065417"/>
+              </a:xfrm>
+              <a:prstGeom prst="line">
+                <a:avLst/>
+              </a:prstGeom>
+              <a:ln w="28575" cap="rnd">
+                <a:solidFill>
+                  <a:schemeClr val="tx1"/>
+                </a:solidFill>
+                <a:round/>
+              </a:ln>
+            </p:spPr>
+            <p:style>
+              <a:lnRef idx="1">
+                <a:schemeClr val="accent1"/>
+              </a:lnRef>
+              <a:fillRef idx="0">
+                <a:schemeClr val="accent1"/>
+              </a:fillRef>
+              <a:effectRef idx="0">
+                <a:schemeClr val="accent1"/>
+              </a:effectRef>
+              <a:fontRef idx="minor">
+                <a:schemeClr val="tx1"/>
+              </a:fontRef>
+            </p:style>
+          </p:cxnSp>
+          <p:cxnSp>
+            <p:nvCxnSpPr>
+              <p:cNvPr id="6" name="Straight Connector 5"/>
+              <p:cNvCxnSpPr/>
+              <p:nvPr/>
+            </p:nvCxnSpPr>
+            <p:spPr>
+              <a:xfrm flipH="1">
+                <a:off x="2655027" y="4111265"/>
+                <a:ext cx="4601118" cy="0"/>
+              </a:xfrm>
+              <a:prstGeom prst="line">
+                <a:avLst/>
+              </a:prstGeom>
+              <a:ln w="28575" cap="rnd">
+                <a:solidFill>
+                  <a:schemeClr val="tx1"/>
+                </a:solidFill>
+                <a:round/>
+              </a:ln>
+            </p:spPr>
+            <p:style>
+              <a:lnRef idx="1">
+                <a:schemeClr val="accent1"/>
+              </a:lnRef>
+              <a:fillRef idx="0">
+                <a:schemeClr val="accent1"/>
+              </a:fillRef>
+              <a:effectRef idx="0">
+                <a:schemeClr val="accent1"/>
+              </a:effectRef>
+              <a:fontRef idx="minor">
+                <a:schemeClr val="tx1"/>
+              </a:fontRef>
+            </p:style>
+          </p:cxnSp>
+          <p:cxnSp>
+            <p:nvCxnSpPr>
+              <p:cNvPr id="8" name="Straight Connector 7"/>
+              <p:cNvCxnSpPr/>
+              <p:nvPr/>
+            </p:nvCxnSpPr>
+            <p:spPr>
+              <a:xfrm flipV="1">
+                <a:off x="1167765" y="4114258"/>
+                <a:ext cx="1484540" cy="1252127"/>
+              </a:xfrm>
+              <a:prstGeom prst="line">
+                <a:avLst/>
+              </a:prstGeom>
+              <a:ln w="28575" cap="rnd">
+                <a:solidFill>
+                  <a:schemeClr val="tx1"/>
+                </a:solidFill>
+                <a:round/>
+              </a:ln>
+            </p:spPr>
+            <p:style>
+              <a:lnRef idx="1">
+                <a:schemeClr val="accent1"/>
+              </a:lnRef>
+              <a:fillRef idx="0">
+                <a:schemeClr val="accent1"/>
+              </a:fillRef>
+              <a:effectRef idx="0">
+                <a:schemeClr val="accent1"/>
+              </a:effectRef>
+              <a:fontRef idx="minor">
+                <a:schemeClr val="tx1"/>
+              </a:fontRef>
+            </p:style>
+          </p:cxnSp>
+        </p:grpSp>
+        <mc:AlternateContent xmlns:mc="http://schemas.openxmlformats.org/markup-compatibility/2006" xmlns:a14="http://schemas.microsoft.com/office/drawing/2010/main">
+          <mc:Choice Requires="a14">
+            <p:sp>
+              <p:nvSpPr>
+                <p:cNvPr id="17" name="TextBox 16"/>
+                <p:cNvSpPr txBox="1"/>
+                <p:nvPr/>
+              </p:nvSpPr>
+              <p:spPr>
+                <a:xfrm>
+                  <a:off x="2323338" y="3787521"/>
+                  <a:ext cx="284822" cy="369332"/>
+                </a:xfrm>
+                <a:prstGeom prst="rect">
+                  <a:avLst/>
+                </a:prstGeom>
+                <a:noFill/>
+              </p:spPr>
+              <p:txBody>
+                <a:bodyPr wrap="none" lIns="0" tIns="0" rIns="0" bIns="0" rtlCol="0">
+                  <a:spAutoFit/>
+                </a:bodyPr>
+                <a:lstStyle/>
+                <a:p>
+                  <a:pPr/>
+                  <a14:m>
+                    <m:oMathPara xmlns:m="http://schemas.openxmlformats.org/officeDocument/2006/math">
+                      <m:oMathParaPr>
+                        <m:jc m:val="centerGroup"/>
+                      </m:oMathParaPr>
+                      <m:oMath xmlns:m="http://schemas.openxmlformats.org/officeDocument/2006/math">
+                        <m:r>
+                          <a:rPr lang="en-US" sz="2400" b="0" i="1" smtClean="0">
+                            <a:latin typeface="Cambria Math" panose="02040503050406030204" pitchFamily="18" charset="0"/>
+                          </a:rPr>
+                          <m:t>𝑂</m:t>
+                        </m:r>
+                      </m:oMath>
+                    </m:oMathPara>
+                  </a14:m>
+                  <a:endParaRPr lang="en-US" sz="2400" dirty="0"/>
+                </a:p>
+              </p:txBody>
+            </p:sp>
+          </mc:Choice>
+          <mc:Fallback xmlns="">
+            <p:sp>
+              <p:nvSpPr>
+                <p:cNvPr id="17" name="TextBox 16"/>
+                <p:cNvSpPr txBox="1">
+                  <a:spLocks noRot="1" noChangeAspect="1" noMove="1" noResize="1" noEditPoints="1" noAdjustHandles="1" noChangeArrowheads="1" noChangeShapeType="1" noTextEdit="1"/>
+                </p:cNvSpPr>
+                <p:nvPr/>
+              </p:nvSpPr>
+              <p:spPr>
+                <a:xfrm>
+                  <a:off x="2323338" y="3787521"/>
+                  <a:ext cx="284822" cy="369332"/>
+                </a:xfrm>
+                <a:prstGeom prst="rect">
+                  <a:avLst/>
+                </a:prstGeom>
+                <a:blipFill>
+                  <a:blip r:embed="rId2"/>
+                  <a:stretch>
+                    <a:fillRect l="-23404" r="-23404" b="-6557"/>
+                  </a:stretch>
+                </a:blipFill>
+              </p:spPr>
+              <p:txBody>
+                <a:bodyPr/>
+                <a:lstStyle/>
+                <a:p>
+                  <a:r>
+                    <a:rPr lang="en-US">
+                      <a:noFill/>
+                    </a:rPr>
+                    <a:t> </a:t>
+                  </a:r>
+                </a:p>
+              </p:txBody>
+            </p:sp>
+          </mc:Fallback>
+        </mc:AlternateContent>
+        <mc:AlternateContent xmlns:mc="http://schemas.openxmlformats.org/markup-compatibility/2006" xmlns:a14="http://schemas.microsoft.com/office/drawing/2010/main">
+          <mc:Choice Requires="a14">
+            <p:sp>
+              <p:nvSpPr>
+                <p:cNvPr id="19" name="TextBox 18"/>
+                <p:cNvSpPr txBox="1"/>
+                <p:nvPr/>
+              </p:nvSpPr>
+              <p:spPr>
+                <a:xfrm>
+                  <a:off x="6972300" y="4152900"/>
+                  <a:ext cx="275204" cy="369332"/>
+                </a:xfrm>
+                <a:prstGeom prst="rect">
+                  <a:avLst/>
+                </a:prstGeom>
+                <a:noFill/>
+              </p:spPr>
+              <p:txBody>
+                <a:bodyPr wrap="none" lIns="0" tIns="0" rIns="0" bIns="0" rtlCol="0">
+                  <a:spAutoFit/>
+                </a:bodyPr>
+                <a:lstStyle/>
+                <a:p>
+                  <a:pPr/>
+                  <a14:m>
+                    <m:oMathPara xmlns:m="http://schemas.openxmlformats.org/officeDocument/2006/math">
+                      <m:oMathParaPr>
+                        <m:jc m:val="centerGroup"/>
+                      </m:oMathParaPr>
+                      <m:oMath xmlns:m="http://schemas.openxmlformats.org/officeDocument/2006/math">
+                        <m:r>
+                          <a:rPr lang="en-US" sz="2400" b="0" i="1" smtClean="0">
+                            <a:latin typeface="Cambria Math" panose="02040503050406030204" pitchFamily="18" charset="0"/>
+                          </a:rPr>
+                          <m:t>𝑋</m:t>
+                        </m:r>
+                      </m:oMath>
+                    </m:oMathPara>
+                  </a14:m>
+                  <a:endParaRPr lang="en-US" sz="2400" dirty="0"/>
+                </a:p>
+              </p:txBody>
+            </p:sp>
+          </mc:Choice>
+          <mc:Fallback xmlns="">
+            <p:sp>
+              <p:nvSpPr>
+                <p:cNvPr id="19" name="TextBox 18"/>
+                <p:cNvSpPr txBox="1">
+                  <a:spLocks noRot="1" noChangeAspect="1" noMove="1" noResize="1" noEditPoints="1" noAdjustHandles="1" noChangeArrowheads="1" noChangeShapeType="1" noTextEdit="1"/>
+                </p:cNvSpPr>
+                <p:nvPr/>
+              </p:nvSpPr>
+              <p:spPr>
+                <a:xfrm>
+                  <a:off x="6972300" y="4152900"/>
+                  <a:ext cx="275204" cy="369332"/>
+                </a:xfrm>
+                <a:prstGeom prst="rect">
+                  <a:avLst/>
+                </a:prstGeom>
+                <a:blipFill>
+                  <a:blip r:embed="rId3"/>
+                  <a:stretch>
+                    <a:fillRect l="-26667" r="-22222" b="-6557"/>
+                  </a:stretch>
+                </a:blipFill>
+              </p:spPr>
+              <p:txBody>
+                <a:bodyPr/>
+                <a:lstStyle/>
+                <a:p>
+                  <a:r>
+                    <a:rPr lang="en-US">
+                      <a:noFill/>
+                    </a:rPr>
+                    <a:t> </a:t>
+                  </a:r>
+                </a:p>
+              </p:txBody>
+            </p:sp>
+          </mc:Fallback>
+        </mc:AlternateContent>
+        <mc:AlternateContent xmlns:mc="http://schemas.openxmlformats.org/markup-compatibility/2006" xmlns:a14="http://schemas.microsoft.com/office/drawing/2010/main">
+          <mc:Choice Requires="a14">
+            <p:sp>
+              <p:nvSpPr>
+                <p:cNvPr id="22" name="TextBox 21"/>
+                <p:cNvSpPr txBox="1"/>
+                <p:nvPr/>
+              </p:nvSpPr>
+              <p:spPr>
+                <a:xfrm>
+                  <a:off x="2760345" y="914400"/>
+                  <a:ext cx="262380" cy="369332"/>
+                </a:xfrm>
+                <a:prstGeom prst="rect">
+                  <a:avLst/>
+                </a:prstGeom>
+                <a:noFill/>
+              </p:spPr>
+              <p:txBody>
+                <a:bodyPr wrap="none" lIns="0" tIns="0" rIns="0" bIns="0" rtlCol="0">
+                  <a:spAutoFit/>
+                </a:bodyPr>
+                <a:lstStyle/>
+                <a:p>
+                  <a:pPr/>
+                  <a14:m>
+                    <m:oMathPara xmlns:m="http://schemas.openxmlformats.org/officeDocument/2006/math">
+                      <m:oMathParaPr>
+                        <m:jc m:val="centerGroup"/>
+                      </m:oMathParaPr>
+                      <m:oMath xmlns:m="http://schemas.openxmlformats.org/officeDocument/2006/math">
+                        <m:r>
+                          <a:rPr lang="en-US" sz="2400" b="0" i="1" smtClean="0">
+                            <a:solidFill>
+                              <a:schemeClr val="tx1"/>
+                            </a:solidFill>
+                            <a:latin typeface="Cambria Math" panose="02040503050406030204" pitchFamily="18" charset="0"/>
+                          </a:rPr>
+                          <m:t>𝑌</m:t>
+                        </m:r>
+                      </m:oMath>
+                    </m:oMathPara>
+                  </a14:m>
+                  <a:endParaRPr lang="en-US" sz="2400" dirty="0">
+                    <a:solidFill>
+                      <a:schemeClr val="tx1"/>
+                    </a:solidFill>
+                  </a:endParaRPr>
+                </a:p>
+              </p:txBody>
+            </p:sp>
+          </mc:Choice>
+          <mc:Fallback xmlns="">
+            <p:sp>
+              <p:nvSpPr>
+                <p:cNvPr id="22" name="TextBox 21"/>
+                <p:cNvSpPr txBox="1">
+                  <a:spLocks noRot="1" noChangeAspect="1" noMove="1" noResize="1" noEditPoints="1" noAdjustHandles="1" noChangeArrowheads="1" noChangeShapeType="1" noTextEdit="1"/>
+                </p:cNvSpPr>
+                <p:nvPr/>
+              </p:nvSpPr>
+              <p:spPr>
+                <a:xfrm>
+                  <a:off x="2760345" y="914400"/>
+                  <a:ext cx="262380" cy="369332"/>
+                </a:xfrm>
+                <a:prstGeom prst="rect">
+                  <a:avLst/>
+                </a:prstGeom>
+                <a:blipFill>
+                  <a:blip r:embed="rId4"/>
+                  <a:stretch>
+                    <a:fillRect l="-27907" r="-23256" b="-4918"/>
+                  </a:stretch>
+                </a:blipFill>
+              </p:spPr>
+              <p:txBody>
+                <a:bodyPr/>
+                <a:lstStyle/>
+                <a:p>
+                  <a:r>
+                    <a:rPr lang="en-US">
+                      <a:noFill/>
+                    </a:rPr>
+                    <a:t> </a:t>
+                  </a:r>
+                </a:p>
+              </p:txBody>
+            </p:sp>
+          </mc:Fallback>
+        </mc:AlternateContent>
+        <mc:AlternateContent xmlns:mc="http://schemas.openxmlformats.org/markup-compatibility/2006" xmlns:a14="http://schemas.microsoft.com/office/drawing/2010/main">
+          <mc:Choice Requires="a14">
+            <p:sp>
+              <p:nvSpPr>
+                <p:cNvPr id="23" name="TextBox 22"/>
+                <p:cNvSpPr txBox="1"/>
+                <p:nvPr/>
+              </p:nvSpPr>
+              <p:spPr>
+                <a:xfrm>
+                  <a:off x="1287780" y="5229225"/>
+                  <a:ext cx="259174" cy="369332"/>
+                </a:xfrm>
+                <a:prstGeom prst="rect">
+                  <a:avLst/>
+                </a:prstGeom>
+                <a:noFill/>
+              </p:spPr>
+              <p:txBody>
+                <a:bodyPr wrap="none" lIns="0" tIns="0" rIns="0" bIns="0" rtlCol="0">
+                  <a:spAutoFit/>
+                </a:bodyPr>
+                <a:lstStyle/>
+                <a:p>
+                  <a:pPr/>
+                  <a14:m>
+                    <m:oMathPara xmlns:m="http://schemas.openxmlformats.org/officeDocument/2006/math">
+                      <m:oMathParaPr>
+                        <m:jc m:val="centerGroup"/>
+                      </m:oMathParaPr>
+                      <m:oMath xmlns:m="http://schemas.openxmlformats.org/officeDocument/2006/math">
+                        <m:r>
+                          <a:rPr lang="en-US" sz="2400" b="0" i="1" smtClean="0">
+                            <a:solidFill>
+                              <a:schemeClr val="tx1"/>
+                            </a:solidFill>
+                            <a:latin typeface="Cambria Math" panose="02040503050406030204" pitchFamily="18" charset="0"/>
+                          </a:rPr>
+                          <m:t>𝑍</m:t>
+                        </m:r>
+                      </m:oMath>
+                    </m:oMathPara>
+                  </a14:m>
+                  <a:endParaRPr lang="en-US" sz="2400" dirty="0">
+                    <a:solidFill>
+                      <a:schemeClr val="tx1"/>
+                    </a:solidFill>
+                  </a:endParaRPr>
+                </a:p>
+              </p:txBody>
+            </p:sp>
+          </mc:Choice>
+          <mc:Fallback xmlns="">
+            <p:sp>
+              <p:nvSpPr>
+                <p:cNvPr id="23" name="TextBox 22"/>
+                <p:cNvSpPr txBox="1">
+                  <a:spLocks noRot="1" noChangeAspect="1" noMove="1" noResize="1" noEditPoints="1" noAdjustHandles="1" noChangeArrowheads="1" noChangeShapeType="1" noTextEdit="1"/>
+                </p:cNvSpPr>
+                <p:nvPr/>
+              </p:nvSpPr>
+              <p:spPr>
+                <a:xfrm>
+                  <a:off x="1287780" y="5229225"/>
+                  <a:ext cx="259174" cy="369332"/>
+                </a:xfrm>
+                <a:prstGeom prst="rect">
+                  <a:avLst/>
+                </a:prstGeom>
+                <a:blipFill>
+                  <a:blip r:embed="rId5"/>
+                  <a:stretch>
+                    <a:fillRect l="-25581" r="-25581" b="-6667"/>
+                  </a:stretch>
+                </a:blipFill>
+              </p:spPr>
+              <p:txBody>
+                <a:bodyPr/>
+                <a:lstStyle/>
+                <a:p>
+                  <a:r>
+                    <a:rPr lang="en-US">
+                      <a:noFill/>
+                    </a:rPr>
+                    <a:t> </a:t>
+                  </a:r>
+                </a:p>
+              </p:txBody>
+            </p:sp>
+          </mc:Fallback>
+        </mc:AlternateContent>
+      </p:grpSp>
+      <p:grpSp>
+        <p:nvGrpSpPr>
+          <p:cNvPr id="37" name="Group 36"/>
+          <p:cNvGrpSpPr/>
+          <p:nvPr/>
+        </p:nvGrpSpPr>
+        <p:grpSpPr>
+          <a:xfrm>
+            <a:off x="3057525" y="914400"/>
+            <a:ext cx="5241034" cy="4684157"/>
+            <a:chOff x="2722245" y="914400"/>
+            <a:chExt cx="5241034" cy="4684157"/>
+          </a:xfrm>
+        </p:grpSpPr>
+        <p:cxnSp>
+          <p:nvCxnSpPr>
+            <p:cNvPr id="16" name="Straight Arrow Connector 15"/>
+            <p:cNvCxnSpPr/>
+            <p:nvPr/>
+          </p:nvCxnSpPr>
+          <p:spPr>
+            <a:xfrm>
+              <a:off x="4223655" y="1702524"/>
+              <a:ext cx="1062446" cy="0"/>
+            </a:xfrm>
+            <a:prstGeom prst="straightConnector1">
+              <a:avLst/>
+            </a:prstGeom>
+            <a:ln w="28575" cap="rnd">
+              <a:solidFill>
+                <a:schemeClr val="accent6">
+                  <a:lumMod val="75000"/>
+                </a:schemeClr>
+              </a:solidFill>
+              <a:round/>
+              <a:tailEnd type="triangle" w="lg" len="lg"/>
+            </a:ln>
+          </p:spPr>
+          <p:style>
+            <a:lnRef idx="1">
+              <a:schemeClr val="accent1"/>
+            </a:lnRef>
+            <a:fillRef idx="0">
+              <a:schemeClr val="accent1"/>
+            </a:fillRef>
+            <a:effectRef idx="0">
+              <a:schemeClr val="accent1"/>
+            </a:effectRef>
+            <a:fontRef idx="minor">
+              <a:schemeClr val="tx1"/>
+            </a:fontRef>
+          </p:style>
+        </p:cxnSp>
+        <p:grpSp>
+          <p:nvGrpSpPr>
+            <p:cNvPr id="11" name="Group 10"/>
+            <p:cNvGrpSpPr/>
+            <p:nvPr/>
+          </p:nvGrpSpPr>
+          <p:grpSpPr>
+            <a:xfrm>
+              <a:off x="2722245" y="1014552"/>
+              <a:ext cx="5172075" cy="4321354"/>
+              <a:chOff x="1167765" y="1045031"/>
+              <a:chExt cx="5172075" cy="4321354"/>
+            </a:xfrm>
+          </p:grpSpPr>
+          <p:cxnSp>
+            <p:nvCxnSpPr>
+              <p:cNvPr id="12" name="Straight Connector 11"/>
+              <p:cNvCxnSpPr/>
+              <p:nvPr/>
+            </p:nvCxnSpPr>
+            <p:spPr>
+              <a:xfrm>
+                <a:off x="2656115" y="1045031"/>
+                <a:ext cx="0" cy="3065417"/>
+              </a:xfrm>
+              <a:prstGeom prst="line">
+                <a:avLst/>
+              </a:prstGeom>
+              <a:ln w="28575" cap="rnd">
+                <a:solidFill>
+                  <a:schemeClr val="accent1">
+                    <a:lumMod val="75000"/>
+                  </a:schemeClr>
+                </a:solidFill>
+                <a:round/>
+              </a:ln>
+            </p:spPr>
+            <p:style>
+              <a:lnRef idx="1">
+                <a:schemeClr val="accent1"/>
+              </a:lnRef>
+              <a:fillRef idx="0">
+                <a:schemeClr val="accent1"/>
+              </a:fillRef>
+              <a:effectRef idx="0">
+                <a:schemeClr val="accent1"/>
+              </a:effectRef>
+              <a:fontRef idx="minor">
+                <a:schemeClr val="tx1"/>
+              </a:fontRef>
+            </p:style>
+          </p:cxnSp>
+          <p:cxnSp>
+            <p:nvCxnSpPr>
+              <p:cNvPr id="13" name="Straight Connector 12"/>
+              <p:cNvCxnSpPr/>
+              <p:nvPr/>
+            </p:nvCxnSpPr>
+            <p:spPr>
+              <a:xfrm flipH="1">
+                <a:off x="2655027" y="4111265"/>
+                <a:ext cx="3684813" cy="0"/>
+              </a:xfrm>
+              <a:prstGeom prst="line">
+                <a:avLst/>
+              </a:prstGeom>
+              <a:ln w="28575" cap="rnd">
+                <a:solidFill>
+                  <a:schemeClr val="accent1">
+                    <a:lumMod val="75000"/>
+                  </a:schemeClr>
+                </a:solidFill>
+                <a:round/>
+              </a:ln>
+            </p:spPr>
+            <p:style>
+              <a:lnRef idx="1">
+                <a:schemeClr val="accent1"/>
+              </a:lnRef>
+              <a:fillRef idx="0">
+                <a:schemeClr val="accent1"/>
+              </a:fillRef>
+              <a:effectRef idx="0">
+                <a:schemeClr val="accent1"/>
+              </a:effectRef>
+              <a:fontRef idx="minor">
+                <a:schemeClr val="tx1"/>
+              </a:fontRef>
+            </p:style>
+          </p:cxnSp>
+          <p:cxnSp>
+            <p:nvCxnSpPr>
+              <p:cNvPr id="14" name="Straight Connector 13"/>
+              <p:cNvCxnSpPr/>
+              <p:nvPr/>
+            </p:nvCxnSpPr>
+            <p:spPr>
+              <a:xfrm flipV="1">
+                <a:off x="1167765" y="4114258"/>
+                <a:ext cx="1484540" cy="1252127"/>
+              </a:xfrm>
+              <a:prstGeom prst="line">
+                <a:avLst/>
+              </a:prstGeom>
+              <a:ln w="28575" cap="rnd">
+                <a:solidFill>
+                  <a:schemeClr val="accent1">
+                    <a:lumMod val="75000"/>
+                  </a:schemeClr>
+                </a:solidFill>
+                <a:round/>
+              </a:ln>
+            </p:spPr>
+            <p:style>
+              <a:lnRef idx="1">
+                <a:schemeClr val="accent1"/>
+              </a:lnRef>
+              <a:fillRef idx="0">
+                <a:schemeClr val="accent1"/>
+              </a:fillRef>
+              <a:effectRef idx="0">
+                <a:schemeClr val="accent1"/>
+              </a:effectRef>
+              <a:fontRef idx="minor">
+                <a:schemeClr val="tx1"/>
+              </a:fontRef>
+            </p:style>
+          </p:cxnSp>
+        </p:grpSp>
+        <mc:AlternateContent xmlns:mc="http://schemas.openxmlformats.org/markup-compatibility/2006" xmlns:a14="http://schemas.microsoft.com/office/drawing/2010/main">
+          <mc:Choice Requires="a14">
+            <p:sp>
+              <p:nvSpPr>
+                <p:cNvPr id="18" name="TextBox 17"/>
+                <p:cNvSpPr txBox="1"/>
+                <p:nvPr/>
+              </p:nvSpPr>
+              <p:spPr>
+                <a:xfrm>
+                  <a:off x="3851529" y="3778377"/>
+                  <a:ext cx="357470" cy="369332"/>
+                </a:xfrm>
+                <a:prstGeom prst="rect">
+                  <a:avLst/>
+                </a:prstGeom>
+                <a:noFill/>
+              </p:spPr>
+              <p:txBody>
+                <a:bodyPr wrap="none" lIns="0" tIns="0" rIns="0" bIns="0" rtlCol="0">
+                  <a:spAutoFit/>
+                </a:bodyPr>
+                <a:lstStyle/>
+                <a:p>
+                  <a:pPr/>
+                  <a14:m>
+                    <m:oMathPara xmlns:m="http://schemas.openxmlformats.org/officeDocument/2006/math">
+                      <m:oMathParaPr>
+                        <m:jc m:val="centerGroup"/>
+                      </m:oMathParaPr>
+                      <m:oMath xmlns:m="http://schemas.openxmlformats.org/officeDocument/2006/math">
+                        <m:r>
+                          <a:rPr lang="en-US" sz="2400" b="0" i="1" smtClean="0">
+                            <a:solidFill>
+                              <a:schemeClr val="accent1">
+                                <a:lumMod val="75000"/>
+                              </a:schemeClr>
+                            </a:solidFill>
+                            <a:latin typeface="Cambria Math" panose="02040503050406030204" pitchFamily="18" charset="0"/>
+                          </a:rPr>
+                          <m:t>𝑂</m:t>
+                        </m:r>
+                        <m:r>
+                          <a:rPr lang="en-US" sz="2400" b="0" i="1" smtClean="0">
+                            <a:solidFill>
+                              <a:schemeClr val="accent1">
+                                <a:lumMod val="75000"/>
+                              </a:schemeClr>
+                            </a:solidFill>
+                            <a:latin typeface="Cambria Math" panose="02040503050406030204" pitchFamily="18" charset="0"/>
+                          </a:rPr>
+                          <m:t>′</m:t>
+                        </m:r>
+                      </m:oMath>
+                    </m:oMathPara>
+                  </a14:m>
+                  <a:endParaRPr lang="en-US" sz="2400" dirty="0">
+                    <a:solidFill>
+                      <a:schemeClr val="accent1">
+                        <a:lumMod val="75000"/>
+                      </a:schemeClr>
+                    </a:solidFill>
+                  </a:endParaRPr>
+                </a:p>
+              </p:txBody>
+            </p:sp>
+          </mc:Choice>
+          <mc:Fallback xmlns="">
+            <p:sp>
+              <p:nvSpPr>
+                <p:cNvPr id="18" name="TextBox 17"/>
+                <p:cNvSpPr txBox="1">
+                  <a:spLocks noRot="1" noChangeAspect="1" noMove="1" noResize="1" noEditPoints="1" noAdjustHandles="1" noChangeArrowheads="1" noChangeShapeType="1" noTextEdit="1"/>
+                </p:cNvSpPr>
+                <p:nvPr/>
+              </p:nvSpPr>
+              <p:spPr>
+                <a:xfrm>
+                  <a:off x="3851529" y="3778377"/>
+                  <a:ext cx="357470" cy="369332"/>
+                </a:xfrm>
+                <a:prstGeom prst="rect">
+                  <a:avLst/>
+                </a:prstGeom>
+                <a:blipFill>
+                  <a:blip r:embed="rId6"/>
+                  <a:stretch>
+                    <a:fillRect l="-24138" t="-1667" r="-24138" b="-10000"/>
+                  </a:stretch>
+                </a:blipFill>
+              </p:spPr>
+              <p:txBody>
+                <a:bodyPr/>
+                <a:lstStyle/>
+                <a:p>
+                  <a:r>
+                    <a:rPr lang="en-US">
+                      <a:noFill/>
+                    </a:rPr>
+                    <a:t> </a:t>
+                  </a:r>
+                </a:p>
+              </p:txBody>
+            </p:sp>
+          </mc:Fallback>
+        </mc:AlternateContent>
+        <mc:AlternateContent xmlns:mc="http://schemas.openxmlformats.org/markup-compatibility/2006" xmlns:a14="http://schemas.microsoft.com/office/drawing/2010/main">
+          <mc:Choice Requires="a14">
+            <p:sp>
+              <p:nvSpPr>
+                <p:cNvPr id="20" name="TextBox 19"/>
+                <p:cNvSpPr txBox="1"/>
+                <p:nvPr/>
+              </p:nvSpPr>
+              <p:spPr>
+                <a:xfrm>
+                  <a:off x="7615428" y="4152900"/>
+                  <a:ext cx="347851" cy="369332"/>
+                </a:xfrm>
+                <a:prstGeom prst="rect">
+                  <a:avLst/>
+                </a:prstGeom>
+                <a:noFill/>
+              </p:spPr>
+              <p:txBody>
+                <a:bodyPr wrap="none" lIns="0" tIns="0" rIns="0" bIns="0" rtlCol="0">
+                  <a:spAutoFit/>
+                </a:bodyPr>
+                <a:lstStyle/>
+                <a:p>
+                  <a:pPr/>
+                  <a14:m>
+                    <m:oMathPara xmlns:m="http://schemas.openxmlformats.org/officeDocument/2006/math">
+                      <m:oMathParaPr>
+                        <m:jc m:val="centerGroup"/>
+                      </m:oMathParaPr>
+                      <m:oMath xmlns:m="http://schemas.openxmlformats.org/officeDocument/2006/math">
+                        <m:r>
+                          <a:rPr lang="en-US" sz="2400" b="0" i="1" smtClean="0">
+                            <a:solidFill>
+                              <a:schemeClr val="accent1">
+                                <a:lumMod val="75000"/>
+                              </a:schemeClr>
+                            </a:solidFill>
+                            <a:latin typeface="Cambria Math" panose="02040503050406030204" pitchFamily="18" charset="0"/>
+                          </a:rPr>
+                          <m:t>𝑋</m:t>
+                        </m:r>
+                        <m:r>
+                          <a:rPr lang="en-US" sz="2400" b="0" i="1" smtClean="0">
+                            <a:solidFill>
+                              <a:schemeClr val="accent1">
+                                <a:lumMod val="75000"/>
+                              </a:schemeClr>
+                            </a:solidFill>
+                            <a:latin typeface="Cambria Math" panose="02040503050406030204" pitchFamily="18" charset="0"/>
+                          </a:rPr>
+                          <m:t>′</m:t>
+                        </m:r>
+                      </m:oMath>
+                    </m:oMathPara>
+                  </a14:m>
+                  <a:endParaRPr lang="en-US" sz="2400" dirty="0"/>
+                </a:p>
+              </p:txBody>
+            </p:sp>
+          </mc:Choice>
+          <mc:Fallback xmlns="">
+            <p:sp>
+              <p:nvSpPr>
+                <p:cNvPr id="20" name="TextBox 19"/>
+                <p:cNvSpPr txBox="1">
+                  <a:spLocks noRot="1" noChangeAspect="1" noMove="1" noResize="1" noEditPoints="1" noAdjustHandles="1" noChangeArrowheads="1" noChangeShapeType="1" noTextEdit="1"/>
+                </p:cNvSpPr>
+                <p:nvPr/>
+              </p:nvSpPr>
+              <p:spPr>
+                <a:xfrm>
+                  <a:off x="7615428" y="4152900"/>
+                  <a:ext cx="347851" cy="369332"/>
+                </a:xfrm>
+                <a:prstGeom prst="rect">
+                  <a:avLst/>
+                </a:prstGeom>
+                <a:blipFill>
+                  <a:blip r:embed="rId7"/>
+                  <a:stretch>
+                    <a:fillRect l="-22807" t="-1639" r="-24561" b="-9836"/>
+                  </a:stretch>
+                </a:blipFill>
+              </p:spPr>
+              <p:txBody>
+                <a:bodyPr/>
+                <a:lstStyle/>
+                <a:p>
+                  <a:r>
+                    <a:rPr lang="en-US">
+                      <a:noFill/>
+                    </a:rPr>
+                    <a:t> </a:t>
+                  </a:r>
+                </a:p>
+              </p:txBody>
+            </p:sp>
+          </mc:Fallback>
+        </mc:AlternateContent>
+        <mc:AlternateContent xmlns:mc="http://schemas.openxmlformats.org/markup-compatibility/2006" xmlns:a14="http://schemas.microsoft.com/office/drawing/2010/main">
+          <mc:Choice Requires="a14">
+            <p:sp>
+              <p:nvSpPr>
+                <p:cNvPr id="21" name="TextBox 20"/>
+                <p:cNvSpPr txBox="1"/>
+                <p:nvPr/>
+              </p:nvSpPr>
+              <p:spPr>
+                <a:xfrm>
+                  <a:off x="4328160" y="914400"/>
+                  <a:ext cx="335027" cy="369332"/>
+                </a:xfrm>
+                <a:prstGeom prst="rect">
+                  <a:avLst/>
+                </a:prstGeom>
+                <a:noFill/>
+              </p:spPr>
+              <p:txBody>
+                <a:bodyPr wrap="none" lIns="0" tIns="0" rIns="0" bIns="0" rtlCol="0">
+                  <a:spAutoFit/>
+                </a:bodyPr>
+                <a:lstStyle/>
+                <a:p>
+                  <a:pPr/>
+                  <a14:m>
+                    <m:oMathPara xmlns:m="http://schemas.openxmlformats.org/officeDocument/2006/math">
+                      <m:oMathParaPr>
+                        <m:jc m:val="centerGroup"/>
+                      </m:oMathParaPr>
+                      <m:oMath xmlns:m="http://schemas.openxmlformats.org/officeDocument/2006/math">
+                        <m:r>
+                          <a:rPr lang="en-US" sz="2400" b="0" i="1" smtClean="0">
+                            <a:solidFill>
+                              <a:schemeClr val="accent1">
+                                <a:lumMod val="75000"/>
+                              </a:schemeClr>
+                            </a:solidFill>
+                            <a:latin typeface="Cambria Math" panose="02040503050406030204" pitchFamily="18" charset="0"/>
+                          </a:rPr>
+                          <m:t>𝑌</m:t>
+                        </m:r>
+                        <m:r>
+                          <a:rPr lang="en-US" sz="2400" b="0" i="1" smtClean="0">
+                            <a:solidFill>
+                              <a:schemeClr val="accent1">
+                                <a:lumMod val="75000"/>
+                              </a:schemeClr>
+                            </a:solidFill>
+                            <a:latin typeface="Cambria Math" panose="02040503050406030204" pitchFamily="18" charset="0"/>
+                          </a:rPr>
+                          <m:t>′</m:t>
+                        </m:r>
+                      </m:oMath>
+                    </m:oMathPara>
+                  </a14:m>
+                  <a:endParaRPr lang="en-US" sz="2400" dirty="0"/>
+                </a:p>
+              </p:txBody>
+            </p:sp>
+          </mc:Choice>
+          <mc:Fallback xmlns="">
+            <p:sp>
+              <p:nvSpPr>
+                <p:cNvPr id="21" name="TextBox 20"/>
+                <p:cNvSpPr txBox="1">
+                  <a:spLocks noRot="1" noChangeAspect="1" noMove="1" noResize="1" noEditPoints="1" noAdjustHandles="1" noChangeArrowheads="1" noChangeShapeType="1" noTextEdit="1"/>
+                </p:cNvSpPr>
+                <p:nvPr/>
+              </p:nvSpPr>
+              <p:spPr>
+                <a:xfrm>
+                  <a:off x="4328160" y="914400"/>
+                  <a:ext cx="335027" cy="369332"/>
+                </a:xfrm>
+                <a:prstGeom prst="rect">
+                  <a:avLst/>
+                </a:prstGeom>
+                <a:blipFill>
+                  <a:blip r:embed="rId8"/>
+                  <a:stretch>
+                    <a:fillRect l="-23636" t="-1639" r="-23636" b="-8197"/>
+                  </a:stretch>
+                </a:blipFill>
+              </p:spPr>
+              <p:txBody>
+                <a:bodyPr/>
+                <a:lstStyle/>
+                <a:p>
+                  <a:r>
+                    <a:rPr lang="en-US">
+                      <a:noFill/>
+                    </a:rPr>
+                    <a:t> </a:t>
+                  </a:r>
+                </a:p>
+              </p:txBody>
+            </p:sp>
+          </mc:Fallback>
+        </mc:AlternateContent>
+        <mc:AlternateContent xmlns:mc="http://schemas.openxmlformats.org/markup-compatibility/2006" xmlns:a14="http://schemas.microsoft.com/office/drawing/2010/main">
+          <mc:Choice Requires="a14">
+            <p:sp>
+              <p:nvSpPr>
+                <p:cNvPr id="24" name="TextBox 23"/>
+                <p:cNvSpPr txBox="1"/>
+                <p:nvPr/>
+              </p:nvSpPr>
+              <p:spPr>
+                <a:xfrm>
+                  <a:off x="2830830" y="5229225"/>
+                  <a:ext cx="331821" cy="369332"/>
+                </a:xfrm>
+                <a:prstGeom prst="rect">
+                  <a:avLst/>
+                </a:prstGeom>
+                <a:noFill/>
+              </p:spPr>
+              <p:txBody>
+                <a:bodyPr wrap="none" lIns="0" tIns="0" rIns="0" bIns="0" rtlCol="0">
+                  <a:spAutoFit/>
+                </a:bodyPr>
+                <a:lstStyle/>
+                <a:p>
+                  <a:pPr/>
+                  <a14:m>
+                    <m:oMathPara xmlns:m="http://schemas.openxmlformats.org/officeDocument/2006/math">
+                      <m:oMathParaPr>
+                        <m:jc m:val="centerGroup"/>
+                      </m:oMathParaPr>
+                      <m:oMath xmlns:m="http://schemas.openxmlformats.org/officeDocument/2006/math">
+                        <m:r>
+                          <a:rPr lang="en-US" sz="2400" b="0" i="1" smtClean="0">
+                            <a:solidFill>
+                              <a:schemeClr val="accent1">
+                                <a:lumMod val="75000"/>
+                              </a:schemeClr>
+                            </a:solidFill>
+                            <a:latin typeface="Cambria Math" panose="02040503050406030204" pitchFamily="18" charset="0"/>
+                          </a:rPr>
+                          <m:t>𝑍</m:t>
+                        </m:r>
+                        <m:r>
+                          <a:rPr lang="en-US" sz="2400" b="0" i="1" smtClean="0">
+                            <a:solidFill>
+                              <a:schemeClr val="accent1">
+                                <a:lumMod val="75000"/>
+                              </a:schemeClr>
+                            </a:solidFill>
+                            <a:latin typeface="Cambria Math" panose="02040503050406030204" pitchFamily="18" charset="0"/>
+                          </a:rPr>
+                          <m:t>′</m:t>
+                        </m:r>
+                      </m:oMath>
+                    </m:oMathPara>
+                  </a14:m>
+                  <a:endParaRPr lang="en-US" sz="2400" dirty="0">
+                    <a:solidFill>
+                      <a:schemeClr val="accent1">
+                        <a:lumMod val="75000"/>
+                      </a:schemeClr>
+                    </a:solidFill>
+                  </a:endParaRPr>
+                </a:p>
+              </p:txBody>
+            </p:sp>
+          </mc:Choice>
+          <mc:Fallback xmlns="">
+            <p:sp>
+              <p:nvSpPr>
+                <p:cNvPr id="24" name="TextBox 23"/>
+                <p:cNvSpPr txBox="1">
+                  <a:spLocks noRot="1" noChangeAspect="1" noMove="1" noResize="1" noEditPoints="1" noAdjustHandles="1" noChangeArrowheads="1" noChangeShapeType="1" noTextEdit="1"/>
+                </p:cNvSpPr>
+                <p:nvPr/>
+              </p:nvSpPr>
+              <p:spPr>
+                <a:xfrm>
+                  <a:off x="2830830" y="5229225"/>
+                  <a:ext cx="331821" cy="369332"/>
+                </a:xfrm>
+                <a:prstGeom prst="rect">
+                  <a:avLst/>
+                </a:prstGeom>
+                <a:blipFill>
+                  <a:blip r:embed="rId9"/>
+                  <a:stretch>
+                    <a:fillRect l="-23636" t="-1667" r="-25455" b="-10000"/>
+                  </a:stretch>
+                </a:blipFill>
+              </p:spPr>
+              <p:txBody>
+                <a:bodyPr/>
+                <a:lstStyle/>
+                <a:p>
+                  <a:r>
+                    <a:rPr lang="en-US">
+                      <a:noFill/>
+                    </a:rPr>
+                    <a:t> </a:t>
+                  </a:r>
+                </a:p>
+              </p:txBody>
+            </p:sp>
+          </mc:Fallback>
+        </mc:AlternateContent>
+        <mc:AlternateContent xmlns:mc="http://schemas.openxmlformats.org/markup-compatibility/2006">
+          <mc:Choice xmlns:a14="http://schemas.microsoft.com/office/drawing/2010/main" Requires="a14">
+            <p:sp>
+              <p:nvSpPr>
+                <p:cNvPr id="25" name="TextBox 24"/>
+                <p:cNvSpPr txBox="1"/>
+                <p:nvPr/>
+              </p:nvSpPr>
+              <p:spPr>
+                <a:xfrm>
+                  <a:off x="4885782" y="1210758"/>
+                  <a:ext cx="402290" cy="369332"/>
+                </a:xfrm>
+                <a:prstGeom prst="rect">
+                  <a:avLst/>
+                </a:prstGeom>
+                <a:noFill/>
+              </p:spPr>
+              <p:txBody>
+                <a:bodyPr wrap="none" lIns="0" tIns="0" rIns="0" bIns="0" rtlCol="0">
+                  <a:spAutoFit/>
+                </a:bodyPr>
+                <a:lstStyle/>
+                <a:p>
+                  <a:pPr/>
+                  <a14:m>
+                    <m:oMathPara xmlns:m="http://schemas.openxmlformats.org/officeDocument/2006/math">
+                      <m:oMathParaPr>
+                        <m:jc m:val="centerGroup"/>
+                      </m:oMathParaPr>
+                      <m:oMath xmlns:m="http://schemas.openxmlformats.org/officeDocument/2006/math">
+                        <m:sSub>
+                          <m:sSubPr>
+                            <m:ctrlPr>
+                              <a:rPr lang="en-US" sz="2400" b="0" i="1" smtClean="0">
+                                <a:solidFill>
+                                  <a:schemeClr val="accent6">
+                                    <a:lumMod val="75000"/>
+                                  </a:schemeClr>
+                                </a:solidFill>
+                                <a:latin typeface="Cambria Math" panose="02040503050406030204" pitchFamily="18" charset="0"/>
+                              </a:rPr>
+                            </m:ctrlPr>
+                          </m:sSubPr>
+                          <m:e>
+                            <m:acc>
+                              <m:accPr>
+                                <m:chr m:val="̅"/>
+                                <m:ctrlPr>
+                                  <a:rPr lang="en-US" sz="2400" i="1">
+                                    <a:solidFill>
+                                      <a:schemeClr val="accent6">
+                                        <a:lumMod val="75000"/>
+                                      </a:schemeClr>
+                                    </a:solidFill>
+                                    <a:latin typeface="Cambria Math" panose="02040503050406030204" pitchFamily="18" charset="0"/>
+                                  </a:rPr>
+                                </m:ctrlPr>
+                              </m:accPr>
+                              <m:e>
+                                <m:r>
+                                  <a:rPr lang="en-US" sz="2400" b="1" i="1">
+                                    <a:solidFill>
+                                      <a:schemeClr val="accent6">
+                                        <a:lumMod val="75000"/>
+                                      </a:schemeClr>
+                                    </a:solidFill>
+                                    <a:latin typeface="Cambria Math" panose="02040503050406030204" pitchFamily="18" charset="0"/>
+                                  </a:rPr>
+                                  <m:t>𝒂</m:t>
+                                </m:r>
+                              </m:e>
+                            </m:acc>
+                          </m:e>
+                          <m:sub>
+                            <m:r>
+                              <a:rPr lang="en-US" sz="2400" b="0" i="1" smtClean="0">
+                                <a:solidFill>
+                                  <a:schemeClr val="accent6">
+                                    <a:lumMod val="75000"/>
+                                  </a:schemeClr>
+                                </a:solidFill>
+                                <a:latin typeface="Cambria Math" panose="02040503050406030204" pitchFamily="18" charset="0"/>
+                              </a:rPr>
+                              <m:t>0</m:t>
+                            </m:r>
+                          </m:sub>
+                        </m:sSub>
+                      </m:oMath>
+                    </m:oMathPara>
+                  </a14:m>
+                  <a:endParaRPr lang="en-US" sz="2400" dirty="0">
+                    <a:solidFill>
+                      <a:schemeClr val="accent6">
+                        <a:lumMod val="75000"/>
+                      </a:schemeClr>
+                    </a:solidFill>
+                  </a:endParaRPr>
+                </a:p>
+              </p:txBody>
+            </p:sp>
+          </mc:Choice>
+          <mc:Fallback>
+            <p:sp>
+              <p:nvSpPr>
+                <p:cNvPr id="25" name="TextBox 24"/>
+                <p:cNvSpPr txBox="1">
+                  <a:spLocks noRot="1" noChangeAspect="1" noMove="1" noResize="1" noEditPoints="1" noAdjustHandles="1" noChangeArrowheads="1" noChangeShapeType="1" noTextEdit="1"/>
+                </p:cNvSpPr>
+                <p:nvPr/>
+              </p:nvSpPr>
+              <p:spPr>
+                <a:xfrm>
+                  <a:off x="4885782" y="1210758"/>
+                  <a:ext cx="402290" cy="369332"/>
+                </a:xfrm>
+                <a:prstGeom prst="rect">
+                  <a:avLst/>
+                </a:prstGeom>
+                <a:blipFill>
+                  <a:blip r:embed="rId10"/>
+                  <a:stretch>
+                    <a:fillRect l="-10606" r="-21212" b="-15000"/>
+                  </a:stretch>
+                </a:blipFill>
+              </p:spPr>
+              <p:txBody>
+                <a:bodyPr/>
+                <a:lstStyle/>
+                <a:p>
+                  <a:r>
+                    <a:rPr lang="en-US">
+                      <a:noFill/>
+                    </a:rPr>
+                    <a:t> </a:t>
+                  </a:r>
+                </a:p>
+              </p:txBody>
+            </p:sp>
+          </mc:Fallback>
+        </mc:AlternateContent>
+      </p:grpSp>
+      <mc:AlternateContent xmlns:mc="http://schemas.openxmlformats.org/markup-compatibility/2006" xmlns:a14="http://schemas.microsoft.com/office/drawing/2010/main">
+        <mc:Choice Requires="a14">
+          <p:sp>
+            <p:nvSpPr>
+              <p:cNvPr id="63" name="TextBox 62"/>
+              <p:cNvSpPr txBox="1"/>
+              <p:nvPr/>
+            </p:nvSpPr>
+            <p:spPr>
+              <a:xfrm>
+                <a:off x="2186178" y="1958340"/>
+                <a:ext cx="229362" cy="369332"/>
+              </a:xfrm>
+              <a:prstGeom prst="rect">
+                <a:avLst/>
+              </a:prstGeom>
+              <a:noFill/>
+            </p:spPr>
+            <p:txBody>
+              <a:bodyPr wrap="square" lIns="0" tIns="0" rIns="0" bIns="0" rtlCol="0">
+                <a:spAutoFit/>
+              </a:bodyPr>
+              <a:lstStyle/>
+              <a:p>
+                <a:pPr/>
+                <a14:m>
+                  <m:oMathPara xmlns:m="http://schemas.openxmlformats.org/officeDocument/2006/math">
+                    <m:oMathParaPr>
+                      <m:jc m:val="centerGroup"/>
+                    </m:oMathParaPr>
+                    <m:oMath xmlns:m="http://schemas.openxmlformats.org/officeDocument/2006/math">
+                      <m:r>
+                        <m:rPr>
+                          <m:sty m:val="p"/>
+                        </m:rPr>
+                        <a:rPr lang="en-US" sz="2400" b="0" i="0" smtClean="0">
+                          <a:latin typeface="Cambria Math" panose="02040503050406030204" pitchFamily="18" charset="0"/>
+                        </a:rPr>
+                        <m:t>S</m:t>
+                      </m:r>
+                    </m:oMath>
+                  </m:oMathPara>
+                </a14:m>
+                <a:endParaRPr lang="en-US" sz="2400" dirty="0"/>
+              </a:p>
+            </p:txBody>
+          </p:sp>
+        </mc:Choice>
+        <mc:Fallback xmlns="">
+          <p:sp>
+            <p:nvSpPr>
+              <p:cNvPr id="63" name="TextBox 62"/>
+              <p:cNvSpPr txBox="1">
+                <a:spLocks noRot="1" noChangeAspect="1" noMove="1" noResize="1" noEditPoints="1" noAdjustHandles="1" noChangeArrowheads="1" noChangeShapeType="1" noTextEdit="1"/>
+              </p:cNvSpPr>
+              <p:nvPr/>
+            </p:nvSpPr>
+            <p:spPr>
+              <a:xfrm>
+                <a:off x="2186178" y="1958340"/>
+                <a:ext cx="229362" cy="369332"/>
+              </a:xfrm>
+              <a:prstGeom prst="rect">
+                <a:avLst/>
+              </a:prstGeom>
+              <a:blipFill>
+                <a:blip r:embed="rId17"/>
+                <a:stretch>
+                  <a:fillRect l="-32432" r="-29730" b="-6557"/>
+                </a:stretch>
+              </a:blipFill>
+            </p:spPr>
+            <p:txBody>
+              <a:bodyPr/>
+              <a:lstStyle/>
+              <a:p>
+                <a:r>
+                  <a:rPr lang="en-US">
+                    <a:noFill/>
+                  </a:rPr>
+                  <a:t> </a:t>
+                </a:r>
+              </a:p>
+            </p:txBody>
+          </p:sp>
+        </mc:Fallback>
+      </mc:AlternateContent>
+      <mc:AlternateContent xmlns:mc="http://schemas.openxmlformats.org/markup-compatibility/2006" xmlns:a14="http://schemas.microsoft.com/office/drawing/2010/main">
+        <mc:Choice Requires="a14">
+          <p:sp>
+            <p:nvSpPr>
+              <p:cNvPr id="64" name="TextBox 63"/>
+              <p:cNvSpPr txBox="1"/>
+              <p:nvPr/>
+            </p:nvSpPr>
+            <p:spPr>
+              <a:xfrm>
+                <a:off x="4144518" y="1958340"/>
+                <a:ext cx="229362" cy="369332"/>
+              </a:xfrm>
+              <a:prstGeom prst="rect">
+                <a:avLst/>
+              </a:prstGeom>
+              <a:noFill/>
+            </p:spPr>
+            <p:txBody>
+              <a:bodyPr wrap="square" lIns="0" tIns="0" rIns="0" bIns="0" rtlCol="0">
+                <a:spAutoFit/>
+              </a:bodyPr>
+              <a:lstStyle/>
+              <a:p>
+                <a:pPr/>
+                <a14:m>
+                  <m:oMathPara xmlns:m="http://schemas.openxmlformats.org/officeDocument/2006/math">
+                    <m:oMathParaPr>
+                      <m:jc m:val="centerGroup"/>
+                    </m:oMathParaPr>
+                    <m:oMath xmlns:m="http://schemas.openxmlformats.org/officeDocument/2006/math">
+                      <m:r>
+                        <m:rPr>
+                          <m:sty m:val="p"/>
+                        </m:rPr>
+                        <a:rPr lang="en-US" sz="2400" b="0" i="0" smtClean="0">
+                          <a:solidFill>
+                            <a:schemeClr val="accent1">
+                              <a:lumMod val="75000"/>
+                            </a:schemeClr>
+                          </a:solidFill>
+                          <a:latin typeface="Cambria Math" panose="02040503050406030204" pitchFamily="18" charset="0"/>
+                        </a:rPr>
+                        <m:t>S</m:t>
+                      </m:r>
+                      <m:r>
+                        <a:rPr lang="en-US" sz="2400" b="0" i="0" smtClean="0">
+                          <a:solidFill>
+                            <a:schemeClr val="accent1">
+                              <a:lumMod val="75000"/>
+                            </a:schemeClr>
+                          </a:solidFill>
+                          <a:latin typeface="Cambria Math" panose="02040503050406030204" pitchFamily="18" charset="0"/>
+                        </a:rPr>
+                        <m:t>′</m:t>
+                      </m:r>
+                    </m:oMath>
+                  </m:oMathPara>
+                </a14:m>
+                <a:endParaRPr lang="en-US" sz="2400" dirty="0"/>
+              </a:p>
+            </p:txBody>
+          </p:sp>
+        </mc:Choice>
+        <mc:Fallback xmlns="">
+          <p:sp>
+            <p:nvSpPr>
+              <p:cNvPr id="64" name="TextBox 63"/>
+              <p:cNvSpPr txBox="1">
+                <a:spLocks noRot="1" noChangeAspect="1" noMove="1" noResize="1" noEditPoints="1" noAdjustHandles="1" noChangeArrowheads="1" noChangeShapeType="1" noTextEdit="1"/>
+              </p:cNvSpPr>
+              <p:nvPr/>
+            </p:nvSpPr>
+            <p:spPr>
+              <a:xfrm>
+                <a:off x="4144518" y="1958340"/>
+                <a:ext cx="229362" cy="369332"/>
+              </a:xfrm>
+              <a:prstGeom prst="rect">
+                <a:avLst/>
+              </a:prstGeom>
+              <a:blipFill>
+                <a:blip r:embed="rId18"/>
+                <a:stretch>
+                  <a:fillRect l="-52632" t="-1639" r="-50000" b="-9836"/>
+                </a:stretch>
+              </a:blipFill>
+            </p:spPr>
+            <p:txBody>
+              <a:bodyPr/>
+              <a:lstStyle/>
+              <a:p>
+                <a:r>
+                  <a:rPr lang="en-US">
+                    <a:noFill/>
+                  </a:rPr>
+                  <a:t> </a:t>
+                </a:r>
+              </a:p>
+            </p:txBody>
+          </p:sp>
+        </mc:Fallback>
+      </mc:AlternateContent>
+    </p:spTree>
+    <p:extLst>
+      <p:ext uri="{BB962C8B-B14F-4D97-AF65-F5344CB8AC3E}">
+        <p14:creationId xmlns:p14="http://schemas.microsoft.com/office/powerpoint/2010/main" val="266600062"/>
+      </p:ext>
+    </p:extLst>
+  </p:cSld>
+  <p:clrMapOvr>
+    <a:masterClrMapping/>
+  </p:clrMapOvr>
+</p:sld>
+</file>
+
+<file path=ppt/slides/slide5.xml><?xml version="1.0" encoding="utf-8"?>
+<p:sld xmlns:a="http://schemas.openxmlformats.org/drawingml/2006/main" xmlns:r="http://schemas.openxmlformats.org/officeDocument/2006/relationships" xmlns:p="http://schemas.openxmlformats.org/presentationml/2006/main">
+  <p:cSld>
+    <p:spTree>
+      <p:nvGrpSpPr>
+        <p:cNvPr id="1" name=""/>
+        <p:cNvGrpSpPr/>
+        <p:nvPr/>
+      </p:nvGrpSpPr>
+      <p:grpSpPr>
+        <a:xfrm>
+          <a:off x="0" y="0"/>
+          <a:ext cx="0" cy="0"/>
+          <a:chOff x="0" y="0"/>
+          <a:chExt cx="0" cy="0"/>
+        </a:xfrm>
+      </p:grpSpPr>
+      <p:cxnSp>
+        <p:nvCxnSpPr>
+          <p:cNvPr id="39" name="Straight Arrow Connector 38"/>
+          <p:cNvCxnSpPr/>
+          <p:nvPr/>
+        </p:nvCxnSpPr>
+        <p:spPr>
+          <a:xfrm>
+            <a:off x="9069213" y="2268944"/>
+            <a:ext cx="1260000" cy="0"/>
+          </a:xfrm>
+          <a:prstGeom prst="straightConnector1">
+            <a:avLst/>
+          </a:prstGeom>
+          <a:ln w="28575" cap="rnd">
+            <a:solidFill>
+              <a:schemeClr val="accent6">
+                <a:lumMod val="75000"/>
+                <a:alpha val="50000"/>
+              </a:schemeClr>
+            </a:solidFill>
+            <a:round/>
+            <a:tailEnd type="triangle" w="lg" len="lg"/>
+          </a:ln>
+        </p:spPr>
+        <p:style>
+          <a:lnRef idx="1">
+            <a:schemeClr val="accent1"/>
+          </a:lnRef>
+          <a:fillRef idx="0">
+            <a:schemeClr val="accent1"/>
+          </a:fillRef>
+          <a:effectRef idx="0">
+            <a:schemeClr val="accent1"/>
+          </a:effectRef>
+          <a:fontRef idx="minor">
+            <a:schemeClr val="tx1"/>
+          </a:fontRef>
+        </p:style>
+      </p:cxnSp>
+      <mc:AlternateContent xmlns:mc="http://schemas.openxmlformats.org/markup-compatibility/2006">
+        <mc:Choice xmlns:a14="http://schemas.microsoft.com/office/drawing/2010/main" Requires="a14">
+          <p:sp>
+            <p:nvSpPr>
+              <p:cNvPr id="40" name="Rectangle 39"/>
+              <p:cNvSpPr/>
+              <p:nvPr/>
+            </p:nvSpPr>
+            <p:spPr>
+              <a:xfrm>
+                <a:off x="9490384" y="2226728"/>
+                <a:ext cx="444352" cy="461665"/>
+              </a:xfrm>
+              <a:prstGeom prst="rect">
+                <a:avLst/>
+              </a:prstGeom>
+            </p:spPr>
+            <p:txBody>
+              <a:bodyPr wrap="none">
+                <a:spAutoFit/>
+              </a:bodyPr>
+              <a:lstStyle/>
+              <a:p>
+                <a14:m>
+                  <m:oMathPara xmlns:m="http://schemas.openxmlformats.org/officeDocument/2006/math">
+                    <m:oMathParaPr>
+                      <m:jc m:val="centerGroup"/>
+                    </m:oMathParaPr>
+                    <m:oMath xmlns:m="http://schemas.openxmlformats.org/officeDocument/2006/math">
+                      <m:acc>
+                        <m:accPr>
+                          <m:chr m:val="̅"/>
+                          <m:ctrlPr>
+                            <a:rPr lang="en-US" sz="2400" i="1" smtClean="0">
+                              <a:solidFill>
+                                <a:schemeClr val="tx1">
+                                  <a:alpha val="50000"/>
+                                </a:schemeClr>
+                              </a:solidFill>
+                              <a:latin typeface="Cambria Math" panose="02040503050406030204" pitchFamily="18" charset="0"/>
+                            </a:rPr>
+                          </m:ctrlPr>
+                        </m:accPr>
+                        <m:e>
+                          <m:r>
+                            <a:rPr lang="en-US" sz="2400" b="1" i="1" smtClean="0">
+                              <a:solidFill>
+                                <a:schemeClr val="tx1">
+                                  <a:alpha val="50000"/>
+                                </a:schemeClr>
+                              </a:solidFill>
+                              <a:latin typeface="Cambria Math" panose="02040503050406030204" pitchFamily="18" charset="0"/>
+                            </a:rPr>
+                            <m:t>𝒂</m:t>
+                          </m:r>
+                        </m:e>
+                      </m:acc>
+                    </m:oMath>
+                  </m:oMathPara>
+                </a14:m>
+                <a:endParaRPr lang="en-US" sz="2400" dirty="0">
+                  <a:solidFill>
+                    <a:schemeClr val="tx1">
+                      <a:alpha val="50000"/>
+                    </a:schemeClr>
+                  </a:solidFill>
+                </a:endParaRPr>
+              </a:p>
+            </p:txBody>
+          </p:sp>
+        </mc:Choice>
+        <mc:Fallback>
+          <p:sp>
+            <p:nvSpPr>
+              <p:cNvPr id="40" name="Rectangle 39"/>
+              <p:cNvSpPr>
+                <a:spLocks noRot="1" noChangeAspect="1" noMove="1" noResize="1" noEditPoints="1" noAdjustHandles="1" noChangeArrowheads="1" noChangeShapeType="1" noTextEdit="1"/>
+              </p:cNvSpPr>
+              <p:nvPr/>
+            </p:nvSpPr>
+            <p:spPr>
+              <a:xfrm>
+                <a:off x="9490384" y="2226728"/>
+                <a:ext cx="444352" cy="461665"/>
+              </a:xfrm>
+              <a:prstGeom prst="rect">
+                <a:avLst/>
+              </a:prstGeom>
+              <a:blipFill>
+                <a:blip r:embed="rId2"/>
+                <a:stretch>
+                  <a:fillRect/>
+                </a:stretch>
+              </a:blipFill>
+            </p:spPr>
+            <p:txBody>
+              <a:bodyPr/>
+              <a:lstStyle/>
+              <a:p>
+                <a:r>
+                  <a:rPr lang="en-US">
+                    <a:noFill/>
+                  </a:rPr>
+                  <a:t> </a:t>
+                </a:r>
+              </a:p>
+            </p:txBody>
+          </p:sp>
+        </mc:Fallback>
+      </mc:AlternateContent>
+      <p:cxnSp>
+        <p:nvCxnSpPr>
+          <p:cNvPr id="38" name="Straight Arrow Connector 37"/>
+          <p:cNvCxnSpPr/>
+          <p:nvPr/>
+        </p:nvCxnSpPr>
+        <p:spPr>
+          <a:xfrm>
+            <a:off x="9071118" y="782663"/>
+            <a:ext cx="1260000" cy="0"/>
+          </a:xfrm>
+          <a:prstGeom prst="straightConnector1">
+            <a:avLst/>
+          </a:prstGeom>
+          <a:ln w="28575" cap="rnd">
+            <a:solidFill>
+              <a:schemeClr val="tx1"/>
+            </a:solidFill>
+            <a:round/>
+            <a:tailEnd type="triangle" w="lg" len="lg"/>
+          </a:ln>
+        </p:spPr>
+        <p:style>
+          <a:lnRef idx="1">
+            <a:schemeClr val="accent1"/>
+          </a:lnRef>
+          <a:fillRef idx="0">
+            <a:schemeClr val="accent1"/>
+          </a:fillRef>
+          <a:effectRef idx="0">
+            <a:schemeClr val="accent1"/>
+          </a:effectRef>
+          <a:fontRef idx="minor">
+            <a:schemeClr val="tx1"/>
+          </a:fontRef>
+        </p:style>
+      </p:cxnSp>
+      <p:grpSp>
+        <p:nvGrpSpPr>
+          <p:cNvPr id="9" name="Group 8"/>
+          <p:cNvGrpSpPr/>
+          <p:nvPr/>
+        </p:nvGrpSpPr>
+        <p:grpSpPr>
+          <a:xfrm>
+            <a:off x="556530" y="363974"/>
+            <a:ext cx="4354029" cy="988709"/>
+            <a:chOff x="864378" y="363974"/>
+            <a:chExt cx="4354029" cy="988709"/>
+          </a:xfrm>
+        </p:grpSpPr>
+        <p:cxnSp>
+          <p:nvCxnSpPr>
+            <p:cNvPr id="2" name="Straight Connector 1"/>
+            <p:cNvCxnSpPr/>
+            <p:nvPr/>
+          </p:nvCxnSpPr>
+          <p:spPr>
+            <a:xfrm flipH="1">
+              <a:off x="1226820" y="1159048"/>
+              <a:ext cx="3626901" cy="0"/>
+            </a:xfrm>
+            <a:prstGeom prst="line">
+              <a:avLst/>
+            </a:prstGeom>
+            <a:ln w="28575" cap="rnd">
+              <a:solidFill>
+                <a:schemeClr val="tx1"/>
+              </a:solidFill>
+              <a:round/>
+              <a:headEnd type="triangle" w="lg" len="lg"/>
+              <a:tailEnd type="none" w="lg" len="lg"/>
+            </a:ln>
+          </p:spPr>
+          <p:style>
+            <a:lnRef idx="1">
+              <a:schemeClr val="accent1"/>
+            </a:lnRef>
+            <a:fillRef idx="0">
+              <a:schemeClr val="accent1"/>
+            </a:fillRef>
+            <a:effectRef idx="0">
+              <a:schemeClr val="accent1"/>
+            </a:effectRef>
+            <a:fontRef idx="minor">
+              <a:schemeClr val="tx1"/>
+            </a:fontRef>
+          </p:style>
+        </p:cxnSp>
+        <mc:AlternateContent xmlns:mc="http://schemas.openxmlformats.org/markup-compatibility/2006">
+          <mc:Choice xmlns:a14="http://schemas.microsoft.com/office/drawing/2010/main" Requires="a14">
+            <p:sp>
+              <p:nvSpPr>
+                <p:cNvPr id="3" name="TextBox 2"/>
+                <p:cNvSpPr txBox="1"/>
+                <p:nvPr/>
+              </p:nvSpPr>
+              <p:spPr>
+                <a:xfrm>
+                  <a:off x="864378" y="983351"/>
+                  <a:ext cx="284822" cy="369332"/>
+                </a:xfrm>
+                <a:prstGeom prst="rect">
+                  <a:avLst/>
+                </a:prstGeom>
+                <a:noFill/>
+              </p:spPr>
+              <p:txBody>
+                <a:bodyPr wrap="none" lIns="0" tIns="0" rIns="0" bIns="0" rtlCol="0">
+                  <a:spAutoFit/>
+                </a:bodyPr>
+                <a:lstStyle/>
+                <a:p>
+                  <a:pPr/>
+                  <a14:m>
+                    <m:oMathPara xmlns:m="http://schemas.openxmlformats.org/officeDocument/2006/math">
+                      <m:oMathParaPr>
+                        <m:jc m:val="centerGroup"/>
+                      </m:oMathParaPr>
+                      <m:oMath xmlns:m="http://schemas.openxmlformats.org/officeDocument/2006/math">
+                        <m:r>
+                          <a:rPr lang="en-US" sz="2400" b="0" i="1" smtClean="0">
+                            <a:latin typeface="Cambria Math" panose="02040503050406030204" pitchFamily="18" charset="0"/>
+                          </a:rPr>
+                          <m:t>𝑂</m:t>
+                        </m:r>
+                      </m:oMath>
+                    </m:oMathPara>
+                  </a14:m>
+                  <a:endParaRPr lang="en-US" sz="2400" dirty="0"/>
+                </a:p>
+              </p:txBody>
+            </p:sp>
+          </mc:Choice>
+          <mc:Fallback>
+            <p:sp>
+              <p:nvSpPr>
+                <p:cNvPr id="3" name="TextBox 2"/>
+                <p:cNvSpPr txBox="1">
+                  <a:spLocks noRot="1" noChangeAspect="1" noMove="1" noResize="1" noEditPoints="1" noAdjustHandles="1" noChangeArrowheads="1" noChangeShapeType="1" noTextEdit="1"/>
+                </p:cNvSpPr>
+                <p:nvPr/>
+              </p:nvSpPr>
+              <p:spPr>
+                <a:xfrm>
+                  <a:off x="864378" y="983351"/>
+                  <a:ext cx="284822" cy="369332"/>
+                </a:xfrm>
+                <a:prstGeom prst="rect">
+                  <a:avLst/>
+                </a:prstGeom>
+                <a:blipFill>
+                  <a:blip r:embed="rId3"/>
+                  <a:stretch>
+                    <a:fillRect l="-23404" r="-23404" b="-6557"/>
+                  </a:stretch>
+                </a:blipFill>
+              </p:spPr>
+              <p:txBody>
+                <a:bodyPr/>
+                <a:lstStyle/>
+                <a:p>
+                  <a:r>
+                    <a:rPr lang="en-US">
+                      <a:noFill/>
+                    </a:rPr>
+                    <a:t> </a:t>
+                  </a:r>
+                </a:p>
+              </p:txBody>
+            </p:sp>
+          </mc:Fallback>
+        </mc:AlternateContent>
+        <mc:AlternateContent xmlns:mc="http://schemas.openxmlformats.org/markup-compatibility/2006">
+          <mc:Choice xmlns:a14="http://schemas.microsoft.com/office/drawing/2010/main" Requires="a14">
+            <p:sp>
+              <p:nvSpPr>
+                <p:cNvPr id="4" name="TextBox 3"/>
+                <p:cNvSpPr txBox="1"/>
+                <p:nvPr/>
+              </p:nvSpPr>
+              <p:spPr>
+                <a:xfrm>
+                  <a:off x="4943203" y="974252"/>
+                  <a:ext cx="275204" cy="369332"/>
+                </a:xfrm>
+                <a:prstGeom prst="rect">
+                  <a:avLst/>
+                </a:prstGeom>
+                <a:noFill/>
+              </p:spPr>
+              <p:txBody>
+                <a:bodyPr wrap="none" lIns="0" tIns="0" rIns="0" bIns="0" rtlCol="0">
+                  <a:spAutoFit/>
+                </a:bodyPr>
+                <a:lstStyle/>
+                <a:p>
+                  <a:pPr/>
+                  <a14:m>
+                    <m:oMathPara xmlns:m="http://schemas.openxmlformats.org/officeDocument/2006/math">
+                      <m:oMathParaPr>
+                        <m:jc m:val="centerGroup"/>
+                      </m:oMathParaPr>
+                      <m:oMath xmlns:m="http://schemas.openxmlformats.org/officeDocument/2006/math">
+                        <m:r>
+                          <a:rPr lang="en-US" sz="2400" b="0" i="1" smtClean="0">
+                            <a:latin typeface="Cambria Math" panose="02040503050406030204" pitchFamily="18" charset="0"/>
+                          </a:rPr>
+                          <m:t>𝑋</m:t>
+                        </m:r>
+                      </m:oMath>
+                    </m:oMathPara>
+                  </a14:m>
+                  <a:endParaRPr lang="en-US" sz="2400" dirty="0"/>
+                </a:p>
+              </p:txBody>
+            </p:sp>
+          </mc:Choice>
+          <mc:Fallback>
+            <p:sp>
+              <p:nvSpPr>
+                <p:cNvPr id="4" name="TextBox 3"/>
+                <p:cNvSpPr txBox="1">
+                  <a:spLocks noRot="1" noChangeAspect="1" noMove="1" noResize="1" noEditPoints="1" noAdjustHandles="1" noChangeArrowheads="1" noChangeShapeType="1" noTextEdit="1"/>
+                </p:cNvSpPr>
+                <p:nvPr/>
+              </p:nvSpPr>
+              <p:spPr>
+                <a:xfrm>
+                  <a:off x="4943203" y="974252"/>
+                  <a:ext cx="275204" cy="369332"/>
+                </a:xfrm>
+                <a:prstGeom prst="rect">
+                  <a:avLst/>
+                </a:prstGeom>
+                <a:blipFill>
+                  <a:blip r:embed="rId4"/>
+                  <a:stretch>
+                    <a:fillRect l="-23913" r="-21739" b="-6667"/>
+                  </a:stretch>
+                </a:blipFill>
+              </p:spPr>
+              <p:txBody>
+                <a:bodyPr/>
+                <a:lstStyle/>
+                <a:p>
+                  <a:r>
+                    <a:rPr lang="en-US">
+                      <a:noFill/>
+                    </a:rPr>
+                    <a:t> </a:t>
+                  </a:r>
+                </a:p>
+              </p:txBody>
+            </p:sp>
+          </mc:Fallback>
+        </mc:AlternateContent>
+        <p:sp>
+          <p:nvSpPr>
+            <p:cNvPr id="5" name="Oval 4"/>
+            <p:cNvSpPr/>
+            <p:nvPr/>
+          </p:nvSpPr>
+          <p:spPr>
+            <a:xfrm>
+              <a:off x="1167674" y="1111159"/>
+              <a:ext cx="94706" cy="94706"/>
+            </a:xfrm>
+            <a:prstGeom prst="ellipse">
+              <a:avLst/>
+            </a:prstGeom>
+            <a:solidFill>
+              <a:schemeClr val="tx1"/>
+            </a:solidFill>
+            <a:ln>
+              <a:noFill/>
+            </a:ln>
+          </p:spPr>
+          <p:style>
+            <a:lnRef idx="2">
+              <a:schemeClr val="accent1">
+                <a:shade val="50000"/>
+              </a:schemeClr>
+            </a:lnRef>
+            <a:fillRef idx="1">
+              <a:schemeClr val="accent1"/>
+            </a:fillRef>
+            <a:effectRef idx="0">
+              <a:schemeClr val="accent1"/>
+            </a:effectRef>
+            <a:fontRef idx="minor">
+              <a:schemeClr val="lt1"/>
+            </a:fontRef>
+          </p:style>
+          <p:txBody>
+            <a:bodyPr rtlCol="0" anchor="ctr"/>
+            <a:lstStyle/>
+            <a:p>
+              <a:pPr algn="ctr"/>
+              <a:endParaRPr lang="en-US"/>
+            </a:p>
+          </p:txBody>
+        </p:sp>
+        <p:sp>
+          <p:nvSpPr>
+            <p:cNvPr id="6" name="Oval 5">
+              <a:extLst>
+                <a:ext uri="{FF2B5EF4-FFF2-40B4-BE49-F238E27FC236}">
+                  <a16:creationId xmlns:a16="http://schemas.microsoft.com/office/drawing/2014/main" id="{44BC4753-ED5A-ABEB-8B41-B9506AC8A628}"/>
+                </a:ext>
+              </a:extLst>
+            </p:cNvPr>
+            <p:cNvSpPr/>
+            <p:nvPr/>
+          </p:nvSpPr>
+          <p:spPr>
+            <a:xfrm>
+              <a:off x="3288012" y="780101"/>
+              <a:ext cx="215346" cy="215346"/>
+            </a:xfrm>
+            <a:prstGeom prst="ellipse">
+              <a:avLst/>
+            </a:prstGeom>
+            <a:gradFill flip="none" rotWithShape="1">
+              <a:gsLst>
+                <a:gs pos="12000">
+                  <a:schemeClr val="bg1"/>
+                </a:gs>
+                <a:gs pos="51000">
+                  <a:schemeClr val="accent5">
+                    <a:lumMod val="95000"/>
+                    <a:lumOff val="5000"/>
+                  </a:schemeClr>
+                </a:gs>
+                <a:gs pos="77000">
+                  <a:srgbClr val="1D345D"/>
+                </a:gs>
+              </a:gsLst>
+              <a:path path="circle">
+                <a:fillToRect r="100000" b="100000"/>
+              </a:path>
+              <a:tileRect l="-100000" t="-100000"/>
+            </a:gradFill>
+            <a:ln w="3175">
+              <a:solidFill>
+                <a:schemeClr val="tx1"/>
+              </a:solidFill>
+            </a:ln>
+          </p:spPr>
+          <p:style>
+            <a:lnRef idx="2">
+              <a:schemeClr val="accent1">
+                <a:shade val="50000"/>
+              </a:schemeClr>
+            </a:lnRef>
+            <a:fillRef idx="1">
+              <a:schemeClr val="accent1"/>
+            </a:fillRef>
+            <a:effectRef idx="0">
+              <a:schemeClr val="accent1"/>
+            </a:effectRef>
+            <a:fontRef idx="minor">
+              <a:schemeClr val="lt1"/>
+            </a:fontRef>
+          </p:style>
+          <p:txBody>
+            <a:bodyPr rtlCol="0" anchor="ctr"/>
+            <a:lstStyle/>
+            <a:p>
+              <a:pPr algn="ctr"/>
+              <a:endParaRPr lang="en-US"/>
+            </a:p>
+          </p:txBody>
+        </p:sp>
+        <mc:AlternateContent xmlns:mc="http://schemas.openxmlformats.org/markup-compatibility/2006">
+          <mc:Choice xmlns:a14="http://schemas.microsoft.com/office/drawing/2010/main" Requires="a14">
+            <p:sp>
+              <p:nvSpPr>
+                <p:cNvPr id="7" name="Rectangle 6"/>
+                <p:cNvSpPr/>
+                <p:nvPr/>
+              </p:nvSpPr>
+              <p:spPr>
+                <a:xfrm>
+                  <a:off x="2984809" y="363974"/>
+                  <a:ext cx="1022459" cy="462434"/>
+                </a:xfrm>
+                <a:prstGeom prst="rect">
+                  <a:avLst/>
+                </a:prstGeom>
+              </p:spPr>
+              <p:txBody>
+                <a:bodyPr wrap="none">
+                  <a:spAutoFit/>
+                </a:bodyPr>
+                <a:lstStyle/>
+                <a:p>
+                  <a14:m>
+                    <m:oMathPara xmlns:m="http://schemas.openxmlformats.org/officeDocument/2006/math">
+                      <m:oMathParaPr>
+                        <m:jc m:val="centerGroup"/>
+                      </m:oMathParaPr>
+                      <m:oMath xmlns:m="http://schemas.openxmlformats.org/officeDocument/2006/math">
+                        <m:acc>
+                          <m:accPr>
+                            <m:chr m:val="̅"/>
+                            <m:ctrlPr>
+                              <a:rPr lang="en-US" sz="2400" i="1" smtClean="0">
+                                <a:solidFill>
+                                  <a:schemeClr val="tx1"/>
+                                </a:solidFill>
+                                <a:latin typeface="Cambria Math" panose="02040503050406030204" pitchFamily="18" charset="0"/>
+                              </a:rPr>
+                            </m:ctrlPr>
+                          </m:accPr>
+                          <m:e>
+                            <m:r>
+                              <a:rPr lang="en-US" sz="2400" b="1" i="1" smtClean="0">
+                                <a:solidFill>
+                                  <a:schemeClr val="tx1"/>
+                                </a:solidFill>
+                                <a:latin typeface="Cambria Math" panose="02040503050406030204" pitchFamily="18" charset="0"/>
+                              </a:rPr>
+                              <m:t>𝒗</m:t>
+                            </m:r>
+                          </m:e>
+                        </m:acc>
+                        <m:r>
+                          <a:rPr lang="en-US" sz="2400" b="0" i="1" smtClean="0">
+                            <a:solidFill>
+                              <a:schemeClr val="tx1"/>
+                            </a:solidFill>
+                            <a:latin typeface="Cambria Math" panose="02040503050406030204" pitchFamily="18" charset="0"/>
+                          </a:rPr>
+                          <m:t>=</m:t>
+                        </m:r>
+                        <m:acc>
+                          <m:accPr>
+                            <m:chr m:val="̅"/>
+                            <m:ctrlPr>
+                              <a:rPr lang="en-US" sz="2400" b="0" i="1" smtClean="0">
+                                <a:solidFill>
+                                  <a:schemeClr val="tx1"/>
+                                </a:solidFill>
+                                <a:latin typeface="Cambria Math" panose="02040503050406030204" pitchFamily="18" charset="0"/>
+                              </a:rPr>
+                            </m:ctrlPr>
+                          </m:accPr>
+                          <m:e>
+                            <m:r>
+                              <a:rPr lang="en-US" sz="2400" b="1" i="1" smtClean="0">
+                                <a:solidFill>
+                                  <a:schemeClr val="tx1"/>
+                                </a:solidFill>
+                                <a:latin typeface="Cambria Math" panose="02040503050406030204" pitchFamily="18" charset="0"/>
+                              </a:rPr>
+                              <m:t>𝟎</m:t>
+                            </m:r>
+                          </m:e>
+                        </m:acc>
+                      </m:oMath>
+                    </m:oMathPara>
+                  </a14:m>
+                  <a:endParaRPr lang="en-US" sz="2400" dirty="0"/>
+                </a:p>
+              </p:txBody>
+            </p:sp>
+          </mc:Choice>
+          <mc:Fallback>
+            <p:sp>
+              <p:nvSpPr>
+                <p:cNvPr id="7" name="Rectangle 6"/>
+                <p:cNvSpPr>
+                  <a:spLocks noRot="1" noChangeAspect="1" noMove="1" noResize="1" noEditPoints="1" noAdjustHandles="1" noChangeArrowheads="1" noChangeShapeType="1" noTextEdit="1"/>
+                </p:cNvSpPr>
+                <p:nvPr/>
+              </p:nvSpPr>
+              <p:spPr>
+                <a:xfrm>
+                  <a:off x="2984809" y="363974"/>
+                  <a:ext cx="1022459" cy="462434"/>
+                </a:xfrm>
+                <a:prstGeom prst="rect">
+                  <a:avLst/>
+                </a:prstGeom>
+                <a:blipFill>
+                  <a:blip r:embed="rId5"/>
+                  <a:stretch>
+                    <a:fillRect r="-42857"/>
+                  </a:stretch>
+                </a:blipFill>
+              </p:spPr>
+              <p:txBody>
+                <a:bodyPr/>
+                <a:lstStyle/>
+                <a:p>
+                  <a:r>
+                    <a:rPr lang="en-US">
+                      <a:noFill/>
+                    </a:rPr>
+                    <a:t> </a:t>
+                  </a:r>
+                </a:p>
+              </p:txBody>
+            </p:sp>
+          </mc:Fallback>
+        </mc:AlternateContent>
+        <mc:AlternateContent xmlns:mc="http://schemas.openxmlformats.org/markup-compatibility/2006">
+          <mc:Choice xmlns:a14="http://schemas.microsoft.com/office/drawing/2010/main" Requires="a14">
+            <p:sp>
+              <p:nvSpPr>
+                <p:cNvPr id="8" name="TextBox 7"/>
+                <p:cNvSpPr txBox="1"/>
+                <p:nvPr/>
+              </p:nvSpPr>
+              <p:spPr>
+                <a:xfrm>
+                  <a:off x="1418082" y="440436"/>
+                  <a:ext cx="346710" cy="369332"/>
+                </a:xfrm>
+                <a:prstGeom prst="rect">
+                  <a:avLst/>
+                </a:prstGeom>
+                <a:noFill/>
+                <a:ln>
+                  <a:solidFill>
+                    <a:schemeClr val="tx1"/>
+                  </a:solidFill>
+                </a:ln>
+              </p:spPr>
+              <p:txBody>
+                <a:bodyPr wrap="square" lIns="0" tIns="0" rIns="0" bIns="0" rtlCol="0">
+                  <a:spAutoFit/>
+                </a:bodyPr>
+                <a:lstStyle/>
+                <a:p>
+                  <a:pPr/>
+                  <a14:m>
+                    <m:oMathPara xmlns:m="http://schemas.openxmlformats.org/officeDocument/2006/math">
+                      <m:oMathParaPr>
+                        <m:jc m:val="centerGroup"/>
+                      </m:oMathParaPr>
+                      <m:oMath xmlns:m="http://schemas.openxmlformats.org/officeDocument/2006/math">
+                        <m:r>
+                          <m:rPr>
+                            <m:sty m:val="p"/>
+                          </m:rPr>
+                          <a:rPr lang="en-US" sz="2400" b="0" i="0" smtClean="0">
+                            <a:latin typeface="Cambria Math" panose="02040503050406030204" pitchFamily="18" charset="0"/>
+                          </a:rPr>
+                          <m:t>S</m:t>
+                        </m:r>
+                      </m:oMath>
+                    </m:oMathPara>
+                  </a14:m>
+                  <a:endParaRPr lang="en-US" sz="2400" dirty="0"/>
+                </a:p>
+              </p:txBody>
+            </p:sp>
+          </mc:Choice>
+          <mc:Fallback>
+            <p:sp>
+              <p:nvSpPr>
+                <p:cNvPr id="8" name="TextBox 7"/>
+                <p:cNvSpPr txBox="1">
+                  <a:spLocks noRot="1" noChangeAspect="1" noMove="1" noResize="1" noEditPoints="1" noAdjustHandles="1" noChangeArrowheads="1" noChangeShapeType="1" noTextEdit="1"/>
+                </p:cNvSpPr>
+                <p:nvPr/>
+              </p:nvSpPr>
+              <p:spPr>
+                <a:xfrm>
+                  <a:off x="1418082" y="440436"/>
+                  <a:ext cx="346710" cy="369332"/>
+                </a:xfrm>
+                <a:prstGeom prst="rect">
+                  <a:avLst/>
+                </a:prstGeom>
+                <a:blipFill>
+                  <a:blip r:embed="rId6"/>
+                  <a:stretch>
+                    <a:fillRect r="-1695" b="-4762"/>
+                  </a:stretch>
+                </a:blipFill>
+                <a:ln>
+                  <a:solidFill>
+                    <a:schemeClr val="tx1"/>
+                  </a:solidFill>
+                </a:ln>
+              </p:spPr>
+              <p:txBody>
+                <a:bodyPr/>
+                <a:lstStyle/>
+                <a:p>
+                  <a:r>
+                    <a:rPr lang="en-US">
+                      <a:noFill/>
+                    </a:rPr>
+                    <a:t> </a:t>
+                  </a:r>
+                </a:p>
+              </p:txBody>
+            </p:sp>
+          </mc:Fallback>
+        </mc:AlternateContent>
+      </p:grpSp>
+      <p:grpSp>
+        <p:nvGrpSpPr>
+          <p:cNvPr id="20" name="Group 19"/>
+          <p:cNvGrpSpPr/>
+          <p:nvPr/>
+        </p:nvGrpSpPr>
+        <p:grpSpPr>
+          <a:xfrm>
+            <a:off x="519954" y="1860542"/>
+            <a:ext cx="4463253" cy="988709"/>
+            <a:chOff x="519954" y="1860542"/>
+            <a:chExt cx="4463253" cy="988709"/>
+          </a:xfrm>
+        </p:grpSpPr>
+        <p:cxnSp>
+          <p:nvCxnSpPr>
+            <p:cNvPr id="19" name="Straight Arrow Connector 18"/>
+            <p:cNvCxnSpPr/>
+            <p:nvPr/>
+          </p:nvCxnSpPr>
+          <p:spPr>
+            <a:xfrm flipH="1">
+              <a:off x="2254647" y="2389340"/>
+              <a:ext cx="720000" cy="0"/>
+            </a:xfrm>
+            <a:prstGeom prst="straightConnector1">
+              <a:avLst/>
+            </a:prstGeom>
+            <a:ln w="28575" cap="rnd">
+              <a:solidFill>
+                <a:schemeClr val="accent6">
+                  <a:lumMod val="75000"/>
+                </a:schemeClr>
+              </a:solidFill>
+              <a:round/>
+              <a:tailEnd type="triangle" w="lg" len="lg"/>
+            </a:ln>
+          </p:spPr>
+          <p:style>
+            <a:lnRef idx="1">
+              <a:schemeClr val="accent1"/>
+            </a:lnRef>
+            <a:fillRef idx="0">
+              <a:schemeClr val="accent1"/>
+            </a:fillRef>
+            <a:effectRef idx="0">
+              <a:schemeClr val="accent1"/>
+            </a:effectRef>
+            <a:fontRef idx="minor">
+              <a:schemeClr val="tx1"/>
+            </a:fontRef>
+          </p:style>
+        </p:cxnSp>
+        <p:cxnSp>
+          <p:nvCxnSpPr>
+            <p:cNvPr id="11" name="Straight Connector 10"/>
+            <p:cNvCxnSpPr/>
+            <p:nvPr/>
+          </p:nvCxnSpPr>
+          <p:spPr>
+            <a:xfrm flipH="1">
+              <a:off x="918972" y="2655616"/>
+              <a:ext cx="3626901" cy="0"/>
+            </a:xfrm>
+            <a:prstGeom prst="line">
+              <a:avLst/>
+            </a:prstGeom>
+            <a:ln w="28575" cap="rnd">
+              <a:solidFill>
+                <a:schemeClr val="accent1">
+                  <a:lumMod val="75000"/>
+                </a:schemeClr>
+              </a:solidFill>
+              <a:round/>
+              <a:headEnd type="triangle" w="lg" len="lg"/>
+              <a:tailEnd type="none" w="lg" len="lg"/>
+            </a:ln>
+          </p:spPr>
+          <p:style>
+            <a:lnRef idx="1">
+              <a:schemeClr val="accent1"/>
+            </a:lnRef>
+            <a:fillRef idx="0">
+              <a:schemeClr val="accent1"/>
+            </a:fillRef>
+            <a:effectRef idx="0">
+              <a:schemeClr val="accent1"/>
+            </a:effectRef>
+            <a:fontRef idx="minor">
+              <a:schemeClr val="tx1"/>
+            </a:fontRef>
+          </p:style>
+        </p:cxnSp>
+        <mc:AlternateContent xmlns:mc="http://schemas.openxmlformats.org/markup-compatibility/2006">
+          <mc:Choice xmlns:a14="http://schemas.microsoft.com/office/drawing/2010/main" Requires="a14">
+            <p:sp>
+              <p:nvSpPr>
+                <p:cNvPr id="12" name="TextBox 11"/>
+                <p:cNvSpPr txBox="1"/>
+                <p:nvPr/>
+              </p:nvSpPr>
+              <p:spPr>
+                <a:xfrm>
+                  <a:off x="519954" y="2479919"/>
+                  <a:ext cx="357470" cy="369332"/>
+                </a:xfrm>
+                <a:prstGeom prst="rect">
+                  <a:avLst/>
+                </a:prstGeom>
+                <a:noFill/>
+              </p:spPr>
+              <p:txBody>
+                <a:bodyPr wrap="none" lIns="0" tIns="0" rIns="0" bIns="0" rtlCol="0">
+                  <a:spAutoFit/>
+                </a:bodyPr>
+                <a:lstStyle/>
+                <a:p>
+                  <a:pPr/>
+                  <a14:m>
+                    <m:oMathPara xmlns:m="http://schemas.openxmlformats.org/officeDocument/2006/math">
+                      <m:oMathParaPr>
+                        <m:jc m:val="centerGroup"/>
+                      </m:oMathParaPr>
+                      <m:oMath xmlns:m="http://schemas.openxmlformats.org/officeDocument/2006/math">
+                        <m:r>
+                          <a:rPr lang="en-US" sz="2400" b="0" i="1" smtClean="0">
+                            <a:solidFill>
+                              <a:schemeClr val="accent1">
+                                <a:lumMod val="75000"/>
+                              </a:schemeClr>
+                            </a:solidFill>
+                            <a:latin typeface="Cambria Math" panose="02040503050406030204" pitchFamily="18" charset="0"/>
+                          </a:rPr>
+                          <m:t>𝑂</m:t>
+                        </m:r>
+                        <m:r>
+                          <a:rPr lang="en-US" sz="2400" b="0" i="1" smtClean="0">
+                            <a:solidFill>
+                              <a:schemeClr val="accent1">
+                                <a:lumMod val="75000"/>
+                              </a:schemeClr>
+                            </a:solidFill>
+                            <a:latin typeface="Cambria Math" panose="02040503050406030204" pitchFamily="18" charset="0"/>
+                          </a:rPr>
+                          <m:t>′</m:t>
+                        </m:r>
+                      </m:oMath>
+                    </m:oMathPara>
+                  </a14:m>
+                  <a:endParaRPr lang="en-US" sz="2400" dirty="0">
+                    <a:solidFill>
+                      <a:schemeClr val="accent1">
+                        <a:lumMod val="75000"/>
+                      </a:schemeClr>
+                    </a:solidFill>
+                  </a:endParaRPr>
+                </a:p>
+              </p:txBody>
+            </p:sp>
+          </mc:Choice>
+          <mc:Fallback>
+            <p:sp>
+              <p:nvSpPr>
+                <p:cNvPr id="12" name="TextBox 11"/>
+                <p:cNvSpPr txBox="1">
+                  <a:spLocks noRot="1" noChangeAspect="1" noMove="1" noResize="1" noEditPoints="1" noAdjustHandles="1" noChangeArrowheads="1" noChangeShapeType="1" noTextEdit="1"/>
+                </p:cNvSpPr>
+                <p:nvPr/>
+              </p:nvSpPr>
+              <p:spPr>
+                <a:xfrm>
+                  <a:off x="519954" y="2479919"/>
+                  <a:ext cx="357470" cy="369332"/>
+                </a:xfrm>
+                <a:prstGeom prst="rect">
+                  <a:avLst/>
+                </a:prstGeom>
+                <a:blipFill>
+                  <a:blip r:embed="rId7"/>
+                  <a:stretch>
+                    <a:fillRect l="-22034" t="-1667" r="-23729" b="-10000"/>
+                  </a:stretch>
+                </a:blipFill>
+              </p:spPr>
+              <p:txBody>
+                <a:bodyPr/>
+                <a:lstStyle/>
+                <a:p>
+                  <a:r>
+                    <a:rPr lang="en-US">
+                      <a:noFill/>
+                    </a:rPr>
+                    <a:t> </a:t>
+                  </a:r>
+                </a:p>
+              </p:txBody>
+            </p:sp>
+          </mc:Fallback>
+        </mc:AlternateContent>
+        <mc:AlternateContent xmlns:mc="http://schemas.openxmlformats.org/markup-compatibility/2006">
+          <mc:Choice xmlns:a14="http://schemas.microsoft.com/office/drawing/2010/main" Requires="a14">
+            <p:sp>
+              <p:nvSpPr>
+                <p:cNvPr id="13" name="TextBox 12"/>
+                <p:cNvSpPr txBox="1"/>
+                <p:nvPr/>
+              </p:nvSpPr>
+              <p:spPr>
+                <a:xfrm>
+                  <a:off x="4635355" y="2470820"/>
+                  <a:ext cx="347852" cy="369332"/>
+                </a:xfrm>
+                <a:prstGeom prst="rect">
+                  <a:avLst/>
+                </a:prstGeom>
+                <a:noFill/>
+              </p:spPr>
+              <p:txBody>
+                <a:bodyPr wrap="none" lIns="0" tIns="0" rIns="0" bIns="0" rtlCol="0">
+                  <a:spAutoFit/>
+                </a:bodyPr>
+                <a:lstStyle/>
+                <a:p>
+                  <a:pPr/>
+                  <a14:m>
+                    <m:oMathPara xmlns:m="http://schemas.openxmlformats.org/officeDocument/2006/math">
+                      <m:oMathParaPr>
+                        <m:jc m:val="centerGroup"/>
+                      </m:oMathParaPr>
+                      <m:oMath xmlns:m="http://schemas.openxmlformats.org/officeDocument/2006/math">
+                        <m:r>
+                          <a:rPr lang="en-US" sz="2400" b="0" i="1" smtClean="0">
+                            <a:solidFill>
+                              <a:schemeClr val="accent1">
+                                <a:lumMod val="75000"/>
+                              </a:schemeClr>
+                            </a:solidFill>
+                            <a:latin typeface="Cambria Math" panose="02040503050406030204" pitchFamily="18" charset="0"/>
+                          </a:rPr>
+                          <m:t>𝑋</m:t>
+                        </m:r>
+                        <m:r>
+                          <a:rPr lang="en-US" sz="2400" b="0" i="1" smtClean="0">
+                            <a:solidFill>
+                              <a:schemeClr val="accent1">
+                                <a:lumMod val="75000"/>
+                              </a:schemeClr>
+                            </a:solidFill>
+                            <a:latin typeface="Cambria Math" panose="02040503050406030204" pitchFamily="18" charset="0"/>
+                          </a:rPr>
+                          <m:t>′</m:t>
+                        </m:r>
+                      </m:oMath>
+                    </m:oMathPara>
+                  </a14:m>
+                  <a:endParaRPr lang="en-US" sz="2400" dirty="0">
+                    <a:solidFill>
+                      <a:schemeClr val="accent1">
+                        <a:lumMod val="75000"/>
+                      </a:schemeClr>
+                    </a:solidFill>
+                  </a:endParaRPr>
+                </a:p>
+              </p:txBody>
+            </p:sp>
+          </mc:Choice>
+          <mc:Fallback>
+            <p:sp>
+              <p:nvSpPr>
+                <p:cNvPr id="13" name="TextBox 12"/>
+                <p:cNvSpPr txBox="1">
+                  <a:spLocks noRot="1" noChangeAspect="1" noMove="1" noResize="1" noEditPoints="1" noAdjustHandles="1" noChangeArrowheads="1" noChangeShapeType="1" noTextEdit="1"/>
+                </p:cNvSpPr>
+                <p:nvPr/>
+              </p:nvSpPr>
+              <p:spPr>
+                <a:xfrm>
+                  <a:off x="4635355" y="2470820"/>
+                  <a:ext cx="347852" cy="369332"/>
+                </a:xfrm>
+                <a:prstGeom prst="rect">
+                  <a:avLst/>
+                </a:prstGeom>
+                <a:blipFill>
+                  <a:blip r:embed="rId8"/>
+                  <a:stretch>
+                    <a:fillRect l="-22807" t="-1639" r="-24561" b="-9836"/>
+                  </a:stretch>
+                </a:blipFill>
+              </p:spPr>
+              <p:txBody>
+                <a:bodyPr/>
+                <a:lstStyle/>
+                <a:p>
+                  <a:r>
+                    <a:rPr lang="en-US">
+                      <a:noFill/>
+                    </a:rPr>
+                    <a:t> </a:t>
+                  </a:r>
+                </a:p>
+              </p:txBody>
+            </p:sp>
+          </mc:Fallback>
+        </mc:AlternateContent>
+        <p:sp>
+          <p:nvSpPr>
+            <p:cNvPr id="14" name="Oval 13"/>
+            <p:cNvSpPr/>
+            <p:nvPr/>
+          </p:nvSpPr>
+          <p:spPr>
+            <a:xfrm>
+              <a:off x="859826" y="2607727"/>
+              <a:ext cx="94706" cy="94706"/>
+            </a:xfrm>
+            <a:prstGeom prst="ellipse">
+              <a:avLst/>
+            </a:prstGeom>
+            <a:solidFill>
+              <a:schemeClr val="accent1">
+                <a:lumMod val="75000"/>
+              </a:schemeClr>
+            </a:solidFill>
+            <a:ln>
+              <a:solidFill>
+                <a:schemeClr val="accent1">
+                  <a:lumMod val="75000"/>
+                </a:schemeClr>
+              </a:solidFill>
+            </a:ln>
+          </p:spPr>
+          <p:style>
+            <a:lnRef idx="2">
+              <a:schemeClr val="accent1">
+                <a:shade val="50000"/>
+              </a:schemeClr>
+            </a:lnRef>
+            <a:fillRef idx="1">
+              <a:schemeClr val="accent1"/>
+            </a:fillRef>
+            <a:effectRef idx="0">
+              <a:schemeClr val="accent1"/>
+            </a:effectRef>
+            <a:fontRef idx="minor">
+              <a:schemeClr val="lt1"/>
+            </a:fontRef>
+          </p:style>
+          <p:txBody>
+            <a:bodyPr rtlCol="0" anchor="ctr"/>
+            <a:lstStyle/>
+            <a:p>
+              <a:pPr algn="ctr"/>
+              <a:endParaRPr lang="en-US"/>
+            </a:p>
+          </p:txBody>
+        </p:sp>
+        <p:sp>
+          <p:nvSpPr>
+            <p:cNvPr id="15" name="Oval 14">
+              <a:extLst>
+                <a:ext uri="{FF2B5EF4-FFF2-40B4-BE49-F238E27FC236}">
+                  <a16:creationId xmlns:a16="http://schemas.microsoft.com/office/drawing/2014/main" id="{44BC4753-ED5A-ABEB-8B41-B9506AC8A628}"/>
+                </a:ext>
+              </a:extLst>
+            </p:cNvPr>
+            <p:cNvSpPr/>
+            <p:nvPr/>
+          </p:nvSpPr>
+          <p:spPr>
+            <a:xfrm>
+              <a:off x="2980164" y="2276669"/>
+              <a:ext cx="215346" cy="215346"/>
+            </a:xfrm>
+            <a:prstGeom prst="ellipse">
+              <a:avLst/>
+            </a:prstGeom>
+            <a:gradFill flip="none" rotWithShape="1">
+              <a:gsLst>
+                <a:gs pos="12000">
+                  <a:schemeClr val="bg1"/>
+                </a:gs>
+                <a:gs pos="51000">
+                  <a:schemeClr val="accent5">
+                    <a:lumMod val="95000"/>
+                    <a:lumOff val="5000"/>
+                  </a:schemeClr>
+                </a:gs>
+                <a:gs pos="77000">
+                  <a:srgbClr val="1D345D"/>
+                </a:gs>
+              </a:gsLst>
+              <a:path path="circle">
+                <a:fillToRect r="100000" b="100000"/>
+              </a:path>
+              <a:tileRect l="-100000" t="-100000"/>
+            </a:gradFill>
+            <a:ln w="3175">
+              <a:solidFill>
+                <a:schemeClr val="tx1"/>
+              </a:solidFill>
+            </a:ln>
+          </p:spPr>
+          <p:style>
+            <a:lnRef idx="2">
+              <a:schemeClr val="accent1">
+                <a:shade val="50000"/>
+              </a:schemeClr>
+            </a:lnRef>
+            <a:fillRef idx="1">
+              <a:schemeClr val="accent1"/>
+            </a:fillRef>
+            <a:effectRef idx="0">
+              <a:schemeClr val="accent1"/>
+            </a:effectRef>
+            <a:fontRef idx="minor">
+              <a:schemeClr val="lt1"/>
+            </a:fontRef>
+          </p:style>
+          <p:txBody>
+            <a:bodyPr rtlCol="0" anchor="ctr"/>
+            <a:lstStyle/>
+            <a:p>
+              <a:pPr algn="ctr"/>
+              <a:endParaRPr lang="en-US"/>
+            </a:p>
+          </p:txBody>
+        </p:sp>
+        <mc:AlternateContent xmlns:mc="http://schemas.openxmlformats.org/markup-compatibility/2006">
+          <mc:Choice xmlns:a14="http://schemas.microsoft.com/office/drawing/2010/main" Requires="a14">
+            <p:sp>
+              <p:nvSpPr>
+                <p:cNvPr id="17" name="TextBox 16"/>
+                <p:cNvSpPr txBox="1"/>
+                <p:nvPr/>
+              </p:nvSpPr>
+              <p:spPr>
+                <a:xfrm>
+                  <a:off x="1110234" y="1937004"/>
+                  <a:ext cx="346710" cy="369332"/>
+                </a:xfrm>
+                <a:prstGeom prst="rect">
+                  <a:avLst/>
+                </a:prstGeom>
+                <a:noFill/>
+                <a:ln>
+                  <a:solidFill>
+                    <a:schemeClr val="tx1"/>
+                  </a:solidFill>
+                </a:ln>
+              </p:spPr>
+              <p:txBody>
+                <a:bodyPr wrap="square" lIns="0" tIns="0" rIns="0" bIns="0" rtlCol="0">
+                  <a:spAutoFit/>
+                </a:bodyPr>
+                <a:lstStyle/>
+                <a:p>
+                  <a:pPr/>
+                  <a14:m>
+                    <m:oMathPara xmlns:m="http://schemas.openxmlformats.org/officeDocument/2006/math">
+                      <m:oMathParaPr>
+                        <m:jc m:val="centerGroup"/>
+                      </m:oMathParaPr>
+                      <m:oMath xmlns:m="http://schemas.openxmlformats.org/officeDocument/2006/math">
+                        <m:r>
+                          <m:rPr>
+                            <m:sty m:val="p"/>
+                          </m:rPr>
+                          <a:rPr lang="en-US" sz="2400" b="0" i="0" smtClean="0">
+                            <a:solidFill>
+                              <a:schemeClr val="accent1">
+                                <a:lumMod val="75000"/>
+                              </a:schemeClr>
+                            </a:solidFill>
+                            <a:latin typeface="Cambria Math" panose="02040503050406030204" pitchFamily="18" charset="0"/>
+                          </a:rPr>
+                          <m:t>S</m:t>
+                        </m:r>
+                        <m:r>
+                          <a:rPr lang="en-US" sz="2400" b="0" i="0" smtClean="0">
+                            <a:solidFill>
+                              <a:schemeClr val="accent1">
+                                <a:lumMod val="75000"/>
+                              </a:schemeClr>
+                            </a:solidFill>
+                            <a:latin typeface="Cambria Math" panose="02040503050406030204" pitchFamily="18" charset="0"/>
+                          </a:rPr>
+                          <m:t>′</m:t>
+                        </m:r>
+                      </m:oMath>
+                    </m:oMathPara>
+                  </a14:m>
+                  <a:endParaRPr lang="en-US" sz="2400" dirty="0">
+                    <a:solidFill>
+                      <a:schemeClr val="accent1">
+                        <a:lumMod val="75000"/>
+                      </a:schemeClr>
+                    </a:solidFill>
+                  </a:endParaRPr>
+                </a:p>
+              </p:txBody>
+            </p:sp>
+          </mc:Choice>
+          <mc:Fallback>
+            <p:sp>
+              <p:nvSpPr>
+                <p:cNvPr id="17" name="TextBox 16"/>
+                <p:cNvSpPr txBox="1">
+                  <a:spLocks noRot="1" noChangeAspect="1" noMove="1" noResize="1" noEditPoints="1" noAdjustHandles="1" noChangeArrowheads="1" noChangeShapeType="1" noTextEdit="1"/>
+                </p:cNvSpPr>
+                <p:nvPr/>
+              </p:nvSpPr>
+              <p:spPr>
+                <a:xfrm>
+                  <a:off x="1110234" y="1937004"/>
+                  <a:ext cx="346710" cy="369332"/>
+                </a:xfrm>
+                <a:prstGeom prst="rect">
+                  <a:avLst/>
+                </a:prstGeom>
+                <a:blipFill>
+                  <a:blip r:embed="rId9"/>
+                  <a:stretch>
+                    <a:fillRect l="-13559" r="-16949" b="-8065"/>
+                  </a:stretch>
+                </a:blipFill>
+                <a:ln>
+                  <a:solidFill>
+                    <a:schemeClr val="tx1"/>
+                  </a:solidFill>
+                </a:ln>
+              </p:spPr>
+              <p:txBody>
+                <a:bodyPr/>
+                <a:lstStyle/>
+                <a:p>
+                  <a:r>
+                    <a:rPr lang="en-US">
+                      <a:noFill/>
+                    </a:rPr>
+                    <a:t> </a:t>
+                  </a:r>
+                </a:p>
+              </p:txBody>
+            </p:sp>
+          </mc:Fallback>
+        </mc:AlternateContent>
+        <mc:AlternateContent xmlns:mc="http://schemas.openxmlformats.org/markup-compatibility/2006">
+          <mc:Choice xmlns:a14="http://schemas.microsoft.com/office/drawing/2010/main" Requires="a14">
+            <p:sp>
+              <p:nvSpPr>
+                <p:cNvPr id="18" name="Rectangle 17"/>
+                <p:cNvSpPr/>
+                <p:nvPr/>
+              </p:nvSpPr>
+              <p:spPr>
+                <a:xfrm>
+                  <a:off x="2202743" y="1860542"/>
+                  <a:ext cx="816185" cy="461665"/>
+                </a:xfrm>
+                <a:prstGeom prst="rect">
+                  <a:avLst/>
+                </a:prstGeom>
+              </p:spPr>
+              <p:txBody>
+                <a:bodyPr wrap="none">
+                  <a:spAutoFit/>
+                </a:bodyPr>
+                <a:lstStyle/>
+                <a:p>
+                  <a:pPr/>
+                  <a14:m>
+                    <m:oMathPara xmlns:m="http://schemas.openxmlformats.org/officeDocument/2006/math">
+                      <m:oMathParaPr>
+                        <m:jc m:val="centerGroup"/>
+                      </m:oMathParaPr>
+                      <m:oMath xmlns:m="http://schemas.openxmlformats.org/officeDocument/2006/math">
+                        <m:sSub>
+                          <m:sSubPr>
+                            <m:ctrlPr>
+                              <a:rPr lang="en-US" sz="2400" i="1" smtClean="0">
+                                <a:solidFill>
+                                  <a:schemeClr val="accent6">
+                                    <a:lumMod val="75000"/>
+                                  </a:schemeClr>
+                                </a:solidFill>
+                                <a:latin typeface="Cambria Math" panose="02040503050406030204" pitchFamily="18" charset="0"/>
+                              </a:rPr>
+                            </m:ctrlPr>
+                          </m:sSubPr>
+                          <m:e>
+                            <m:r>
+                              <a:rPr lang="en-US" sz="2400" b="0" i="1" smtClean="0">
+                                <a:solidFill>
+                                  <a:schemeClr val="accent6">
+                                    <a:lumMod val="75000"/>
+                                  </a:schemeClr>
+                                </a:solidFill>
+                                <a:latin typeface="Cambria Math" panose="02040503050406030204" pitchFamily="18" charset="0"/>
+                              </a:rPr>
+                              <m:t>−</m:t>
+                            </m:r>
+                            <m:acc>
+                              <m:accPr>
+                                <m:chr m:val="̅"/>
+                                <m:ctrlPr>
+                                  <a:rPr lang="en-US" sz="2400" i="1">
+                                    <a:solidFill>
+                                      <a:schemeClr val="accent6">
+                                        <a:lumMod val="75000"/>
+                                      </a:schemeClr>
+                                    </a:solidFill>
+                                    <a:latin typeface="Cambria Math" panose="02040503050406030204" pitchFamily="18" charset="0"/>
+                                  </a:rPr>
+                                </m:ctrlPr>
+                              </m:accPr>
+                              <m:e>
+                                <m:r>
+                                  <a:rPr lang="en-US" sz="2400" b="1" i="1">
+                                    <a:solidFill>
+                                      <a:schemeClr val="accent6">
+                                        <a:lumMod val="75000"/>
+                                      </a:schemeClr>
+                                    </a:solidFill>
+                                    <a:latin typeface="Cambria Math" panose="02040503050406030204" pitchFamily="18" charset="0"/>
+                                  </a:rPr>
+                                  <m:t>𝒂</m:t>
+                                </m:r>
+                              </m:e>
+                            </m:acc>
+                          </m:e>
+                          <m:sub>
+                            <m:r>
+                              <a:rPr lang="en-US" sz="2400" i="1">
+                                <a:solidFill>
+                                  <a:schemeClr val="accent6">
+                                    <a:lumMod val="75000"/>
+                                  </a:schemeClr>
+                                </a:solidFill>
+                                <a:latin typeface="Cambria Math" panose="02040503050406030204" pitchFamily="18" charset="0"/>
+                              </a:rPr>
+                              <m:t>0</m:t>
+                            </m:r>
+                          </m:sub>
+                        </m:sSub>
+                      </m:oMath>
+                    </m:oMathPara>
+                  </a14:m>
+                  <a:endParaRPr lang="en-US" sz="2400" dirty="0">
+                    <a:solidFill>
+                      <a:schemeClr val="accent6">
+                        <a:lumMod val="75000"/>
+                      </a:schemeClr>
+                    </a:solidFill>
+                  </a:endParaRPr>
+                </a:p>
+              </p:txBody>
+            </p:sp>
+          </mc:Choice>
+          <mc:Fallback>
+            <p:sp>
+              <p:nvSpPr>
+                <p:cNvPr id="18" name="Rectangle 17"/>
+                <p:cNvSpPr>
+                  <a:spLocks noRot="1" noChangeAspect="1" noMove="1" noResize="1" noEditPoints="1" noAdjustHandles="1" noChangeArrowheads="1" noChangeShapeType="1" noTextEdit="1"/>
+                </p:cNvSpPr>
+                <p:nvPr/>
+              </p:nvSpPr>
+              <p:spPr>
+                <a:xfrm>
+                  <a:off x="2202743" y="1860542"/>
+                  <a:ext cx="816185" cy="461665"/>
+                </a:xfrm>
+                <a:prstGeom prst="rect">
+                  <a:avLst/>
+                </a:prstGeom>
+                <a:blipFill>
+                  <a:blip r:embed="rId10"/>
+                  <a:stretch>
+                    <a:fillRect r="-26866" b="-1316"/>
+                  </a:stretch>
+                </a:blipFill>
+              </p:spPr>
+              <p:txBody>
+                <a:bodyPr/>
+                <a:lstStyle/>
+                <a:p>
+                  <a:r>
+                    <a:rPr lang="en-US">
+                      <a:noFill/>
+                    </a:rPr>
+                    <a:t> </a:t>
+                  </a:r>
+                </a:p>
+              </p:txBody>
+            </p:sp>
+          </mc:Fallback>
+        </mc:AlternateContent>
+      </p:grpSp>
+      <p:cxnSp>
+        <p:nvCxnSpPr>
+          <p:cNvPr id="22" name="Straight Connector 21"/>
+          <p:cNvCxnSpPr/>
+          <p:nvPr/>
+        </p:nvCxnSpPr>
+        <p:spPr>
+          <a:xfrm flipH="1">
+            <a:off x="6792468" y="1160064"/>
+            <a:ext cx="3626901" cy="0"/>
+          </a:xfrm>
+          <a:prstGeom prst="line">
+            <a:avLst/>
+          </a:prstGeom>
+          <a:ln w="28575" cap="rnd">
+            <a:solidFill>
+              <a:schemeClr val="tx1"/>
+            </a:solidFill>
+            <a:round/>
+            <a:headEnd type="triangle" w="lg" len="lg"/>
+            <a:tailEnd type="none" w="lg" len="lg"/>
+          </a:ln>
+        </p:spPr>
+        <p:style>
+          <a:lnRef idx="1">
+            <a:schemeClr val="accent1"/>
+          </a:lnRef>
+          <a:fillRef idx="0">
+            <a:schemeClr val="accent1"/>
+          </a:fillRef>
+          <a:effectRef idx="0">
+            <a:schemeClr val="accent1"/>
+          </a:effectRef>
+          <a:fontRef idx="minor">
+            <a:schemeClr val="tx1"/>
+          </a:fontRef>
+        </p:style>
+      </p:cxnSp>
+      <mc:AlternateContent xmlns:mc="http://schemas.openxmlformats.org/markup-compatibility/2006">
+        <mc:Choice xmlns:a14="http://schemas.microsoft.com/office/drawing/2010/main" Requires="a14">
+          <p:sp>
+            <p:nvSpPr>
+              <p:cNvPr id="23" name="TextBox 22"/>
+              <p:cNvSpPr txBox="1"/>
+              <p:nvPr/>
+            </p:nvSpPr>
+            <p:spPr>
+              <a:xfrm>
+                <a:off x="6430026" y="984367"/>
+                <a:ext cx="284822" cy="369332"/>
+              </a:xfrm>
+              <a:prstGeom prst="rect">
+                <a:avLst/>
+              </a:prstGeom>
+              <a:noFill/>
+            </p:spPr>
+            <p:txBody>
+              <a:bodyPr wrap="none" lIns="0" tIns="0" rIns="0" bIns="0" rtlCol="0">
+                <a:spAutoFit/>
+              </a:bodyPr>
+              <a:lstStyle/>
+              <a:p>
+                <a:pPr/>
+                <a14:m>
+                  <m:oMathPara xmlns:m="http://schemas.openxmlformats.org/officeDocument/2006/math">
+                    <m:oMathParaPr>
+                      <m:jc m:val="centerGroup"/>
+                    </m:oMathParaPr>
+                    <m:oMath xmlns:m="http://schemas.openxmlformats.org/officeDocument/2006/math">
+                      <m:r>
+                        <a:rPr lang="en-US" sz="2400" b="0" i="1" smtClean="0">
+                          <a:latin typeface="Cambria Math" panose="02040503050406030204" pitchFamily="18" charset="0"/>
+                        </a:rPr>
+                        <m:t>𝑂</m:t>
+                      </m:r>
+                    </m:oMath>
+                  </m:oMathPara>
+                </a14:m>
+                <a:endParaRPr lang="en-US" sz="2400" dirty="0"/>
+              </a:p>
+            </p:txBody>
+          </p:sp>
+        </mc:Choice>
+        <mc:Fallback>
+          <p:sp>
+            <p:nvSpPr>
+              <p:cNvPr id="23" name="TextBox 22"/>
+              <p:cNvSpPr txBox="1">
+                <a:spLocks noRot="1" noChangeAspect="1" noMove="1" noResize="1" noEditPoints="1" noAdjustHandles="1" noChangeArrowheads="1" noChangeShapeType="1" noTextEdit="1"/>
+              </p:cNvSpPr>
+              <p:nvPr/>
+            </p:nvSpPr>
+            <p:spPr>
+              <a:xfrm>
+                <a:off x="6430026" y="984367"/>
+                <a:ext cx="284822" cy="369332"/>
+              </a:xfrm>
+              <a:prstGeom prst="rect">
+                <a:avLst/>
+              </a:prstGeom>
+              <a:blipFill>
+                <a:blip r:embed="rId11"/>
+                <a:stretch>
+                  <a:fillRect l="-25532" r="-21277" b="-6557"/>
+                </a:stretch>
+              </a:blipFill>
+            </p:spPr>
+            <p:txBody>
+              <a:bodyPr/>
+              <a:lstStyle/>
+              <a:p>
+                <a:r>
+                  <a:rPr lang="en-US">
+                    <a:noFill/>
+                  </a:rPr>
+                  <a:t> </a:t>
+                </a:r>
+              </a:p>
+            </p:txBody>
+          </p:sp>
+        </mc:Fallback>
+      </mc:AlternateContent>
+      <mc:AlternateContent xmlns:mc="http://schemas.openxmlformats.org/markup-compatibility/2006">
+        <mc:Choice xmlns:a14="http://schemas.microsoft.com/office/drawing/2010/main" Requires="a14">
+          <p:sp>
+            <p:nvSpPr>
+              <p:cNvPr id="24" name="TextBox 23"/>
+              <p:cNvSpPr txBox="1"/>
+              <p:nvPr/>
+            </p:nvSpPr>
+            <p:spPr>
+              <a:xfrm>
+                <a:off x="10508851" y="975268"/>
+                <a:ext cx="275204" cy="369332"/>
+              </a:xfrm>
+              <a:prstGeom prst="rect">
+                <a:avLst/>
+              </a:prstGeom>
+              <a:noFill/>
+            </p:spPr>
+            <p:txBody>
+              <a:bodyPr wrap="none" lIns="0" tIns="0" rIns="0" bIns="0" rtlCol="0">
+                <a:spAutoFit/>
+              </a:bodyPr>
+              <a:lstStyle/>
+              <a:p>
+                <a:pPr/>
+                <a14:m>
+                  <m:oMathPara xmlns:m="http://schemas.openxmlformats.org/officeDocument/2006/math">
+                    <m:oMathParaPr>
+                      <m:jc m:val="centerGroup"/>
+                    </m:oMathParaPr>
+                    <m:oMath xmlns:m="http://schemas.openxmlformats.org/officeDocument/2006/math">
+                      <m:r>
+                        <a:rPr lang="en-US" sz="2400" b="0" i="1" smtClean="0">
+                          <a:latin typeface="Cambria Math" panose="02040503050406030204" pitchFamily="18" charset="0"/>
+                        </a:rPr>
+                        <m:t>𝑋</m:t>
+                      </m:r>
+                    </m:oMath>
+                  </m:oMathPara>
+                </a14:m>
+                <a:endParaRPr lang="en-US" sz="2400" dirty="0"/>
+              </a:p>
+            </p:txBody>
+          </p:sp>
+        </mc:Choice>
+        <mc:Fallback>
+          <p:sp>
+            <p:nvSpPr>
+              <p:cNvPr id="24" name="TextBox 23"/>
+              <p:cNvSpPr txBox="1">
+                <a:spLocks noRot="1" noChangeAspect="1" noMove="1" noResize="1" noEditPoints="1" noAdjustHandles="1" noChangeArrowheads="1" noChangeShapeType="1" noTextEdit="1"/>
+              </p:cNvSpPr>
+              <p:nvPr/>
+            </p:nvSpPr>
+            <p:spPr>
+              <a:xfrm>
+                <a:off x="10508851" y="975268"/>
+                <a:ext cx="275204" cy="369332"/>
+              </a:xfrm>
+              <a:prstGeom prst="rect">
+                <a:avLst/>
+              </a:prstGeom>
+              <a:blipFill>
+                <a:blip r:embed="rId12"/>
+                <a:stretch>
+                  <a:fillRect l="-26667" r="-22222" b="-4918"/>
+                </a:stretch>
+              </a:blipFill>
+            </p:spPr>
+            <p:txBody>
+              <a:bodyPr/>
+              <a:lstStyle/>
+              <a:p>
+                <a:r>
+                  <a:rPr lang="en-US">
+                    <a:noFill/>
+                  </a:rPr>
+                  <a:t> </a:t>
+                </a:r>
+              </a:p>
+            </p:txBody>
+          </p:sp>
+        </mc:Fallback>
+      </mc:AlternateContent>
+      <p:sp>
+        <p:nvSpPr>
+          <p:cNvPr id="25" name="Oval 24"/>
+          <p:cNvSpPr/>
+          <p:nvPr/>
+        </p:nvSpPr>
+        <p:spPr>
+          <a:xfrm>
+            <a:off x="6733322" y="1112175"/>
+            <a:ext cx="94706" cy="94706"/>
+          </a:xfrm>
+          <a:prstGeom prst="ellipse">
+            <a:avLst/>
+          </a:prstGeom>
+          <a:solidFill>
+            <a:schemeClr val="tx1"/>
+          </a:solidFill>
+          <a:ln>
+            <a:noFill/>
+          </a:ln>
+        </p:spPr>
+        <p:style>
+          <a:lnRef idx="2">
+            <a:schemeClr val="accent1">
+              <a:shade val="50000"/>
+            </a:schemeClr>
+          </a:lnRef>
+          <a:fillRef idx="1">
+            <a:schemeClr val="accent1"/>
+          </a:fillRef>
+          <a:effectRef idx="0">
+            <a:schemeClr val="accent1"/>
+          </a:effectRef>
+          <a:fontRef idx="minor">
+            <a:schemeClr val="lt1"/>
+          </a:fontRef>
+        </p:style>
+        <p:txBody>
+          <a:bodyPr rtlCol="0" anchor="ctr"/>
+          <a:lstStyle/>
+          <a:p>
+            <a:pPr algn="ctr"/>
+            <a:endParaRPr lang="en-US"/>
+          </a:p>
+        </p:txBody>
+      </p:sp>
+      <p:sp>
+        <p:nvSpPr>
+          <p:cNvPr id="26" name="Oval 25">
+            <a:extLst>
+              <a:ext uri="{FF2B5EF4-FFF2-40B4-BE49-F238E27FC236}">
+                <a16:creationId xmlns:a16="http://schemas.microsoft.com/office/drawing/2014/main" id="{44BC4753-ED5A-ABEB-8B41-B9506AC8A628}"/>
+              </a:ext>
+            </a:extLst>
+          </p:cNvPr>
+          <p:cNvSpPr/>
+          <p:nvPr/>
+        </p:nvSpPr>
+        <p:spPr>
+          <a:xfrm>
+            <a:off x="8853660" y="671389"/>
+            <a:ext cx="215346" cy="215346"/>
+          </a:xfrm>
+          <a:prstGeom prst="ellipse">
+            <a:avLst/>
+          </a:prstGeom>
+          <a:gradFill flip="none" rotWithShape="1">
+            <a:gsLst>
+              <a:gs pos="12000">
+                <a:schemeClr val="bg1"/>
+              </a:gs>
+              <a:gs pos="51000">
+                <a:schemeClr val="accent5">
+                  <a:lumMod val="95000"/>
+                  <a:lumOff val="5000"/>
+                </a:schemeClr>
+              </a:gs>
+              <a:gs pos="77000">
+                <a:srgbClr val="1D345D"/>
+              </a:gs>
+            </a:gsLst>
+            <a:path path="circle">
+              <a:fillToRect r="100000" b="100000"/>
+            </a:path>
+            <a:tileRect l="-100000" t="-100000"/>
+          </a:gradFill>
+          <a:ln w="3175">
+            <a:solidFill>
+              <a:schemeClr val="tx1"/>
+            </a:solidFill>
+          </a:ln>
+        </p:spPr>
+        <p:style>
+          <a:lnRef idx="2">
+            <a:schemeClr val="accent1">
+              <a:shade val="50000"/>
+            </a:schemeClr>
+          </a:lnRef>
+          <a:fillRef idx="1">
+            <a:schemeClr val="accent1"/>
+          </a:fillRef>
+          <a:effectRef idx="0">
+            <a:schemeClr val="accent1"/>
+          </a:effectRef>
+          <a:fontRef idx="minor">
+            <a:schemeClr val="lt1"/>
+          </a:fontRef>
+        </p:style>
+        <p:txBody>
+          <a:bodyPr rtlCol="0" anchor="ctr"/>
+          <a:lstStyle/>
+          <a:p>
+            <a:pPr algn="ctr"/>
+            <a:endParaRPr lang="en-US"/>
+          </a:p>
+        </p:txBody>
+      </p:sp>
+      <mc:AlternateContent xmlns:mc="http://schemas.openxmlformats.org/markup-compatibility/2006">
+        <mc:Choice xmlns:a14="http://schemas.microsoft.com/office/drawing/2010/main" Requires="a14">
+          <p:sp>
+            <p:nvSpPr>
+              <p:cNvPr id="27" name="Rectangle 26"/>
+              <p:cNvSpPr/>
+              <p:nvPr/>
+            </p:nvSpPr>
+            <p:spPr>
+              <a:xfrm>
+                <a:off x="9492289" y="267417"/>
+                <a:ext cx="444352" cy="461665"/>
+              </a:xfrm>
+              <a:prstGeom prst="rect">
+                <a:avLst/>
+              </a:prstGeom>
+            </p:spPr>
+            <p:txBody>
+              <a:bodyPr wrap="none">
+                <a:spAutoFit/>
+              </a:bodyPr>
+              <a:lstStyle/>
+              <a:p>
+                <a14:m>
+                  <m:oMathPara xmlns:m="http://schemas.openxmlformats.org/officeDocument/2006/math">
+                    <m:oMathParaPr>
+                      <m:jc m:val="centerGroup"/>
+                    </m:oMathParaPr>
+                    <m:oMath xmlns:m="http://schemas.openxmlformats.org/officeDocument/2006/math">
+                      <m:acc>
+                        <m:accPr>
+                          <m:chr m:val="̅"/>
+                          <m:ctrlPr>
+                            <a:rPr lang="en-US" sz="2400" i="1" smtClean="0">
+                              <a:solidFill>
+                                <a:schemeClr val="tx1"/>
+                              </a:solidFill>
+                              <a:latin typeface="Cambria Math" panose="02040503050406030204" pitchFamily="18" charset="0"/>
+                            </a:rPr>
+                          </m:ctrlPr>
+                        </m:accPr>
+                        <m:e>
+                          <m:r>
+                            <a:rPr lang="en-US" sz="2400" b="1" i="1" smtClean="0">
+                              <a:solidFill>
+                                <a:schemeClr val="tx1"/>
+                              </a:solidFill>
+                              <a:latin typeface="Cambria Math" panose="02040503050406030204" pitchFamily="18" charset="0"/>
+                            </a:rPr>
+                            <m:t>𝒂</m:t>
+                          </m:r>
+                        </m:e>
+                      </m:acc>
+                    </m:oMath>
+                  </m:oMathPara>
+                </a14:m>
+                <a:endParaRPr lang="en-US" sz="2400" dirty="0"/>
+              </a:p>
+            </p:txBody>
+          </p:sp>
+        </mc:Choice>
+        <mc:Fallback>
+          <p:sp>
+            <p:nvSpPr>
+              <p:cNvPr id="27" name="Rectangle 26"/>
+              <p:cNvSpPr>
+                <a:spLocks noRot="1" noChangeAspect="1" noMove="1" noResize="1" noEditPoints="1" noAdjustHandles="1" noChangeArrowheads="1" noChangeShapeType="1" noTextEdit="1"/>
+              </p:cNvSpPr>
+              <p:nvPr/>
+            </p:nvSpPr>
+            <p:spPr>
+              <a:xfrm>
+                <a:off x="9492289" y="267417"/>
+                <a:ext cx="444352" cy="461665"/>
+              </a:xfrm>
+              <a:prstGeom prst="rect">
+                <a:avLst/>
+              </a:prstGeom>
+              <a:blipFill>
+                <a:blip r:embed="rId13"/>
+                <a:stretch>
+                  <a:fillRect/>
+                </a:stretch>
+              </a:blipFill>
+            </p:spPr>
+            <p:txBody>
+              <a:bodyPr/>
+              <a:lstStyle/>
+              <a:p>
+                <a:r>
+                  <a:rPr lang="en-US">
+                    <a:noFill/>
+                  </a:rPr>
+                  <a:t> </a:t>
+                </a:r>
+              </a:p>
+            </p:txBody>
+          </p:sp>
+        </mc:Fallback>
+      </mc:AlternateContent>
+      <mc:AlternateContent xmlns:mc="http://schemas.openxmlformats.org/markup-compatibility/2006">
+        <mc:Choice xmlns:a14="http://schemas.microsoft.com/office/drawing/2010/main" Requires="a14">
+          <p:sp>
+            <p:nvSpPr>
+              <p:cNvPr id="28" name="TextBox 27"/>
+              <p:cNvSpPr txBox="1"/>
+              <p:nvPr/>
+            </p:nvSpPr>
+            <p:spPr>
+              <a:xfrm>
+                <a:off x="6983730" y="441452"/>
+                <a:ext cx="346710" cy="369332"/>
+              </a:xfrm>
+              <a:prstGeom prst="rect">
+                <a:avLst/>
+              </a:prstGeom>
+              <a:noFill/>
+              <a:ln>
+                <a:solidFill>
+                  <a:schemeClr val="tx1"/>
+                </a:solidFill>
+              </a:ln>
+            </p:spPr>
+            <p:txBody>
+              <a:bodyPr wrap="square" lIns="0" tIns="0" rIns="0" bIns="0" rtlCol="0">
+                <a:spAutoFit/>
+              </a:bodyPr>
+              <a:lstStyle/>
+              <a:p>
+                <a:pPr/>
+                <a14:m>
+                  <m:oMathPara xmlns:m="http://schemas.openxmlformats.org/officeDocument/2006/math">
+                    <m:oMathParaPr>
+                      <m:jc m:val="centerGroup"/>
+                    </m:oMathParaPr>
+                    <m:oMath xmlns:m="http://schemas.openxmlformats.org/officeDocument/2006/math">
+                      <m:r>
+                        <m:rPr>
+                          <m:sty m:val="p"/>
+                        </m:rPr>
+                        <a:rPr lang="en-US" sz="2400" b="0" i="0" smtClean="0">
+                          <a:latin typeface="Cambria Math" panose="02040503050406030204" pitchFamily="18" charset="0"/>
+                        </a:rPr>
+                        <m:t>S</m:t>
+                      </m:r>
+                    </m:oMath>
+                  </m:oMathPara>
+                </a14:m>
+                <a:endParaRPr lang="en-US" sz="2400" dirty="0"/>
+              </a:p>
+            </p:txBody>
+          </p:sp>
+        </mc:Choice>
+        <mc:Fallback>
+          <p:sp>
+            <p:nvSpPr>
+              <p:cNvPr id="28" name="TextBox 27"/>
+              <p:cNvSpPr txBox="1">
+                <a:spLocks noRot="1" noChangeAspect="1" noMove="1" noResize="1" noEditPoints="1" noAdjustHandles="1" noChangeArrowheads="1" noChangeShapeType="1" noTextEdit="1"/>
+              </p:cNvSpPr>
+              <p:nvPr/>
+            </p:nvSpPr>
+            <p:spPr>
+              <a:xfrm>
+                <a:off x="6983730" y="441452"/>
+                <a:ext cx="346710" cy="369332"/>
+              </a:xfrm>
+              <a:prstGeom prst="rect">
+                <a:avLst/>
+              </a:prstGeom>
+              <a:blipFill>
+                <a:blip r:embed="rId14"/>
+                <a:stretch>
+                  <a:fillRect l="-1695" b="-4762"/>
+                </a:stretch>
+              </a:blipFill>
+              <a:ln>
+                <a:solidFill>
+                  <a:schemeClr val="tx1"/>
+                </a:solidFill>
+              </a:ln>
+            </p:spPr>
+            <p:txBody>
+              <a:bodyPr/>
+              <a:lstStyle/>
+              <a:p>
+                <a:r>
+                  <a:rPr lang="en-US">
+                    <a:noFill/>
+                  </a:rPr>
+                  <a:t> </a:t>
+                </a:r>
+              </a:p>
+            </p:txBody>
+          </p:sp>
+        </mc:Fallback>
+      </mc:AlternateContent>
+      <p:cxnSp>
+        <p:nvCxnSpPr>
+          <p:cNvPr id="30" name="Straight Arrow Connector 29"/>
+          <p:cNvCxnSpPr/>
+          <p:nvPr/>
+        </p:nvCxnSpPr>
+        <p:spPr>
+          <a:xfrm flipH="1">
+            <a:off x="8128143" y="2268944"/>
+            <a:ext cx="720000" cy="0"/>
+          </a:xfrm>
+          <a:prstGeom prst="straightConnector1">
+            <a:avLst/>
+          </a:prstGeom>
+          <a:ln w="28575" cap="rnd">
+            <a:solidFill>
+              <a:schemeClr val="accent6">
+                <a:lumMod val="75000"/>
+                <a:alpha val="50000"/>
+              </a:schemeClr>
+            </a:solidFill>
+            <a:round/>
+            <a:tailEnd type="triangle" w="lg" len="lg"/>
+          </a:ln>
+        </p:spPr>
+        <p:style>
+          <a:lnRef idx="1">
+            <a:schemeClr val="accent1"/>
+          </a:lnRef>
+          <a:fillRef idx="0">
+            <a:schemeClr val="accent1"/>
+          </a:fillRef>
+          <a:effectRef idx="0">
+            <a:schemeClr val="accent1"/>
+          </a:effectRef>
+          <a:fontRef idx="minor">
+            <a:schemeClr val="tx1"/>
+          </a:fontRef>
+        </p:style>
+      </p:cxnSp>
+      <p:cxnSp>
+        <p:nvCxnSpPr>
+          <p:cNvPr id="31" name="Straight Connector 30"/>
+          <p:cNvCxnSpPr/>
+          <p:nvPr/>
+        </p:nvCxnSpPr>
+        <p:spPr>
+          <a:xfrm flipH="1">
+            <a:off x="6792468" y="2656632"/>
+            <a:ext cx="3626901" cy="0"/>
+          </a:xfrm>
+          <a:prstGeom prst="line">
+            <a:avLst/>
+          </a:prstGeom>
+          <a:ln w="28575" cap="rnd">
+            <a:solidFill>
+              <a:schemeClr val="accent1">
+                <a:lumMod val="75000"/>
+              </a:schemeClr>
+            </a:solidFill>
+            <a:round/>
+            <a:headEnd type="triangle" w="lg" len="lg"/>
+            <a:tailEnd type="none" w="lg" len="lg"/>
+          </a:ln>
+        </p:spPr>
+        <p:style>
+          <a:lnRef idx="1">
+            <a:schemeClr val="accent1"/>
+          </a:lnRef>
+          <a:fillRef idx="0">
+            <a:schemeClr val="accent1"/>
+          </a:fillRef>
+          <a:effectRef idx="0">
+            <a:schemeClr val="accent1"/>
+          </a:effectRef>
+          <a:fontRef idx="minor">
+            <a:schemeClr val="tx1"/>
+          </a:fontRef>
+        </p:style>
+      </p:cxnSp>
+      <mc:AlternateContent xmlns:mc="http://schemas.openxmlformats.org/markup-compatibility/2006">
+        <mc:Choice xmlns:a14="http://schemas.microsoft.com/office/drawing/2010/main" Requires="a14">
+          <p:sp>
+            <p:nvSpPr>
+              <p:cNvPr id="32" name="TextBox 31"/>
+              <p:cNvSpPr txBox="1"/>
+              <p:nvPr/>
+            </p:nvSpPr>
+            <p:spPr>
+              <a:xfrm>
+                <a:off x="6393450" y="2480935"/>
+                <a:ext cx="357470" cy="369332"/>
+              </a:xfrm>
+              <a:prstGeom prst="rect">
+                <a:avLst/>
+              </a:prstGeom>
+              <a:noFill/>
+            </p:spPr>
+            <p:txBody>
+              <a:bodyPr wrap="none" lIns="0" tIns="0" rIns="0" bIns="0" rtlCol="0">
+                <a:spAutoFit/>
+              </a:bodyPr>
+              <a:lstStyle/>
+              <a:p>
+                <a:pPr/>
+                <a14:m>
+                  <m:oMathPara xmlns:m="http://schemas.openxmlformats.org/officeDocument/2006/math">
+                    <m:oMathParaPr>
+                      <m:jc m:val="centerGroup"/>
+                    </m:oMathParaPr>
+                    <m:oMath xmlns:m="http://schemas.openxmlformats.org/officeDocument/2006/math">
+                      <m:r>
+                        <a:rPr lang="en-US" sz="2400" b="0" i="1" smtClean="0">
+                          <a:solidFill>
+                            <a:schemeClr val="accent1">
+                              <a:lumMod val="75000"/>
+                            </a:schemeClr>
+                          </a:solidFill>
+                          <a:latin typeface="Cambria Math" panose="02040503050406030204" pitchFamily="18" charset="0"/>
+                        </a:rPr>
+                        <m:t>𝑂</m:t>
+                      </m:r>
+                      <m:r>
+                        <a:rPr lang="en-US" sz="2400" b="0" i="1" smtClean="0">
+                          <a:solidFill>
+                            <a:schemeClr val="accent1">
+                              <a:lumMod val="75000"/>
+                            </a:schemeClr>
+                          </a:solidFill>
+                          <a:latin typeface="Cambria Math" panose="02040503050406030204" pitchFamily="18" charset="0"/>
+                        </a:rPr>
+                        <m:t>′</m:t>
+                      </m:r>
+                    </m:oMath>
+                  </m:oMathPara>
+                </a14:m>
+                <a:endParaRPr lang="en-US" sz="2400" dirty="0">
+                  <a:solidFill>
+                    <a:schemeClr val="accent1">
+                      <a:lumMod val="75000"/>
+                    </a:schemeClr>
+                  </a:solidFill>
+                </a:endParaRPr>
+              </a:p>
+            </p:txBody>
+          </p:sp>
+        </mc:Choice>
+        <mc:Fallback>
+          <p:sp>
+            <p:nvSpPr>
+              <p:cNvPr id="32" name="TextBox 31"/>
+              <p:cNvSpPr txBox="1">
+                <a:spLocks noRot="1" noChangeAspect="1" noMove="1" noResize="1" noEditPoints="1" noAdjustHandles="1" noChangeArrowheads="1" noChangeShapeType="1" noTextEdit="1"/>
+              </p:cNvSpPr>
+              <p:nvPr/>
+            </p:nvSpPr>
+            <p:spPr>
+              <a:xfrm>
+                <a:off x="6393450" y="2480935"/>
+                <a:ext cx="357470" cy="369332"/>
+              </a:xfrm>
+              <a:prstGeom prst="rect">
+                <a:avLst/>
+              </a:prstGeom>
+              <a:blipFill>
+                <a:blip r:embed="rId15"/>
+                <a:stretch>
+                  <a:fillRect l="-24138" t="-1639" r="-24138" b="-8197"/>
+                </a:stretch>
+              </a:blipFill>
+            </p:spPr>
+            <p:txBody>
+              <a:bodyPr/>
+              <a:lstStyle/>
+              <a:p>
+                <a:r>
+                  <a:rPr lang="en-US">
+                    <a:noFill/>
+                  </a:rPr>
+                  <a:t> </a:t>
+                </a:r>
+              </a:p>
+            </p:txBody>
+          </p:sp>
+        </mc:Fallback>
+      </mc:AlternateContent>
+      <mc:AlternateContent xmlns:mc="http://schemas.openxmlformats.org/markup-compatibility/2006">
+        <mc:Choice xmlns:a14="http://schemas.microsoft.com/office/drawing/2010/main" Requires="a14">
+          <p:sp>
+            <p:nvSpPr>
+              <p:cNvPr id="33" name="TextBox 32"/>
+              <p:cNvSpPr txBox="1"/>
+              <p:nvPr/>
+            </p:nvSpPr>
+            <p:spPr>
+              <a:xfrm>
+                <a:off x="10508851" y="2471836"/>
+                <a:ext cx="347852" cy="369332"/>
+              </a:xfrm>
+              <a:prstGeom prst="rect">
+                <a:avLst/>
+              </a:prstGeom>
+              <a:noFill/>
+            </p:spPr>
+            <p:txBody>
+              <a:bodyPr wrap="none" lIns="0" tIns="0" rIns="0" bIns="0" rtlCol="0">
+                <a:spAutoFit/>
+              </a:bodyPr>
+              <a:lstStyle/>
+              <a:p>
+                <a:pPr/>
+                <a14:m>
+                  <m:oMathPara xmlns:m="http://schemas.openxmlformats.org/officeDocument/2006/math">
+                    <m:oMathParaPr>
+                      <m:jc m:val="centerGroup"/>
+                    </m:oMathParaPr>
+                    <m:oMath xmlns:m="http://schemas.openxmlformats.org/officeDocument/2006/math">
+                      <m:r>
+                        <a:rPr lang="en-US" sz="2400" b="0" i="1" smtClean="0">
+                          <a:solidFill>
+                            <a:schemeClr val="accent1">
+                              <a:lumMod val="75000"/>
+                            </a:schemeClr>
+                          </a:solidFill>
+                          <a:latin typeface="Cambria Math" panose="02040503050406030204" pitchFamily="18" charset="0"/>
+                        </a:rPr>
+                        <m:t>𝑋</m:t>
+                      </m:r>
+                      <m:r>
+                        <a:rPr lang="en-US" sz="2400" b="0" i="1" smtClean="0">
+                          <a:solidFill>
+                            <a:schemeClr val="accent1">
+                              <a:lumMod val="75000"/>
+                            </a:schemeClr>
+                          </a:solidFill>
+                          <a:latin typeface="Cambria Math" panose="02040503050406030204" pitchFamily="18" charset="0"/>
+                        </a:rPr>
+                        <m:t>′</m:t>
+                      </m:r>
+                    </m:oMath>
+                  </m:oMathPara>
+                </a14:m>
+                <a:endParaRPr lang="en-US" sz="2400" dirty="0">
+                  <a:solidFill>
+                    <a:schemeClr val="accent1">
+                      <a:lumMod val="75000"/>
+                    </a:schemeClr>
+                  </a:solidFill>
+                </a:endParaRPr>
+              </a:p>
+            </p:txBody>
+          </p:sp>
+        </mc:Choice>
+        <mc:Fallback>
+          <p:sp>
+            <p:nvSpPr>
+              <p:cNvPr id="33" name="TextBox 32"/>
+              <p:cNvSpPr txBox="1">
+                <a:spLocks noRot="1" noChangeAspect="1" noMove="1" noResize="1" noEditPoints="1" noAdjustHandles="1" noChangeArrowheads="1" noChangeShapeType="1" noTextEdit="1"/>
+              </p:cNvSpPr>
+              <p:nvPr/>
+            </p:nvSpPr>
+            <p:spPr>
+              <a:xfrm>
+                <a:off x="10508851" y="2471836"/>
+                <a:ext cx="347852" cy="369332"/>
+              </a:xfrm>
+              <a:prstGeom prst="rect">
+                <a:avLst/>
+              </a:prstGeom>
+              <a:blipFill>
+                <a:blip r:embed="rId16"/>
+                <a:stretch>
+                  <a:fillRect l="-24561" t="-1639" r="-22807" b="-9836"/>
+                </a:stretch>
+              </a:blipFill>
+            </p:spPr>
+            <p:txBody>
+              <a:bodyPr/>
+              <a:lstStyle/>
+              <a:p>
+                <a:r>
+                  <a:rPr lang="en-US">
+                    <a:noFill/>
+                  </a:rPr>
+                  <a:t> </a:t>
+                </a:r>
+              </a:p>
+            </p:txBody>
+          </p:sp>
+        </mc:Fallback>
+      </mc:AlternateContent>
+      <p:sp>
+        <p:nvSpPr>
+          <p:cNvPr id="34" name="Oval 33"/>
+          <p:cNvSpPr/>
+          <p:nvPr/>
+        </p:nvSpPr>
+        <p:spPr>
+          <a:xfrm>
+            <a:off x="6733322" y="2608743"/>
+            <a:ext cx="94706" cy="94706"/>
+          </a:xfrm>
+          <a:prstGeom prst="ellipse">
+            <a:avLst/>
+          </a:prstGeom>
+          <a:solidFill>
+            <a:schemeClr val="accent1">
+              <a:lumMod val="75000"/>
+            </a:schemeClr>
+          </a:solidFill>
+          <a:ln>
+            <a:solidFill>
+              <a:schemeClr val="accent1">
+                <a:lumMod val="75000"/>
+              </a:schemeClr>
+            </a:solidFill>
+          </a:ln>
+        </p:spPr>
+        <p:style>
+          <a:lnRef idx="2">
+            <a:schemeClr val="accent1">
+              <a:shade val="50000"/>
+            </a:schemeClr>
+          </a:lnRef>
+          <a:fillRef idx="1">
+            <a:schemeClr val="accent1"/>
+          </a:fillRef>
+          <a:effectRef idx="0">
+            <a:schemeClr val="accent1"/>
+          </a:effectRef>
+          <a:fontRef idx="minor">
+            <a:schemeClr val="lt1"/>
+          </a:fontRef>
+        </p:style>
+        <p:txBody>
+          <a:bodyPr rtlCol="0" anchor="ctr"/>
+          <a:lstStyle/>
+          <a:p>
+            <a:pPr algn="ctr"/>
+            <a:endParaRPr lang="en-US"/>
+          </a:p>
+        </p:txBody>
+      </p:sp>
+      <p:sp>
+        <p:nvSpPr>
+          <p:cNvPr id="35" name="Oval 34">
+            <a:extLst>
+              <a:ext uri="{FF2B5EF4-FFF2-40B4-BE49-F238E27FC236}">
+                <a16:creationId xmlns:a16="http://schemas.microsoft.com/office/drawing/2014/main" id="{44BC4753-ED5A-ABEB-8B41-B9506AC8A628}"/>
+              </a:ext>
+            </a:extLst>
+          </p:cNvPr>
+          <p:cNvSpPr/>
+          <p:nvPr/>
+        </p:nvSpPr>
+        <p:spPr>
+          <a:xfrm>
+            <a:off x="8853660" y="2158813"/>
+            <a:ext cx="215346" cy="215346"/>
+          </a:xfrm>
+          <a:prstGeom prst="ellipse">
+            <a:avLst/>
+          </a:prstGeom>
+          <a:gradFill flip="none" rotWithShape="1">
+            <a:gsLst>
+              <a:gs pos="12000">
+                <a:schemeClr val="bg1"/>
+              </a:gs>
+              <a:gs pos="51000">
+                <a:schemeClr val="accent5">
+                  <a:lumMod val="95000"/>
+                  <a:lumOff val="5000"/>
+                </a:schemeClr>
+              </a:gs>
+              <a:gs pos="77000">
+                <a:srgbClr val="1D345D"/>
+              </a:gs>
+            </a:gsLst>
+            <a:path path="circle">
+              <a:fillToRect r="100000" b="100000"/>
+            </a:path>
+            <a:tileRect l="-100000" t="-100000"/>
+          </a:gradFill>
+          <a:ln w="3175">
+            <a:solidFill>
+              <a:schemeClr val="tx1"/>
+            </a:solidFill>
+          </a:ln>
+        </p:spPr>
+        <p:style>
+          <a:lnRef idx="2">
+            <a:schemeClr val="accent1">
+              <a:shade val="50000"/>
+            </a:schemeClr>
+          </a:lnRef>
+          <a:fillRef idx="1">
+            <a:schemeClr val="accent1"/>
+          </a:fillRef>
+          <a:effectRef idx="0">
+            <a:schemeClr val="accent1"/>
+          </a:effectRef>
+          <a:fontRef idx="minor">
+            <a:schemeClr val="lt1"/>
+          </a:fontRef>
+        </p:style>
+        <p:txBody>
+          <a:bodyPr rtlCol="0" anchor="ctr"/>
+          <a:lstStyle/>
+          <a:p>
+            <a:pPr algn="ctr"/>
+            <a:endParaRPr lang="en-US"/>
+          </a:p>
+        </p:txBody>
+      </p:sp>
+      <mc:AlternateContent xmlns:mc="http://schemas.openxmlformats.org/markup-compatibility/2006">
+        <mc:Choice xmlns:a14="http://schemas.microsoft.com/office/drawing/2010/main" Requires="a14">
+          <p:sp>
+            <p:nvSpPr>
+              <p:cNvPr id="36" name="TextBox 35"/>
+              <p:cNvSpPr txBox="1"/>
+              <p:nvPr/>
+            </p:nvSpPr>
+            <p:spPr>
+              <a:xfrm>
+                <a:off x="6983730" y="1938020"/>
+                <a:ext cx="346710" cy="369332"/>
+              </a:xfrm>
+              <a:prstGeom prst="rect">
+                <a:avLst/>
+              </a:prstGeom>
+              <a:noFill/>
+              <a:ln>
+                <a:solidFill>
+                  <a:schemeClr val="tx1"/>
+                </a:solidFill>
+              </a:ln>
+            </p:spPr>
+            <p:txBody>
+              <a:bodyPr wrap="square" lIns="0" tIns="0" rIns="0" bIns="0" rtlCol="0">
+                <a:spAutoFit/>
+              </a:bodyPr>
+              <a:lstStyle/>
+              <a:p>
+                <a:pPr/>
+                <a14:m>
+                  <m:oMathPara xmlns:m="http://schemas.openxmlformats.org/officeDocument/2006/math">
+                    <m:oMathParaPr>
+                      <m:jc m:val="centerGroup"/>
+                    </m:oMathParaPr>
+                    <m:oMath xmlns:m="http://schemas.openxmlformats.org/officeDocument/2006/math">
+                      <m:r>
+                        <m:rPr>
+                          <m:sty m:val="p"/>
+                        </m:rPr>
+                        <a:rPr lang="en-US" sz="2400" b="0" i="0" smtClean="0">
+                          <a:solidFill>
+                            <a:schemeClr val="accent1">
+                              <a:lumMod val="75000"/>
+                            </a:schemeClr>
+                          </a:solidFill>
+                          <a:latin typeface="Cambria Math" panose="02040503050406030204" pitchFamily="18" charset="0"/>
+                        </a:rPr>
+                        <m:t>S</m:t>
+                      </m:r>
+                      <m:r>
+                        <a:rPr lang="en-US" sz="2400" b="0" i="0" smtClean="0">
+                          <a:solidFill>
+                            <a:schemeClr val="accent1">
+                              <a:lumMod val="75000"/>
+                            </a:schemeClr>
+                          </a:solidFill>
+                          <a:latin typeface="Cambria Math" panose="02040503050406030204" pitchFamily="18" charset="0"/>
+                        </a:rPr>
+                        <m:t>′</m:t>
+                      </m:r>
+                    </m:oMath>
+                  </m:oMathPara>
+                </a14:m>
+                <a:endParaRPr lang="en-US" sz="2400" dirty="0">
+                  <a:solidFill>
+                    <a:schemeClr val="accent1">
+                      <a:lumMod val="75000"/>
+                    </a:schemeClr>
+                  </a:solidFill>
+                </a:endParaRPr>
+              </a:p>
+            </p:txBody>
+          </p:sp>
+        </mc:Choice>
+        <mc:Fallback>
+          <p:sp>
+            <p:nvSpPr>
+              <p:cNvPr id="36" name="TextBox 35"/>
+              <p:cNvSpPr txBox="1">
+                <a:spLocks noRot="1" noChangeAspect="1" noMove="1" noResize="1" noEditPoints="1" noAdjustHandles="1" noChangeArrowheads="1" noChangeShapeType="1" noTextEdit="1"/>
+              </p:cNvSpPr>
+              <p:nvPr/>
+            </p:nvSpPr>
+            <p:spPr>
+              <a:xfrm>
+                <a:off x="6983730" y="1938020"/>
+                <a:ext cx="346710" cy="369332"/>
+              </a:xfrm>
+              <a:prstGeom prst="rect">
+                <a:avLst/>
+              </a:prstGeom>
+              <a:blipFill>
+                <a:blip r:embed="rId17"/>
+                <a:stretch>
+                  <a:fillRect l="-15254" r="-15254" b="-6349"/>
+                </a:stretch>
+              </a:blipFill>
+              <a:ln>
+                <a:solidFill>
+                  <a:schemeClr val="tx1"/>
+                </a:solidFill>
+              </a:ln>
+            </p:spPr>
+            <p:txBody>
+              <a:bodyPr/>
+              <a:lstStyle/>
+              <a:p>
+                <a:r>
+                  <a:rPr lang="en-US">
+                    <a:noFill/>
+                  </a:rPr>
+                  <a:t> </a:t>
+                </a:r>
+              </a:p>
+            </p:txBody>
+          </p:sp>
+        </mc:Fallback>
+      </mc:AlternateContent>
+      <mc:AlternateContent xmlns:mc="http://schemas.openxmlformats.org/markup-compatibility/2006">
+        <mc:Choice xmlns:a14="http://schemas.microsoft.com/office/drawing/2010/main" Requires="a14">
+          <p:sp>
+            <p:nvSpPr>
+              <p:cNvPr id="37" name="Rectangle 36"/>
+              <p:cNvSpPr/>
+              <p:nvPr/>
+            </p:nvSpPr>
+            <p:spPr>
+              <a:xfrm>
+                <a:off x="8135929" y="2226728"/>
+                <a:ext cx="816185" cy="461665"/>
+              </a:xfrm>
+              <a:prstGeom prst="rect">
+                <a:avLst/>
+              </a:prstGeom>
+            </p:spPr>
+            <p:txBody>
+              <a:bodyPr wrap="none">
+                <a:spAutoFit/>
+              </a:bodyPr>
+              <a:lstStyle/>
+              <a:p>
+                <a:pPr/>
+                <a14:m>
+                  <m:oMathPara xmlns:m="http://schemas.openxmlformats.org/officeDocument/2006/math">
+                    <m:oMathParaPr>
+                      <m:jc m:val="centerGroup"/>
+                    </m:oMathParaPr>
+                    <m:oMath xmlns:m="http://schemas.openxmlformats.org/officeDocument/2006/math">
+                      <m:sSub>
+                        <m:sSubPr>
+                          <m:ctrlPr>
+                            <a:rPr lang="en-US" sz="2400" i="1" smtClean="0">
+                              <a:solidFill>
+                                <a:schemeClr val="accent6">
+                                  <a:lumMod val="75000"/>
+                                  <a:alpha val="50000"/>
+                                </a:schemeClr>
+                              </a:solidFill>
+                              <a:latin typeface="Cambria Math" panose="02040503050406030204" pitchFamily="18" charset="0"/>
+                            </a:rPr>
+                          </m:ctrlPr>
+                        </m:sSubPr>
+                        <m:e>
+                          <m:r>
+                            <a:rPr lang="en-US" sz="2400" b="0" i="1" smtClean="0">
+                              <a:solidFill>
+                                <a:schemeClr val="accent6">
+                                  <a:lumMod val="75000"/>
+                                  <a:alpha val="50000"/>
+                                </a:schemeClr>
+                              </a:solidFill>
+                              <a:latin typeface="Cambria Math" panose="02040503050406030204" pitchFamily="18" charset="0"/>
+                            </a:rPr>
+                            <m:t>−</m:t>
+                          </m:r>
+                          <m:acc>
+                            <m:accPr>
+                              <m:chr m:val="̅"/>
+                              <m:ctrlPr>
+                                <a:rPr lang="en-US" sz="2400" i="1">
+                                  <a:solidFill>
+                                    <a:schemeClr val="accent6">
+                                      <a:lumMod val="75000"/>
+                                      <a:alpha val="50000"/>
+                                    </a:schemeClr>
+                                  </a:solidFill>
+                                  <a:latin typeface="Cambria Math" panose="02040503050406030204" pitchFamily="18" charset="0"/>
+                                </a:rPr>
+                              </m:ctrlPr>
+                            </m:accPr>
+                            <m:e>
+                              <m:r>
+                                <a:rPr lang="en-US" sz="2400" b="1" i="1">
+                                  <a:solidFill>
+                                    <a:schemeClr val="accent6">
+                                      <a:lumMod val="75000"/>
+                                      <a:alpha val="50000"/>
+                                    </a:schemeClr>
+                                  </a:solidFill>
+                                  <a:latin typeface="Cambria Math" panose="02040503050406030204" pitchFamily="18" charset="0"/>
+                                </a:rPr>
+                                <m:t>𝒂</m:t>
+                              </m:r>
+                            </m:e>
+                          </m:acc>
+                        </m:e>
+                        <m:sub>
+                          <m:r>
+                            <a:rPr lang="en-US" sz="2400" i="1">
+                              <a:solidFill>
+                                <a:schemeClr val="accent6">
+                                  <a:lumMod val="75000"/>
+                                  <a:alpha val="50000"/>
+                                </a:schemeClr>
+                              </a:solidFill>
+                              <a:latin typeface="Cambria Math" panose="02040503050406030204" pitchFamily="18" charset="0"/>
+                            </a:rPr>
+                            <m:t>0</m:t>
+                          </m:r>
+                        </m:sub>
+                      </m:sSub>
+                    </m:oMath>
+                  </m:oMathPara>
+                </a14:m>
+                <a:endParaRPr lang="en-US" sz="2400" dirty="0">
+                  <a:solidFill>
+                    <a:schemeClr val="accent6">
+                      <a:lumMod val="75000"/>
+                      <a:alpha val="50000"/>
+                    </a:schemeClr>
+                  </a:solidFill>
+                </a:endParaRPr>
+              </a:p>
+            </p:txBody>
+          </p:sp>
+        </mc:Choice>
+        <mc:Fallback>
+          <p:sp>
+            <p:nvSpPr>
+              <p:cNvPr id="37" name="Rectangle 36"/>
+              <p:cNvSpPr>
+                <a:spLocks noRot="1" noChangeAspect="1" noMove="1" noResize="1" noEditPoints="1" noAdjustHandles="1" noChangeArrowheads="1" noChangeShapeType="1" noTextEdit="1"/>
+              </p:cNvSpPr>
+              <p:nvPr/>
+            </p:nvSpPr>
+            <p:spPr>
+              <a:xfrm>
+                <a:off x="8135929" y="2226728"/>
+                <a:ext cx="816185" cy="461665"/>
+              </a:xfrm>
+              <a:prstGeom prst="rect">
+                <a:avLst/>
+              </a:prstGeom>
+              <a:blipFill>
+                <a:blip r:embed="rId18"/>
+                <a:stretch>
+                  <a:fillRect r="-26119" b="-1316"/>
+                </a:stretch>
+              </a:blipFill>
+            </p:spPr>
+            <p:txBody>
+              <a:bodyPr/>
+              <a:lstStyle/>
+              <a:p>
+                <a:r>
+                  <a:rPr lang="en-US">
+                    <a:noFill/>
+                  </a:rPr>
+                  <a:t> </a:t>
+                </a:r>
+              </a:p>
+            </p:txBody>
+          </p:sp>
+        </mc:Fallback>
+      </mc:AlternateContent>
+      <p:cxnSp>
+        <p:nvCxnSpPr>
+          <p:cNvPr id="41" name="Straight Arrow Connector 40"/>
+          <p:cNvCxnSpPr/>
+          <p:nvPr/>
+        </p:nvCxnSpPr>
+        <p:spPr>
+          <a:xfrm>
+            <a:off x="8737743" y="2044154"/>
+            <a:ext cx="540000" cy="0"/>
+          </a:xfrm>
+          <a:prstGeom prst="straightConnector1">
+            <a:avLst/>
+          </a:prstGeom>
+          <a:ln w="28575" cap="rnd">
+            <a:solidFill>
+              <a:schemeClr val="accent1">
+                <a:lumMod val="75000"/>
+              </a:schemeClr>
+            </a:solidFill>
+            <a:round/>
+            <a:tailEnd type="triangle" w="lg" len="lg"/>
+          </a:ln>
+        </p:spPr>
+        <p:style>
+          <a:lnRef idx="1">
+            <a:schemeClr val="accent1"/>
+          </a:lnRef>
+          <a:fillRef idx="0">
+            <a:schemeClr val="accent1"/>
+          </a:fillRef>
+          <a:effectRef idx="0">
+            <a:schemeClr val="accent1"/>
+          </a:effectRef>
+          <a:fontRef idx="minor">
+            <a:schemeClr val="tx1"/>
+          </a:fontRef>
+        </p:style>
+      </p:cxnSp>
+      <mc:AlternateContent xmlns:mc="http://schemas.openxmlformats.org/markup-compatibility/2006">
+        <mc:Choice xmlns:a14="http://schemas.microsoft.com/office/drawing/2010/main" Requires="a14">
+          <p:sp>
+            <p:nvSpPr>
+              <p:cNvPr id="42" name="Rectangle 41"/>
+              <p:cNvSpPr/>
+              <p:nvPr/>
+            </p:nvSpPr>
+            <p:spPr>
+              <a:xfrm>
+                <a:off x="8705524" y="1579028"/>
+                <a:ext cx="524503" cy="461665"/>
+              </a:xfrm>
+              <a:prstGeom prst="rect">
+                <a:avLst/>
+              </a:prstGeom>
+            </p:spPr>
+            <p:txBody>
+              <a:bodyPr wrap="none">
+                <a:spAutoFit/>
+              </a:bodyPr>
+              <a:lstStyle/>
+              <a:p>
+                <a14:m>
+                  <m:oMathPara xmlns:m="http://schemas.openxmlformats.org/officeDocument/2006/math">
+                    <m:oMathParaPr>
+                      <m:jc m:val="centerGroup"/>
+                    </m:oMathParaPr>
+                    <m:oMath xmlns:m="http://schemas.openxmlformats.org/officeDocument/2006/math">
+                      <m:acc>
+                        <m:accPr>
+                          <m:chr m:val="̅"/>
+                          <m:ctrlPr>
+                            <a:rPr lang="en-US" sz="2400" i="1" smtClean="0">
+                              <a:solidFill>
+                                <a:schemeClr val="accent1">
+                                  <a:lumMod val="75000"/>
+                                </a:schemeClr>
+                              </a:solidFill>
+                              <a:latin typeface="Cambria Math" panose="02040503050406030204" pitchFamily="18" charset="0"/>
+                            </a:rPr>
+                          </m:ctrlPr>
+                        </m:accPr>
+                        <m:e>
+                          <m:r>
+                            <a:rPr lang="en-US" sz="2400" b="1" i="1" smtClean="0">
+                              <a:solidFill>
+                                <a:schemeClr val="accent1">
+                                  <a:lumMod val="75000"/>
+                                </a:schemeClr>
+                              </a:solidFill>
+                              <a:latin typeface="Cambria Math" panose="02040503050406030204" pitchFamily="18" charset="0"/>
+                            </a:rPr>
+                            <m:t>𝒂</m:t>
+                          </m:r>
+                        </m:e>
+                      </m:acc>
+                      <m:r>
+                        <a:rPr lang="en-US" sz="2400" b="0" i="1" smtClean="0">
+                          <a:solidFill>
+                            <a:schemeClr val="accent1">
+                              <a:lumMod val="75000"/>
+                            </a:schemeClr>
+                          </a:solidFill>
+                          <a:latin typeface="Cambria Math" panose="02040503050406030204" pitchFamily="18" charset="0"/>
+                        </a:rPr>
+                        <m:t>′</m:t>
+                      </m:r>
+                    </m:oMath>
+                  </m:oMathPara>
+                </a14:m>
+                <a:endParaRPr lang="en-US" sz="2400" dirty="0">
+                  <a:solidFill>
+                    <a:schemeClr val="accent1">
+                      <a:lumMod val="75000"/>
+                    </a:schemeClr>
+                  </a:solidFill>
+                </a:endParaRPr>
+              </a:p>
+            </p:txBody>
+          </p:sp>
+        </mc:Choice>
+        <mc:Fallback>
+          <p:sp>
+            <p:nvSpPr>
+              <p:cNvPr id="42" name="Rectangle 41"/>
+              <p:cNvSpPr>
+                <a:spLocks noRot="1" noChangeAspect="1" noMove="1" noResize="1" noEditPoints="1" noAdjustHandles="1" noChangeArrowheads="1" noChangeShapeType="1" noTextEdit="1"/>
+              </p:cNvSpPr>
+              <p:nvPr/>
+            </p:nvSpPr>
+            <p:spPr>
+              <a:xfrm>
+                <a:off x="8705524" y="1579028"/>
+                <a:ext cx="524503" cy="461665"/>
+              </a:xfrm>
+              <a:prstGeom prst="rect">
+                <a:avLst/>
+              </a:prstGeom>
+              <a:blipFill>
+                <a:blip r:embed="rId19"/>
+                <a:stretch>
+                  <a:fillRect/>
+                </a:stretch>
+              </a:blipFill>
+            </p:spPr>
+            <p:txBody>
+              <a:bodyPr/>
+              <a:lstStyle/>
+              <a:p>
+                <a:r>
+                  <a:rPr lang="en-US">
+                    <a:noFill/>
+                  </a:rPr>
+                  <a:t> </a:t>
+                </a:r>
+              </a:p>
+            </p:txBody>
+          </p:sp>
+        </mc:Fallback>
+      </mc:AlternateContent>
+    </p:spTree>
+    <p:extLst>
+      <p:ext uri="{BB962C8B-B14F-4D97-AF65-F5344CB8AC3E}">
+        <p14:creationId xmlns:p14="http://schemas.microsoft.com/office/powerpoint/2010/main" val="3987561150"/>
       </p:ext>
     </p:extLst>
   </p:cSld>

--- a/U1-Frames-of-Reference/figures/all-figs.pptx
+++ b/U1-Frames-of-Reference/figures/all-figs.pptx
@@ -10,6 +10,8 @@
     <p:sldId id="258" r:id="rId4"/>
     <p:sldId id="259" r:id="rId5"/>
     <p:sldId id="260" r:id="rId6"/>
+    <p:sldId id="261" r:id="rId7"/>
+    <p:sldId id="262" r:id="rId8"/>
   </p:sldIdLst>
   <p:sldSz cx="12192000" cy="6858000"/>
   <p:notesSz cx="6858000" cy="9144000"/>
@@ -3341,10 +3343,7 @@
                   <a:pPr/>
                   <a14:m>
                     <m:oMathPara xmlns:m="http://schemas.openxmlformats.org/officeDocument/2006/math">
-                      <m:oMathParaPr>
-                        <m:jc m:val="centerGroup"/>
-                      </m:oMathParaPr>
-                      <m:oMath xmlns:m="http://schemas.openxmlformats.org/officeDocument/2006/math">
+                      <m:oMath>
                         <m:r>
                           <a:rPr lang="en-US" sz="2400" b="0" i="1" smtClean="0">
                             <a:latin typeface="Cambria Math" panose="02040503050406030204" pitchFamily="18" charset="0"/>
@@ -3425,10 +3424,7 @@
                   <a:pPr/>
                   <a14:m>
                     <m:oMathPara xmlns:m="http://schemas.openxmlformats.org/officeDocument/2006/math">
-                      <m:oMathParaPr>
-                        <m:jc m:val="centerGroup"/>
-                      </m:oMathParaPr>
-                      <m:oMath xmlns:m="http://schemas.openxmlformats.org/officeDocument/2006/math">
+                      <m:oMath>
                         <m:r>
                           <a:rPr lang="en-US" sz="2400" b="0" i="1" smtClean="0">
                             <a:latin typeface="Cambria Math" panose="02040503050406030204" pitchFamily="18" charset="0"/>
@@ -3509,10 +3505,7 @@
                   <a:pPr/>
                   <a14:m>
                     <m:oMathPara xmlns:m="http://schemas.openxmlformats.org/officeDocument/2006/math">
-                      <m:oMathParaPr>
-                        <m:jc m:val="centerGroup"/>
-                      </m:oMathParaPr>
-                      <m:oMath xmlns:m="http://schemas.openxmlformats.org/officeDocument/2006/math">
+                      <m:oMath>
                         <m:r>
                           <a:rPr lang="en-US" sz="2400" b="0" i="1" smtClean="0">
                             <a:solidFill>
@@ -3600,10 +3593,7 @@
                   <a:pPr/>
                   <a14:m>
                     <m:oMathPara xmlns:m="http://schemas.openxmlformats.org/officeDocument/2006/math">
-                      <m:oMathParaPr>
-                        <m:jc m:val="centerGroup"/>
-                      </m:oMathParaPr>
-                      <m:oMath xmlns:m="http://schemas.openxmlformats.org/officeDocument/2006/math">
+                      <m:oMath>
                         <m:r>
                           <a:rPr lang="en-US" sz="2400" b="0" i="1" smtClean="0">
                             <a:solidFill>
@@ -3872,10 +3862,7 @@
                   <a:pPr/>
                   <a14:m>
                     <m:oMathPara xmlns:m="http://schemas.openxmlformats.org/officeDocument/2006/math">
-                      <m:oMathParaPr>
-                        <m:jc m:val="centerGroup"/>
-                      </m:oMathParaPr>
-                      <m:oMath xmlns:m="http://schemas.openxmlformats.org/officeDocument/2006/math">
+                      <m:oMath>
                         <m:r>
                           <a:rPr lang="en-US" sz="2400" b="0" i="1" smtClean="0">
                             <a:solidFill>
@@ -3978,10 +3965,7 @@
                   <a:pPr/>
                   <a14:m>
                     <m:oMathPara xmlns:m="http://schemas.openxmlformats.org/officeDocument/2006/math">
-                      <m:oMathParaPr>
-                        <m:jc m:val="centerGroup"/>
-                      </m:oMathParaPr>
-                      <m:oMath xmlns:m="http://schemas.openxmlformats.org/officeDocument/2006/math">
+                      <m:oMath>
                         <m:r>
                           <a:rPr lang="en-US" sz="2400" b="0" i="1" smtClean="0">
                             <a:solidFill>
@@ -4078,10 +4062,7 @@
                   <a:pPr/>
                   <a14:m>
                     <m:oMathPara xmlns:m="http://schemas.openxmlformats.org/officeDocument/2006/math">
-                      <m:oMathParaPr>
-                        <m:jc m:val="centerGroup"/>
-                      </m:oMathParaPr>
-                      <m:oMath xmlns:m="http://schemas.openxmlformats.org/officeDocument/2006/math">
+                      <m:oMath>
                         <m:r>
                           <a:rPr lang="en-US" sz="2400" b="0" i="1" smtClean="0">
                             <a:solidFill>
@@ -4178,10 +4159,7 @@
                   <a:pPr/>
                   <a14:m>
                     <m:oMathPara xmlns:m="http://schemas.openxmlformats.org/officeDocument/2006/math">
-                      <m:oMathParaPr>
-                        <m:jc m:val="centerGroup"/>
-                      </m:oMathParaPr>
-                      <m:oMath xmlns:m="http://schemas.openxmlformats.org/officeDocument/2006/math">
+                      <m:oMath>
                         <m:r>
                           <a:rPr lang="en-US" sz="2400" b="0" i="1" smtClean="0">
                             <a:solidFill>
@@ -4284,10 +4262,7 @@
                   <a:pPr/>
                   <a14:m>
                     <m:oMathPara xmlns:m="http://schemas.openxmlformats.org/officeDocument/2006/math">
-                      <m:oMathParaPr>
-                        <m:jc m:val="centerGroup"/>
-                      </m:oMathParaPr>
-                      <m:oMath xmlns:m="http://schemas.openxmlformats.org/officeDocument/2006/math">
+                      <m:oMath>
                         <m:r>
                           <a:rPr lang="en-US" sz="2400" b="0" i="1" smtClean="0">
                             <a:solidFill>
@@ -4422,10 +4397,7 @@
                 <a:pPr/>
                 <a14:m>
                   <m:oMathPara xmlns:m="http://schemas.openxmlformats.org/officeDocument/2006/math">
-                    <m:oMathParaPr>
-                      <m:jc m:val="centerGroup"/>
-                    </m:oMathParaPr>
-                    <m:oMath xmlns:m="http://schemas.openxmlformats.org/officeDocument/2006/math">
+                    <m:oMath>
                       <m:r>
                         <a:rPr lang="en-US" sz="2400" b="0" i="1" smtClean="0">
                           <a:latin typeface="Cambria Math" panose="02040503050406030204" pitchFamily="18" charset="0"/>
@@ -4506,10 +4478,7 @@
                 <a:pPr/>
                 <a14:m>
                   <m:oMathPara xmlns:m="http://schemas.openxmlformats.org/officeDocument/2006/math">
-                    <m:oMathParaPr>
-                      <m:jc m:val="centerGroup"/>
-                    </m:oMathParaPr>
-                    <m:oMath xmlns:m="http://schemas.openxmlformats.org/officeDocument/2006/math">
+                    <m:oMath>
                       <m:acc>
                         <m:accPr>
                           <m:chr m:val="̅"/>
@@ -4602,10 +4571,7 @@
                 <a:pPr/>
                 <a14:m>
                   <m:oMathPara xmlns:m="http://schemas.openxmlformats.org/officeDocument/2006/math">
-                    <m:oMathParaPr>
-                      <m:jc m:val="centerGroup"/>
-                    </m:oMathParaPr>
-                    <m:oMath xmlns:m="http://schemas.openxmlformats.org/officeDocument/2006/math">
+                    <m:oMath>
                       <m:acc>
                         <m:accPr>
                           <m:chr m:val="̅"/>
@@ -4784,10 +4750,7 @@
                 <a:pPr/>
                 <a14:m>
                   <m:oMathPara xmlns:m="http://schemas.openxmlformats.org/officeDocument/2006/math">
-                    <m:oMathParaPr>
-                      <m:jc m:val="centerGroup"/>
-                    </m:oMathParaPr>
-                    <m:oMath xmlns:m="http://schemas.openxmlformats.org/officeDocument/2006/math">
+                    <m:oMath>
                       <m:r>
                         <a:rPr lang="en-US" sz="2400" b="0" i="1" smtClean="0">
                           <a:solidFill>
@@ -4886,10 +4849,7 @@
                 <a:pPr/>
                 <a14:m>
                   <m:oMathPara xmlns:m="http://schemas.openxmlformats.org/officeDocument/2006/math">
-                    <m:oMathParaPr>
-                      <m:jc m:val="centerGroup"/>
-                    </m:oMathParaPr>
-                    <m:oMath xmlns:m="http://schemas.openxmlformats.org/officeDocument/2006/math">
+                    <m:oMath>
                       <m:r>
                         <a:rPr lang="en-US" sz="2400" b="0" i="1" smtClean="0">
                           <a:solidFill>
@@ -4975,10 +4935,7 @@
                 <a:pPr/>
                 <a14:m>
                   <m:oMathPara xmlns:m="http://schemas.openxmlformats.org/officeDocument/2006/math">
-                    <m:oMathParaPr>
-                      <m:jc m:val="centerGroup"/>
-                    </m:oMathParaPr>
-                    <m:oMath xmlns:m="http://schemas.openxmlformats.org/officeDocument/2006/math">
+                    <m:oMath>
                       <m:r>
                         <a:rPr lang="en-US" sz="2400" b="0" i="1" smtClean="0">
                           <a:solidFill>
@@ -5070,10 +5027,7 @@
                 <a:pPr/>
                 <a14:m>
                   <m:oMathPara xmlns:m="http://schemas.openxmlformats.org/officeDocument/2006/math">
-                    <m:oMathParaPr>
-                      <m:jc m:val="centerGroup"/>
-                    </m:oMathParaPr>
-                    <m:oMath xmlns:m="http://schemas.openxmlformats.org/officeDocument/2006/math">
+                    <m:oMath>
                       <m:r>
                         <m:rPr>
                           <m:sty m:val="p"/>
@@ -5157,10 +5111,7 @@
                 <a:pPr/>
                 <a14:m>
                   <m:oMathPara xmlns:m="http://schemas.openxmlformats.org/officeDocument/2006/math">
-                    <m:oMathParaPr>
-                      <m:jc m:val="centerGroup"/>
-                    </m:oMathParaPr>
-                    <m:oMath xmlns:m="http://schemas.openxmlformats.org/officeDocument/2006/math">
+                    <m:oMath>
                       <m:r>
                         <m:rPr>
                           <m:sty m:val="p"/>
@@ -5441,10 +5392,7 @@
                     <a:pPr/>
                     <a14:m>
                       <m:oMathPara xmlns:m="http://schemas.openxmlformats.org/officeDocument/2006/math">
-                        <m:oMathParaPr>
-                          <m:jc m:val="centerGroup"/>
-                        </m:oMathParaPr>
-                        <m:oMath xmlns:m="http://schemas.openxmlformats.org/officeDocument/2006/math">
+                        <m:oMath>
                           <m:r>
                             <a:rPr lang="en-US" sz="2400" b="0" i="1" smtClean="0">
                               <a:latin typeface="Cambria Math" panose="02040503050406030204" pitchFamily="18" charset="0"/>
@@ -5525,10 +5473,7 @@
                     <a:pPr/>
                     <a14:m>
                       <m:oMathPara xmlns:m="http://schemas.openxmlformats.org/officeDocument/2006/math">
-                        <m:oMathParaPr>
-                          <m:jc m:val="centerGroup"/>
-                        </m:oMathParaPr>
-                        <m:oMath xmlns:m="http://schemas.openxmlformats.org/officeDocument/2006/math">
+                        <m:oMath>
                           <m:r>
                             <a:rPr lang="en-US" sz="2400" b="0" i="1" smtClean="0">
                               <a:latin typeface="Cambria Math" panose="02040503050406030204" pitchFamily="18" charset="0"/>
@@ -5609,10 +5554,7 @@
                     <a:pPr/>
                     <a14:m>
                       <m:oMathPara xmlns:m="http://schemas.openxmlformats.org/officeDocument/2006/math">
-                        <m:oMathParaPr>
-                          <m:jc m:val="centerGroup"/>
-                        </m:oMathParaPr>
-                        <m:oMath xmlns:m="http://schemas.openxmlformats.org/officeDocument/2006/math">
+                        <m:oMath>
                           <m:r>
                             <a:rPr lang="en-US" sz="2400" b="0" i="1" smtClean="0">
                               <a:solidFill>
@@ -5700,10 +5642,7 @@
                     <a:pPr/>
                     <a14:m>
                       <m:oMathPara xmlns:m="http://schemas.openxmlformats.org/officeDocument/2006/math">
-                        <m:oMathParaPr>
-                          <m:jc m:val="centerGroup"/>
-                        </m:oMathParaPr>
-                        <m:oMath xmlns:m="http://schemas.openxmlformats.org/officeDocument/2006/math">
+                        <m:oMath>
                           <m:r>
                             <a:rPr lang="en-US" sz="2400" b="0" i="1" smtClean="0">
                               <a:solidFill>
@@ -5792,10 +5731,7 @@
                   <a:pPr/>
                   <a14:m>
                     <m:oMathPara xmlns:m="http://schemas.openxmlformats.org/officeDocument/2006/math">
-                      <m:oMathParaPr>
-                        <m:jc m:val="centerGroup"/>
-                      </m:oMathParaPr>
-                      <m:oMath xmlns:m="http://schemas.openxmlformats.org/officeDocument/2006/math">
+                      <m:oMath>
                         <m:r>
                           <m:rPr>
                             <m:sty m:val="p"/>
@@ -6074,10 +6010,7 @@
                     <a:pPr/>
                     <a14:m>
                       <m:oMathPara xmlns:m="http://schemas.openxmlformats.org/officeDocument/2006/math">
-                        <m:oMathParaPr>
-                          <m:jc m:val="centerGroup"/>
-                        </m:oMathParaPr>
-                        <m:oMath xmlns:m="http://schemas.openxmlformats.org/officeDocument/2006/math">
+                        <m:oMath>
                           <m:r>
                             <a:rPr lang="en-US" sz="2400" b="0" i="1" smtClean="0">
                               <a:solidFill>
@@ -6180,10 +6113,7 @@
                     <a:pPr/>
                     <a14:m>
                       <m:oMathPara xmlns:m="http://schemas.openxmlformats.org/officeDocument/2006/math">
-                        <m:oMathParaPr>
-                          <m:jc m:val="centerGroup"/>
-                        </m:oMathParaPr>
-                        <m:oMath xmlns:m="http://schemas.openxmlformats.org/officeDocument/2006/math">
+                        <m:oMath>
                           <m:r>
                             <a:rPr lang="en-US" sz="2400" b="0" i="1" smtClean="0">
                               <a:solidFill>
@@ -6280,10 +6210,7 @@
                     <a:pPr/>
                     <a14:m>
                       <m:oMathPara xmlns:m="http://schemas.openxmlformats.org/officeDocument/2006/math">
-                        <m:oMathParaPr>
-                          <m:jc m:val="centerGroup"/>
-                        </m:oMathParaPr>
-                        <m:oMath xmlns:m="http://schemas.openxmlformats.org/officeDocument/2006/math">
+                        <m:oMath>
                           <m:r>
                             <a:rPr lang="en-US" sz="2400" b="0" i="1" smtClean="0">
                               <a:solidFill>
@@ -6380,10 +6307,7 @@
                     <a:pPr/>
                     <a14:m>
                       <m:oMathPara xmlns:m="http://schemas.openxmlformats.org/officeDocument/2006/math">
-                        <m:oMathParaPr>
-                          <m:jc m:val="centerGroup"/>
-                        </m:oMathParaPr>
-                        <m:oMath xmlns:m="http://schemas.openxmlformats.org/officeDocument/2006/math">
+                        <m:oMath>
                           <m:r>
                             <a:rPr lang="en-US" sz="2400" b="0" i="1" smtClean="0">
                               <a:solidFill>
@@ -6486,10 +6410,7 @@
                     <a:pPr/>
                     <a14:m>
                       <m:oMathPara xmlns:m="http://schemas.openxmlformats.org/officeDocument/2006/math">
-                        <m:oMathParaPr>
-                          <m:jc m:val="centerGroup"/>
-                        </m:oMathParaPr>
-                        <m:oMath xmlns:m="http://schemas.openxmlformats.org/officeDocument/2006/math">
+                        <m:oMath>
                           <m:r>
                             <a:rPr lang="en-US" sz="2400" b="0" i="1" smtClean="0">
                               <a:solidFill>
@@ -6578,10 +6499,7 @@
                   <a:pPr/>
                   <a14:m>
                     <m:oMathPara xmlns:m="http://schemas.openxmlformats.org/officeDocument/2006/math">
-                      <m:oMathParaPr>
-                        <m:jc m:val="centerGroup"/>
-                      </m:oMathParaPr>
-                      <m:oMath xmlns:m="http://schemas.openxmlformats.org/officeDocument/2006/math">
+                      <m:oMath>
                         <m:r>
                           <m:rPr>
                             <m:sty m:val="p"/>
@@ -6733,10 +6651,7 @@
                 <a:pPr/>
                 <a14:m>
                   <m:oMathPara xmlns:m="http://schemas.openxmlformats.org/officeDocument/2006/math">
-                    <m:oMathParaPr>
-                      <m:jc m:val="centerGroup"/>
-                    </m:oMathParaPr>
-                    <m:oMath xmlns:m="http://schemas.openxmlformats.org/officeDocument/2006/math">
+                    <m:oMath>
                       <m:r>
                         <a:rPr lang="en-US" sz="2400" b="0" i="1" smtClean="0">
                           <a:latin typeface="Cambria Math" panose="02040503050406030204" pitchFamily="18" charset="0"/>
@@ -6817,10 +6732,7 @@
                 <a:pPr/>
                 <a14:m>
                   <m:oMathPara xmlns:m="http://schemas.openxmlformats.org/officeDocument/2006/math">
-                    <m:oMathParaPr>
-                      <m:jc m:val="centerGroup"/>
-                    </m:oMathParaPr>
-                    <m:oMath xmlns:m="http://schemas.openxmlformats.org/officeDocument/2006/math">
+                    <m:oMath>
                       <m:r>
                         <a:rPr lang="en-US" sz="2400" b="0" i="1" smtClean="0">
                           <a:latin typeface="Cambria Math" panose="02040503050406030204" pitchFamily="18" charset="0"/>
@@ -7142,10 +7054,7 @@
                     <a:pPr/>
                     <a14:m>
                       <m:oMathPara xmlns:m="http://schemas.openxmlformats.org/officeDocument/2006/math">
-                        <m:oMathParaPr>
-                          <m:jc m:val="centerGroup"/>
-                        </m:oMathParaPr>
-                        <m:oMath xmlns:m="http://schemas.openxmlformats.org/officeDocument/2006/math">
+                        <m:oMath>
                           <m:r>
                             <a:rPr lang="en-US" sz="2400" b="0" i="1" smtClean="0">
                               <a:solidFill>
@@ -7257,10 +7166,7 @@
                     <a:pPr/>
                     <a14:m>
                       <m:oMathPara xmlns:m="http://schemas.openxmlformats.org/officeDocument/2006/math">
-                        <m:oMathParaPr>
-                          <m:jc m:val="centerGroup"/>
-                        </m:oMathParaPr>
-                        <m:oMath xmlns:m="http://schemas.openxmlformats.org/officeDocument/2006/math">
+                        <m:oMath>
                           <m:r>
                             <a:rPr lang="en-US" sz="2400" b="0" i="1" smtClean="0">
                               <a:solidFill>
@@ -7372,10 +7278,7 @@
                     <a:pPr/>
                     <a14:m>
                       <m:oMathPara xmlns:m="http://schemas.openxmlformats.org/officeDocument/2006/math">
-                        <m:oMathParaPr>
-                          <m:jc m:val="centerGroup"/>
-                        </m:oMathParaPr>
-                        <m:oMath xmlns:m="http://schemas.openxmlformats.org/officeDocument/2006/math">
+                        <m:oMath>
                           <m:r>
                             <a:rPr lang="en-US" sz="2400" b="0" i="1" smtClean="0">
                               <a:solidFill>
@@ -7487,10 +7390,7 @@
                     <a:pPr/>
                     <a14:m>
                       <m:oMathPara xmlns:m="http://schemas.openxmlformats.org/officeDocument/2006/math">
-                        <m:oMathParaPr>
-                          <m:jc m:val="centerGroup"/>
-                        </m:oMathParaPr>
-                        <m:oMath xmlns:m="http://schemas.openxmlformats.org/officeDocument/2006/math">
+                        <m:oMath>
                           <m:r>
                             <a:rPr lang="en-US" sz="2400" b="0" i="1" smtClean="0">
                               <a:solidFill>
@@ -7603,10 +7503,7 @@
                   <a:pPr/>
                   <a14:m>
                     <m:oMathPara xmlns:m="http://schemas.openxmlformats.org/officeDocument/2006/math">
-                      <m:oMathParaPr>
-                        <m:jc m:val="centerGroup"/>
-                      </m:oMathParaPr>
-                      <m:oMath xmlns:m="http://schemas.openxmlformats.org/officeDocument/2006/math">
+                      <m:oMath>
                         <m:r>
                           <m:rPr>
                             <m:sty m:val="p"/>
@@ -7955,10 +7852,7 @@
                     <a:pPr/>
                     <a14:m>
                       <m:oMathPara xmlns:m="http://schemas.openxmlformats.org/officeDocument/2006/math">
-                        <m:oMathParaPr>
-                          <m:jc m:val="centerGroup"/>
-                        </m:oMathParaPr>
-                        <m:oMath xmlns:m="http://schemas.openxmlformats.org/officeDocument/2006/math">
+                        <m:oMath>
                           <m:r>
                             <a:rPr lang="en-US" sz="2400" b="0" i="1" smtClean="0">
                               <a:solidFill>
@@ -8073,10 +7967,7 @@
                     <a:pPr/>
                     <a14:m>
                       <m:oMathPara xmlns:m="http://schemas.openxmlformats.org/officeDocument/2006/math">
-                        <m:oMathParaPr>
-                          <m:jc m:val="centerGroup"/>
-                        </m:oMathParaPr>
-                        <m:oMath xmlns:m="http://schemas.openxmlformats.org/officeDocument/2006/math">
+                        <m:oMath>
                           <m:r>
                             <a:rPr lang="en-US" sz="2400" b="0" i="1" smtClean="0">
                               <a:solidFill>
@@ -8185,10 +8076,7 @@
                     <a:pPr/>
                     <a14:m>
                       <m:oMathPara xmlns:m="http://schemas.openxmlformats.org/officeDocument/2006/math">
-                        <m:oMathParaPr>
-                          <m:jc m:val="centerGroup"/>
-                        </m:oMathParaPr>
-                        <m:oMath xmlns:m="http://schemas.openxmlformats.org/officeDocument/2006/math">
+                        <m:oMath>
                           <m:r>
                             <a:rPr lang="en-US" sz="2400" b="0" i="1" smtClean="0">
                               <a:solidFill>
@@ -8297,10 +8185,7 @@
                     <a:pPr/>
                     <a14:m>
                       <m:oMathPara xmlns:m="http://schemas.openxmlformats.org/officeDocument/2006/math">
-                        <m:oMathParaPr>
-                          <m:jc m:val="centerGroup"/>
-                        </m:oMathParaPr>
-                        <m:oMath xmlns:m="http://schemas.openxmlformats.org/officeDocument/2006/math">
+                        <m:oMath>
                           <m:r>
                             <a:rPr lang="en-US" sz="2400" b="0" i="1" smtClean="0">
                               <a:solidFill>
@@ -8415,10 +8300,7 @@
                     <a:pPr/>
                     <a14:m>
                       <m:oMathPara xmlns:m="http://schemas.openxmlformats.org/officeDocument/2006/math">
-                        <m:oMathParaPr>
-                          <m:jc m:val="centerGroup"/>
-                        </m:oMathParaPr>
-                        <m:oMath xmlns:m="http://schemas.openxmlformats.org/officeDocument/2006/math">
+                        <m:oMath>
                           <m:r>
                             <a:rPr lang="en-US" sz="2400" b="0" i="1" smtClean="0">
                               <a:solidFill>
@@ -8519,10 +8401,7 @@
                   <a:pPr/>
                   <a14:m>
                     <m:oMathPara xmlns:m="http://schemas.openxmlformats.org/officeDocument/2006/math">
-                      <m:oMathParaPr>
-                        <m:jc m:val="centerGroup"/>
-                      </m:oMathParaPr>
-                      <m:oMath xmlns:m="http://schemas.openxmlformats.org/officeDocument/2006/math">
+                      <m:oMath>
                         <m:r>
                           <m:rPr>
                             <m:sty m:val="p"/>
@@ -9088,10 +8967,7 @@
                 <a:pPr/>
                 <a14:m>
                   <m:oMathPara xmlns:m="http://schemas.openxmlformats.org/officeDocument/2006/math">
-                    <m:oMathParaPr>
-                      <m:jc m:val="centerGroup"/>
-                    </m:oMathParaPr>
-                    <m:oMath xmlns:m="http://schemas.openxmlformats.org/officeDocument/2006/math">
+                    <m:oMath>
                       <m:acc>
                         <m:accPr>
                           <m:chr m:val="̂"/>
@@ -9221,10 +9097,7 @@
                 <a:pPr/>
                 <a14:m>
                   <m:oMathPara xmlns:m="http://schemas.openxmlformats.org/officeDocument/2006/math">
-                    <m:oMathParaPr>
-                      <m:jc m:val="centerGroup"/>
-                    </m:oMathParaPr>
-                    <m:oMath xmlns:m="http://schemas.openxmlformats.org/officeDocument/2006/math">
+                    <m:oMath>
                       <m:acc>
                         <m:accPr>
                           <m:chr m:val="̂"/>
@@ -9354,10 +9227,7 @@
                 <a:pPr/>
                 <a14:m>
                   <m:oMathPara xmlns:m="http://schemas.openxmlformats.org/officeDocument/2006/math">
-                    <m:oMathParaPr>
-                      <m:jc m:val="centerGroup"/>
-                    </m:oMathParaPr>
-                    <m:oMath xmlns:m="http://schemas.openxmlformats.org/officeDocument/2006/math">
+                    <m:oMath>
                       <m:acc>
                         <m:accPr>
                           <m:chr m:val="̂"/>
@@ -9487,10 +9357,7 @@
                 <a:pPr/>
                 <a14:m>
                   <m:oMathPara xmlns:m="http://schemas.openxmlformats.org/officeDocument/2006/math">
-                    <m:oMathParaPr>
-                      <m:jc m:val="centerGroup"/>
-                    </m:oMathParaPr>
-                    <m:oMath xmlns:m="http://schemas.openxmlformats.org/officeDocument/2006/math">
+                    <m:oMath>
                       <m:acc>
                         <m:accPr>
                           <m:chr m:val="̂"/>
@@ -9628,10 +9495,7 @@
                 <a:pPr/>
                 <a14:m>
                   <m:oMathPara xmlns:m="http://schemas.openxmlformats.org/officeDocument/2006/math">
-                    <m:oMathParaPr>
-                      <m:jc m:val="centerGroup"/>
-                    </m:oMathParaPr>
-                    <m:oMath xmlns:m="http://schemas.openxmlformats.org/officeDocument/2006/math">
+                    <m:oMath>
                       <m:acc>
                         <m:accPr>
                           <m:chr m:val="̂"/>
@@ -9769,10 +9633,7 @@
                 <a:pPr/>
                 <a14:m>
                   <m:oMathPara xmlns:m="http://schemas.openxmlformats.org/officeDocument/2006/math">
-                    <m:oMathParaPr>
-                      <m:jc m:val="centerGroup"/>
-                    </m:oMathParaPr>
-                    <m:oMath xmlns:m="http://schemas.openxmlformats.org/officeDocument/2006/math">
+                    <m:oMath>
                       <m:acc>
                         <m:accPr>
                           <m:chr m:val="̂"/>
@@ -10068,10 +9929,7 @@
                   <a:pPr/>
                   <a14:m>
                     <m:oMathPara xmlns:m="http://schemas.openxmlformats.org/officeDocument/2006/math">
-                      <m:oMathParaPr>
-                        <m:jc m:val="centerGroup"/>
-                      </m:oMathParaPr>
-                      <m:oMath xmlns:m="http://schemas.openxmlformats.org/officeDocument/2006/math">
+                      <m:oMath>
                         <m:r>
                           <a:rPr lang="en-US" sz="2400" b="0" i="1" smtClean="0">
                             <a:latin typeface="Cambria Math" panose="02040503050406030204" pitchFamily="18" charset="0"/>
@@ -10152,10 +10010,7 @@
                   <a:pPr/>
                   <a14:m>
                     <m:oMathPara xmlns:m="http://schemas.openxmlformats.org/officeDocument/2006/math">
-                      <m:oMathParaPr>
-                        <m:jc m:val="centerGroup"/>
-                      </m:oMathParaPr>
-                      <m:oMath xmlns:m="http://schemas.openxmlformats.org/officeDocument/2006/math">
+                      <m:oMath>
                         <m:r>
                           <a:rPr lang="en-US" sz="2400" b="0" i="1" smtClean="0">
                             <a:latin typeface="Cambria Math" panose="02040503050406030204" pitchFamily="18" charset="0"/>
@@ -10236,10 +10091,7 @@
                   <a:pPr/>
                   <a14:m>
                     <m:oMathPara xmlns:m="http://schemas.openxmlformats.org/officeDocument/2006/math">
-                      <m:oMathParaPr>
-                        <m:jc m:val="centerGroup"/>
-                      </m:oMathParaPr>
-                      <m:oMath xmlns:m="http://schemas.openxmlformats.org/officeDocument/2006/math">
+                      <m:oMath>
                         <m:r>
                           <a:rPr lang="en-US" sz="2400" b="0" i="1" smtClean="0">
                             <a:solidFill>
@@ -10327,10 +10179,7 @@
                   <a:pPr/>
                   <a14:m>
                     <m:oMathPara xmlns:m="http://schemas.openxmlformats.org/officeDocument/2006/math">
-                      <m:oMathParaPr>
-                        <m:jc m:val="centerGroup"/>
-                      </m:oMathParaPr>
-                      <m:oMath xmlns:m="http://schemas.openxmlformats.org/officeDocument/2006/math">
+                      <m:oMath>
                         <m:r>
                           <a:rPr lang="en-US" sz="2400" b="0" i="1" smtClean="0">
                             <a:solidFill>
@@ -10601,10 +10450,7 @@
                   <a:pPr/>
                   <a14:m>
                     <m:oMathPara xmlns:m="http://schemas.openxmlformats.org/officeDocument/2006/math">
-                      <m:oMathParaPr>
-                        <m:jc m:val="centerGroup"/>
-                      </m:oMathParaPr>
-                      <m:oMath xmlns:m="http://schemas.openxmlformats.org/officeDocument/2006/math">
+                      <m:oMath>
                         <m:r>
                           <a:rPr lang="en-US" sz="2400" b="0" i="1" smtClean="0">
                             <a:solidFill>
@@ -10707,10 +10553,7 @@
                   <a:pPr/>
                   <a14:m>
                     <m:oMathPara xmlns:m="http://schemas.openxmlformats.org/officeDocument/2006/math">
-                      <m:oMathParaPr>
-                        <m:jc m:val="centerGroup"/>
-                      </m:oMathParaPr>
-                      <m:oMath xmlns:m="http://schemas.openxmlformats.org/officeDocument/2006/math">
+                      <m:oMath>
                         <m:r>
                           <a:rPr lang="en-US" sz="2400" b="0" i="1" smtClean="0">
                             <a:solidFill>
@@ -10807,10 +10650,7 @@
                   <a:pPr/>
                   <a14:m>
                     <m:oMathPara xmlns:m="http://schemas.openxmlformats.org/officeDocument/2006/math">
-                      <m:oMathParaPr>
-                        <m:jc m:val="centerGroup"/>
-                      </m:oMathParaPr>
-                      <m:oMath xmlns:m="http://schemas.openxmlformats.org/officeDocument/2006/math">
+                      <m:oMath>
                         <m:r>
                           <a:rPr lang="en-US" sz="2400" b="0" i="1" smtClean="0">
                             <a:solidFill>
@@ -10907,10 +10747,7 @@
                   <a:pPr/>
                   <a14:m>
                     <m:oMathPara xmlns:m="http://schemas.openxmlformats.org/officeDocument/2006/math">
-                      <m:oMathParaPr>
-                        <m:jc m:val="centerGroup"/>
-                      </m:oMathParaPr>
-                      <m:oMath xmlns:m="http://schemas.openxmlformats.org/officeDocument/2006/math">
+                      <m:oMath>
                         <m:r>
                           <a:rPr lang="en-US" sz="2400" b="0" i="1" smtClean="0">
                             <a:solidFill>
@@ -10986,8 +10823,8 @@
             </p:sp>
           </mc:Fallback>
         </mc:AlternateContent>
-        <mc:AlternateContent xmlns:mc="http://schemas.openxmlformats.org/markup-compatibility/2006">
-          <mc:Choice xmlns:a14="http://schemas.microsoft.com/office/drawing/2010/main" Requires="a14">
+        <mc:AlternateContent xmlns:mc="http://schemas.openxmlformats.org/markup-compatibility/2006" xmlns:a14="http://schemas.microsoft.com/office/drawing/2010/main">
+          <mc:Choice Requires="a14">
             <p:sp>
               <p:nvSpPr>
                 <p:cNvPr id="25" name="TextBox 24"/>
@@ -11013,14 +10850,11 @@
                   <a:pPr/>
                   <a14:m>
                     <m:oMathPara xmlns:m="http://schemas.openxmlformats.org/officeDocument/2006/math">
-                      <m:oMathParaPr>
-                        <m:jc m:val="centerGroup"/>
-                      </m:oMathParaPr>
-                      <m:oMath xmlns:m="http://schemas.openxmlformats.org/officeDocument/2006/math">
+                      <m:oMath>
                         <m:sSub>
                           <m:sSubPr>
                             <m:ctrlPr>
-                              <a:rPr lang="en-US" sz="2400" b="0" i="1" smtClean="0">
+                              <a:rPr lang="en-US" sz="2400" i="1">
                                 <a:solidFill>
                                   <a:schemeClr val="accent6">
                                     <a:lumMod val="75000"/>
@@ -11035,7 +10869,7 @@
                               <m:accPr>
                                 <m:chr m:val="̅"/>
                                 <m:ctrlPr>
-                                  <a:rPr lang="en-US" sz="2400" i="1">
+                                  <a:rPr lang="en-US" sz="2400" b="1" i="1">
                                     <a:solidFill>
                                       <a:schemeClr val="accent6">
                                         <a:lumMod val="75000"/>
@@ -11088,7 +10922,7 @@
               </p:txBody>
             </p:sp>
           </mc:Choice>
-          <mc:Fallback>
+          <mc:Fallback xmlns="">
             <p:sp>
               <p:nvSpPr>
                 <p:cNvPr id="25" name="TextBox 24"/>
@@ -11155,10 +10989,7 @@
                 <a:pPr/>
                 <a14:m>
                   <m:oMathPara xmlns:m="http://schemas.openxmlformats.org/officeDocument/2006/math">
-                    <m:oMathParaPr>
-                      <m:jc m:val="centerGroup"/>
-                    </m:oMathParaPr>
-                    <m:oMath xmlns:m="http://schemas.openxmlformats.org/officeDocument/2006/math">
+                    <m:oMath>
                       <m:r>
                         <m:rPr>
                           <m:sty m:val="p"/>
@@ -11242,10 +11073,7 @@
                 <a:pPr/>
                 <a14:m>
                   <m:oMathPara xmlns:m="http://schemas.openxmlformats.org/officeDocument/2006/math">
-                    <m:oMathParaPr>
-                      <m:jc m:val="centerGroup"/>
-                    </m:oMathParaPr>
-                    <m:oMath xmlns:m="http://schemas.openxmlformats.org/officeDocument/2006/math">
+                    <m:oMath>
                       <m:r>
                         <m:rPr>
                           <m:sty m:val="p"/>
@@ -11388,8 +11216,8 @@
           </a:fontRef>
         </p:style>
       </p:cxnSp>
-      <mc:AlternateContent xmlns:mc="http://schemas.openxmlformats.org/markup-compatibility/2006">
-        <mc:Choice xmlns:a14="http://schemas.microsoft.com/office/drawing/2010/main" Requires="a14">
+      <mc:AlternateContent xmlns:mc="http://schemas.openxmlformats.org/markup-compatibility/2006" xmlns:a14="http://schemas.microsoft.com/office/drawing/2010/main">
+        <mc:Choice Requires="a14">
           <p:sp>
             <p:nvSpPr>
               <p:cNvPr id="40" name="Rectangle 39"/>
@@ -11411,17 +11239,15 @@
               </a:bodyPr>
               <a:lstStyle/>
               <a:p>
+                <a:pPr/>
                 <a14:m>
                   <m:oMathPara xmlns:m="http://schemas.openxmlformats.org/officeDocument/2006/math">
-                    <m:oMathParaPr>
-                      <m:jc m:val="centerGroup"/>
-                    </m:oMathParaPr>
-                    <m:oMath xmlns:m="http://schemas.openxmlformats.org/officeDocument/2006/math">
+                    <m:oMath>
                       <m:acc>
                         <m:accPr>
                           <m:chr m:val="̅"/>
                           <m:ctrlPr>
-                            <a:rPr lang="en-US" sz="2400" i="1" smtClean="0">
+                            <a:rPr lang="en-US" sz="2400" b="1" i="1" smtClean="0">
                               <a:solidFill>
                                 <a:schemeClr val="tx1">
                                   <a:alpha val="50000"/>
@@ -11459,7 +11285,7 @@
             </p:txBody>
           </p:sp>
         </mc:Choice>
-        <mc:Fallback>
+        <mc:Fallback xmlns="">
           <p:sp>
             <p:nvSpPr>
               <p:cNvPr id="40" name="Rectangle 39"/>
@@ -11587,8 +11413,8 @@
             </a:fontRef>
           </p:style>
         </p:cxnSp>
-        <mc:AlternateContent xmlns:mc="http://schemas.openxmlformats.org/markup-compatibility/2006">
-          <mc:Choice xmlns:a14="http://schemas.microsoft.com/office/drawing/2010/main" Requires="a14">
+        <mc:AlternateContent xmlns:mc="http://schemas.openxmlformats.org/markup-compatibility/2006" xmlns:a14="http://schemas.microsoft.com/office/drawing/2010/main">
+          <mc:Choice Requires="a14">
             <p:sp>
               <p:nvSpPr>
                 <p:cNvPr id="3" name="TextBox 2"/>
@@ -11614,10 +11440,7 @@
                   <a:pPr/>
                   <a14:m>
                     <m:oMathPara xmlns:m="http://schemas.openxmlformats.org/officeDocument/2006/math">
-                      <m:oMathParaPr>
-                        <m:jc m:val="centerGroup"/>
-                      </m:oMathParaPr>
-                      <m:oMath xmlns:m="http://schemas.openxmlformats.org/officeDocument/2006/math">
+                      <m:oMath>
                         <m:r>
                           <a:rPr lang="en-US" sz="2400" b="0" i="1" smtClean="0">
                             <a:latin typeface="Cambria Math" panose="02040503050406030204" pitchFamily="18" charset="0"/>
@@ -11632,7 +11455,7 @@
               </p:txBody>
             </p:sp>
           </mc:Choice>
-          <mc:Fallback>
+          <mc:Fallback xmlns="">
             <p:sp>
               <p:nvSpPr>
                 <p:cNvPr id="3" name="TextBox 2"/>
@@ -11671,8 +11494,8 @@
             </p:sp>
           </mc:Fallback>
         </mc:AlternateContent>
-        <mc:AlternateContent xmlns:mc="http://schemas.openxmlformats.org/markup-compatibility/2006">
-          <mc:Choice xmlns:a14="http://schemas.microsoft.com/office/drawing/2010/main" Requires="a14">
+        <mc:AlternateContent xmlns:mc="http://schemas.openxmlformats.org/markup-compatibility/2006" xmlns:a14="http://schemas.microsoft.com/office/drawing/2010/main">
+          <mc:Choice Requires="a14">
             <p:sp>
               <p:nvSpPr>
                 <p:cNvPr id="4" name="TextBox 3"/>
@@ -11698,10 +11521,7 @@
                   <a:pPr/>
                   <a14:m>
                     <m:oMathPara xmlns:m="http://schemas.openxmlformats.org/officeDocument/2006/math">
-                      <m:oMathParaPr>
-                        <m:jc m:val="centerGroup"/>
-                      </m:oMathParaPr>
-                      <m:oMath xmlns:m="http://schemas.openxmlformats.org/officeDocument/2006/math">
+                      <m:oMath>
                         <m:r>
                           <a:rPr lang="en-US" sz="2400" b="0" i="1" smtClean="0">
                             <a:latin typeface="Cambria Math" panose="02040503050406030204" pitchFamily="18" charset="0"/>
@@ -11716,7 +11536,7 @@
               </p:txBody>
             </p:sp>
           </mc:Choice>
-          <mc:Fallback>
+          <mc:Fallback xmlns="">
             <p:sp>
               <p:nvSpPr>
                 <p:cNvPr id="4" name="TextBox 3"/>
@@ -11872,8 +11692,8 @@
             </a:p>
           </p:txBody>
         </p:sp>
-        <mc:AlternateContent xmlns:mc="http://schemas.openxmlformats.org/markup-compatibility/2006">
-          <mc:Choice xmlns:a14="http://schemas.microsoft.com/office/drawing/2010/main" Requires="a14">
+        <mc:AlternateContent xmlns:mc="http://schemas.openxmlformats.org/markup-compatibility/2006" xmlns:a14="http://schemas.microsoft.com/office/drawing/2010/main">
+          <mc:Choice Requires="a14">
             <p:sp>
               <p:nvSpPr>
                 <p:cNvPr id="7" name="Rectangle 6"/>
@@ -11895,17 +11715,15 @@
                 </a:bodyPr>
                 <a:lstStyle/>
                 <a:p>
+                  <a:pPr/>
                   <a14:m>
                     <m:oMathPara xmlns:m="http://schemas.openxmlformats.org/officeDocument/2006/math">
-                      <m:oMathParaPr>
-                        <m:jc m:val="centerGroup"/>
-                      </m:oMathParaPr>
-                      <m:oMath xmlns:m="http://schemas.openxmlformats.org/officeDocument/2006/math">
+                      <m:oMath>
                         <m:acc>
                           <m:accPr>
                             <m:chr m:val="̅"/>
                             <m:ctrlPr>
-                              <a:rPr lang="en-US" sz="2400" i="1" smtClean="0">
+                              <a:rPr lang="en-US" sz="2400" b="1" i="1" smtClean="0">
                                 <a:solidFill>
                                   <a:schemeClr val="tx1"/>
                                 </a:solidFill>
@@ -11938,7 +11756,7 @@
                           <m:accPr>
                             <m:chr m:val="̅"/>
                             <m:ctrlPr>
-                              <a:rPr lang="en-US" sz="2400" b="0" i="1" smtClean="0">
+                              <a:rPr lang="en-US" sz="2400" b="1" i="1" smtClean="0">
                                 <a:solidFill>
                                   <a:schemeClr val="tx1"/>
                                 </a:solidFill>
@@ -11966,7 +11784,7 @@
               </p:txBody>
             </p:sp>
           </mc:Choice>
-          <mc:Fallback>
+          <mc:Fallback xmlns="">
             <p:sp>
               <p:nvSpPr>
                 <p:cNvPr id="7" name="Rectangle 6"/>
@@ -12005,8 +11823,8 @@
             </p:sp>
           </mc:Fallback>
         </mc:AlternateContent>
-        <mc:AlternateContent xmlns:mc="http://schemas.openxmlformats.org/markup-compatibility/2006">
-          <mc:Choice xmlns:a14="http://schemas.microsoft.com/office/drawing/2010/main" Requires="a14">
+        <mc:AlternateContent xmlns:mc="http://schemas.openxmlformats.org/markup-compatibility/2006" xmlns:a14="http://schemas.microsoft.com/office/drawing/2010/main">
+          <mc:Choice Requires="a14">
             <p:sp>
               <p:nvSpPr>
                 <p:cNvPr id="8" name="TextBox 7"/>
@@ -12037,10 +11855,7 @@
                   <a:pPr/>
                   <a14:m>
                     <m:oMathPara xmlns:m="http://schemas.openxmlformats.org/officeDocument/2006/math">
-                      <m:oMathParaPr>
-                        <m:jc m:val="centerGroup"/>
-                      </m:oMathParaPr>
-                      <m:oMath xmlns:m="http://schemas.openxmlformats.org/officeDocument/2006/math">
+                      <m:oMath>
                         <m:r>
                           <m:rPr>
                             <m:sty m:val="p"/>
@@ -12058,7 +11873,7 @@
               </p:txBody>
             </p:sp>
           </mc:Choice>
-          <mc:Fallback>
+          <mc:Fallback xmlns="">
             <p:sp>
               <p:nvSpPr>
                 <p:cNvPr id="8" name="TextBox 7"/>
@@ -12196,8 +12011,8 @@
             </a:fontRef>
           </p:style>
         </p:cxnSp>
-        <mc:AlternateContent xmlns:mc="http://schemas.openxmlformats.org/markup-compatibility/2006">
-          <mc:Choice xmlns:a14="http://schemas.microsoft.com/office/drawing/2010/main" Requires="a14">
+        <mc:AlternateContent xmlns:mc="http://schemas.openxmlformats.org/markup-compatibility/2006" xmlns:a14="http://schemas.microsoft.com/office/drawing/2010/main">
+          <mc:Choice Requires="a14">
             <p:sp>
               <p:nvSpPr>
                 <p:cNvPr id="12" name="TextBox 11"/>
@@ -12223,10 +12038,7 @@
                   <a:pPr/>
                   <a14:m>
                     <m:oMathPara xmlns:m="http://schemas.openxmlformats.org/officeDocument/2006/math">
-                      <m:oMathParaPr>
-                        <m:jc m:val="centerGroup"/>
-                      </m:oMathParaPr>
-                      <m:oMath xmlns:m="http://schemas.openxmlformats.org/officeDocument/2006/math">
+                      <m:oMath>
                         <m:r>
                           <a:rPr lang="en-US" sz="2400" b="0" i="1" smtClean="0">
                             <a:solidFill>
@@ -12263,7 +12075,7 @@
               </p:txBody>
             </p:sp>
           </mc:Choice>
-          <mc:Fallback>
+          <mc:Fallback xmlns="">
             <p:sp>
               <p:nvSpPr>
                 <p:cNvPr id="12" name="TextBox 11"/>
@@ -12302,8 +12114,8 @@
             </p:sp>
           </mc:Fallback>
         </mc:AlternateContent>
-        <mc:AlternateContent xmlns:mc="http://schemas.openxmlformats.org/markup-compatibility/2006">
-          <mc:Choice xmlns:a14="http://schemas.microsoft.com/office/drawing/2010/main" Requires="a14">
+        <mc:AlternateContent xmlns:mc="http://schemas.openxmlformats.org/markup-compatibility/2006" xmlns:a14="http://schemas.microsoft.com/office/drawing/2010/main">
+          <mc:Choice Requires="a14">
             <p:sp>
               <p:nvSpPr>
                 <p:cNvPr id="13" name="TextBox 12"/>
@@ -12329,10 +12141,7 @@
                   <a:pPr/>
                   <a14:m>
                     <m:oMathPara xmlns:m="http://schemas.openxmlformats.org/officeDocument/2006/math">
-                      <m:oMathParaPr>
-                        <m:jc m:val="centerGroup"/>
-                      </m:oMathParaPr>
-                      <m:oMath xmlns:m="http://schemas.openxmlformats.org/officeDocument/2006/math">
+                      <m:oMath>
                         <m:r>
                           <a:rPr lang="en-US" sz="2400" b="0" i="1" smtClean="0">
                             <a:solidFill>
@@ -12369,7 +12178,7 @@
               </p:txBody>
             </p:sp>
           </mc:Choice>
-          <mc:Fallback>
+          <mc:Fallback xmlns="">
             <p:sp>
               <p:nvSpPr>
                 <p:cNvPr id="13" name="TextBox 12"/>
@@ -12531,8 +12340,8 @@
             </a:p>
           </p:txBody>
         </p:sp>
-        <mc:AlternateContent xmlns:mc="http://schemas.openxmlformats.org/markup-compatibility/2006">
-          <mc:Choice xmlns:a14="http://schemas.microsoft.com/office/drawing/2010/main" Requires="a14">
+        <mc:AlternateContent xmlns:mc="http://schemas.openxmlformats.org/markup-compatibility/2006" xmlns:a14="http://schemas.microsoft.com/office/drawing/2010/main">
+          <mc:Choice Requires="a14">
             <p:sp>
               <p:nvSpPr>
                 <p:cNvPr id="17" name="TextBox 16"/>
@@ -12563,10 +12372,7 @@
                   <a:pPr/>
                   <a14:m>
                     <m:oMathPara xmlns:m="http://schemas.openxmlformats.org/officeDocument/2006/math">
-                      <m:oMathParaPr>
-                        <m:jc m:val="centerGroup"/>
-                      </m:oMathParaPr>
-                      <m:oMath xmlns:m="http://schemas.openxmlformats.org/officeDocument/2006/math">
+                      <m:oMath>
                         <m:r>
                           <m:rPr>
                             <m:sty m:val="p"/>
@@ -12606,7 +12412,7 @@
               </p:txBody>
             </p:sp>
           </mc:Choice>
-          <mc:Fallback>
+          <mc:Fallback xmlns="">
             <p:sp>
               <p:nvSpPr>
                 <p:cNvPr id="17" name="TextBox 16"/>
@@ -12650,8 +12456,8 @@
             </p:sp>
           </mc:Fallback>
         </mc:AlternateContent>
-        <mc:AlternateContent xmlns:mc="http://schemas.openxmlformats.org/markup-compatibility/2006">
-          <mc:Choice xmlns:a14="http://schemas.microsoft.com/office/drawing/2010/main" Requires="a14">
+        <mc:AlternateContent xmlns:mc="http://schemas.openxmlformats.org/markup-compatibility/2006" xmlns:a14="http://schemas.microsoft.com/office/drawing/2010/main">
+          <mc:Choice Requires="a14">
             <p:sp>
               <p:nvSpPr>
                 <p:cNvPr id="18" name="Rectangle 17"/>
@@ -12676,14 +12482,11 @@
                   <a:pPr/>
                   <a14:m>
                     <m:oMathPara xmlns:m="http://schemas.openxmlformats.org/officeDocument/2006/math">
-                      <m:oMathParaPr>
-                        <m:jc m:val="centerGroup"/>
-                      </m:oMathParaPr>
-                      <m:oMath xmlns:m="http://schemas.openxmlformats.org/officeDocument/2006/math">
+                      <m:oMath>
                         <m:sSub>
                           <m:sSubPr>
                             <m:ctrlPr>
-                              <a:rPr lang="en-US" sz="2400" i="1" smtClean="0">
+                              <a:rPr lang="en-US" sz="2400" b="0" i="1" smtClean="0">
                                 <a:solidFill>
                                   <a:schemeClr val="accent6">
                                     <a:lumMod val="75000"/>
@@ -12709,7 +12512,7 @@
                               <m:accPr>
                                 <m:chr m:val="̅"/>
                                 <m:ctrlPr>
-                                  <a:rPr lang="en-US" sz="2400" i="1">
+                                  <a:rPr lang="en-US" sz="2400" b="1" i="1">
                                     <a:solidFill>
                                       <a:schemeClr val="accent6">
                                         <a:lumMod val="75000"/>
@@ -12762,7 +12565,7 @@
               </p:txBody>
             </p:sp>
           </mc:Choice>
-          <mc:Fallback>
+          <mc:Fallback xmlns="">
             <p:sp>
               <p:nvSpPr>
                 <p:cNvPr id="18" name="Rectangle 17"/>
@@ -12840,8 +12643,8 @@
           </a:fontRef>
         </p:style>
       </p:cxnSp>
-      <mc:AlternateContent xmlns:mc="http://schemas.openxmlformats.org/markup-compatibility/2006">
-        <mc:Choice xmlns:a14="http://schemas.microsoft.com/office/drawing/2010/main" Requires="a14">
+      <mc:AlternateContent xmlns:mc="http://schemas.openxmlformats.org/markup-compatibility/2006" xmlns:a14="http://schemas.microsoft.com/office/drawing/2010/main">
+        <mc:Choice Requires="a14">
           <p:sp>
             <p:nvSpPr>
               <p:cNvPr id="23" name="TextBox 22"/>
@@ -12867,10 +12670,7 @@
                 <a:pPr/>
                 <a14:m>
                   <m:oMathPara xmlns:m="http://schemas.openxmlformats.org/officeDocument/2006/math">
-                    <m:oMathParaPr>
-                      <m:jc m:val="centerGroup"/>
-                    </m:oMathParaPr>
-                    <m:oMath xmlns:m="http://schemas.openxmlformats.org/officeDocument/2006/math">
+                    <m:oMath>
                       <m:r>
                         <a:rPr lang="en-US" sz="2400" b="0" i="1" smtClean="0">
                           <a:latin typeface="Cambria Math" panose="02040503050406030204" pitchFamily="18" charset="0"/>
@@ -12885,7 +12685,7 @@
             </p:txBody>
           </p:sp>
         </mc:Choice>
-        <mc:Fallback>
+        <mc:Fallback xmlns="">
           <p:sp>
             <p:nvSpPr>
               <p:cNvPr id="23" name="TextBox 22"/>
@@ -12924,8 +12724,8 @@
           </p:sp>
         </mc:Fallback>
       </mc:AlternateContent>
-      <mc:AlternateContent xmlns:mc="http://schemas.openxmlformats.org/markup-compatibility/2006">
-        <mc:Choice xmlns:a14="http://schemas.microsoft.com/office/drawing/2010/main" Requires="a14">
+      <mc:AlternateContent xmlns:mc="http://schemas.openxmlformats.org/markup-compatibility/2006" xmlns:a14="http://schemas.microsoft.com/office/drawing/2010/main">
+        <mc:Choice Requires="a14">
           <p:sp>
             <p:nvSpPr>
               <p:cNvPr id="24" name="TextBox 23"/>
@@ -12951,10 +12751,7 @@
                 <a:pPr/>
                 <a14:m>
                   <m:oMathPara xmlns:m="http://schemas.openxmlformats.org/officeDocument/2006/math">
-                    <m:oMathParaPr>
-                      <m:jc m:val="centerGroup"/>
-                    </m:oMathParaPr>
-                    <m:oMath xmlns:m="http://schemas.openxmlformats.org/officeDocument/2006/math">
+                    <m:oMath>
                       <m:r>
                         <a:rPr lang="en-US" sz="2400" b="0" i="1" smtClean="0">
                           <a:latin typeface="Cambria Math" panose="02040503050406030204" pitchFamily="18" charset="0"/>
@@ -12969,7 +12766,7 @@
             </p:txBody>
           </p:sp>
         </mc:Choice>
-        <mc:Fallback>
+        <mc:Fallback xmlns="">
           <p:sp>
             <p:nvSpPr>
               <p:cNvPr id="24" name="TextBox 23"/>
@@ -13125,8 +12922,8 @@
           </a:p>
         </p:txBody>
       </p:sp>
-      <mc:AlternateContent xmlns:mc="http://schemas.openxmlformats.org/markup-compatibility/2006">
-        <mc:Choice xmlns:a14="http://schemas.microsoft.com/office/drawing/2010/main" Requires="a14">
+      <mc:AlternateContent xmlns:mc="http://schemas.openxmlformats.org/markup-compatibility/2006" xmlns:a14="http://schemas.microsoft.com/office/drawing/2010/main">
+        <mc:Choice Requires="a14">
           <p:sp>
             <p:nvSpPr>
               <p:cNvPr id="27" name="Rectangle 26"/>
@@ -13148,17 +12945,15 @@
               </a:bodyPr>
               <a:lstStyle/>
               <a:p>
+                <a:pPr/>
                 <a14:m>
                   <m:oMathPara xmlns:m="http://schemas.openxmlformats.org/officeDocument/2006/math">
-                    <m:oMathParaPr>
-                      <m:jc m:val="centerGroup"/>
-                    </m:oMathParaPr>
-                    <m:oMath xmlns:m="http://schemas.openxmlformats.org/officeDocument/2006/math">
+                    <m:oMath>
                       <m:acc>
                         <m:accPr>
                           <m:chr m:val="̅"/>
                           <m:ctrlPr>
-                            <a:rPr lang="en-US" sz="2400" i="1" smtClean="0">
+                            <a:rPr lang="en-US" sz="2400" b="1" i="1" smtClean="0">
                               <a:solidFill>
                                 <a:schemeClr val="tx1"/>
                               </a:solidFill>
@@ -13186,7 +12981,7 @@
             </p:txBody>
           </p:sp>
         </mc:Choice>
-        <mc:Fallback>
+        <mc:Fallback xmlns="">
           <p:sp>
             <p:nvSpPr>
               <p:cNvPr id="27" name="Rectangle 26"/>
@@ -13225,8 +13020,8 @@
           </p:sp>
         </mc:Fallback>
       </mc:AlternateContent>
-      <mc:AlternateContent xmlns:mc="http://schemas.openxmlformats.org/markup-compatibility/2006">
-        <mc:Choice xmlns:a14="http://schemas.microsoft.com/office/drawing/2010/main" Requires="a14">
+      <mc:AlternateContent xmlns:mc="http://schemas.openxmlformats.org/markup-compatibility/2006" xmlns:a14="http://schemas.microsoft.com/office/drawing/2010/main">
+        <mc:Choice Requires="a14">
           <p:sp>
             <p:nvSpPr>
               <p:cNvPr id="28" name="TextBox 27"/>
@@ -13257,10 +13052,7 @@
                 <a:pPr/>
                 <a14:m>
                   <m:oMathPara xmlns:m="http://schemas.openxmlformats.org/officeDocument/2006/math">
-                    <m:oMathParaPr>
-                      <m:jc m:val="centerGroup"/>
-                    </m:oMathParaPr>
-                    <m:oMath xmlns:m="http://schemas.openxmlformats.org/officeDocument/2006/math">
+                    <m:oMath>
                       <m:r>
                         <m:rPr>
                           <m:sty m:val="p"/>
@@ -13278,7 +13070,7 @@
             </p:txBody>
           </p:sp>
         </mc:Choice>
-        <mc:Fallback>
+        <mc:Fallback xmlns="">
           <p:sp>
             <p:nvSpPr>
               <p:cNvPr id="28" name="TextBox 27"/>
@@ -13402,8 +13194,8 @@
           </a:fontRef>
         </p:style>
       </p:cxnSp>
-      <mc:AlternateContent xmlns:mc="http://schemas.openxmlformats.org/markup-compatibility/2006">
-        <mc:Choice xmlns:a14="http://schemas.microsoft.com/office/drawing/2010/main" Requires="a14">
+      <mc:AlternateContent xmlns:mc="http://schemas.openxmlformats.org/markup-compatibility/2006" xmlns:a14="http://schemas.microsoft.com/office/drawing/2010/main">
+        <mc:Choice Requires="a14">
           <p:sp>
             <p:nvSpPr>
               <p:cNvPr id="32" name="TextBox 31"/>
@@ -13429,10 +13221,7 @@
                 <a:pPr/>
                 <a14:m>
                   <m:oMathPara xmlns:m="http://schemas.openxmlformats.org/officeDocument/2006/math">
-                    <m:oMathParaPr>
-                      <m:jc m:val="centerGroup"/>
-                    </m:oMathParaPr>
-                    <m:oMath xmlns:m="http://schemas.openxmlformats.org/officeDocument/2006/math">
+                    <m:oMath>
                       <m:r>
                         <a:rPr lang="en-US" sz="2400" b="0" i="1" smtClean="0">
                           <a:solidFill>
@@ -13469,7 +13258,7 @@
             </p:txBody>
           </p:sp>
         </mc:Choice>
-        <mc:Fallback>
+        <mc:Fallback xmlns="">
           <p:sp>
             <p:nvSpPr>
               <p:cNvPr id="32" name="TextBox 31"/>
@@ -13508,8 +13297,8 @@
           </p:sp>
         </mc:Fallback>
       </mc:AlternateContent>
-      <mc:AlternateContent xmlns:mc="http://schemas.openxmlformats.org/markup-compatibility/2006">
-        <mc:Choice xmlns:a14="http://schemas.microsoft.com/office/drawing/2010/main" Requires="a14">
+      <mc:AlternateContent xmlns:mc="http://schemas.openxmlformats.org/markup-compatibility/2006" xmlns:a14="http://schemas.microsoft.com/office/drawing/2010/main">
+        <mc:Choice Requires="a14">
           <p:sp>
             <p:nvSpPr>
               <p:cNvPr id="33" name="TextBox 32"/>
@@ -13535,10 +13324,7 @@
                 <a:pPr/>
                 <a14:m>
                   <m:oMathPara xmlns:m="http://schemas.openxmlformats.org/officeDocument/2006/math">
-                    <m:oMathParaPr>
-                      <m:jc m:val="centerGroup"/>
-                    </m:oMathParaPr>
-                    <m:oMath xmlns:m="http://schemas.openxmlformats.org/officeDocument/2006/math">
+                    <m:oMath>
                       <m:r>
                         <a:rPr lang="en-US" sz="2400" b="0" i="1" smtClean="0">
                           <a:solidFill>
@@ -13575,7 +13361,7 @@
             </p:txBody>
           </p:sp>
         </mc:Choice>
-        <mc:Fallback>
+        <mc:Fallback xmlns="">
           <p:sp>
             <p:nvSpPr>
               <p:cNvPr id="33" name="TextBox 32"/>
@@ -13737,8 +13523,8 @@
           </a:p>
         </p:txBody>
       </p:sp>
-      <mc:AlternateContent xmlns:mc="http://schemas.openxmlformats.org/markup-compatibility/2006">
-        <mc:Choice xmlns:a14="http://schemas.microsoft.com/office/drawing/2010/main" Requires="a14">
+      <mc:AlternateContent xmlns:mc="http://schemas.openxmlformats.org/markup-compatibility/2006" xmlns:a14="http://schemas.microsoft.com/office/drawing/2010/main">
+        <mc:Choice Requires="a14">
           <p:sp>
             <p:nvSpPr>
               <p:cNvPr id="36" name="TextBox 35"/>
@@ -13769,10 +13555,7 @@
                 <a:pPr/>
                 <a14:m>
                   <m:oMathPara xmlns:m="http://schemas.openxmlformats.org/officeDocument/2006/math">
-                    <m:oMathParaPr>
-                      <m:jc m:val="centerGroup"/>
-                    </m:oMathParaPr>
-                    <m:oMath xmlns:m="http://schemas.openxmlformats.org/officeDocument/2006/math">
+                    <m:oMath>
                       <m:r>
                         <m:rPr>
                           <m:sty m:val="p"/>
@@ -13812,7 +13595,7 @@
             </p:txBody>
           </p:sp>
         </mc:Choice>
-        <mc:Fallback>
+        <mc:Fallback xmlns="">
           <p:sp>
             <p:nvSpPr>
               <p:cNvPr id="36" name="TextBox 35"/>
@@ -13856,8 +13639,8 @@
           </p:sp>
         </mc:Fallback>
       </mc:AlternateContent>
-      <mc:AlternateContent xmlns:mc="http://schemas.openxmlformats.org/markup-compatibility/2006">
-        <mc:Choice xmlns:a14="http://schemas.microsoft.com/office/drawing/2010/main" Requires="a14">
+      <mc:AlternateContent xmlns:mc="http://schemas.openxmlformats.org/markup-compatibility/2006" xmlns:a14="http://schemas.microsoft.com/office/drawing/2010/main">
+        <mc:Choice Requires="a14">
           <p:sp>
             <p:nvSpPr>
               <p:cNvPr id="37" name="Rectangle 36"/>
@@ -13882,14 +13665,11 @@
                 <a:pPr/>
                 <a14:m>
                   <m:oMathPara xmlns:m="http://schemas.openxmlformats.org/officeDocument/2006/math">
-                    <m:oMathParaPr>
-                      <m:jc m:val="centerGroup"/>
-                    </m:oMathParaPr>
-                    <m:oMath xmlns:m="http://schemas.openxmlformats.org/officeDocument/2006/math">
+                    <m:oMath>
                       <m:sSub>
                         <m:sSubPr>
                           <m:ctrlPr>
-                            <a:rPr lang="en-US" sz="2400" i="1" smtClean="0">
+                            <a:rPr lang="en-US" sz="2400" b="0" i="1" smtClean="0">
                               <a:solidFill>
                                 <a:schemeClr val="accent6">
                                   <a:lumMod val="75000"/>
@@ -13917,7 +13697,7 @@
                             <m:accPr>
                               <m:chr m:val="̅"/>
                               <m:ctrlPr>
-                                <a:rPr lang="en-US" sz="2400" i="1">
+                                <a:rPr lang="en-US" sz="2400" b="1" i="1">
                                   <a:solidFill>
                                     <a:schemeClr val="accent6">
                                       <a:lumMod val="75000"/>
@@ -13974,7 +13754,7 @@
             </p:txBody>
           </p:sp>
         </mc:Choice>
-        <mc:Fallback>
+        <mc:Fallback xmlns="">
           <p:sp>
             <p:nvSpPr>
               <p:cNvPr id="37" name="Rectangle 36"/>
@@ -14052,8 +13832,8 @@
           </a:fontRef>
         </p:style>
       </p:cxnSp>
-      <mc:AlternateContent xmlns:mc="http://schemas.openxmlformats.org/markup-compatibility/2006">
-        <mc:Choice xmlns:a14="http://schemas.microsoft.com/office/drawing/2010/main" Requires="a14">
+      <mc:AlternateContent xmlns:mc="http://schemas.openxmlformats.org/markup-compatibility/2006" xmlns:a14="http://schemas.microsoft.com/office/drawing/2010/main">
+        <mc:Choice Requires="a14">
           <p:sp>
             <p:nvSpPr>
               <p:cNvPr id="42" name="Rectangle 41"/>
@@ -14075,17 +13855,15 @@
               </a:bodyPr>
               <a:lstStyle/>
               <a:p>
+                <a:pPr/>
                 <a14:m>
                   <m:oMathPara xmlns:m="http://schemas.openxmlformats.org/officeDocument/2006/math">
-                    <m:oMathParaPr>
-                      <m:jc m:val="centerGroup"/>
-                    </m:oMathParaPr>
-                    <m:oMath xmlns:m="http://schemas.openxmlformats.org/officeDocument/2006/math">
+                    <m:oMath>
                       <m:acc>
                         <m:accPr>
                           <m:chr m:val="̅"/>
                           <m:ctrlPr>
-                            <a:rPr lang="en-US" sz="2400" i="1" smtClean="0">
+                            <a:rPr lang="en-US" sz="2400" b="1" i="1" smtClean="0">
                               <a:solidFill>
                                 <a:schemeClr val="accent1">
                                   <a:lumMod val="75000"/>
@@ -14134,7 +13912,7 @@
             </p:txBody>
           </p:sp>
         </mc:Choice>
-        <mc:Fallback>
+        <mc:Fallback xmlns="">
           <p:sp>
             <p:nvSpPr>
               <p:cNvPr id="42" name="Rectangle 41"/>
@@ -14177,6 +13955,3953 @@
     <p:extLst>
       <p:ext uri="{BB962C8B-B14F-4D97-AF65-F5344CB8AC3E}">
         <p14:creationId xmlns:p14="http://schemas.microsoft.com/office/powerpoint/2010/main" val="3987561150"/>
+      </p:ext>
+    </p:extLst>
+  </p:cSld>
+  <p:clrMapOvr>
+    <a:masterClrMapping/>
+  </p:clrMapOvr>
+</p:sld>
+</file>
+
+<file path=ppt/slides/slide6.xml><?xml version="1.0" encoding="utf-8"?>
+<p:sld xmlns:a="http://schemas.openxmlformats.org/drawingml/2006/main" xmlns:r="http://schemas.openxmlformats.org/officeDocument/2006/relationships" xmlns:p="http://schemas.openxmlformats.org/presentationml/2006/main">
+  <p:cSld>
+    <p:spTree>
+      <p:nvGrpSpPr>
+        <p:cNvPr id="1" name=""/>
+        <p:cNvGrpSpPr/>
+        <p:nvPr/>
+      </p:nvGrpSpPr>
+      <p:grpSpPr>
+        <a:xfrm>
+          <a:off x="0" y="0"/>
+          <a:ext cx="0" cy="0"/>
+          <a:chOff x="0" y="0"/>
+          <a:chExt cx="0" cy="0"/>
+        </a:xfrm>
+      </p:grpSpPr>
+      <p:sp>
+        <p:nvSpPr>
+          <p:cNvPr id="21" name="Parallelogram 20">
+            <a:extLst>
+              <a:ext uri="{FF2B5EF4-FFF2-40B4-BE49-F238E27FC236}">
+                <a16:creationId xmlns:a16="http://schemas.microsoft.com/office/drawing/2014/main" id="{19BBF73A-1360-1921-CC85-2D186624CAF9}"/>
+              </a:ext>
+            </a:extLst>
+          </p:cNvPr>
+          <p:cNvSpPr/>
+          <p:nvPr/>
+        </p:nvSpPr>
+        <p:spPr>
+          <a:xfrm rot="16200000" flipH="1">
+            <a:off x="2201633" y="1862288"/>
+            <a:ext cx="5040777" cy="3538539"/>
+          </a:xfrm>
+          <a:prstGeom prst="parallelogram">
+            <a:avLst>
+              <a:gd name="adj" fmla="val 60355"/>
+            </a:avLst>
+          </a:prstGeom>
+          <a:solidFill>
+            <a:schemeClr val="accent1">
+              <a:alpha val="50000"/>
+            </a:schemeClr>
+          </a:solidFill>
+          <a:ln>
+            <a:noFill/>
+          </a:ln>
+        </p:spPr>
+        <p:style>
+          <a:lnRef idx="2">
+            <a:schemeClr val="accent1">
+              <a:shade val="15000"/>
+            </a:schemeClr>
+          </a:lnRef>
+          <a:fillRef idx="1">
+            <a:schemeClr val="accent1"/>
+          </a:fillRef>
+          <a:effectRef idx="0">
+            <a:schemeClr val="accent1"/>
+          </a:effectRef>
+          <a:fontRef idx="minor">
+            <a:schemeClr val="lt1"/>
+          </a:fontRef>
+        </p:style>
+        <p:txBody>
+          <a:bodyPr rtlCol="0" anchor="ctr"/>
+          <a:lstStyle/>
+          <a:p>
+            <a:pPr algn="ctr"/>
+            <a:endParaRPr lang="en-IN"/>
+          </a:p>
+        </p:txBody>
+      </p:sp>
+      <p:sp>
+        <p:nvSpPr>
+          <p:cNvPr id="3" name="Parallelogram 2">
+            <a:extLst>
+              <a:ext uri="{FF2B5EF4-FFF2-40B4-BE49-F238E27FC236}">
+                <a16:creationId xmlns:a16="http://schemas.microsoft.com/office/drawing/2014/main" id="{A023B467-90D9-9935-413E-A6C672B3113A}"/>
+              </a:ext>
+            </a:extLst>
+          </p:cNvPr>
+          <p:cNvSpPr/>
+          <p:nvPr/>
+        </p:nvSpPr>
+        <p:spPr>
+          <a:xfrm>
+            <a:off x="1956123" y="1111170"/>
+            <a:ext cx="5544272" cy="2129741"/>
+          </a:xfrm>
+          <a:prstGeom prst="parallelogram">
+            <a:avLst>
+              <a:gd name="adj" fmla="val 88587"/>
+            </a:avLst>
+          </a:prstGeom>
+          <a:solidFill>
+            <a:schemeClr val="tx1">
+              <a:lumMod val="75000"/>
+              <a:lumOff val="25000"/>
+              <a:alpha val="50000"/>
+            </a:schemeClr>
+          </a:solidFill>
+          <a:ln>
+            <a:noFill/>
+          </a:ln>
+        </p:spPr>
+        <p:style>
+          <a:lnRef idx="2">
+            <a:schemeClr val="accent1">
+              <a:shade val="15000"/>
+            </a:schemeClr>
+          </a:lnRef>
+          <a:fillRef idx="1">
+            <a:schemeClr val="accent1"/>
+          </a:fillRef>
+          <a:effectRef idx="0">
+            <a:schemeClr val="accent1"/>
+          </a:effectRef>
+          <a:fontRef idx="minor">
+            <a:schemeClr val="lt1"/>
+          </a:fontRef>
+        </p:style>
+        <p:txBody>
+          <a:bodyPr rtlCol="0" anchor="ctr"/>
+          <a:lstStyle/>
+          <a:p>
+            <a:pPr algn="ctr"/>
+            <a:endParaRPr lang="en-IN"/>
+          </a:p>
+        </p:txBody>
+      </p:sp>
+      <p:grpSp>
+        <p:nvGrpSpPr>
+          <p:cNvPr id="11" name="Group 10">
+            <a:extLst>
+              <a:ext uri="{FF2B5EF4-FFF2-40B4-BE49-F238E27FC236}">
+                <a16:creationId xmlns:a16="http://schemas.microsoft.com/office/drawing/2014/main" id="{6B8A17A6-B1CD-6B8D-DBB6-7764FB1D82F5}"/>
+              </a:ext>
+            </a:extLst>
+          </p:cNvPr>
+          <p:cNvGrpSpPr/>
+          <p:nvPr/>
+        </p:nvGrpSpPr>
+        <p:grpSpPr>
+          <a:xfrm rot="20552324">
+            <a:off x="2830010" y="1353514"/>
+            <a:ext cx="3808070" cy="1645052"/>
+            <a:chOff x="1927184" y="4079352"/>
+            <a:chExt cx="3808070" cy="1645052"/>
+          </a:xfrm>
+        </p:grpSpPr>
+        <p:sp>
+          <p:nvSpPr>
+            <p:cNvPr id="4" name="Oval 3">
+              <a:extLst>
+                <a:ext uri="{FF2B5EF4-FFF2-40B4-BE49-F238E27FC236}">
+                  <a16:creationId xmlns:a16="http://schemas.microsoft.com/office/drawing/2014/main" id="{89A0EE1A-2AAF-4DFB-59AA-82BCCFE6BF1A}"/>
+                </a:ext>
+              </a:extLst>
+            </p:cNvPr>
+            <p:cNvSpPr/>
+            <p:nvPr/>
+          </p:nvSpPr>
+          <p:spPr>
+            <a:xfrm>
+              <a:off x="1927184" y="4079352"/>
+              <a:ext cx="3808070" cy="1645052"/>
+            </a:xfrm>
+            <a:prstGeom prst="ellipse">
+              <a:avLst/>
+            </a:prstGeom>
+            <a:noFill/>
+            <a:ln w="19050">
+              <a:solidFill>
+                <a:schemeClr val="tx1"/>
+              </a:solidFill>
+              <a:prstDash val="dash"/>
+            </a:ln>
+          </p:spPr>
+          <p:style>
+            <a:lnRef idx="2">
+              <a:schemeClr val="accent1">
+                <a:shade val="15000"/>
+              </a:schemeClr>
+            </a:lnRef>
+            <a:fillRef idx="1">
+              <a:schemeClr val="accent1"/>
+            </a:fillRef>
+            <a:effectRef idx="0">
+              <a:schemeClr val="accent1"/>
+            </a:effectRef>
+            <a:fontRef idx="minor">
+              <a:schemeClr val="lt1"/>
+            </a:fontRef>
+          </p:style>
+          <p:txBody>
+            <a:bodyPr rtlCol="0" anchor="ctr"/>
+            <a:lstStyle/>
+            <a:p>
+              <a:pPr algn="ctr"/>
+              <a:endParaRPr lang="en-IN"/>
+            </a:p>
+          </p:txBody>
+        </p:sp>
+        <p:cxnSp>
+          <p:nvCxnSpPr>
+            <p:cNvPr id="10" name="Straight Arrow Connector 9">
+              <a:extLst>
+                <a:ext uri="{FF2B5EF4-FFF2-40B4-BE49-F238E27FC236}">
+                  <a16:creationId xmlns:a16="http://schemas.microsoft.com/office/drawing/2014/main" id="{A06EB51D-E9E4-E7E7-F0C7-665AFB8125AC}"/>
+                </a:ext>
+              </a:extLst>
+            </p:cNvPr>
+            <p:cNvCxnSpPr>
+              <a:cxnSpLocks/>
+            </p:cNvCxnSpPr>
+            <p:nvPr/>
+          </p:nvCxnSpPr>
+          <p:spPr>
+            <a:xfrm rot="1047676" flipH="1">
+              <a:off x="2287554" y="4664820"/>
+              <a:ext cx="1446501" cy="869761"/>
+            </a:xfrm>
+            <a:prstGeom prst="straightConnector1">
+              <a:avLst/>
+            </a:prstGeom>
+            <a:ln w="28575" cap="rnd">
+              <a:solidFill>
+                <a:schemeClr val="tx1">
+                  <a:lumMod val="65000"/>
+                  <a:lumOff val="35000"/>
+                </a:schemeClr>
+              </a:solidFill>
+              <a:round/>
+              <a:tailEnd type="none" w="lg" len="lg"/>
+            </a:ln>
+          </p:spPr>
+          <p:style>
+            <a:lnRef idx="1">
+              <a:schemeClr val="accent1"/>
+            </a:lnRef>
+            <a:fillRef idx="0">
+              <a:schemeClr val="accent1"/>
+            </a:fillRef>
+            <a:effectRef idx="0">
+              <a:schemeClr val="accent1"/>
+            </a:effectRef>
+            <a:fontRef idx="minor">
+              <a:schemeClr val="tx1"/>
+            </a:fontRef>
+          </p:style>
+        </p:cxnSp>
+      </p:grpSp>
+      <p:cxnSp>
+        <p:nvCxnSpPr>
+          <p:cNvPr id="14" name="Straight Arrow Connector 13">
+            <a:extLst>
+              <a:ext uri="{FF2B5EF4-FFF2-40B4-BE49-F238E27FC236}">
+                <a16:creationId xmlns:a16="http://schemas.microsoft.com/office/drawing/2014/main" id="{F23F73A3-074A-4701-7996-040998654143}"/>
+              </a:ext>
+            </a:extLst>
+          </p:cNvPr>
+          <p:cNvCxnSpPr>
+            <a:cxnSpLocks/>
+          </p:cNvCxnSpPr>
+          <p:nvPr/>
+        </p:nvCxnSpPr>
+        <p:spPr>
+          <a:xfrm flipV="1">
+            <a:off x="4729625" y="393539"/>
+            <a:ext cx="0" cy="4479403"/>
+          </a:xfrm>
+          <a:prstGeom prst="straightConnector1">
+            <a:avLst/>
+          </a:prstGeom>
+          <a:ln w="25400" cap="rnd">
+            <a:solidFill>
+              <a:schemeClr val="tx1">
+                <a:lumMod val="65000"/>
+                <a:lumOff val="35000"/>
+              </a:schemeClr>
+            </a:solidFill>
+            <a:prstDash val="sysDash"/>
+            <a:round/>
+            <a:tailEnd type="none" w="lg" len="lg"/>
+          </a:ln>
+        </p:spPr>
+        <p:style>
+          <a:lnRef idx="1">
+            <a:schemeClr val="accent1"/>
+          </a:lnRef>
+          <a:fillRef idx="0">
+            <a:schemeClr val="accent1"/>
+          </a:fillRef>
+          <a:effectRef idx="0">
+            <a:schemeClr val="accent1"/>
+          </a:effectRef>
+          <a:fontRef idx="minor">
+            <a:schemeClr val="tx1"/>
+          </a:fontRef>
+        </p:style>
+      </p:cxnSp>
+      <p:cxnSp>
+        <p:nvCxnSpPr>
+          <p:cNvPr id="13" name="Straight Arrow Connector 12">
+            <a:extLst>
+              <a:ext uri="{FF2B5EF4-FFF2-40B4-BE49-F238E27FC236}">
+                <a16:creationId xmlns:a16="http://schemas.microsoft.com/office/drawing/2014/main" id="{B09ADAC3-7290-DB57-4A40-E2DDC6AAEC66}"/>
+              </a:ext>
+            </a:extLst>
+          </p:cNvPr>
+          <p:cNvCxnSpPr>
+            <a:cxnSpLocks/>
+          </p:cNvCxnSpPr>
+          <p:nvPr/>
+        </p:nvCxnSpPr>
+        <p:spPr>
+          <a:xfrm flipV="1">
+            <a:off x="4734045" y="1588635"/>
+            <a:ext cx="0" cy="587405"/>
+          </a:xfrm>
+          <a:prstGeom prst="straightConnector1">
+            <a:avLst/>
+          </a:prstGeom>
+          <a:ln w="28575" cap="rnd">
+            <a:solidFill>
+              <a:schemeClr val="tx1"/>
+            </a:solidFill>
+            <a:round/>
+            <a:tailEnd type="triangle" w="lg" len="lg"/>
+          </a:ln>
+        </p:spPr>
+        <p:style>
+          <a:lnRef idx="1">
+            <a:schemeClr val="accent1"/>
+          </a:lnRef>
+          <a:fillRef idx="0">
+            <a:schemeClr val="accent1"/>
+          </a:fillRef>
+          <a:effectRef idx="0">
+            <a:schemeClr val="accent1"/>
+          </a:effectRef>
+          <a:fontRef idx="minor">
+            <a:schemeClr val="tx1"/>
+          </a:fontRef>
+        </p:style>
+      </p:cxnSp>
+      <p:sp>
+        <p:nvSpPr>
+          <p:cNvPr id="26" name="Freeform: Shape 25">
+            <a:extLst>
+              <a:ext uri="{FF2B5EF4-FFF2-40B4-BE49-F238E27FC236}">
+                <a16:creationId xmlns:a16="http://schemas.microsoft.com/office/drawing/2014/main" id="{353F8EEE-D372-75ED-D5A1-8C937F736E3A}"/>
+              </a:ext>
+            </a:extLst>
+          </p:cNvPr>
+          <p:cNvSpPr/>
+          <p:nvPr/>
+        </p:nvSpPr>
+        <p:spPr>
+          <a:xfrm>
+            <a:off x="4410075" y="4467225"/>
+            <a:ext cx="669131" cy="504825"/>
+          </a:xfrm>
+          <a:custGeom>
+            <a:avLst/>
+            <a:gdLst>
+              <a:gd name="csX0" fmla="*/ 0 w 669131"/>
+              <a:gd name="csY0" fmla="*/ 0 h 504825"/>
+              <a:gd name="csX1" fmla="*/ 435769 w 669131"/>
+              <a:gd name="csY1" fmla="*/ 121444 h 504825"/>
+              <a:gd name="csX2" fmla="*/ 669131 w 669131"/>
+              <a:gd name="csY2" fmla="*/ 504825 h 504825"/>
+            </a:gdLst>
+            <a:ahLst/>
+            <a:cxnLst>
+              <a:cxn ang="0">
+                <a:pos x="csX0" y="csY0"/>
+              </a:cxn>
+              <a:cxn ang="0">
+                <a:pos x="csX1" y="csY1"/>
+              </a:cxn>
+              <a:cxn ang="0">
+                <a:pos x="csX2" y="csY2"/>
+              </a:cxn>
+            </a:cxnLst>
+            <a:rect l="l" t="t" r="r" b="b"/>
+            <a:pathLst>
+              <a:path w="669131" h="504825">
+                <a:moveTo>
+                  <a:pt x="0" y="0"/>
+                </a:moveTo>
+                <a:lnTo>
+                  <a:pt x="435769" y="121444"/>
+                </a:lnTo>
+                <a:lnTo>
+                  <a:pt x="669131" y="504825"/>
+                </a:lnTo>
+              </a:path>
+            </a:pathLst>
+          </a:custGeom>
+          <a:noFill/>
+          <a:ln>
+            <a:solidFill>
+              <a:schemeClr val="tx1">
+                <a:lumMod val="75000"/>
+                <a:lumOff val="25000"/>
+              </a:schemeClr>
+            </a:solidFill>
+          </a:ln>
+        </p:spPr>
+        <p:style>
+          <a:lnRef idx="2">
+            <a:schemeClr val="accent1">
+              <a:shade val="15000"/>
+            </a:schemeClr>
+          </a:lnRef>
+          <a:fillRef idx="1">
+            <a:schemeClr val="accent1"/>
+          </a:fillRef>
+          <a:effectRef idx="0">
+            <a:schemeClr val="accent1"/>
+          </a:effectRef>
+          <a:fontRef idx="minor">
+            <a:schemeClr val="lt1"/>
+          </a:fontRef>
+        </p:style>
+        <p:txBody>
+          <a:bodyPr rtlCol="0" anchor="ctr"/>
+          <a:lstStyle/>
+          <a:p>
+            <a:pPr algn="ctr"/>
+            <a:endParaRPr lang="en-IN"/>
+          </a:p>
+        </p:txBody>
+      </p:sp>
+      <p:sp>
+        <p:nvSpPr>
+          <p:cNvPr id="28" name="Freeform: Shape 27">
+            <a:extLst>
+              <a:ext uri="{FF2B5EF4-FFF2-40B4-BE49-F238E27FC236}">
+                <a16:creationId xmlns:a16="http://schemas.microsoft.com/office/drawing/2014/main" id="{DC3A5374-1037-A398-8487-A344ED5AB1CF}"/>
+              </a:ext>
+            </a:extLst>
+          </p:cNvPr>
+          <p:cNvSpPr/>
+          <p:nvPr/>
+        </p:nvSpPr>
+        <p:spPr>
+          <a:xfrm>
+            <a:off x="4729163" y="4417219"/>
+            <a:ext cx="402431" cy="561975"/>
+          </a:xfrm>
+          <a:custGeom>
+            <a:avLst/>
+            <a:gdLst>
+              <a:gd name="csX0" fmla="*/ 402431 w 402431"/>
+              <a:gd name="csY0" fmla="*/ 561975 h 561975"/>
+              <a:gd name="csX1" fmla="*/ 402431 w 402431"/>
+              <a:gd name="csY1" fmla="*/ 107156 h 561975"/>
+              <a:gd name="csX2" fmla="*/ 0 w 402431"/>
+              <a:gd name="csY2" fmla="*/ 0 h 561975"/>
+            </a:gdLst>
+            <a:ahLst/>
+            <a:cxnLst>
+              <a:cxn ang="0">
+                <a:pos x="csX0" y="csY0"/>
+              </a:cxn>
+              <a:cxn ang="0">
+                <a:pos x="csX1" y="csY1"/>
+              </a:cxn>
+              <a:cxn ang="0">
+                <a:pos x="csX2" y="csY2"/>
+              </a:cxn>
+            </a:cxnLst>
+            <a:rect l="l" t="t" r="r" b="b"/>
+            <a:pathLst>
+              <a:path w="402431" h="561975">
+                <a:moveTo>
+                  <a:pt x="402431" y="561975"/>
+                </a:moveTo>
+                <a:lnTo>
+                  <a:pt x="402431" y="107156"/>
+                </a:lnTo>
+                <a:lnTo>
+                  <a:pt x="0" y="0"/>
+                </a:lnTo>
+              </a:path>
+            </a:pathLst>
+          </a:custGeom>
+          <a:noFill/>
+          <a:ln>
+            <a:solidFill>
+              <a:schemeClr val="tx1">
+                <a:lumMod val="75000"/>
+                <a:lumOff val="25000"/>
+              </a:schemeClr>
+            </a:solidFill>
+          </a:ln>
+        </p:spPr>
+        <p:style>
+          <a:lnRef idx="2">
+            <a:schemeClr val="accent1">
+              <a:shade val="15000"/>
+            </a:schemeClr>
+          </a:lnRef>
+          <a:fillRef idx="1">
+            <a:schemeClr val="accent1"/>
+          </a:fillRef>
+          <a:effectRef idx="0">
+            <a:schemeClr val="accent1"/>
+          </a:effectRef>
+          <a:fontRef idx="minor">
+            <a:schemeClr val="lt1"/>
+          </a:fontRef>
+        </p:style>
+        <p:txBody>
+          <a:bodyPr rtlCol="0" anchor="ctr"/>
+          <a:lstStyle/>
+          <a:p>
+            <a:pPr algn="ctr"/>
+            <a:endParaRPr lang="en-IN"/>
+          </a:p>
+        </p:txBody>
+      </p:sp>
+      <p:cxnSp>
+        <p:nvCxnSpPr>
+          <p:cNvPr id="24" name="Straight Arrow Connector 23">
+            <a:extLst>
+              <a:ext uri="{FF2B5EF4-FFF2-40B4-BE49-F238E27FC236}">
+                <a16:creationId xmlns:a16="http://schemas.microsoft.com/office/drawing/2014/main" id="{A27DC983-554D-5180-378C-A40DFEE09A59}"/>
+              </a:ext>
+            </a:extLst>
+          </p:cNvPr>
+          <p:cNvCxnSpPr>
+            <a:cxnSpLocks/>
+          </p:cNvCxnSpPr>
+          <p:nvPr/>
+        </p:nvCxnSpPr>
+        <p:spPr>
+          <a:xfrm>
+            <a:off x="4731212" y="4869767"/>
+            <a:ext cx="1117138" cy="318183"/>
+          </a:xfrm>
+          <a:prstGeom prst="straightConnector1">
+            <a:avLst/>
+          </a:prstGeom>
+          <a:ln w="28575" cap="rnd">
+            <a:solidFill>
+              <a:schemeClr val="tx1"/>
+            </a:solidFill>
+            <a:round/>
+            <a:tailEnd type="triangle" w="lg" len="lg"/>
+          </a:ln>
+        </p:spPr>
+        <p:style>
+          <a:lnRef idx="1">
+            <a:schemeClr val="accent1"/>
+          </a:lnRef>
+          <a:fillRef idx="0">
+            <a:schemeClr val="accent1"/>
+          </a:fillRef>
+          <a:effectRef idx="0">
+            <a:schemeClr val="accent1"/>
+          </a:effectRef>
+          <a:fontRef idx="minor">
+            <a:schemeClr val="tx1"/>
+          </a:fontRef>
+        </p:style>
+      </p:cxnSp>
+      <p:cxnSp>
+        <p:nvCxnSpPr>
+          <p:cNvPr id="20" name="Straight Arrow Connector 19">
+            <a:extLst>
+              <a:ext uri="{FF2B5EF4-FFF2-40B4-BE49-F238E27FC236}">
+                <a16:creationId xmlns:a16="http://schemas.microsoft.com/office/drawing/2014/main" id="{A66769A3-C059-501D-36F8-0D6C7BA5470F}"/>
+              </a:ext>
+            </a:extLst>
+          </p:cNvPr>
+          <p:cNvCxnSpPr/>
+          <p:nvPr/>
+        </p:nvCxnSpPr>
+        <p:spPr>
+          <a:xfrm flipV="1">
+            <a:off x="4732116" y="3402957"/>
+            <a:ext cx="0" cy="1469985"/>
+          </a:xfrm>
+          <a:prstGeom prst="straightConnector1">
+            <a:avLst/>
+          </a:prstGeom>
+          <a:ln w="28575" cap="rnd">
+            <a:solidFill>
+              <a:schemeClr val="tx1"/>
+            </a:solidFill>
+            <a:round/>
+            <a:tailEnd type="triangle" w="lg" len="lg"/>
+          </a:ln>
+        </p:spPr>
+        <p:style>
+          <a:lnRef idx="1">
+            <a:schemeClr val="accent1"/>
+          </a:lnRef>
+          <a:fillRef idx="0">
+            <a:schemeClr val="accent1"/>
+          </a:fillRef>
+          <a:effectRef idx="0">
+            <a:schemeClr val="accent1"/>
+          </a:effectRef>
+          <a:fontRef idx="minor">
+            <a:schemeClr val="tx1"/>
+          </a:fontRef>
+        </p:style>
+      </p:cxnSp>
+      <p:cxnSp>
+        <p:nvCxnSpPr>
+          <p:cNvPr id="17" name="Straight Arrow Connector 16">
+            <a:extLst>
+              <a:ext uri="{FF2B5EF4-FFF2-40B4-BE49-F238E27FC236}">
+                <a16:creationId xmlns:a16="http://schemas.microsoft.com/office/drawing/2014/main" id="{F06C8BEB-80AC-8FCC-730E-B751F1D7D9B5}"/>
+              </a:ext>
+            </a:extLst>
+          </p:cNvPr>
+          <p:cNvCxnSpPr>
+            <a:cxnSpLocks/>
+          </p:cNvCxnSpPr>
+          <p:nvPr/>
+        </p:nvCxnSpPr>
+        <p:spPr>
+          <a:xfrm flipH="1" flipV="1">
+            <a:off x="3275492" y="3066285"/>
+            <a:ext cx="1456624" cy="1806657"/>
+          </a:xfrm>
+          <a:prstGeom prst="straightConnector1">
+            <a:avLst/>
+          </a:prstGeom>
+          <a:ln w="28575" cap="rnd">
+            <a:solidFill>
+              <a:schemeClr val="tx1"/>
+            </a:solidFill>
+            <a:round/>
+            <a:tailEnd type="triangle" w="lg" len="lg"/>
+          </a:ln>
+        </p:spPr>
+        <p:style>
+          <a:lnRef idx="1">
+            <a:schemeClr val="accent1"/>
+          </a:lnRef>
+          <a:fillRef idx="0">
+            <a:schemeClr val="accent1"/>
+          </a:fillRef>
+          <a:effectRef idx="0">
+            <a:schemeClr val="accent1"/>
+          </a:effectRef>
+          <a:fontRef idx="minor">
+            <a:schemeClr val="tx1"/>
+          </a:fontRef>
+        </p:style>
+      </p:cxnSp>
+      <p:cxnSp>
+        <p:nvCxnSpPr>
+          <p:cNvPr id="35" name="Straight Arrow Connector 34">
+            <a:extLst>
+              <a:ext uri="{FF2B5EF4-FFF2-40B4-BE49-F238E27FC236}">
+                <a16:creationId xmlns:a16="http://schemas.microsoft.com/office/drawing/2014/main" id="{05681D85-41F8-D122-E556-962165D3A76E}"/>
+              </a:ext>
+            </a:extLst>
+          </p:cNvPr>
+          <p:cNvCxnSpPr>
+            <a:cxnSpLocks/>
+          </p:cNvCxnSpPr>
+          <p:nvPr/>
+        </p:nvCxnSpPr>
+        <p:spPr>
+          <a:xfrm>
+            <a:off x="3287544" y="3069460"/>
+            <a:ext cx="1117138" cy="318183"/>
+          </a:xfrm>
+          <a:prstGeom prst="straightConnector1">
+            <a:avLst/>
+          </a:prstGeom>
+          <a:ln w="28575" cap="rnd">
+            <a:solidFill>
+              <a:schemeClr val="tx1"/>
+            </a:solidFill>
+            <a:round/>
+            <a:tailEnd type="triangle" w="lg" len="lg"/>
+          </a:ln>
+        </p:spPr>
+        <p:style>
+          <a:lnRef idx="1">
+            <a:schemeClr val="accent1"/>
+          </a:lnRef>
+          <a:fillRef idx="0">
+            <a:schemeClr val="accent1"/>
+          </a:fillRef>
+          <a:effectRef idx="0">
+            <a:schemeClr val="accent1"/>
+          </a:effectRef>
+          <a:fontRef idx="minor">
+            <a:schemeClr val="tx1"/>
+          </a:fontRef>
+        </p:style>
+      </p:cxnSp>
+      <p:cxnSp>
+        <p:nvCxnSpPr>
+          <p:cNvPr id="46" name="Straight Arrow Connector 45">
+            <a:extLst>
+              <a:ext uri="{FF2B5EF4-FFF2-40B4-BE49-F238E27FC236}">
+                <a16:creationId xmlns:a16="http://schemas.microsoft.com/office/drawing/2014/main" id="{D8A33718-43F3-1AB0-5B28-BEF2FDD6F898}"/>
+              </a:ext>
+            </a:extLst>
+          </p:cNvPr>
+          <p:cNvCxnSpPr/>
+          <p:nvPr/>
+        </p:nvCxnSpPr>
+        <p:spPr>
+          <a:xfrm flipV="1">
+            <a:off x="3280222" y="1588635"/>
+            <a:ext cx="0" cy="1469985"/>
+          </a:xfrm>
+          <a:prstGeom prst="straightConnector1">
+            <a:avLst/>
+          </a:prstGeom>
+          <a:ln w="28575" cap="rnd">
+            <a:solidFill>
+              <a:schemeClr val="tx1"/>
+            </a:solidFill>
+            <a:round/>
+            <a:tailEnd type="triangle" w="lg" len="lg"/>
+          </a:ln>
+        </p:spPr>
+        <p:style>
+          <a:lnRef idx="1">
+            <a:schemeClr val="accent1"/>
+          </a:lnRef>
+          <a:fillRef idx="0">
+            <a:schemeClr val="accent1"/>
+          </a:fillRef>
+          <a:effectRef idx="0">
+            <a:schemeClr val="accent1"/>
+          </a:effectRef>
+          <a:fontRef idx="minor">
+            <a:schemeClr val="tx1"/>
+          </a:fontRef>
+        </p:style>
+      </p:cxnSp>
+      <p:cxnSp>
+        <p:nvCxnSpPr>
+          <p:cNvPr id="48" name="Straight Arrow Connector 47">
+            <a:extLst>
+              <a:ext uri="{FF2B5EF4-FFF2-40B4-BE49-F238E27FC236}">
+                <a16:creationId xmlns:a16="http://schemas.microsoft.com/office/drawing/2014/main" id="{B530EE79-8043-D11B-0882-A8DB7B881723}"/>
+              </a:ext>
+            </a:extLst>
+          </p:cNvPr>
+          <p:cNvCxnSpPr>
+            <a:cxnSpLocks/>
+          </p:cNvCxnSpPr>
+          <p:nvPr/>
+        </p:nvCxnSpPr>
+        <p:spPr>
+          <a:xfrm flipV="1">
+            <a:off x="3282619" y="2564608"/>
+            <a:ext cx="801225" cy="485803"/>
+          </a:xfrm>
+          <a:prstGeom prst="straightConnector1">
+            <a:avLst/>
+          </a:prstGeom>
+          <a:ln w="28575" cap="rnd">
+            <a:solidFill>
+              <a:schemeClr val="tx1"/>
+            </a:solidFill>
+            <a:round/>
+            <a:tailEnd type="triangle" w="lg" len="lg"/>
+          </a:ln>
+        </p:spPr>
+        <p:style>
+          <a:lnRef idx="1">
+            <a:schemeClr val="accent1"/>
+          </a:lnRef>
+          <a:fillRef idx="0">
+            <a:schemeClr val="accent1"/>
+          </a:fillRef>
+          <a:effectRef idx="0">
+            <a:schemeClr val="accent1"/>
+          </a:effectRef>
+          <a:fontRef idx="minor">
+            <a:schemeClr val="tx1"/>
+          </a:fontRef>
+        </p:style>
+      </p:cxnSp>
+      <p:sp>
+        <p:nvSpPr>
+          <p:cNvPr id="45" name="Oval 44">
+            <a:extLst>
+              <a:ext uri="{FF2B5EF4-FFF2-40B4-BE49-F238E27FC236}">
+                <a16:creationId xmlns:a16="http://schemas.microsoft.com/office/drawing/2014/main" id="{69049BF4-76C4-D375-8ADE-AF69D28A232E}"/>
+              </a:ext>
+            </a:extLst>
+          </p:cNvPr>
+          <p:cNvSpPr/>
+          <p:nvPr/>
+        </p:nvSpPr>
+        <p:spPr>
+          <a:xfrm>
+            <a:off x="3229422" y="3014170"/>
+            <a:ext cx="94706" cy="94706"/>
+          </a:xfrm>
+          <a:prstGeom prst="ellipse">
+            <a:avLst/>
+          </a:prstGeom>
+          <a:solidFill>
+            <a:schemeClr val="accent1">
+              <a:lumMod val="50000"/>
+            </a:schemeClr>
+          </a:solidFill>
+          <a:ln>
+            <a:noFill/>
+          </a:ln>
+        </p:spPr>
+        <p:style>
+          <a:lnRef idx="2">
+            <a:schemeClr val="accent1">
+              <a:shade val="50000"/>
+            </a:schemeClr>
+          </a:lnRef>
+          <a:fillRef idx="1">
+            <a:schemeClr val="accent1"/>
+          </a:fillRef>
+          <a:effectRef idx="0">
+            <a:schemeClr val="accent1"/>
+          </a:effectRef>
+          <a:fontRef idx="minor">
+            <a:schemeClr val="lt1"/>
+          </a:fontRef>
+        </p:style>
+        <p:txBody>
+          <a:bodyPr rtlCol="0" anchor="ctr"/>
+          <a:lstStyle/>
+          <a:p>
+            <a:pPr algn="ctr"/>
+            <a:endParaRPr lang="en-US"/>
+          </a:p>
+        </p:txBody>
+      </p:sp>
+      <mc:AlternateContent xmlns:mc="http://schemas.openxmlformats.org/markup-compatibility/2006">
+        <mc:Choice xmlns:a14="http://schemas.microsoft.com/office/drawing/2010/main" Requires="a14">
+          <p:sp>
+            <p:nvSpPr>
+              <p:cNvPr id="50" name="TextBox 49">
+                <a:extLst>
+                  <a:ext uri="{FF2B5EF4-FFF2-40B4-BE49-F238E27FC236}">
+                    <a16:creationId xmlns:a16="http://schemas.microsoft.com/office/drawing/2014/main" id="{88874F11-6EFE-3D01-CB75-990D9D573461}"/>
+                  </a:ext>
+                </a:extLst>
+              </p:cNvPr>
+              <p:cNvSpPr txBox="1"/>
+              <p:nvPr/>
+            </p:nvSpPr>
+            <p:spPr>
+              <a:xfrm>
+                <a:off x="4812956" y="3622939"/>
+                <a:ext cx="246862" cy="308611"/>
+              </a:xfrm>
+              <a:prstGeom prst="rect">
+                <a:avLst/>
+              </a:prstGeom>
+              <a:noFill/>
+            </p:spPr>
+            <p:txBody>
+              <a:bodyPr wrap="none" lIns="0" tIns="0" rIns="0" bIns="0" rtlCol="0">
+                <a:spAutoFit/>
+              </a:bodyPr>
+              <a:lstStyle/>
+              <a:p>
+                <a14:m>
+                  <m:oMathPara xmlns:m="http://schemas.openxmlformats.org/officeDocument/2006/math">
+                    <m:oMath>
+                      <m:acc>
+                        <m:accPr>
+                          <m:chr m:val="̅"/>
+                          <m:ctrlPr>
+                            <a:rPr lang="el-GR" sz="2000" b="1" i="0" smtClean="0">
+                              <a:latin typeface="Cambria Math" panose="02040503050406030204" pitchFamily="18" charset="0"/>
+                              <a:ea typeface="Cambria Math" panose="02040503050406030204" pitchFamily="18" charset="0"/>
+                            </a:rPr>
+                          </m:ctrlPr>
+                        </m:accPr>
+                        <m:e>
+                          <m:r>
+                            <a:rPr lang="el-GR" sz="2000" b="1" i="0" smtClean="0">
+                              <a:latin typeface="Cambria Math" panose="02040503050406030204" pitchFamily="18" charset="0"/>
+                              <a:ea typeface="Cambria Math" panose="02040503050406030204" pitchFamily="18" charset="0"/>
+                            </a:rPr>
+                            <m:t>𝛀</m:t>
+                          </m:r>
+                        </m:e>
+                      </m:acc>
+                    </m:oMath>
+                  </m:oMathPara>
+                </a14:m>
+                <a:endParaRPr lang="en-IN" sz="2000" dirty="0"/>
+              </a:p>
+            </p:txBody>
+          </p:sp>
+        </mc:Choice>
+        <mc:Fallback>
+          <p:sp>
+            <p:nvSpPr>
+              <p:cNvPr id="50" name="TextBox 49">
+                <a:extLst>
+                  <a:ext uri="{FF2B5EF4-FFF2-40B4-BE49-F238E27FC236}">
+                    <a16:creationId xmlns:a16="http://schemas.microsoft.com/office/drawing/2014/main" id="{88874F11-6EFE-3D01-CB75-990D9D573461}"/>
+                  </a:ext>
+                </a:extLst>
+              </p:cNvPr>
+              <p:cNvSpPr txBox="1">
+                <a:spLocks noRot="1" noChangeAspect="1" noMove="1" noResize="1" noEditPoints="1" noAdjustHandles="1" noChangeArrowheads="1" noChangeShapeType="1" noTextEdit="1"/>
+              </p:cNvSpPr>
+              <p:nvPr/>
+            </p:nvSpPr>
+            <p:spPr>
+              <a:xfrm>
+                <a:off x="4812956" y="3622939"/>
+                <a:ext cx="246862" cy="308611"/>
+              </a:xfrm>
+              <a:prstGeom prst="rect">
+                <a:avLst/>
+              </a:prstGeom>
+              <a:blipFill>
+                <a:blip r:embed="rId2"/>
+                <a:stretch>
+                  <a:fillRect l="-25000" r="-30000" b="-7843"/>
+                </a:stretch>
+              </a:blipFill>
+            </p:spPr>
+            <p:txBody>
+              <a:bodyPr/>
+              <a:lstStyle/>
+              <a:p>
+                <a:r>
+                  <a:rPr lang="en-IN">
+                    <a:noFill/>
+                  </a:rPr>
+                  <a:t> </a:t>
+                </a:r>
+              </a:p>
+            </p:txBody>
+          </p:sp>
+        </mc:Fallback>
+      </mc:AlternateContent>
+      <mc:AlternateContent xmlns:mc="http://schemas.openxmlformats.org/markup-compatibility/2006">
+        <mc:Choice xmlns:a14="http://schemas.microsoft.com/office/drawing/2010/main" Requires="a14">
+          <p:sp>
+            <p:nvSpPr>
+              <p:cNvPr id="52" name="TextBox 51">
+                <a:extLst>
+                  <a:ext uri="{FF2B5EF4-FFF2-40B4-BE49-F238E27FC236}">
+                    <a16:creationId xmlns:a16="http://schemas.microsoft.com/office/drawing/2014/main" id="{54B89449-3641-E503-C155-4314A3D95F25}"/>
+                  </a:ext>
+                </a:extLst>
+              </p:cNvPr>
+              <p:cNvSpPr txBox="1"/>
+              <p:nvPr/>
+            </p:nvSpPr>
+            <p:spPr>
+              <a:xfrm>
+                <a:off x="2924151" y="1488793"/>
+                <a:ext cx="246862" cy="308611"/>
+              </a:xfrm>
+              <a:prstGeom prst="rect">
+                <a:avLst/>
+              </a:prstGeom>
+              <a:noFill/>
+            </p:spPr>
+            <p:txBody>
+              <a:bodyPr wrap="none" lIns="0" tIns="0" rIns="0" bIns="0" rtlCol="0">
+                <a:spAutoFit/>
+              </a:bodyPr>
+              <a:lstStyle/>
+              <a:p>
+                <a:pPr/>
+                <a14:m>
+                  <m:oMathPara xmlns:m="http://schemas.openxmlformats.org/officeDocument/2006/math">
+                    <m:oMath>
+                      <m:acc>
+                        <m:accPr>
+                          <m:chr m:val="̅"/>
+                          <m:ctrlPr>
+                            <a:rPr lang="el-GR" sz="2000" b="1" i="0" smtClean="0">
+                              <a:latin typeface="Cambria Math" panose="02040503050406030204" pitchFamily="18" charset="0"/>
+                              <a:ea typeface="Cambria Math" panose="02040503050406030204" pitchFamily="18" charset="0"/>
+                            </a:rPr>
+                          </m:ctrlPr>
+                        </m:accPr>
+                        <m:e>
+                          <m:r>
+                            <a:rPr lang="el-GR" sz="2000" b="1" i="0" smtClean="0">
+                              <a:latin typeface="Cambria Math" panose="02040503050406030204" pitchFamily="18" charset="0"/>
+                              <a:ea typeface="Cambria Math" panose="02040503050406030204" pitchFamily="18" charset="0"/>
+                            </a:rPr>
+                            <m:t>𝛀</m:t>
+                          </m:r>
+                        </m:e>
+                      </m:acc>
+                    </m:oMath>
+                  </m:oMathPara>
+                </a14:m>
+                <a:endParaRPr lang="en-IN" sz="2000" dirty="0"/>
+              </a:p>
+            </p:txBody>
+          </p:sp>
+        </mc:Choice>
+        <mc:Fallback>
+          <p:sp>
+            <p:nvSpPr>
+              <p:cNvPr id="52" name="TextBox 51">
+                <a:extLst>
+                  <a:ext uri="{FF2B5EF4-FFF2-40B4-BE49-F238E27FC236}">
+                    <a16:creationId xmlns:a16="http://schemas.microsoft.com/office/drawing/2014/main" id="{54B89449-3641-E503-C155-4314A3D95F25}"/>
+                  </a:ext>
+                </a:extLst>
+              </p:cNvPr>
+              <p:cNvSpPr txBox="1">
+                <a:spLocks noRot="1" noChangeAspect="1" noMove="1" noResize="1" noEditPoints="1" noAdjustHandles="1" noChangeArrowheads="1" noChangeShapeType="1" noTextEdit="1"/>
+              </p:cNvSpPr>
+              <p:nvPr/>
+            </p:nvSpPr>
+            <p:spPr>
+              <a:xfrm>
+                <a:off x="2924151" y="1488793"/>
+                <a:ext cx="246862" cy="308611"/>
+              </a:xfrm>
+              <a:prstGeom prst="rect">
+                <a:avLst/>
+              </a:prstGeom>
+              <a:blipFill>
+                <a:blip r:embed="rId3"/>
+                <a:stretch>
+                  <a:fillRect l="-25000" r="-30000" b="-7843"/>
+                </a:stretch>
+              </a:blipFill>
+            </p:spPr>
+            <p:txBody>
+              <a:bodyPr/>
+              <a:lstStyle/>
+              <a:p>
+                <a:r>
+                  <a:rPr lang="en-IN">
+                    <a:noFill/>
+                  </a:rPr>
+                  <a:t> </a:t>
+                </a:r>
+              </a:p>
+            </p:txBody>
+          </p:sp>
+        </mc:Fallback>
+      </mc:AlternateContent>
+      <mc:AlternateContent xmlns:mc="http://schemas.openxmlformats.org/markup-compatibility/2006">
+        <mc:Choice xmlns:a14="http://schemas.microsoft.com/office/drawing/2010/main" Requires="a14">
+          <p:sp>
+            <p:nvSpPr>
+              <p:cNvPr id="54" name="TextBox 53">
+                <a:extLst>
+                  <a:ext uri="{FF2B5EF4-FFF2-40B4-BE49-F238E27FC236}">
+                    <a16:creationId xmlns:a16="http://schemas.microsoft.com/office/drawing/2014/main" id="{49F7DA76-3B2C-0820-D2B7-84272597D436}"/>
+                  </a:ext>
+                </a:extLst>
+              </p:cNvPr>
+              <p:cNvSpPr txBox="1"/>
+              <p:nvPr/>
+            </p:nvSpPr>
+            <p:spPr>
+              <a:xfrm>
+                <a:off x="4813911" y="1427833"/>
+                <a:ext cx="224420" cy="307777"/>
+              </a:xfrm>
+              <a:prstGeom prst="rect">
+                <a:avLst/>
+              </a:prstGeom>
+              <a:noFill/>
+            </p:spPr>
+            <p:txBody>
+              <a:bodyPr wrap="none" lIns="0" tIns="0" rIns="0" bIns="0" rtlCol="0">
+                <a:spAutoFit/>
+              </a:bodyPr>
+              <a:lstStyle/>
+              <a:p>
+                <a:pPr/>
+                <a14:m>
+                  <m:oMathPara xmlns:m="http://schemas.openxmlformats.org/officeDocument/2006/math">
+                    <m:oMath>
+                      <m:acc>
+                        <m:accPr>
+                          <m:chr m:val="̂"/>
+                          <m:ctrlPr>
+                            <a:rPr lang="en-US" sz="2000" b="1" i="1" smtClean="0">
+                              <a:latin typeface="Cambria Math" panose="02040503050406030204" pitchFamily="18" charset="0"/>
+                              <a:ea typeface="Cambria Math" panose="02040503050406030204" pitchFamily="18" charset="0"/>
+                            </a:rPr>
+                          </m:ctrlPr>
+                        </m:accPr>
+                        <m:e>
+                          <m:r>
+                            <a:rPr lang="en-US" sz="2000" b="1" i="1" smtClean="0">
+                              <a:latin typeface="Cambria Math" panose="02040503050406030204" pitchFamily="18" charset="0"/>
+                              <a:ea typeface="Cambria Math" panose="02040503050406030204" pitchFamily="18" charset="0"/>
+                            </a:rPr>
+                            <m:t>𝒏</m:t>
+                          </m:r>
+                        </m:e>
+                      </m:acc>
+                    </m:oMath>
+                  </m:oMathPara>
+                </a14:m>
+                <a:endParaRPr lang="en-IN" sz="2000" dirty="0"/>
+              </a:p>
+            </p:txBody>
+          </p:sp>
+        </mc:Choice>
+        <mc:Fallback>
+          <p:sp>
+            <p:nvSpPr>
+              <p:cNvPr id="54" name="TextBox 53">
+                <a:extLst>
+                  <a:ext uri="{FF2B5EF4-FFF2-40B4-BE49-F238E27FC236}">
+                    <a16:creationId xmlns:a16="http://schemas.microsoft.com/office/drawing/2014/main" id="{49F7DA76-3B2C-0820-D2B7-84272597D436}"/>
+                  </a:ext>
+                </a:extLst>
+              </p:cNvPr>
+              <p:cNvSpPr txBox="1">
+                <a:spLocks noRot="1" noChangeAspect="1" noMove="1" noResize="1" noEditPoints="1" noAdjustHandles="1" noChangeArrowheads="1" noChangeShapeType="1" noTextEdit="1"/>
+              </p:cNvSpPr>
+              <p:nvPr/>
+            </p:nvSpPr>
+            <p:spPr>
+              <a:xfrm>
+                <a:off x="4813911" y="1427833"/>
+                <a:ext cx="224420" cy="307777"/>
+              </a:xfrm>
+              <a:prstGeom prst="rect">
+                <a:avLst/>
+              </a:prstGeom>
+              <a:blipFill>
+                <a:blip r:embed="rId4"/>
+                <a:stretch>
+                  <a:fillRect l="-30556" t="-23529" r="-63889"/>
+                </a:stretch>
+              </a:blipFill>
+            </p:spPr>
+            <p:txBody>
+              <a:bodyPr/>
+              <a:lstStyle/>
+              <a:p>
+                <a:r>
+                  <a:rPr lang="en-IN">
+                    <a:noFill/>
+                  </a:rPr>
+                  <a:t> </a:t>
+                </a:r>
+              </a:p>
+            </p:txBody>
+          </p:sp>
+        </mc:Fallback>
+      </mc:AlternateContent>
+      <mc:AlternateContent xmlns:mc="http://schemas.openxmlformats.org/markup-compatibility/2006">
+        <mc:Choice xmlns:a14="http://schemas.microsoft.com/office/drawing/2010/main" Requires="a14">
+          <p:sp>
+            <p:nvSpPr>
+              <p:cNvPr id="56" name="TextBox 55">
+                <a:extLst>
+                  <a:ext uri="{FF2B5EF4-FFF2-40B4-BE49-F238E27FC236}">
+                    <a16:creationId xmlns:a16="http://schemas.microsoft.com/office/drawing/2014/main" id="{8D80D33F-E391-1A7A-5F3E-A76543434E33}"/>
+                  </a:ext>
+                </a:extLst>
+              </p:cNvPr>
+              <p:cNvSpPr txBox="1"/>
+              <p:nvPr/>
+            </p:nvSpPr>
+            <p:spPr>
+              <a:xfrm>
+                <a:off x="3668267" y="3856524"/>
+                <a:ext cx="195566" cy="307777"/>
+              </a:xfrm>
+              <a:prstGeom prst="rect">
+                <a:avLst/>
+              </a:prstGeom>
+              <a:noFill/>
+            </p:spPr>
+            <p:txBody>
+              <a:bodyPr wrap="none" lIns="0" tIns="0" rIns="0" bIns="0" rtlCol="0">
+                <a:spAutoFit/>
+              </a:bodyPr>
+              <a:lstStyle/>
+              <a:p>
+                <a:pPr/>
+                <a14:m>
+                  <m:oMathPara xmlns:m="http://schemas.openxmlformats.org/officeDocument/2006/math">
+                    <m:oMath>
+                      <m:acc>
+                        <m:accPr>
+                          <m:chr m:val="̅"/>
+                          <m:ctrlPr>
+                            <a:rPr lang="en-US" sz="2000" b="1" i="1" smtClean="0">
+                              <a:latin typeface="Cambria Math" panose="02040503050406030204" pitchFamily="18" charset="0"/>
+                              <a:ea typeface="Cambria Math" panose="02040503050406030204" pitchFamily="18" charset="0"/>
+                            </a:rPr>
+                          </m:ctrlPr>
+                        </m:accPr>
+                        <m:e>
+                          <m:r>
+                            <a:rPr lang="en-US" sz="2000" b="1" i="1" smtClean="0">
+                              <a:latin typeface="Cambria Math" panose="02040503050406030204" pitchFamily="18" charset="0"/>
+                              <a:ea typeface="Cambria Math" panose="02040503050406030204" pitchFamily="18" charset="0"/>
+                            </a:rPr>
+                            <m:t>𝒓</m:t>
+                          </m:r>
+                        </m:e>
+                      </m:acc>
+                    </m:oMath>
+                  </m:oMathPara>
+                </a14:m>
+                <a:endParaRPr lang="en-IN" sz="2000" dirty="0"/>
+              </a:p>
+            </p:txBody>
+          </p:sp>
+        </mc:Choice>
+        <mc:Fallback>
+          <p:sp>
+            <p:nvSpPr>
+              <p:cNvPr id="56" name="TextBox 55">
+                <a:extLst>
+                  <a:ext uri="{FF2B5EF4-FFF2-40B4-BE49-F238E27FC236}">
+                    <a16:creationId xmlns:a16="http://schemas.microsoft.com/office/drawing/2014/main" id="{8D80D33F-E391-1A7A-5F3E-A76543434E33}"/>
+                  </a:ext>
+                </a:extLst>
+              </p:cNvPr>
+              <p:cNvSpPr txBox="1">
+                <a:spLocks noRot="1" noChangeAspect="1" noMove="1" noResize="1" noEditPoints="1" noAdjustHandles="1" noChangeArrowheads="1" noChangeShapeType="1" noTextEdit="1"/>
+              </p:cNvSpPr>
+              <p:nvPr/>
+            </p:nvSpPr>
+            <p:spPr>
+              <a:xfrm>
+                <a:off x="3668267" y="3856524"/>
+                <a:ext cx="195566" cy="307777"/>
+              </a:xfrm>
+              <a:prstGeom prst="rect">
+                <a:avLst/>
+              </a:prstGeom>
+              <a:blipFill>
+                <a:blip r:embed="rId5"/>
+                <a:stretch>
+                  <a:fillRect l="-18750" r="-34375"/>
+                </a:stretch>
+              </a:blipFill>
+            </p:spPr>
+            <p:txBody>
+              <a:bodyPr/>
+              <a:lstStyle/>
+              <a:p>
+                <a:r>
+                  <a:rPr lang="en-IN">
+                    <a:noFill/>
+                  </a:rPr>
+                  <a:t> </a:t>
+                </a:r>
+              </a:p>
+            </p:txBody>
+          </p:sp>
+        </mc:Fallback>
+      </mc:AlternateContent>
+      <mc:AlternateContent xmlns:mc="http://schemas.openxmlformats.org/markup-compatibility/2006">
+        <mc:Choice xmlns:a14="http://schemas.microsoft.com/office/drawing/2010/main" Requires="a14">
+          <p:sp>
+            <p:nvSpPr>
+              <p:cNvPr id="60" name="TextBox 59">
+                <a:extLst>
+                  <a:ext uri="{FF2B5EF4-FFF2-40B4-BE49-F238E27FC236}">
+                    <a16:creationId xmlns:a16="http://schemas.microsoft.com/office/drawing/2014/main" id="{8E0C1E1B-1B4B-2069-DD35-37DA57E7BE98}"/>
+                  </a:ext>
+                </a:extLst>
+              </p:cNvPr>
+              <p:cNvSpPr txBox="1"/>
+              <p:nvPr/>
+            </p:nvSpPr>
+            <p:spPr>
+              <a:xfrm rot="846057">
+                <a:off x="3706528" y="3324110"/>
+                <a:ext cx="681469" cy="308611"/>
+              </a:xfrm>
+              <a:prstGeom prst="rect">
+                <a:avLst/>
+              </a:prstGeom>
+              <a:noFill/>
+            </p:spPr>
+            <p:txBody>
+              <a:bodyPr wrap="none" lIns="0" tIns="0" rIns="0" bIns="0" rtlCol="0">
+                <a:spAutoFit/>
+              </a:bodyPr>
+              <a:lstStyle/>
+              <a:p>
+                <a:pPr/>
+                <a14:m>
+                  <m:oMathPara xmlns:m="http://schemas.openxmlformats.org/officeDocument/2006/math">
+                    <m:oMath>
+                      <m:acc>
+                        <m:accPr>
+                          <m:chr m:val="̅"/>
+                          <m:ctrlPr>
+                            <a:rPr lang="el-GR" sz="2000" b="1" i="0" smtClean="0">
+                              <a:latin typeface="Cambria Math" panose="02040503050406030204" pitchFamily="18" charset="0"/>
+                              <a:ea typeface="Cambria Math" panose="02040503050406030204" pitchFamily="18" charset="0"/>
+                            </a:rPr>
+                          </m:ctrlPr>
+                        </m:accPr>
+                        <m:e>
+                          <m:r>
+                            <a:rPr lang="el-GR" sz="2000" b="1" i="0" smtClean="0">
+                              <a:latin typeface="Cambria Math" panose="02040503050406030204" pitchFamily="18" charset="0"/>
+                              <a:ea typeface="Cambria Math" panose="02040503050406030204" pitchFamily="18" charset="0"/>
+                            </a:rPr>
+                            <m:t>𝛀</m:t>
+                          </m:r>
+                        </m:e>
+                      </m:acc>
+                      <m:r>
+                        <a:rPr lang="el-GR" sz="2000" b="1" i="1" smtClean="0">
+                          <a:latin typeface="Cambria Math" panose="02040503050406030204" pitchFamily="18" charset="0"/>
+                          <a:ea typeface="Cambria Math" panose="02040503050406030204" pitchFamily="18" charset="0"/>
+                        </a:rPr>
+                        <m:t>×</m:t>
+                      </m:r>
+                      <m:acc>
+                        <m:accPr>
+                          <m:chr m:val="̅"/>
+                          <m:ctrlPr>
+                            <a:rPr lang="en-US" sz="2000" b="1" i="1" smtClean="0">
+                              <a:latin typeface="Cambria Math" panose="02040503050406030204" pitchFamily="18" charset="0"/>
+                              <a:ea typeface="Cambria Math" panose="02040503050406030204" pitchFamily="18" charset="0"/>
+                            </a:rPr>
+                          </m:ctrlPr>
+                        </m:accPr>
+                        <m:e>
+                          <m:r>
+                            <a:rPr lang="en-US" sz="2000" b="1" i="1" smtClean="0">
+                              <a:latin typeface="Cambria Math" panose="02040503050406030204" pitchFamily="18" charset="0"/>
+                              <a:ea typeface="Cambria Math" panose="02040503050406030204" pitchFamily="18" charset="0"/>
+                            </a:rPr>
+                            <m:t>𝒓</m:t>
+                          </m:r>
+                        </m:e>
+                      </m:acc>
+                    </m:oMath>
+                  </m:oMathPara>
+                </a14:m>
+                <a:endParaRPr lang="en-IN" sz="2000" dirty="0"/>
+              </a:p>
+            </p:txBody>
+          </p:sp>
+        </mc:Choice>
+        <mc:Fallback>
+          <p:sp>
+            <p:nvSpPr>
+              <p:cNvPr id="60" name="TextBox 59">
+                <a:extLst>
+                  <a:ext uri="{FF2B5EF4-FFF2-40B4-BE49-F238E27FC236}">
+                    <a16:creationId xmlns:a16="http://schemas.microsoft.com/office/drawing/2014/main" id="{8E0C1E1B-1B4B-2069-DD35-37DA57E7BE98}"/>
+                  </a:ext>
+                </a:extLst>
+              </p:cNvPr>
+              <p:cNvSpPr txBox="1">
+                <a:spLocks noRot="1" noChangeAspect="1" noMove="1" noResize="1" noEditPoints="1" noAdjustHandles="1" noChangeArrowheads="1" noChangeShapeType="1" noTextEdit="1"/>
+              </p:cNvSpPr>
+              <p:nvPr/>
+            </p:nvSpPr>
+            <p:spPr>
+              <a:xfrm rot="846057">
+                <a:off x="3706528" y="3324110"/>
+                <a:ext cx="681469" cy="308611"/>
+              </a:xfrm>
+              <a:prstGeom prst="rect">
+                <a:avLst/>
+              </a:prstGeom>
+              <a:blipFill>
+                <a:blip r:embed="rId6"/>
+                <a:stretch>
+                  <a:fillRect l="-8197" r="-38525" b="-2597"/>
+                </a:stretch>
+              </a:blipFill>
+            </p:spPr>
+            <p:txBody>
+              <a:bodyPr/>
+              <a:lstStyle/>
+              <a:p>
+                <a:r>
+                  <a:rPr lang="en-IN">
+                    <a:noFill/>
+                  </a:rPr>
+                  <a:t> </a:t>
+                </a:r>
+              </a:p>
+            </p:txBody>
+          </p:sp>
+        </mc:Fallback>
+      </mc:AlternateContent>
+      <mc:AlternateContent xmlns:mc="http://schemas.openxmlformats.org/markup-compatibility/2006">
+        <mc:Choice xmlns:a14="http://schemas.microsoft.com/office/drawing/2010/main" Requires="a14">
+          <p:sp>
+            <p:nvSpPr>
+              <p:cNvPr id="62" name="TextBox 61">
+                <a:extLst>
+                  <a:ext uri="{FF2B5EF4-FFF2-40B4-BE49-F238E27FC236}">
+                    <a16:creationId xmlns:a16="http://schemas.microsoft.com/office/drawing/2014/main" id="{72D0485D-0D4A-675A-909F-274AD52EB57B}"/>
+                  </a:ext>
+                </a:extLst>
+              </p:cNvPr>
+              <p:cNvSpPr txBox="1"/>
+              <p:nvPr/>
+            </p:nvSpPr>
+            <p:spPr>
+              <a:xfrm rot="19732310">
+                <a:off x="3315711" y="2197027"/>
+                <a:ext cx="1380250" cy="308611"/>
+              </a:xfrm>
+              <a:prstGeom prst="rect">
+                <a:avLst/>
+              </a:prstGeom>
+              <a:noFill/>
+            </p:spPr>
+            <p:txBody>
+              <a:bodyPr wrap="none" lIns="0" tIns="0" rIns="0" bIns="0" rtlCol="0">
+                <a:spAutoFit/>
+              </a:bodyPr>
+              <a:lstStyle/>
+              <a:p>
+                <a:pPr/>
+                <a14:m>
+                  <m:oMathPara xmlns:m="http://schemas.openxmlformats.org/officeDocument/2006/math">
+                    <m:oMath>
+                      <m:acc>
+                        <m:accPr>
+                          <m:chr m:val="̅"/>
+                          <m:ctrlPr>
+                            <a:rPr lang="el-GR" sz="2000" b="1">
+                              <a:latin typeface="Cambria Math" panose="02040503050406030204" pitchFamily="18" charset="0"/>
+                              <a:ea typeface="Cambria Math" panose="02040503050406030204" pitchFamily="18" charset="0"/>
+                            </a:rPr>
+                          </m:ctrlPr>
+                        </m:accPr>
+                        <m:e>
+                          <m:r>
+                            <a:rPr lang="el-GR" sz="2000" b="1">
+                              <a:latin typeface="Cambria Math" panose="02040503050406030204" pitchFamily="18" charset="0"/>
+                              <a:ea typeface="Cambria Math" panose="02040503050406030204" pitchFamily="18" charset="0"/>
+                            </a:rPr>
+                            <m:t>𝛀</m:t>
+                          </m:r>
+                        </m:e>
+                      </m:acc>
+                      <m:r>
+                        <a:rPr lang="el-GR" sz="2000" b="1" i="1" smtClean="0">
+                          <a:latin typeface="Cambria Math" panose="02040503050406030204" pitchFamily="18" charset="0"/>
+                          <a:ea typeface="Cambria Math" panose="02040503050406030204" pitchFamily="18" charset="0"/>
+                        </a:rPr>
+                        <m:t>×</m:t>
+                      </m:r>
+                      <m:d>
+                        <m:dPr>
+                          <m:ctrlPr>
+                            <a:rPr lang="en-IN" sz="2000" b="1" i="1">
+                              <a:latin typeface="Cambria Math" panose="02040503050406030204" pitchFamily="18" charset="0"/>
+                              <a:ea typeface="Cambria Math" panose="02040503050406030204" pitchFamily="18" charset="0"/>
+                            </a:rPr>
+                          </m:ctrlPr>
+                        </m:dPr>
+                        <m:e>
+                          <m:acc>
+                            <m:accPr>
+                              <m:chr m:val="̅"/>
+                              <m:ctrlPr>
+                                <a:rPr lang="en-IN" sz="2000" b="1">
+                                  <a:latin typeface="Cambria Math" panose="02040503050406030204" pitchFamily="18" charset="0"/>
+                                  <a:ea typeface="Cambria Math" panose="02040503050406030204" pitchFamily="18" charset="0"/>
+                                </a:rPr>
+                              </m:ctrlPr>
+                            </m:accPr>
+                            <m:e>
+                              <m:r>
+                                <a:rPr lang="en-IN" sz="2000" b="1">
+                                  <a:latin typeface="Cambria Math" panose="02040503050406030204" pitchFamily="18" charset="0"/>
+                                  <a:ea typeface="Cambria Math" panose="02040503050406030204" pitchFamily="18" charset="0"/>
+                                </a:rPr>
+                                <m:t>𝛀</m:t>
+                              </m:r>
+                            </m:e>
+                          </m:acc>
+                          <m:r>
+                            <a:rPr lang="en-IN" sz="2000" b="1" i="1">
+                              <a:latin typeface="Cambria Math" panose="02040503050406030204" pitchFamily="18" charset="0"/>
+                              <a:ea typeface="Cambria Math" panose="02040503050406030204" pitchFamily="18" charset="0"/>
+                            </a:rPr>
+                            <m:t>×</m:t>
+                          </m:r>
+                          <m:acc>
+                            <m:accPr>
+                              <m:chr m:val="̅"/>
+                              <m:ctrlPr>
+                                <a:rPr lang="en-IN" sz="2000" b="1" i="1">
+                                  <a:latin typeface="Cambria Math" panose="02040503050406030204" pitchFamily="18" charset="0"/>
+                                  <a:ea typeface="Cambria Math" panose="02040503050406030204" pitchFamily="18" charset="0"/>
+                                </a:rPr>
+                              </m:ctrlPr>
+                            </m:accPr>
+                            <m:e>
+                              <m:r>
+                                <a:rPr lang="en-IN" sz="2000" b="1" i="1">
+                                  <a:latin typeface="Cambria Math" panose="02040503050406030204" pitchFamily="18" charset="0"/>
+                                  <a:ea typeface="Cambria Math" panose="02040503050406030204" pitchFamily="18" charset="0"/>
+                                </a:rPr>
+                                <m:t>𝒓</m:t>
+                              </m:r>
+                            </m:e>
+                          </m:acc>
+                        </m:e>
+                      </m:d>
+                    </m:oMath>
+                  </m:oMathPara>
+                </a14:m>
+                <a:endParaRPr lang="en-IN" sz="2000" dirty="0"/>
+              </a:p>
+            </p:txBody>
+          </p:sp>
+        </mc:Choice>
+        <mc:Fallback>
+          <p:sp>
+            <p:nvSpPr>
+              <p:cNvPr id="62" name="TextBox 61">
+                <a:extLst>
+                  <a:ext uri="{FF2B5EF4-FFF2-40B4-BE49-F238E27FC236}">
+                    <a16:creationId xmlns:a16="http://schemas.microsoft.com/office/drawing/2014/main" id="{72D0485D-0D4A-675A-909F-274AD52EB57B}"/>
+                  </a:ext>
+                </a:extLst>
+              </p:cNvPr>
+              <p:cNvSpPr txBox="1">
+                <a:spLocks noRot="1" noChangeAspect="1" noMove="1" noResize="1" noEditPoints="1" noAdjustHandles="1" noChangeArrowheads="1" noChangeShapeType="1" noTextEdit="1"/>
+              </p:cNvSpPr>
+              <p:nvPr/>
+            </p:nvSpPr>
+            <p:spPr>
+              <a:xfrm rot="19732310">
+                <a:off x="3315711" y="2197027"/>
+                <a:ext cx="1380250" cy="308611"/>
+              </a:xfrm>
+              <a:prstGeom prst="rect">
+                <a:avLst/>
+              </a:prstGeom>
+              <a:blipFill>
+                <a:blip r:embed="rId7"/>
+                <a:stretch>
+                  <a:fillRect l="-2262" t="-6211" r="-5882" b="-4348"/>
+                </a:stretch>
+              </a:blipFill>
+            </p:spPr>
+            <p:txBody>
+              <a:bodyPr/>
+              <a:lstStyle/>
+              <a:p>
+                <a:r>
+                  <a:rPr lang="en-IN">
+                    <a:noFill/>
+                  </a:rPr>
+                  <a:t> </a:t>
+                </a:r>
+              </a:p>
+            </p:txBody>
+          </p:sp>
+        </mc:Fallback>
+      </mc:AlternateContent>
+      <mc:AlternateContent xmlns:mc="http://schemas.openxmlformats.org/markup-compatibility/2006">
+        <mc:Choice xmlns:a14="http://schemas.microsoft.com/office/drawing/2010/main" Requires="a14">
+          <p:sp>
+            <p:nvSpPr>
+              <p:cNvPr id="64" name="TextBox 63">
+                <a:extLst>
+                  <a:ext uri="{FF2B5EF4-FFF2-40B4-BE49-F238E27FC236}">
+                    <a16:creationId xmlns:a16="http://schemas.microsoft.com/office/drawing/2014/main" id="{214F960B-089C-CF1F-B392-E41E2766AB2E}"/>
+                  </a:ext>
+                </a:extLst>
+              </p:cNvPr>
+              <p:cNvSpPr txBox="1"/>
+              <p:nvPr/>
+            </p:nvSpPr>
+            <p:spPr>
+              <a:xfrm rot="846057">
+                <a:off x="5167494" y="5130082"/>
+                <a:ext cx="681469" cy="308611"/>
+              </a:xfrm>
+              <a:prstGeom prst="rect">
+                <a:avLst/>
+              </a:prstGeom>
+              <a:noFill/>
+            </p:spPr>
+            <p:txBody>
+              <a:bodyPr wrap="none" lIns="0" tIns="0" rIns="0" bIns="0" rtlCol="0">
+                <a:spAutoFit/>
+              </a:bodyPr>
+              <a:lstStyle/>
+              <a:p>
+                <a:pPr/>
+                <a14:m>
+                  <m:oMathPara xmlns:m="http://schemas.openxmlformats.org/officeDocument/2006/math">
+                    <m:oMath>
+                      <m:acc>
+                        <m:accPr>
+                          <m:chr m:val="̅"/>
+                          <m:ctrlPr>
+                            <a:rPr lang="el-GR" sz="2000" b="1" i="0" smtClean="0">
+                              <a:latin typeface="Cambria Math" panose="02040503050406030204" pitchFamily="18" charset="0"/>
+                              <a:ea typeface="Cambria Math" panose="02040503050406030204" pitchFamily="18" charset="0"/>
+                            </a:rPr>
+                          </m:ctrlPr>
+                        </m:accPr>
+                        <m:e>
+                          <m:r>
+                            <a:rPr lang="el-GR" sz="2000" b="1" i="0" smtClean="0">
+                              <a:latin typeface="Cambria Math" panose="02040503050406030204" pitchFamily="18" charset="0"/>
+                              <a:ea typeface="Cambria Math" panose="02040503050406030204" pitchFamily="18" charset="0"/>
+                            </a:rPr>
+                            <m:t>𝛀</m:t>
+                          </m:r>
+                        </m:e>
+                      </m:acc>
+                      <m:r>
+                        <a:rPr lang="el-GR" sz="2000" b="1" i="1" smtClean="0">
+                          <a:latin typeface="Cambria Math" panose="02040503050406030204" pitchFamily="18" charset="0"/>
+                          <a:ea typeface="Cambria Math" panose="02040503050406030204" pitchFamily="18" charset="0"/>
+                        </a:rPr>
+                        <m:t>×</m:t>
+                      </m:r>
+                      <m:acc>
+                        <m:accPr>
+                          <m:chr m:val="̅"/>
+                          <m:ctrlPr>
+                            <a:rPr lang="en-US" sz="2000" b="1" i="1" smtClean="0">
+                              <a:latin typeface="Cambria Math" panose="02040503050406030204" pitchFamily="18" charset="0"/>
+                              <a:ea typeface="Cambria Math" panose="02040503050406030204" pitchFamily="18" charset="0"/>
+                            </a:rPr>
+                          </m:ctrlPr>
+                        </m:accPr>
+                        <m:e>
+                          <m:r>
+                            <a:rPr lang="en-US" sz="2000" b="1" i="1" smtClean="0">
+                              <a:latin typeface="Cambria Math" panose="02040503050406030204" pitchFamily="18" charset="0"/>
+                              <a:ea typeface="Cambria Math" panose="02040503050406030204" pitchFamily="18" charset="0"/>
+                            </a:rPr>
+                            <m:t>𝒓</m:t>
+                          </m:r>
+                        </m:e>
+                      </m:acc>
+                    </m:oMath>
+                  </m:oMathPara>
+                </a14:m>
+                <a:endParaRPr lang="en-IN" sz="2000" dirty="0"/>
+              </a:p>
+            </p:txBody>
+          </p:sp>
+        </mc:Choice>
+        <mc:Fallback>
+          <p:sp>
+            <p:nvSpPr>
+              <p:cNvPr id="64" name="TextBox 63">
+                <a:extLst>
+                  <a:ext uri="{FF2B5EF4-FFF2-40B4-BE49-F238E27FC236}">
+                    <a16:creationId xmlns:a16="http://schemas.microsoft.com/office/drawing/2014/main" id="{214F960B-089C-CF1F-B392-E41E2766AB2E}"/>
+                  </a:ext>
+                </a:extLst>
+              </p:cNvPr>
+              <p:cNvSpPr txBox="1">
+                <a:spLocks noRot="1" noChangeAspect="1" noMove="1" noResize="1" noEditPoints="1" noAdjustHandles="1" noChangeArrowheads="1" noChangeShapeType="1" noTextEdit="1"/>
+              </p:cNvSpPr>
+              <p:nvPr/>
+            </p:nvSpPr>
+            <p:spPr>
+              <a:xfrm rot="846057">
+                <a:off x="5167494" y="5130082"/>
+                <a:ext cx="681469" cy="308611"/>
+              </a:xfrm>
+              <a:prstGeom prst="rect">
+                <a:avLst/>
+              </a:prstGeom>
+              <a:blipFill>
+                <a:blip r:embed="rId8"/>
+                <a:stretch>
+                  <a:fillRect l="-8264" r="-38843" b="-1282"/>
+                </a:stretch>
+              </a:blipFill>
+            </p:spPr>
+            <p:txBody>
+              <a:bodyPr/>
+              <a:lstStyle/>
+              <a:p>
+                <a:r>
+                  <a:rPr lang="en-IN">
+                    <a:noFill/>
+                  </a:rPr>
+                  <a:t> </a:t>
+                </a:r>
+              </a:p>
+            </p:txBody>
+          </p:sp>
+        </mc:Fallback>
+      </mc:AlternateContent>
+    </p:spTree>
+    <p:extLst>
+      <p:ext uri="{BB962C8B-B14F-4D97-AF65-F5344CB8AC3E}">
+        <p14:creationId xmlns:p14="http://schemas.microsoft.com/office/powerpoint/2010/main" val="1893198802"/>
+      </p:ext>
+    </p:extLst>
+  </p:cSld>
+  <p:clrMapOvr>
+    <a:masterClrMapping/>
+  </p:clrMapOvr>
+</p:sld>
+</file>
+
+<file path=ppt/slides/slide7.xml><?xml version="1.0" encoding="utf-8"?>
+<p:sld xmlns:a="http://schemas.openxmlformats.org/drawingml/2006/main" xmlns:r="http://schemas.openxmlformats.org/officeDocument/2006/relationships" xmlns:p="http://schemas.openxmlformats.org/presentationml/2006/main">
+  <p:cSld>
+    <p:spTree>
+      <p:nvGrpSpPr>
+        <p:cNvPr id="1" name=""/>
+        <p:cNvGrpSpPr/>
+        <p:nvPr/>
+      </p:nvGrpSpPr>
+      <p:grpSpPr>
+        <a:xfrm>
+          <a:off x="0" y="0"/>
+          <a:ext cx="0" cy="0"/>
+          <a:chOff x="0" y="0"/>
+          <a:chExt cx="0" cy="0"/>
+        </a:xfrm>
+      </p:grpSpPr>
+      <p:cxnSp>
+        <p:nvCxnSpPr>
+          <p:cNvPr id="8" name="Straight Connector 7">
+            <a:extLst>
+              <a:ext uri="{FF2B5EF4-FFF2-40B4-BE49-F238E27FC236}">
+                <a16:creationId xmlns:a16="http://schemas.microsoft.com/office/drawing/2014/main" id="{CD8D949B-BD1E-58F7-E3BE-A83A505B97F1}"/>
+              </a:ext>
+            </a:extLst>
+          </p:cNvPr>
+          <p:cNvCxnSpPr>
+            <a:cxnSpLocks/>
+            <a:stCxn id="13" idx="4"/>
+          </p:cNvCxnSpPr>
+          <p:nvPr/>
+        </p:nvCxnSpPr>
+        <p:spPr>
+          <a:xfrm>
+            <a:off x="6096000" y="1616510"/>
+            <a:ext cx="0" cy="3737089"/>
+          </a:xfrm>
+          <a:prstGeom prst="line">
+            <a:avLst/>
+          </a:prstGeom>
+          <a:ln w="9525">
+            <a:solidFill>
+              <a:srgbClr val="08088E"/>
+            </a:solidFill>
+          </a:ln>
+        </p:spPr>
+        <p:style>
+          <a:lnRef idx="1">
+            <a:schemeClr val="accent1"/>
+          </a:lnRef>
+          <a:fillRef idx="0">
+            <a:schemeClr val="accent1"/>
+          </a:fillRef>
+          <a:effectRef idx="0">
+            <a:schemeClr val="accent1"/>
+          </a:effectRef>
+          <a:fontRef idx="minor">
+            <a:schemeClr val="tx1"/>
+          </a:fontRef>
+        </p:style>
+      </p:cxnSp>
+      <p:cxnSp>
+        <p:nvCxnSpPr>
+          <p:cNvPr id="38" name="Straight Connector 37">
+            <a:extLst>
+              <a:ext uri="{FF2B5EF4-FFF2-40B4-BE49-F238E27FC236}">
+                <a16:creationId xmlns:a16="http://schemas.microsoft.com/office/drawing/2014/main" id="{BD8EACE9-9368-1F45-29D4-E502A5AE13DA}"/>
+              </a:ext>
+            </a:extLst>
+          </p:cNvPr>
+          <p:cNvCxnSpPr>
+            <a:cxnSpLocks/>
+          </p:cNvCxnSpPr>
+          <p:nvPr/>
+        </p:nvCxnSpPr>
+        <p:spPr>
+          <a:xfrm>
+            <a:off x="4918686" y="1502720"/>
+            <a:ext cx="1177331" cy="3850879"/>
+          </a:xfrm>
+          <a:prstGeom prst="line">
+            <a:avLst/>
+          </a:prstGeom>
+          <a:ln w="9525">
+            <a:solidFill>
+              <a:srgbClr val="08088E"/>
+            </a:solidFill>
+          </a:ln>
+        </p:spPr>
+        <p:style>
+          <a:lnRef idx="1">
+            <a:schemeClr val="accent1"/>
+          </a:lnRef>
+          <a:fillRef idx="0">
+            <a:schemeClr val="accent1"/>
+          </a:fillRef>
+          <a:effectRef idx="0">
+            <a:schemeClr val="accent1"/>
+          </a:effectRef>
+          <a:fontRef idx="minor">
+            <a:schemeClr val="tx1"/>
+          </a:fontRef>
+        </p:style>
+      </p:cxnSp>
+      <p:cxnSp>
+        <p:nvCxnSpPr>
+          <p:cNvPr id="39" name="Straight Connector 38">
+            <a:extLst>
+              <a:ext uri="{FF2B5EF4-FFF2-40B4-BE49-F238E27FC236}">
+                <a16:creationId xmlns:a16="http://schemas.microsoft.com/office/drawing/2014/main" id="{6EF1B371-725C-840F-7FD2-DFC7BD0778B7}"/>
+              </a:ext>
+            </a:extLst>
+          </p:cNvPr>
+          <p:cNvCxnSpPr>
+            <a:cxnSpLocks/>
+          </p:cNvCxnSpPr>
+          <p:nvPr/>
+        </p:nvCxnSpPr>
+        <p:spPr>
+          <a:xfrm>
+            <a:off x="3495421" y="1505038"/>
+            <a:ext cx="2593951" cy="3845689"/>
+          </a:xfrm>
+          <a:prstGeom prst="line">
+            <a:avLst/>
+          </a:prstGeom>
+          <a:ln w="9525">
+            <a:solidFill>
+              <a:srgbClr val="08088E"/>
+            </a:solidFill>
+          </a:ln>
+        </p:spPr>
+        <p:style>
+          <a:lnRef idx="1">
+            <a:schemeClr val="accent1"/>
+          </a:lnRef>
+          <a:fillRef idx="0">
+            <a:schemeClr val="accent1"/>
+          </a:fillRef>
+          <a:effectRef idx="0">
+            <a:schemeClr val="accent1"/>
+          </a:effectRef>
+          <a:fontRef idx="minor">
+            <a:schemeClr val="tx1"/>
+          </a:fontRef>
+        </p:style>
+      </p:cxnSp>
+      <p:cxnSp>
+        <p:nvCxnSpPr>
+          <p:cNvPr id="40" name="Straight Connector 39">
+            <a:extLst>
+              <a:ext uri="{FF2B5EF4-FFF2-40B4-BE49-F238E27FC236}">
+                <a16:creationId xmlns:a16="http://schemas.microsoft.com/office/drawing/2014/main" id="{729A690E-163C-3D1E-9097-6AA6A8B55AE9}"/>
+              </a:ext>
+            </a:extLst>
+          </p:cNvPr>
+          <p:cNvCxnSpPr>
+            <a:cxnSpLocks/>
+          </p:cNvCxnSpPr>
+          <p:nvPr/>
+        </p:nvCxnSpPr>
+        <p:spPr>
+          <a:xfrm>
+            <a:off x="1348529" y="1514070"/>
+            <a:ext cx="4740842" cy="3839059"/>
+          </a:xfrm>
+          <a:prstGeom prst="line">
+            <a:avLst/>
+          </a:prstGeom>
+          <a:ln w="9525">
+            <a:solidFill>
+              <a:srgbClr val="08088E"/>
+            </a:solidFill>
+          </a:ln>
+        </p:spPr>
+        <p:style>
+          <a:lnRef idx="1">
+            <a:schemeClr val="accent1"/>
+          </a:lnRef>
+          <a:fillRef idx="0">
+            <a:schemeClr val="accent1"/>
+          </a:fillRef>
+          <a:effectRef idx="0">
+            <a:schemeClr val="accent1"/>
+          </a:effectRef>
+          <a:fontRef idx="minor">
+            <a:schemeClr val="tx1"/>
+          </a:fontRef>
+        </p:style>
+      </p:cxnSp>
+      <p:sp>
+        <p:nvSpPr>
+          <p:cNvPr id="66" name="Freeform: Shape 65">
+            <a:extLst>
+              <a:ext uri="{FF2B5EF4-FFF2-40B4-BE49-F238E27FC236}">
+                <a16:creationId xmlns:a16="http://schemas.microsoft.com/office/drawing/2014/main" id="{668A54B1-5644-C311-6C44-FA18B234DF05}"/>
+              </a:ext>
+            </a:extLst>
+          </p:cNvPr>
+          <p:cNvSpPr/>
+          <p:nvPr/>
+        </p:nvSpPr>
+        <p:spPr>
+          <a:xfrm rot="2040000">
+            <a:off x="4903176" y="1514298"/>
+            <a:ext cx="120854" cy="143233"/>
+          </a:xfrm>
+          <a:custGeom>
+            <a:avLst/>
+            <a:gdLst>
+              <a:gd name="csX0" fmla="*/ 120854 w 120854"/>
+              <a:gd name="csY0" fmla="*/ 143233 h 143233"/>
+              <a:gd name="csX1" fmla="*/ 0 w 120854"/>
+              <a:gd name="csY1" fmla="*/ 0 h 143233"/>
+            </a:gdLst>
+            <a:ahLst/>
+            <a:cxnLst>
+              <a:cxn ang="0">
+                <a:pos x="csX0" y="csY0"/>
+              </a:cxn>
+              <a:cxn ang="0">
+                <a:pos x="csX1" y="csY1"/>
+              </a:cxn>
+            </a:cxnLst>
+            <a:rect l="l" t="t" r="r" b="b"/>
+            <a:pathLst>
+              <a:path w="120854" h="143233">
+                <a:moveTo>
+                  <a:pt x="120854" y="143233"/>
+                </a:moveTo>
+                <a:cubicBezTo>
+                  <a:pt x="-2443" y="12263"/>
+                  <a:pt x="28243" y="29242"/>
+                  <a:pt x="0" y="0"/>
+                </a:cubicBezTo>
+              </a:path>
+            </a:pathLst>
+          </a:custGeom>
+          <a:noFill/>
+          <a:ln>
+            <a:solidFill>
+              <a:srgbClr val="C00000"/>
+            </a:solidFill>
+          </a:ln>
+        </p:spPr>
+        <p:style>
+          <a:lnRef idx="2">
+            <a:schemeClr val="accent1">
+              <a:shade val="15000"/>
+            </a:schemeClr>
+          </a:lnRef>
+          <a:fillRef idx="1">
+            <a:schemeClr val="accent1"/>
+          </a:fillRef>
+          <a:effectRef idx="0">
+            <a:schemeClr val="accent1"/>
+          </a:effectRef>
+          <a:fontRef idx="minor">
+            <a:schemeClr val="lt1"/>
+          </a:fontRef>
+        </p:style>
+        <p:txBody>
+          <a:bodyPr rtlCol="0" anchor="ctr"/>
+          <a:lstStyle/>
+          <a:p>
+            <a:pPr algn="ctr"/>
+            <a:endParaRPr lang="en-IN"/>
+          </a:p>
+        </p:txBody>
+      </p:sp>
+      <p:sp>
+        <p:nvSpPr>
+          <p:cNvPr id="64" name="Freeform: Shape 63">
+            <a:extLst>
+              <a:ext uri="{FF2B5EF4-FFF2-40B4-BE49-F238E27FC236}">
+                <a16:creationId xmlns:a16="http://schemas.microsoft.com/office/drawing/2014/main" id="{FA4406D3-2793-1D52-BAB9-05112D7D1ED3}"/>
+              </a:ext>
+            </a:extLst>
+          </p:cNvPr>
+          <p:cNvSpPr/>
+          <p:nvPr/>
+        </p:nvSpPr>
+        <p:spPr>
+          <a:xfrm rot="1248557">
+            <a:off x="3688676" y="1521754"/>
+            <a:ext cx="368303" cy="590999"/>
+          </a:xfrm>
+          <a:custGeom>
+            <a:avLst/>
+            <a:gdLst>
+              <a:gd name="csX0" fmla="*/ 368303 w 368303"/>
+              <a:gd name="csY0" fmla="*/ 590999 h 590999"/>
+              <a:gd name="csX1" fmla="*/ 0 w 368303"/>
+              <a:gd name="csY1" fmla="*/ 0 h 590999"/>
+            </a:gdLst>
+            <a:ahLst/>
+            <a:cxnLst>
+              <a:cxn ang="0">
+                <a:pos x="csX0" y="csY0"/>
+              </a:cxn>
+              <a:cxn ang="0">
+                <a:pos x="csX1" y="csY1"/>
+              </a:cxn>
+            </a:cxnLst>
+            <a:rect l="l" t="t" r="r" b="b"/>
+            <a:pathLst>
+              <a:path w="368303" h="590999">
+                <a:moveTo>
+                  <a:pt x="368303" y="590999"/>
+                </a:moveTo>
+                <a:cubicBezTo>
+                  <a:pt x="245006" y="460029"/>
+                  <a:pt x="71782" y="264126"/>
+                  <a:pt x="0" y="0"/>
+                </a:cubicBezTo>
+              </a:path>
+            </a:pathLst>
+          </a:custGeom>
+          <a:noFill/>
+          <a:ln>
+            <a:solidFill>
+              <a:srgbClr val="C00000"/>
+            </a:solidFill>
+          </a:ln>
+        </p:spPr>
+        <p:style>
+          <a:lnRef idx="2">
+            <a:schemeClr val="accent1">
+              <a:shade val="15000"/>
+            </a:schemeClr>
+          </a:lnRef>
+          <a:fillRef idx="1">
+            <a:schemeClr val="accent1"/>
+          </a:fillRef>
+          <a:effectRef idx="0">
+            <a:schemeClr val="accent1"/>
+          </a:effectRef>
+          <a:fontRef idx="minor">
+            <a:schemeClr val="lt1"/>
+          </a:fontRef>
+        </p:style>
+        <p:txBody>
+          <a:bodyPr rtlCol="0" anchor="ctr"/>
+          <a:lstStyle/>
+          <a:p>
+            <a:pPr algn="ctr"/>
+            <a:endParaRPr lang="en-IN"/>
+          </a:p>
+        </p:txBody>
+      </p:sp>
+      <p:sp>
+        <p:nvSpPr>
+          <p:cNvPr id="62" name="Freeform: Shape 61">
+            <a:extLst>
+              <a:ext uri="{FF2B5EF4-FFF2-40B4-BE49-F238E27FC236}">
+                <a16:creationId xmlns:a16="http://schemas.microsoft.com/office/drawing/2014/main" id="{75A13A39-7599-2EEC-9857-4286FB6C6ADC}"/>
+              </a:ext>
+            </a:extLst>
+          </p:cNvPr>
+          <p:cNvSpPr/>
+          <p:nvPr/>
+        </p:nvSpPr>
+        <p:spPr>
+          <a:xfrm>
+            <a:off x="2631077" y="1504950"/>
+            <a:ext cx="467722" cy="1419225"/>
+          </a:xfrm>
+          <a:custGeom>
+            <a:avLst/>
+            <a:gdLst>
+              <a:gd name="csX0" fmla="*/ 467722 w 467722"/>
+              <a:gd name="csY0" fmla="*/ 1419225 h 1419225"/>
+              <a:gd name="csX1" fmla="*/ 44653 w 467722"/>
+              <a:gd name="csY1" fmla="*/ 670720 h 1419225"/>
+              <a:gd name="csX2" fmla="*/ 23222 w 467722"/>
+              <a:gd name="csY2" fmla="*/ 0 h 1419225"/>
+            </a:gdLst>
+            <a:ahLst/>
+            <a:cxnLst>
+              <a:cxn ang="0">
+                <a:pos x="csX0" y="csY0"/>
+              </a:cxn>
+              <a:cxn ang="0">
+                <a:pos x="csX1" y="csY1"/>
+              </a:cxn>
+              <a:cxn ang="0">
+                <a:pos x="csX2" y="csY2"/>
+              </a:cxn>
+            </a:cxnLst>
+            <a:rect l="l" t="t" r="r" b="b"/>
+            <a:pathLst>
+              <a:path w="467722" h="1419225">
+                <a:moveTo>
+                  <a:pt x="467722" y="1419225"/>
+                </a:moveTo>
+                <a:cubicBezTo>
+                  <a:pt x="344425" y="1288255"/>
+                  <a:pt x="112386" y="964408"/>
+                  <a:pt x="44653" y="670720"/>
+                </a:cubicBezTo>
+                <a:cubicBezTo>
+                  <a:pt x="-23080" y="377032"/>
+                  <a:pt x="467" y="127793"/>
+                  <a:pt x="23222" y="0"/>
+                </a:cubicBezTo>
+              </a:path>
+            </a:pathLst>
+          </a:custGeom>
+          <a:noFill/>
+          <a:ln>
+            <a:solidFill>
+              <a:srgbClr val="C00000"/>
+            </a:solidFill>
+          </a:ln>
+        </p:spPr>
+        <p:style>
+          <a:lnRef idx="2">
+            <a:schemeClr val="accent1">
+              <a:shade val="15000"/>
+            </a:schemeClr>
+          </a:lnRef>
+          <a:fillRef idx="1">
+            <a:schemeClr val="accent1"/>
+          </a:fillRef>
+          <a:effectRef idx="0">
+            <a:schemeClr val="accent1"/>
+          </a:effectRef>
+          <a:fontRef idx="minor">
+            <a:schemeClr val="lt1"/>
+          </a:fontRef>
+        </p:style>
+        <p:txBody>
+          <a:bodyPr rtlCol="0" anchor="ctr"/>
+          <a:lstStyle/>
+          <a:p>
+            <a:pPr algn="ctr"/>
+            <a:endParaRPr lang="en-IN"/>
+          </a:p>
+        </p:txBody>
+      </p:sp>
+      <p:cxnSp>
+        <p:nvCxnSpPr>
+          <p:cNvPr id="15" name="Straight Connector 14">
+            <a:extLst>
+              <a:ext uri="{FF2B5EF4-FFF2-40B4-BE49-F238E27FC236}">
+                <a16:creationId xmlns:a16="http://schemas.microsoft.com/office/drawing/2014/main" id="{AECE0B54-AB2A-E23C-648B-C1C27A734C64}"/>
+              </a:ext>
+            </a:extLst>
+          </p:cNvPr>
+          <p:cNvCxnSpPr>
+            <a:cxnSpLocks/>
+          </p:cNvCxnSpPr>
+          <p:nvPr/>
+        </p:nvCxnSpPr>
+        <p:spPr>
+          <a:xfrm>
+            <a:off x="1284514" y="1511219"/>
+            <a:ext cx="4814661" cy="0"/>
+          </a:xfrm>
+          <a:prstGeom prst="line">
+            <a:avLst/>
+          </a:prstGeom>
+          <a:ln w="19050">
+            <a:solidFill>
+              <a:schemeClr val="tx1">
+                <a:lumMod val="75000"/>
+                <a:lumOff val="25000"/>
+              </a:schemeClr>
+            </a:solidFill>
+            <a:prstDash val="dash"/>
+          </a:ln>
+        </p:spPr>
+        <p:style>
+          <a:lnRef idx="1">
+            <a:schemeClr val="accent1"/>
+          </a:lnRef>
+          <a:fillRef idx="0">
+            <a:schemeClr val="accent1"/>
+          </a:fillRef>
+          <a:effectRef idx="0">
+            <a:schemeClr val="accent1"/>
+          </a:effectRef>
+          <a:fontRef idx="minor">
+            <a:schemeClr val="tx1"/>
+          </a:fontRef>
+        </p:style>
+      </p:cxnSp>
+      <p:sp>
+        <p:nvSpPr>
+          <p:cNvPr id="4" name="Freeform: Shape 3">
+            <a:extLst>
+              <a:ext uri="{FF2B5EF4-FFF2-40B4-BE49-F238E27FC236}">
+                <a16:creationId xmlns:a16="http://schemas.microsoft.com/office/drawing/2014/main" id="{CD21FE62-C80F-8367-EBC4-651026C66754}"/>
+              </a:ext>
+            </a:extLst>
+          </p:cNvPr>
+          <p:cNvSpPr/>
+          <p:nvPr/>
+        </p:nvSpPr>
+        <p:spPr>
+          <a:xfrm>
+            <a:off x="2213475" y="1511220"/>
+            <a:ext cx="7765050" cy="3835560"/>
+          </a:xfrm>
+          <a:custGeom>
+            <a:avLst/>
+            <a:gdLst>
+              <a:gd name="csX0" fmla="*/ 0 w 4997049"/>
+              <a:gd name="csY0" fmla="*/ 2468301 h 2468301"/>
+              <a:gd name="csX1" fmla="*/ 11300 w 4997049"/>
+              <a:gd name="csY1" fmla="*/ 2244508 h 2468301"/>
+              <a:gd name="csX2" fmla="*/ 2498524 w 4997049"/>
+              <a:gd name="csY2" fmla="*/ 0 h 2468301"/>
+              <a:gd name="csX3" fmla="*/ 4985748 w 4997049"/>
+              <a:gd name="csY3" fmla="*/ 2244508 h 2468301"/>
+              <a:gd name="csX4" fmla="*/ 4997049 w 4997049"/>
+              <a:gd name="csY4" fmla="*/ 2468301 h 2468301"/>
+            </a:gdLst>
+            <a:ahLst/>
+            <a:cxnLst>
+              <a:cxn ang="0">
+                <a:pos x="csX0" y="csY0"/>
+              </a:cxn>
+              <a:cxn ang="0">
+                <a:pos x="csX1" y="csY1"/>
+              </a:cxn>
+              <a:cxn ang="0">
+                <a:pos x="csX2" y="csY2"/>
+              </a:cxn>
+              <a:cxn ang="0">
+                <a:pos x="csX3" y="csY3"/>
+              </a:cxn>
+              <a:cxn ang="0">
+                <a:pos x="csX4" y="csY4"/>
+              </a:cxn>
+            </a:cxnLst>
+            <a:rect l="l" t="t" r="r" b="b"/>
+            <a:pathLst>
+              <a:path w="4997049" h="2468301">
+                <a:moveTo>
+                  <a:pt x="0" y="2468301"/>
+                </a:moveTo>
+                <a:lnTo>
+                  <a:pt x="11300" y="2244508"/>
+                </a:lnTo>
+                <a:cubicBezTo>
+                  <a:pt x="139332" y="983801"/>
+                  <a:pt x="1204038" y="0"/>
+                  <a:pt x="2498524" y="0"/>
+                </a:cubicBezTo>
+                <a:cubicBezTo>
+                  <a:pt x="3793010" y="0"/>
+                  <a:pt x="4857717" y="983801"/>
+                  <a:pt x="4985748" y="2244508"/>
+                </a:cubicBezTo>
+                <a:lnTo>
+                  <a:pt x="4997049" y="2468301"/>
+                </a:lnTo>
+              </a:path>
+            </a:pathLst>
+          </a:custGeom>
+          <a:noFill/>
+          <a:ln w="28575">
+            <a:solidFill>
+              <a:schemeClr val="tx1"/>
+            </a:solidFill>
+          </a:ln>
+        </p:spPr>
+        <p:style>
+          <a:lnRef idx="2">
+            <a:schemeClr val="accent1">
+              <a:shade val="15000"/>
+            </a:schemeClr>
+          </a:lnRef>
+          <a:fillRef idx="1">
+            <a:schemeClr val="accent1"/>
+          </a:fillRef>
+          <a:effectRef idx="0">
+            <a:schemeClr val="accent1"/>
+          </a:effectRef>
+          <a:fontRef idx="minor">
+            <a:schemeClr val="lt1"/>
+          </a:fontRef>
+        </p:style>
+        <p:txBody>
+          <a:bodyPr wrap="square" rtlCol="0" anchor="ctr">
+            <a:noAutofit/>
+          </a:bodyPr>
+          <a:lstStyle/>
+          <a:p>
+            <a:pPr algn="ctr"/>
+            <a:endParaRPr lang="en-IN"/>
+          </a:p>
+        </p:txBody>
+      </p:sp>
+      <p:sp>
+        <p:nvSpPr>
+          <p:cNvPr id="13" name="Oval 12">
+            <a:extLst>
+              <a:ext uri="{FF2B5EF4-FFF2-40B4-BE49-F238E27FC236}">
+                <a16:creationId xmlns:a16="http://schemas.microsoft.com/office/drawing/2014/main" id="{9899B11D-283A-434A-2C8D-D15D1F04AE52}"/>
+              </a:ext>
+            </a:extLst>
+          </p:cNvPr>
+          <p:cNvSpPr/>
+          <p:nvPr/>
+        </p:nvSpPr>
+        <p:spPr>
+          <a:xfrm>
+            <a:off x="5988327" y="1401164"/>
+            <a:ext cx="215346" cy="215346"/>
+          </a:xfrm>
+          <a:prstGeom prst="ellipse">
+            <a:avLst/>
+          </a:prstGeom>
+          <a:gradFill flip="none" rotWithShape="1">
+            <a:gsLst>
+              <a:gs pos="12000">
+                <a:schemeClr val="bg1"/>
+              </a:gs>
+              <a:gs pos="51000">
+                <a:schemeClr val="accent5">
+                  <a:lumMod val="95000"/>
+                  <a:lumOff val="5000"/>
+                </a:schemeClr>
+              </a:gs>
+              <a:gs pos="77000">
+                <a:srgbClr val="1D345D"/>
+              </a:gs>
+            </a:gsLst>
+            <a:path path="circle">
+              <a:fillToRect r="100000" b="100000"/>
+            </a:path>
+            <a:tileRect l="-100000" t="-100000"/>
+          </a:gradFill>
+          <a:ln w="3175">
+            <a:solidFill>
+              <a:schemeClr val="tx1"/>
+            </a:solidFill>
+          </a:ln>
+        </p:spPr>
+        <p:style>
+          <a:lnRef idx="2">
+            <a:schemeClr val="accent1">
+              <a:shade val="50000"/>
+            </a:schemeClr>
+          </a:lnRef>
+          <a:fillRef idx="1">
+            <a:schemeClr val="accent1"/>
+          </a:fillRef>
+          <a:effectRef idx="0">
+            <a:schemeClr val="accent1"/>
+          </a:effectRef>
+          <a:fontRef idx="minor">
+            <a:schemeClr val="lt1"/>
+          </a:fontRef>
+        </p:style>
+        <p:txBody>
+          <a:bodyPr rtlCol="0" anchor="ctr"/>
+          <a:lstStyle/>
+          <a:p>
+            <a:pPr algn="ctr"/>
+            <a:endParaRPr lang="en-US"/>
+          </a:p>
+        </p:txBody>
+      </p:sp>
+      <p:sp>
+        <p:nvSpPr>
+          <p:cNvPr id="19" name="Oval 18">
+            <a:extLst>
+              <a:ext uri="{FF2B5EF4-FFF2-40B4-BE49-F238E27FC236}">
+                <a16:creationId xmlns:a16="http://schemas.microsoft.com/office/drawing/2014/main" id="{003052F0-9006-54C2-609A-68D4015BBF0F}"/>
+              </a:ext>
+            </a:extLst>
+          </p:cNvPr>
+          <p:cNvSpPr/>
+          <p:nvPr/>
+        </p:nvSpPr>
+        <p:spPr>
+          <a:xfrm>
+            <a:off x="4844020" y="1401164"/>
+            <a:ext cx="215346" cy="215346"/>
+          </a:xfrm>
+          <a:prstGeom prst="ellipse">
+            <a:avLst/>
+          </a:prstGeom>
+          <a:gradFill flip="none" rotWithShape="1">
+            <a:gsLst>
+              <a:gs pos="12000">
+                <a:schemeClr val="bg1"/>
+              </a:gs>
+              <a:gs pos="51000">
+                <a:schemeClr val="accent5">
+                  <a:lumMod val="95000"/>
+                  <a:lumOff val="5000"/>
+                </a:schemeClr>
+              </a:gs>
+              <a:gs pos="77000">
+                <a:srgbClr val="1D345D"/>
+              </a:gs>
+            </a:gsLst>
+            <a:path path="circle">
+              <a:fillToRect r="100000" b="100000"/>
+            </a:path>
+            <a:tileRect l="-100000" t="-100000"/>
+          </a:gradFill>
+          <a:ln w="3175">
+            <a:solidFill>
+              <a:schemeClr val="tx1"/>
+            </a:solidFill>
+          </a:ln>
+        </p:spPr>
+        <p:style>
+          <a:lnRef idx="2">
+            <a:schemeClr val="accent1">
+              <a:shade val="50000"/>
+            </a:schemeClr>
+          </a:lnRef>
+          <a:fillRef idx="1">
+            <a:schemeClr val="accent1"/>
+          </a:fillRef>
+          <a:effectRef idx="0">
+            <a:schemeClr val="accent1"/>
+          </a:effectRef>
+          <a:fontRef idx="minor">
+            <a:schemeClr val="lt1"/>
+          </a:fontRef>
+        </p:style>
+        <p:txBody>
+          <a:bodyPr rtlCol="0" anchor="ctr"/>
+          <a:lstStyle/>
+          <a:p>
+            <a:pPr algn="ctr"/>
+            <a:endParaRPr lang="en-US"/>
+          </a:p>
+        </p:txBody>
+      </p:sp>
+      <p:sp>
+        <p:nvSpPr>
+          <p:cNvPr id="20" name="Oval 19">
+            <a:extLst>
+              <a:ext uri="{FF2B5EF4-FFF2-40B4-BE49-F238E27FC236}">
+                <a16:creationId xmlns:a16="http://schemas.microsoft.com/office/drawing/2014/main" id="{32B2E120-3E29-B91F-95E3-0D713A857541}"/>
+              </a:ext>
+            </a:extLst>
+          </p:cNvPr>
+          <p:cNvSpPr/>
+          <p:nvPr/>
+        </p:nvSpPr>
+        <p:spPr>
+          <a:xfrm>
+            <a:off x="3699713" y="1401164"/>
+            <a:ext cx="215346" cy="215346"/>
+          </a:xfrm>
+          <a:prstGeom prst="ellipse">
+            <a:avLst/>
+          </a:prstGeom>
+          <a:gradFill flip="none" rotWithShape="1">
+            <a:gsLst>
+              <a:gs pos="12000">
+                <a:schemeClr val="bg1"/>
+              </a:gs>
+              <a:gs pos="51000">
+                <a:schemeClr val="accent5">
+                  <a:lumMod val="95000"/>
+                  <a:lumOff val="5000"/>
+                </a:schemeClr>
+              </a:gs>
+              <a:gs pos="77000">
+                <a:srgbClr val="1D345D"/>
+              </a:gs>
+            </a:gsLst>
+            <a:path path="circle">
+              <a:fillToRect r="100000" b="100000"/>
+            </a:path>
+            <a:tileRect l="-100000" t="-100000"/>
+          </a:gradFill>
+          <a:ln w="3175">
+            <a:solidFill>
+              <a:schemeClr val="tx1"/>
+            </a:solidFill>
+          </a:ln>
+        </p:spPr>
+        <p:style>
+          <a:lnRef idx="2">
+            <a:schemeClr val="accent1">
+              <a:shade val="50000"/>
+            </a:schemeClr>
+          </a:lnRef>
+          <a:fillRef idx="1">
+            <a:schemeClr val="accent1"/>
+          </a:fillRef>
+          <a:effectRef idx="0">
+            <a:schemeClr val="accent1"/>
+          </a:effectRef>
+          <a:fontRef idx="minor">
+            <a:schemeClr val="lt1"/>
+          </a:fontRef>
+        </p:style>
+        <p:txBody>
+          <a:bodyPr rtlCol="0" anchor="ctr"/>
+          <a:lstStyle/>
+          <a:p>
+            <a:pPr algn="ctr"/>
+            <a:endParaRPr lang="en-US" dirty="0"/>
+          </a:p>
+        </p:txBody>
+      </p:sp>
+      <p:sp>
+        <p:nvSpPr>
+          <p:cNvPr id="21" name="Oval 20">
+            <a:extLst>
+              <a:ext uri="{FF2B5EF4-FFF2-40B4-BE49-F238E27FC236}">
+                <a16:creationId xmlns:a16="http://schemas.microsoft.com/office/drawing/2014/main" id="{A5808ADE-B8E5-17C6-B8AF-BFD915E69168}"/>
+              </a:ext>
+            </a:extLst>
+          </p:cNvPr>
+          <p:cNvSpPr/>
+          <p:nvPr/>
+        </p:nvSpPr>
+        <p:spPr>
+          <a:xfrm>
+            <a:off x="2555406" y="1401164"/>
+            <a:ext cx="215346" cy="215346"/>
+          </a:xfrm>
+          <a:prstGeom prst="ellipse">
+            <a:avLst/>
+          </a:prstGeom>
+          <a:gradFill flip="none" rotWithShape="1">
+            <a:gsLst>
+              <a:gs pos="12000">
+                <a:schemeClr val="bg1"/>
+              </a:gs>
+              <a:gs pos="51000">
+                <a:schemeClr val="accent5">
+                  <a:lumMod val="95000"/>
+                  <a:lumOff val="5000"/>
+                </a:schemeClr>
+              </a:gs>
+              <a:gs pos="77000">
+                <a:srgbClr val="1D345D"/>
+              </a:gs>
+            </a:gsLst>
+            <a:path path="circle">
+              <a:fillToRect r="100000" b="100000"/>
+            </a:path>
+            <a:tileRect l="-100000" t="-100000"/>
+          </a:gradFill>
+          <a:ln w="3175">
+            <a:solidFill>
+              <a:schemeClr val="tx1"/>
+            </a:solidFill>
+          </a:ln>
+        </p:spPr>
+        <p:style>
+          <a:lnRef idx="2">
+            <a:schemeClr val="accent1">
+              <a:shade val="50000"/>
+            </a:schemeClr>
+          </a:lnRef>
+          <a:fillRef idx="1">
+            <a:schemeClr val="accent1"/>
+          </a:fillRef>
+          <a:effectRef idx="0">
+            <a:schemeClr val="accent1"/>
+          </a:effectRef>
+          <a:fontRef idx="minor">
+            <a:schemeClr val="lt1"/>
+          </a:fontRef>
+        </p:style>
+        <p:txBody>
+          <a:bodyPr rtlCol="0" anchor="ctr"/>
+          <a:lstStyle/>
+          <a:p>
+            <a:pPr algn="ctr"/>
+            <a:endParaRPr lang="en-US"/>
+          </a:p>
+        </p:txBody>
+      </p:sp>
+      <p:sp>
+        <p:nvSpPr>
+          <p:cNvPr id="30" name="Oval 29">
+            <a:extLst>
+              <a:ext uri="{FF2B5EF4-FFF2-40B4-BE49-F238E27FC236}">
+                <a16:creationId xmlns:a16="http://schemas.microsoft.com/office/drawing/2014/main" id="{DC68FCF4-F3E2-C8B6-E1E7-3483ECAE949D}"/>
+              </a:ext>
+            </a:extLst>
+          </p:cNvPr>
+          <p:cNvSpPr/>
+          <p:nvPr/>
+        </p:nvSpPr>
+        <p:spPr>
+          <a:xfrm>
+            <a:off x="4919943" y="1631725"/>
+            <a:ext cx="94706" cy="94706"/>
+          </a:xfrm>
+          <a:prstGeom prst="ellipse">
+            <a:avLst/>
+          </a:prstGeom>
+          <a:solidFill>
+            <a:schemeClr val="tx1"/>
+          </a:solidFill>
+          <a:ln>
+            <a:solidFill>
+              <a:schemeClr val="tx1">
+                <a:lumMod val="75000"/>
+                <a:lumOff val="25000"/>
+              </a:schemeClr>
+            </a:solidFill>
+          </a:ln>
+        </p:spPr>
+        <p:style>
+          <a:lnRef idx="2">
+            <a:schemeClr val="accent1">
+              <a:shade val="50000"/>
+            </a:schemeClr>
+          </a:lnRef>
+          <a:fillRef idx="1">
+            <a:schemeClr val="accent1"/>
+          </a:fillRef>
+          <a:effectRef idx="0">
+            <a:schemeClr val="accent1"/>
+          </a:effectRef>
+          <a:fontRef idx="minor">
+            <a:schemeClr val="lt1"/>
+          </a:fontRef>
+        </p:style>
+        <p:txBody>
+          <a:bodyPr rtlCol="0" anchor="ctr"/>
+          <a:lstStyle/>
+          <a:p>
+            <a:pPr algn="ctr"/>
+            <a:endParaRPr lang="en-US"/>
+          </a:p>
+        </p:txBody>
+      </p:sp>
+      <p:sp>
+        <p:nvSpPr>
+          <p:cNvPr id="56" name="Oval 55">
+            <a:extLst>
+              <a:ext uri="{FF2B5EF4-FFF2-40B4-BE49-F238E27FC236}">
+                <a16:creationId xmlns:a16="http://schemas.microsoft.com/office/drawing/2014/main" id="{E862A6AB-472A-EC83-E05B-BA3165C55F2D}"/>
+              </a:ext>
+            </a:extLst>
+          </p:cNvPr>
+          <p:cNvSpPr/>
+          <p:nvPr/>
+        </p:nvSpPr>
+        <p:spPr>
+          <a:xfrm>
+            <a:off x="6049162" y="1466227"/>
+            <a:ext cx="94706" cy="94706"/>
+          </a:xfrm>
+          <a:prstGeom prst="ellipse">
+            <a:avLst/>
+          </a:prstGeom>
+          <a:solidFill>
+            <a:schemeClr val="tx1"/>
+          </a:solidFill>
+          <a:ln>
+            <a:solidFill>
+              <a:schemeClr val="tx1">
+                <a:lumMod val="75000"/>
+                <a:lumOff val="25000"/>
+              </a:schemeClr>
+            </a:solidFill>
+          </a:ln>
+        </p:spPr>
+        <p:style>
+          <a:lnRef idx="2">
+            <a:schemeClr val="accent1">
+              <a:shade val="50000"/>
+            </a:schemeClr>
+          </a:lnRef>
+          <a:fillRef idx="1">
+            <a:schemeClr val="accent1"/>
+          </a:fillRef>
+          <a:effectRef idx="0">
+            <a:schemeClr val="accent1"/>
+          </a:effectRef>
+          <a:fontRef idx="minor">
+            <a:schemeClr val="lt1"/>
+          </a:fontRef>
+        </p:style>
+        <p:txBody>
+          <a:bodyPr rtlCol="0" anchor="ctr"/>
+          <a:lstStyle/>
+          <a:p>
+            <a:pPr algn="ctr"/>
+            <a:endParaRPr lang="en-US"/>
+          </a:p>
+        </p:txBody>
+      </p:sp>
+      <p:sp>
+        <p:nvSpPr>
+          <p:cNvPr id="58" name="Oval 57">
+            <a:extLst>
+              <a:ext uri="{FF2B5EF4-FFF2-40B4-BE49-F238E27FC236}">
+                <a16:creationId xmlns:a16="http://schemas.microsoft.com/office/drawing/2014/main" id="{26994B68-7A7D-FD00-A821-980F2C96A3FE}"/>
+              </a:ext>
+            </a:extLst>
+          </p:cNvPr>
+          <p:cNvSpPr/>
+          <p:nvPr/>
+        </p:nvSpPr>
+        <p:spPr>
+          <a:xfrm>
+            <a:off x="3892638" y="2111546"/>
+            <a:ext cx="94706" cy="94706"/>
+          </a:xfrm>
+          <a:prstGeom prst="ellipse">
+            <a:avLst/>
+          </a:prstGeom>
+          <a:solidFill>
+            <a:schemeClr val="tx1"/>
+          </a:solidFill>
+          <a:ln>
+            <a:solidFill>
+              <a:schemeClr val="tx1">
+                <a:lumMod val="75000"/>
+                <a:lumOff val="25000"/>
+              </a:schemeClr>
+            </a:solidFill>
+          </a:ln>
+        </p:spPr>
+        <p:style>
+          <a:lnRef idx="2">
+            <a:schemeClr val="accent1">
+              <a:shade val="50000"/>
+            </a:schemeClr>
+          </a:lnRef>
+          <a:fillRef idx="1">
+            <a:schemeClr val="accent1"/>
+          </a:fillRef>
+          <a:effectRef idx="0">
+            <a:schemeClr val="accent1"/>
+          </a:effectRef>
+          <a:fontRef idx="minor">
+            <a:schemeClr val="lt1"/>
+          </a:fontRef>
+        </p:style>
+        <p:txBody>
+          <a:bodyPr rtlCol="0" anchor="ctr"/>
+          <a:lstStyle/>
+          <a:p>
+            <a:pPr algn="ctr"/>
+            <a:endParaRPr lang="en-US"/>
+          </a:p>
+        </p:txBody>
+      </p:sp>
+      <p:sp>
+        <p:nvSpPr>
+          <p:cNvPr id="60" name="Oval 59">
+            <a:extLst>
+              <a:ext uri="{FF2B5EF4-FFF2-40B4-BE49-F238E27FC236}">
+                <a16:creationId xmlns:a16="http://schemas.microsoft.com/office/drawing/2014/main" id="{AAEDA5A8-D39A-8D03-3E56-408E15695DEE}"/>
+              </a:ext>
+            </a:extLst>
+          </p:cNvPr>
+          <p:cNvSpPr/>
+          <p:nvPr/>
+        </p:nvSpPr>
+        <p:spPr>
+          <a:xfrm>
+            <a:off x="3054247" y="2875927"/>
+            <a:ext cx="94706" cy="94706"/>
+          </a:xfrm>
+          <a:prstGeom prst="ellipse">
+            <a:avLst/>
+          </a:prstGeom>
+          <a:solidFill>
+            <a:schemeClr val="tx1"/>
+          </a:solidFill>
+          <a:ln>
+            <a:solidFill>
+              <a:schemeClr val="tx1">
+                <a:lumMod val="75000"/>
+                <a:lumOff val="25000"/>
+              </a:schemeClr>
+            </a:solidFill>
+          </a:ln>
+        </p:spPr>
+        <p:style>
+          <a:lnRef idx="2">
+            <a:schemeClr val="accent1">
+              <a:shade val="50000"/>
+            </a:schemeClr>
+          </a:lnRef>
+          <a:fillRef idx="1">
+            <a:schemeClr val="accent1"/>
+          </a:fillRef>
+          <a:effectRef idx="0">
+            <a:schemeClr val="accent1"/>
+          </a:effectRef>
+          <a:fontRef idx="minor">
+            <a:schemeClr val="lt1"/>
+          </a:fontRef>
+        </p:style>
+        <p:txBody>
+          <a:bodyPr rtlCol="0" anchor="ctr"/>
+          <a:lstStyle/>
+          <a:p>
+            <a:pPr algn="ctr"/>
+            <a:endParaRPr lang="en-US"/>
+          </a:p>
+        </p:txBody>
+      </p:sp>
+      <p:sp>
+        <p:nvSpPr>
+          <p:cNvPr id="69" name="Freeform: Shape 68">
+            <a:extLst>
+              <a:ext uri="{FF2B5EF4-FFF2-40B4-BE49-F238E27FC236}">
+                <a16:creationId xmlns:a16="http://schemas.microsoft.com/office/drawing/2014/main" id="{E91177CB-507A-1CCB-3868-04D170E7CA5E}"/>
+              </a:ext>
+            </a:extLst>
+          </p:cNvPr>
+          <p:cNvSpPr/>
+          <p:nvPr/>
+        </p:nvSpPr>
+        <p:spPr>
+          <a:xfrm>
+            <a:off x="5654780" y="4908048"/>
+            <a:ext cx="882439" cy="435882"/>
+          </a:xfrm>
+          <a:custGeom>
+            <a:avLst/>
+            <a:gdLst>
+              <a:gd name="csX0" fmla="*/ 0 w 4997049"/>
+              <a:gd name="csY0" fmla="*/ 2468301 h 2468301"/>
+              <a:gd name="csX1" fmla="*/ 11300 w 4997049"/>
+              <a:gd name="csY1" fmla="*/ 2244508 h 2468301"/>
+              <a:gd name="csX2" fmla="*/ 2498524 w 4997049"/>
+              <a:gd name="csY2" fmla="*/ 0 h 2468301"/>
+              <a:gd name="csX3" fmla="*/ 4985748 w 4997049"/>
+              <a:gd name="csY3" fmla="*/ 2244508 h 2468301"/>
+              <a:gd name="csX4" fmla="*/ 4997049 w 4997049"/>
+              <a:gd name="csY4" fmla="*/ 2468301 h 2468301"/>
+            </a:gdLst>
+            <a:ahLst/>
+            <a:cxnLst>
+              <a:cxn ang="0">
+                <a:pos x="csX0" y="csY0"/>
+              </a:cxn>
+              <a:cxn ang="0">
+                <a:pos x="csX1" y="csY1"/>
+              </a:cxn>
+              <a:cxn ang="0">
+                <a:pos x="csX2" y="csY2"/>
+              </a:cxn>
+              <a:cxn ang="0">
+                <a:pos x="csX3" y="csY3"/>
+              </a:cxn>
+              <a:cxn ang="0">
+                <a:pos x="csX4" y="csY4"/>
+              </a:cxn>
+            </a:cxnLst>
+            <a:rect l="l" t="t" r="r" b="b"/>
+            <a:pathLst>
+              <a:path w="4997049" h="2468301">
+                <a:moveTo>
+                  <a:pt x="0" y="2468301"/>
+                </a:moveTo>
+                <a:lnTo>
+                  <a:pt x="11300" y="2244508"/>
+                </a:lnTo>
+                <a:cubicBezTo>
+                  <a:pt x="139332" y="983801"/>
+                  <a:pt x="1204038" y="0"/>
+                  <a:pt x="2498524" y="0"/>
+                </a:cubicBezTo>
+                <a:cubicBezTo>
+                  <a:pt x="3793010" y="0"/>
+                  <a:pt x="4857717" y="983801"/>
+                  <a:pt x="4985748" y="2244508"/>
+                </a:cubicBezTo>
+                <a:lnTo>
+                  <a:pt x="4997049" y="2468301"/>
+                </a:lnTo>
+              </a:path>
+            </a:pathLst>
+          </a:custGeom>
+          <a:noFill/>
+          <a:ln w="28575">
+            <a:solidFill>
+              <a:schemeClr val="tx1"/>
+            </a:solidFill>
+            <a:headEnd type="triangle" w="lg" len="med"/>
+          </a:ln>
+        </p:spPr>
+        <p:style>
+          <a:lnRef idx="2">
+            <a:schemeClr val="accent1">
+              <a:shade val="15000"/>
+            </a:schemeClr>
+          </a:lnRef>
+          <a:fillRef idx="1">
+            <a:schemeClr val="accent1"/>
+          </a:fillRef>
+          <a:effectRef idx="0">
+            <a:schemeClr val="accent1"/>
+          </a:effectRef>
+          <a:fontRef idx="minor">
+            <a:schemeClr val="lt1"/>
+          </a:fontRef>
+        </p:style>
+        <p:txBody>
+          <a:bodyPr wrap="square" rtlCol="0" anchor="ctr">
+            <a:noAutofit/>
+          </a:bodyPr>
+          <a:lstStyle/>
+          <a:p>
+            <a:pPr algn="ctr"/>
+            <a:endParaRPr lang="en-IN"/>
+          </a:p>
+        </p:txBody>
+      </p:sp>
+      <mc:AlternateContent xmlns:mc="http://schemas.openxmlformats.org/markup-compatibility/2006">
+        <mc:Choice xmlns:a14="http://schemas.microsoft.com/office/drawing/2010/main" Requires="a14">
+          <p:sp>
+            <p:nvSpPr>
+              <p:cNvPr id="71" name="TextBox 70">
+                <a:extLst>
+                  <a:ext uri="{FF2B5EF4-FFF2-40B4-BE49-F238E27FC236}">
+                    <a16:creationId xmlns:a16="http://schemas.microsoft.com/office/drawing/2014/main" id="{34E26C26-CEDA-982E-E4FD-4B21E2611987}"/>
+                  </a:ext>
+                </a:extLst>
+              </p:cNvPr>
+              <p:cNvSpPr txBox="1"/>
+              <p:nvPr/>
+            </p:nvSpPr>
+            <p:spPr>
+              <a:xfrm>
+                <a:off x="6131069" y="5011233"/>
+                <a:ext cx="239296" cy="307777"/>
+              </a:xfrm>
+              <a:prstGeom prst="rect">
+                <a:avLst/>
+              </a:prstGeom>
+              <a:noFill/>
+            </p:spPr>
+            <p:txBody>
+              <a:bodyPr wrap="none" lIns="0" tIns="0" rIns="0" bIns="0" rtlCol="0">
+                <a:spAutoFit/>
+              </a:bodyPr>
+              <a:lstStyle/>
+              <a:p>
+                <a:pPr/>
+                <a14:m>
+                  <m:oMathPara xmlns:m="http://schemas.openxmlformats.org/officeDocument/2006/math">
+                    <m:oMath>
+                      <m:r>
+                        <m:rPr>
+                          <m:sty m:val="p"/>
+                        </m:rPr>
+                        <a:rPr lang="el-GR" sz="2000" b="0" i="0" smtClean="0">
+                          <a:latin typeface="Cambria Math" panose="02040503050406030204" pitchFamily="18" charset="0"/>
+                          <a:ea typeface="Cambria Math" panose="02040503050406030204" pitchFamily="18" charset="0"/>
+                        </a:rPr>
+                        <m:t>Ω</m:t>
+                      </m:r>
+                    </m:oMath>
+                  </m:oMathPara>
+                </a14:m>
+                <a:endParaRPr lang="en-IN" sz="2000" dirty="0"/>
+              </a:p>
+            </p:txBody>
+          </p:sp>
+        </mc:Choice>
+        <mc:Fallback>
+          <p:sp>
+            <p:nvSpPr>
+              <p:cNvPr id="71" name="TextBox 70">
+                <a:extLst>
+                  <a:ext uri="{FF2B5EF4-FFF2-40B4-BE49-F238E27FC236}">
+                    <a16:creationId xmlns:a16="http://schemas.microsoft.com/office/drawing/2014/main" id="{34E26C26-CEDA-982E-E4FD-4B21E2611987}"/>
+                  </a:ext>
+                </a:extLst>
+              </p:cNvPr>
+              <p:cNvSpPr txBox="1">
+                <a:spLocks noRot="1" noChangeAspect="1" noMove="1" noResize="1" noEditPoints="1" noAdjustHandles="1" noChangeArrowheads="1" noChangeShapeType="1" noTextEdit="1"/>
+              </p:cNvSpPr>
+              <p:nvPr/>
+            </p:nvSpPr>
+            <p:spPr>
+              <a:xfrm>
+                <a:off x="6131069" y="5011233"/>
+                <a:ext cx="239296" cy="307777"/>
+              </a:xfrm>
+              <a:prstGeom prst="rect">
+                <a:avLst/>
+              </a:prstGeom>
+              <a:blipFill>
+                <a:blip r:embed="rId2"/>
+                <a:stretch>
+                  <a:fillRect l="-25641" r="-23077" b="-5882"/>
+                </a:stretch>
+              </a:blipFill>
+            </p:spPr>
+            <p:txBody>
+              <a:bodyPr/>
+              <a:lstStyle/>
+              <a:p>
+                <a:r>
+                  <a:rPr lang="en-IN">
+                    <a:noFill/>
+                  </a:rPr>
+                  <a:t> </a:t>
+                </a:r>
+              </a:p>
+            </p:txBody>
+          </p:sp>
+        </mc:Fallback>
+      </mc:AlternateContent>
+      <mc:AlternateContent xmlns:mc="http://schemas.openxmlformats.org/markup-compatibility/2006">
+        <mc:Choice xmlns:a14="http://schemas.microsoft.com/office/drawing/2010/main" Requires="a14">
+          <p:sp>
+            <p:nvSpPr>
+              <p:cNvPr id="72" name="TextBox 71">
+                <a:extLst>
+                  <a:ext uri="{FF2B5EF4-FFF2-40B4-BE49-F238E27FC236}">
+                    <a16:creationId xmlns:a16="http://schemas.microsoft.com/office/drawing/2014/main" id="{CBF4BF27-D3DB-B2C5-1108-98D1F5F008F6}"/>
+                  </a:ext>
+                </a:extLst>
+              </p:cNvPr>
+              <p:cNvSpPr txBox="1"/>
+              <p:nvPr/>
+            </p:nvSpPr>
+            <p:spPr>
+              <a:xfrm>
+                <a:off x="6006587" y="1049790"/>
+                <a:ext cx="274562" cy="307777"/>
+              </a:xfrm>
+              <a:prstGeom prst="rect">
+                <a:avLst/>
+              </a:prstGeom>
+              <a:noFill/>
+            </p:spPr>
+            <p:txBody>
+              <a:bodyPr wrap="none" lIns="0" tIns="0" rIns="0" bIns="0" rtlCol="0">
+                <a:spAutoFit/>
+              </a:bodyPr>
+              <a:lstStyle/>
+              <a:p>
+                <a14:m>
+                  <m:oMathPara xmlns:m="http://schemas.openxmlformats.org/officeDocument/2006/math">
+                    <m:oMath>
+                      <m:sSub>
+                        <m:sSubPr>
+                          <m:ctrlPr>
+                            <a:rPr lang="en-US" sz="2000" b="0" i="1" smtClean="0">
+                              <a:latin typeface="Cambria Math" panose="02040503050406030204" pitchFamily="18" charset="0"/>
+                            </a:rPr>
+                          </m:ctrlPr>
+                        </m:sSubPr>
+                        <m:e>
+                          <m:r>
+                            <a:rPr lang="en-US" sz="2000" b="0" i="1" smtClean="0">
+                              <a:latin typeface="Cambria Math" panose="02040503050406030204" pitchFamily="18" charset="0"/>
+                            </a:rPr>
+                            <m:t>𝑡</m:t>
+                          </m:r>
+                        </m:e>
+                        <m:sub>
+                          <m:r>
+                            <a:rPr lang="en-US" sz="2000" b="0" i="1" smtClean="0">
+                              <a:latin typeface="Cambria Math" panose="02040503050406030204" pitchFamily="18" charset="0"/>
+                            </a:rPr>
+                            <m:t>0</m:t>
+                          </m:r>
+                        </m:sub>
+                      </m:sSub>
+                    </m:oMath>
+                  </m:oMathPara>
+                </a14:m>
+                <a:endParaRPr lang="en-IN" sz="2000" dirty="0"/>
+              </a:p>
+            </p:txBody>
+          </p:sp>
+        </mc:Choice>
+        <mc:Fallback>
+          <p:sp>
+            <p:nvSpPr>
+              <p:cNvPr id="72" name="TextBox 71">
+                <a:extLst>
+                  <a:ext uri="{FF2B5EF4-FFF2-40B4-BE49-F238E27FC236}">
+                    <a16:creationId xmlns:a16="http://schemas.microsoft.com/office/drawing/2014/main" id="{CBF4BF27-D3DB-B2C5-1108-98D1F5F008F6}"/>
+                  </a:ext>
+                </a:extLst>
+              </p:cNvPr>
+              <p:cNvSpPr txBox="1">
+                <a:spLocks noRot="1" noChangeAspect="1" noMove="1" noResize="1" noEditPoints="1" noAdjustHandles="1" noChangeArrowheads="1" noChangeShapeType="1" noTextEdit="1"/>
+              </p:cNvSpPr>
+              <p:nvPr/>
+            </p:nvSpPr>
+            <p:spPr>
+              <a:xfrm>
+                <a:off x="6006587" y="1049790"/>
+                <a:ext cx="274562" cy="307777"/>
+              </a:xfrm>
+              <a:prstGeom prst="rect">
+                <a:avLst/>
+              </a:prstGeom>
+              <a:blipFill>
+                <a:blip r:embed="rId3"/>
+                <a:stretch>
+                  <a:fillRect l="-17778" r="-6667" b="-13725"/>
+                </a:stretch>
+              </a:blipFill>
+            </p:spPr>
+            <p:txBody>
+              <a:bodyPr/>
+              <a:lstStyle/>
+              <a:p>
+                <a:r>
+                  <a:rPr lang="en-IN">
+                    <a:noFill/>
+                  </a:rPr>
+                  <a:t> </a:t>
+                </a:r>
+              </a:p>
+            </p:txBody>
+          </p:sp>
+        </mc:Fallback>
+      </mc:AlternateContent>
+      <mc:AlternateContent xmlns:mc="http://schemas.openxmlformats.org/markup-compatibility/2006">
+        <mc:Choice xmlns:a14="http://schemas.microsoft.com/office/drawing/2010/main" Requires="a14">
+          <p:sp>
+            <p:nvSpPr>
+              <p:cNvPr id="74" name="TextBox 73">
+                <a:extLst>
+                  <a:ext uri="{FF2B5EF4-FFF2-40B4-BE49-F238E27FC236}">
+                    <a16:creationId xmlns:a16="http://schemas.microsoft.com/office/drawing/2014/main" id="{C275DC27-A686-C38A-CB1D-84D7D0F100FE}"/>
+                  </a:ext>
+                </a:extLst>
+              </p:cNvPr>
+              <p:cNvSpPr txBox="1"/>
+              <p:nvPr/>
+            </p:nvSpPr>
+            <p:spPr>
+              <a:xfrm>
+                <a:off x="4834830" y="1053551"/>
+                <a:ext cx="274562" cy="307777"/>
+              </a:xfrm>
+              <a:prstGeom prst="rect">
+                <a:avLst/>
+              </a:prstGeom>
+              <a:noFill/>
+            </p:spPr>
+            <p:txBody>
+              <a:bodyPr wrap="none" lIns="0" tIns="0" rIns="0" bIns="0" rtlCol="0">
+                <a:spAutoFit/>
+              </a:bodyPr>
+              <a:lstStyle/>
+              <a:p>
+                <a:pPr/>
+                <a14:m>
+                  <m:oMathPara xmlns:m="http://schemas.openxmlformats.org/officeDocument/2006/math">
+                    <m:oMath>
+                      <m:sSub>
+                        <m:sSubPr>
+                          <m:ctrlPr>
+                            <a:rPr lang="en-US" sz="2000" b="0" i="1" smtClean="0">
+                              <a:latin typeface="Cambria Math" panose="02040503050406030204" pitchFamily="18" charset="0"/>
+                            </a:rPr>
+                          </m:ctrlPr>
+                        </m:sSubPr>
+                        <m:e>
+                          <m:r>
+                            <a:rPr lang="en-US" sz="2000" b="0" i="1" smtClean="0">
+                              <a:latin typeface="Cambria Math" panose="02040503050406030204" pitchFamily="18" charset="0"/>
+                            </a:rPr>
+                            <m:t>𝑡</m:t>
+                          </m:r>
+                        </m:e>
+                        <m:sub>
+                          <m:r>
+                            <a:rPr lang="en-US" sz="2000" b="0" i="1" smtClean="0">
+                              <a:latin typeface="Cambria Math" panose="02040503050406030204" pitchFamily="18" charset="0"/>
+                            </a:rPr>
+                            <m:t>1</m:t>
+                          </m:r>
+                        </m:sub>
+                      </m:sSub>
+                    </m:oMath>
+                  </m:oMathPara>
+                </a14:m>
+                <a:endParaRPr lang="en-IN" sz="2000" dirty="0"/>
+              </a:p>
+            </p:txBody>
+          </p:sp>
+        </mc:Choice>
+        <mc:Fallback>
+          <p:sp>
+            <p:nvSpPr>
+              <p:cNvPr id="74" name="TextBox 73">
+                <a:extLst>
+                  <a:ext uri="{FF2B5EF4-FFF2-40B4-BE49-F238E27FC236}">
+                    <a16:creationId xmlns:a16="http://schemas.microsoft.com/office/drawing/2014/main" id="{C275DC27-A686-C38A-CB1D-84D7D0F100FE}"/>
+                  </a:ext>
+                </a:extLst>
+              </p:cNvPr>
+              <p:cNvSpPr txBox="1">
+                <a:spLocks noRot="1" noChangeAspect="1" noMove="1" noResize="1" noEditPoints="1" noAdjustHandles="1" noChangeArrowheads="1" noChangeShapeType="1" noTextEdit="1"/>
+              </p:cNvSpPr>
+              <p:nvPr/>
+            </p:nvSpPr>
+            <p:spPr>
+              <a:xfrm>
+                <a:off x="4834830" y="1053551"/>
+                <a:ext cx="274562" cy="307777"/>
+              </a:xfrm>
+              <a:prstGeom prst="rect">
+                <a:avLst/>
+              </a:prstGeom>
+              <a:blipFill>
+                <a:blip r:embed="rId4"/>
+                <a:stretch>
+                  <a:fillRect l="-17778" r="-4444" b="-16000"/>
+                </a:stretch>
+              </a:blipFill>
+            </p:spPr>
+            <p:txBody>
+              <a:bodyPr/>
+              <a:lstStyle/>
+              <a:p>
+                <a:r>
+                  <a:rPr lang="en-IN">
+                    <a:noFill/>
+                  </a:rPr>
+                  <a:t> </a:t>
+                </a:r>
+              </a:p>
+            </p:txBody>
+          </p:sp>
+        </mc:Fallback>
+      </mc:AlternateContent>
+      <mc:AlternateContent xmlns:mc="http://schemas.openxmlformats.org/markup-compatibility/2006">
+        <mc:Choice xmlns:a14="http://schemas.microsoft.com/office/drawing/2010/main" Requires="a14">
+          <p:sp>
+            <p:nvSpPr>
+              <p:cNvPr id="76" name="TextBox 75">
+                <a:extLst>
+                  <a:ext uri="{FF2B5EF4-FFF2-40B4-BE49-F238E27FC236}">
+                    <a16:creationId xmlns:a16="http://schemas.microsoft.com/office/drawing/2014/main" id="{1C829C31-8EFC-ABA9-AB3B-1B0D6C670344}"/>
+                  </a:ext>
+                </a:extLst>
+              </p:cNvPr>
+              <p:cNvSpPr txBox="1"/>
+              <p:nvPr/>
+            </p:nvSpPr>
+            <p:spPr>
+              <a:xfrm>
+                <a:off x="3671415" y="1045304"/>
+                <a:ext cx="274562" cy="307777"/>
+              </a:xfrm>
+              <a:prstGeom prst="rect">
+                <a:avLst/>
+              </a:prstGeom>
+              <a:noFill/>
+            </p:spPr>
+            <p:txBody>
+              <a:bodyPr wrap="none" lIns="0" tIns="0" rIns="0" bIns="0" rtlCol="0">
+                <a:spAutoFit/>
+              </a:bodyPr>
+              <a:lstStyle/>
+              <a:p>
+                <a:pPr/>
+                <a14:m>
+                  <m:oMathPara xmlns:m="http://schemas.openxmlformats.org/officeDocument/2006/math">
+                    <m:oMath>
+                      <m:sSub>
+                        <m:sSubPr>
+                          <m:ctrlPr>
+                            <a:rPr lang="en-US" sz="2000" b="0" i="1" smtClean="0">
+                              <a:latin typeface="Cambria Math" panose="02040503050406030204" pitchFamily="18" charset="0"/>
+                            </a:rPr>
+                          </m:ctrlPr>
+                        </m:sSubPr>
+                        <m:e>
+                          <m:r>
+                            <a:rPr lang="en-US" sz="2000" b="0" i="1" smtClean="0">
+                              <a:latin typeface="Cambria Math" panose="02040503050406030204" pitchFamily="18" charset="0"/>
+                            </a:rPr>
+                            <m:t>𝑡</m:t>
+                          </m:r>
+                        </m:e>
+                        <m:sub>
+                          <m:r>
+                            <a:rPr lang="en-US" sz="2000" b="0" i="1" smtClean="0">
+                              <a:latin typeface="Cambria Math" panose="02040503050406030204" pitchFamily="18" charset="0"/>
+                            </a:rPr>
+                            <m:t>2</m:t>
+                          </m:r>
+                        </m:sub>
+                      </m:sSub>
+                    </m:oMath>
+                  </m:oMathPara>
+                </a14:m>
+                <a:endParaRPr lang="en-IN" sz="2000" dirty="0"/>
+              </a:p>
+            </p:txBody>
+          </p:sp>
+        </mc:Choice>
+        <mc:Fallback>
+          <p:sp>
+            <p:nvSpPr>
+              <p:cNvPr id="76" name="TextBox 75">
+                <a:extLst>
+                  <a:ext uri="{FF2B5EF4-FFF2-40B4-BE49-F238E27FC236}">
+                    <a16:creationId xmlns:a16="http://schemas.microsoft.com/office/drawing/2014/main" id="{1C829C31-8EFC-ABA9-AB3B-1B0D6C670344}"/>
+                  </a:ext>
+                </a:extLst>
+              </p:cNvPr>
+              <p:cNvSpPr txBox="1">
+                <a:spLocks noRot="1" noChangeAspect="1" noMove="1" noResize="1" noEditPoints="1" noAdjustHandles="1" noChangeArrowheads="1" noChangeShapeType="1" noTextEdit="1"/>
+              </p:cNvSpPr>
+              <p:nvPr/>
+            </p:nvSpPr>
+            <p:spPr>
+              <a:xfrm>
+                <a:off x="3671415" y="1045304"/>
+                <a:ext cx="274562" cy="307777"/>
+              </a:xfrm>
+              <a:prstGeom prst="rect">
+                <a:avLst/>
+              </a:prstGeom>
+              <a:blipFill>
+                <a:blip r:embed="rId5"/>
+                <a:stretch>
+                  <a:fillRect l="-17778" r="-6667" b="-13725"/>
+                </a:stretch>
+              </a:blipFill>
+            </p:spPr>
+            <p:txBody>
+              <a:bodyPr/>
+              <a:lstStyle/>
+              <a:p>
+                <a:r>
+                  <a:rPr lang="en-IN">
+                    <a:noFill/>
+                  </a:rPr>
+                  <a:t> </a:t>
+                </a:r>
+              </a:p>
+            </p:txBody>
+          </p:sp>
+        </mc:Fallback>
+      </mc:AlternateContent>
+      <mc:AlternateContent xmlns:mc="http://schemas.openxmlformats.org/markup-compatibility/2006">
+        <mc:Choice xmlns:a14="http://schemas.microsoft.com/office/drawing/2010/main" Requires="a14">
+          <p:sp>
+            <p:nvSpPr>
+              <p:cNvPr id="78" name="TextBox 77">
+                <a:extLst>
+                  <a:ext uri="{FF2B5EF4-FFF2-40B4-BE49-F238E27FC236}">
+                    <a16:creationId xmlns:a16="http://schemas.microsoft.com/office/drawing/2014/main" id="{25C25092-61EB-2A21-D9B0-8A5752A70538}"/>
+                  </a:ext>
+                </a:extLst>
+              </p:cNvPr>
+              <p:cNvSpPr txBox="1"/>
+              <p:nvPr/>
+            </p:nvSpPr>
+            <p:spPr>
+              <a:xfrm>
+                <a:off x="2521679" y="1053551"/>
+                <a:ext cx="274562" cy="307777"/>
+              </a:xfrm>
+              <a:prstGeom prst="rect">
+                <a:avLst/>
+              </a:prstGeom>
+              <a:noFill/>
+            </p:spPr>
+            <p:txBody>
+              <a:bodyPr wrap="none" lIns="0" tIns="0" rIns="0" bIns="0" rtlCol="0">
+                <a:spAutoFit/>
+              </a:bodyPr>
+              <a:lstStyle/>
+              <a:p>
+                <a:pPr/>
+                <a14:m>
+                  <m:oMathPara xmlns:m="http://schemas.openxmlformats.org/officeDocument/2006/math">
+                    <m:oMath>
+                      <m:sSub>
+                        <m:sSubPr>
+                          <m:ctrlPr>
+                            <a:rPr lang="en-US" sz="2000" b="0" i="1" smtClean="0">
+                              <a:latin typeface="Cambria Math" panose="02040503050406030204" pitchFamily="18" charset="0"/>
+                            </a:rPr>
+                          </m:ctrlPr>
+                        </m:sSubPr>
+                        <m:e>
+                          <m:r>
+                            <a:rPr lang="en-US" sz="2000" b="0" i="1" smtClean="0">
+                              <a:latin typeface="Cambria Math" panose="02040503050406030204" pitchFamily="18" charset="0"/>
+                            </a:rPr>
+                            <m:t>𝑡</m:t>
+                          </m:r>
+                        </m:e>
+                        <m:sub>
+                          <m:r>
+                            <a:rPr lang="en-US" sz="2000" b="0" i="1" smtClean="0">
+                              <a:latin typeface="Cambria Math" panose="02040503050406030204" pitchFamily="18" charset="0"/>
+                            </a:rPr>
+                            <m:t>3</m:t>
+                          </m:r>
+                        </m:sub>
+                      </m:sSub>
+                    </m:oMath>
+                  </m:oMathPara>
+                </a14:m>
+                <a:endParaRPr lang="en-IN" sz="2000" dirty="0"/>
+              </a:p>
+            </p:txBody>
+          </p:sp>
+        </mc:Choice>
+        <mc:Fallback>
+          <p:sp>
+            <p:nvSpPr>
+              <p:cNvPr id="78" name="TextBox 77">
+                <a:extLst>
+                  <a:ext uri="{FF2B5EF4-FFF2-40B4-BE49-F238E27FC236}">
+                    <a16:creationId xmlns:a16="http://schemas.microsoft.com/office/drawing/2014/main" id="{25C25092-61EB-2A21-D9B0-8A5752A70538}"/>
+                  </a:ext>
+                </a:extLst>
+              </p:cNvPr>
+              <p:cNvSpPr txBox="1">
+                <a:spLocks noRot="1" noChangeAspect="1" noMove="1" noResize="1" noEditPoints="1" noAdjustHandles="1" noChangeArrowheads="1" noChangeShapeType="1" noTextEdit="1"/>
+              </p:cNvSpPr>
+              <p:nvPr/>
+            </p:nvSpPr>
+            <p:spPr>
+              <a:xfrm>
+                <a:off x="2521679" y="1053551"/>
+                <a:ext cx="274562" cy="307777"/>
+              </a:xfrm>
+              <a:prstGeom prst="rect">
+                <a:avLst/>
+              </a:prstGeom>
+              <a:blipFill>
+                <a:blip r:embed="rId6"/>
+                <a:stretch>
+                  <a:fillRect l="-17778" r="-6667" b="-16000"/>
+                </a:stretch>
+              </a:blipFill>
+            </p:spPr>
+            <p:txBody>
+              <a:bodyPr/>
+              <a:lstStyle/>
+              <a:p>
+                <a:r>
+                  <a:rPr lang="en-IN">
+                    <a:noFill/>
+                  </a:rPr>
+                  <a:t> </a:t>
+                </a:r>
+              </a:p>
+            </p:txBody>
+          </p:sp>
+        </mc:Fallback>
+      </mc:AlternateContent>
+      <mc:AlternateContent xmlns:mc="http://schemas.openxmlformats.org/markup-compatibility/2006">
+        <mc:Choice xmlns:a14="http://schemas.microsoft.com/office/drawing/2010/main" Requires="a14">
+          <p:sp>
+            <p:nvSpPr>
+              <p:cNvPr id="80" name="TextBox 79">
+                <a:extLst>
+                  <a:ext uri="{FF2B5EF4-FFF2-40B4-BE49-F238E27FC236}">
+                    <a16:creationId xmlns:a16="http://schemas.microsoft.com/office/drawing/2014/main" id="{E211D8E2-9D4D-ACB2-E084-03C0A6B98A18}"/>
+                  </a:ext>
+                </a:extLst>
+              </p:cNvPr>
+              <p:cNvSpPr txBox="1"/>
+              <p:nvPr/>
+            </p:nvSpPr>
+            <p:spPr>
+              <a:xfrm>
+                <a:off x="6124261" y="1584154"/>
+                <a:ext cx="274562" cy="307777"/>
+              </a:xfrm>
+              <a:prstGeom prst="rect">
+                <a:avLst/>
+              </a:prstGeom>
+              <a:noFill/>
+            </p:spPr>
+            <p:txBody>
+              <a:bodyPr wrap="none" lIns="0" tIns="0" rIns="0" bIns="0" rtlCol="0">
+                <a:spAutoFit/>
+              </a:bodyPr>
+              <a:lstStyle/>
+              <a:p>
+                <a:pPr/>
+                <a14:m>
+                  <m:oMathPara xmlns:m="http://schemas.openxmlformats.org/officeDocument/2006/math">
+                    <m:oMath>
+                      <m:sSub>
+                        <m:sSubPr>
+                          <m:ctrlPr>
+                            <a:rPr lang="en-US" sz="2000" b="0" i="1" smtClean="0">
+                              <a:latin typeface="Cambria Math" panose="02040503050406030204" pitchFamily="18" charset="0"/>
+                            </a:rPr>
+                          </m:ctrlPr>
+                        </m:sSubPr>
+                        <m:e>
+                          <m:r>
+                            <a:rPr lang="en-US" sz="2000" b="0" i="1" smtClean="0">
+                              <a:latin typeface="Cambria Math" panose="02040503050406030204" pitchFamily="18" charset="0"/>
+                            </a:rPr>
+                            <m:t>𝑡</m:t>
+                          </m:r>
+                        </m:e>
+                        <m:sub>
+                          <m:r>
+                            <a:rPr lang="en-US" sz="2000" b="0" i="1" smtClean="0">
+                              <a:latin typeface="Cambria Math" panose="02040503050406030204" pitchFamily="18" charset="0"/>
+                            </a:rPr>
+                            <m:t>0</m:t>
+                          </m:r>
+                        </m:sub>
+                      </m:sSub>
+                    </m:oMath>
+                  </m:oMathPara>
+                </a14:m>
+                <a:endParaRPr lang="en-IN" sz="2000" dirty="0"/>
+              </a:p>
+            </p:txBody>
+          </p:sp>
+        </mc:Choice>
+        <mc:Fallback>
+          <p:sp>
+            <p:nvSpPr>
+              <p:cNvPr id="80" name="TextBox 79">
+                <a:extLst>
+                  <a:ext uri="{FF2B5EF4-FFF2-40B4-BE49-F238E27FC236}">
+                    <a16:creationId xmlns:a16="http://schemas.microsoft.com/office/drawing/2014/main" id="{E211D8E2-9D4D-ACB2-E084-03C0A6B98A18}"/>
+                  </a:ext>
+                </a:extLst>
+              </p:cNvPr>
+              <p:cNvSpPr txBox="1">
+                <a:spLocks noRot="1" noChangeAspect="1" noMove="1" noResize="1" noEditPoints="1" noAdjustHandles="1" noChangeArrowheads="1" noChangeShapeType="1" noTextEdit="1"/>
+              </p:cNvSpPr>
+              <p:nvPr/>
+            </p:nvSpPr>
+            <p:spPr>
+              <a:xfrm>
+                <a:off x="6124261" y="1584154"/>
+                <a:ext cx="274562" cy="307777"/>
+              </a:xfrm>
+              <a:prstGeom prst="rect">
+                <a:avLst/>
+              </a:prstGeom>
+              <a:blipFill>
+                <a:blip r:embed="rId7"/>
+                <a:stretch>
+                  <a:fillRect l="-17778" r="-6667" b="-16000"/>
+                </a:stretch>
+              </a:blipFill>
+            </p:spPr>
+            <p:txBody>
+              <a:bodyPr/>
+              <a:lstStyle/>
+              <a:p>
+                <a:r>
+                  <a:rPr lang="en-IN">
+                    <a:noFill/>
+                  </a:rPr>
+                  <a:t> </a:t>
+                </a:r>
+              </a:p>
+            </p:txBody>
+          </p:sp>
+        </mc:Fallback>
+      </mc:AlternateContent>
+      <mc:AlternateContent xmlns:mc="http://schemas.openxmlformats.org/markup-compatibility/2006">
+        <mc:Choice xmlns:a14="http://schemas.microsoft.com/office/drawing/2010/main" Requires="a14">
+          <p:sp>
+            <p:nvSpPr>
+              <p:cNvPr id="82" name="TextBox 81">
+                <a:extLst>
+                  <a:ext uri="{FF2B5EF4-FFF2-40B4-BE49-F238E27FC236}">
+                    <a16:creationId xmlns:a16="http://schemas.microsoft.com/office/drawing/2014/main" id="{1F0E2F90-E487-CFE6-D8D2-47BCE2201F1C}"/>
+                  </a:ext>
+                </a:extLst>
+              </p:cNvPr>
+              <p:cNvSpPr txBox="1"/>
+              <p:nvPr/>
+            </p:nvSpPr>
+            <p:spPr>
+              <a:xfrm>
+                <a:off x="5079830" y="1634215"/>
+                <a:ext cx="274562" cy="307777"/>
+              </a:xfrm>
+              <a:prstGeom prst="rect">
+                <a:avLst/>
+              </a:prstGeom>
+              <a:noFill/>
+            </p:spPr>
+            <p:txBody>
+              <a:bodyPr wrap="none" lIns="0" tIns="0" rIns="0" bIns="0" rtlCol="0">
+                <a:spAutoFit/>
+              </a:bodyPr>
+              <a:lstStyle/>
+              <a:p>
+                <a:pPr/>
+                <a14:m>
+                  <m:oMathPara xmlns:m="http://schemas.openxmlformats.org/officeDocument/2006/math">
+                    <m:oMath>
+                      <m:sSub>
+                        <m:sSubPr>
+                          <m:ctrlPr>
+                            <a:rPr lang="en-US" sz="2000" b="0" i="1" smtClean="0">
+                              <a:latin typeface="Cambria Math" panose="02040503050406030204" pitchFamily="18" charset="0"/>
+                            </a:rPr>
+                          </m:ctrlPr>
+                        </m:sSubPr>
+                        <m:e>
+                          <m:r>
+                            <a:rPr lang="en-US" sz="2000" b="0" i="1" smtClean="0">
+                              <a:latin typeface="Cambria Math" panose="02040503050406030204" pitchFamily="18" charset="0"/>
+                            </a:rPr>
+                            <m:t>𝑡</m:t>
+                          </m:r>
+                        </m:e>
+                        <m:sub>
+                          <m:r>
+                            <a:rPr lang="en-US" sz="2000" b="0" i="1" smtClean="0">
+                              <a:latin typeface="Cambria Math" panose="02040503050406030204" pitchFamily="18" charset="0"/>
+                            </a:rPr>
+                            <m:t>1</m:t>
+                          </m:r>
+                        </m:sub>
+                      </m:sSub>
+                    </m:oMath>
+                  </m:oMathPara>
+                </a14:m>
+                <a:endParaRPr lang="en-IN" sz="2000" dirty="0"/>
+              </a:p>
+            </p:txBody>
+          </p:sp>
+        </mc:Choice>
+        <mc:Fallback>
+          <p:sp>
+            <p:nvSpPr>
+              <p:cNvPr id="82" name="TextBox 81">
+                <a:extLst>
+                  <a:ext uri="{FF2B5EF4-FFF2-40B4-BE49-F238E27FC236}">
+                    <a16:creationId xmlns:a16="http://schemas.microsoft.com/office/drawing/2014/main" id="{1F0E2F90-E487-CFE6-D8D2-47BCE2201F1C}"/>
+                  </a:ext>
+                </a:extLst>
+              </p:cNvPr>
+              <p:cNvSpPr txBox="1">
+                <a:spLocks noRot="1" noChangeAspect="1" noMove="1" noResize="1" noEditPoints="1" noAdjustHandles="1" noChangeArrowheads="1" noChangeShapeType="1" noTextEdit="1"/>
+              </p:cNvSpPr>
+              <p:nvPr/>
+            </p:nvSpPr>
+            <p:spPr>
+              <a:xfrm>
+                <a:off x="5079830" y="1634215"/>
+                <a:ext cx="274562" cy="307777"/>
+              </a:xfrm>
+              <a:prstGeom prst="rect">
+                <a:avLst/>
+              </a:prstGeom>
+              <a:blipFill>
+                <a:blip r:embed="rId8"/>
+                <a:stretch>
+                  <a:fillRect l="-17778" r="-4444" b="-13725"/>
+                </a:stretch>
+              </a:blipFill>
+            </p:spPr>
+            <p:txBody>
+              <a:bodyPr/>
+              <a:lstStyle/>
+              <a:p>
+                <a:r>
+                  <a:rPr lang="en-IN">
+                    <a:noFill/>
+                  </a:rPr>
+                  <a:t> </a:t>
+                </a:r>
+              </a:p>
+            </p:txBody>
+          </p:sp>
+        </mc:Fallback>
+      </mc:AlternateContent>
+      <mc:AlternateContent xmlns:mc="http://schemas.openxmlformats.org/markup-compatibility/2006">
+        <mc:Choice xmlns:a14="http://schemas.microsoft.com/office/drawing/2010/main" Requires="a14">
+          <p:sp>
+            <p:nvSpPr>
+              <p:cNvPr id="84" name="TextBox 83">
+                <a:extLst>
+                  <a:ext uri="{FF2B5EF4-FFF2-40B4-BE49-F238E27FC236}">
+                    <a16:creationId xmlns:a16="http://schemas.microsoft.com/office/drawing/2014/main" id="{69CB71C4-494E-C259-8EF3-05371CBE7134}"/>
+                  </a:ext>
+                </a:extLst>
+              </p:cNvPr>
+              <p:cNvSpPr txBox="1"/>
+              <p:nvPr/>
+            </p:nvSpPr>
+            <p:spPr>
+              <a:xfrm>
+                <a:off x="4066884" y="2042656"/>
+                <a:ext cx="274562" cy="307777"/>
+              </a:xfrm>
+              <a:prstGeom prst="rect">
+                <a:avLst/>
+              </a:prstGeom>
+              <a:noFill/>
+            </p:spPr>
+            <p:txBody>
+              <a:bodyPr wrap="none" lIns="0" tIns="0" rIns="0" bIns="0" rtlCol="0">
+                <a:spAutoFit/>
+              </a:bodyPr>
+              <a:lstStyle/>
+              <a:p>
+                <a:pPr/>
+                <a14:m>
+                  <m:oMathPara xmlns:m="http://schemas.openxmlformats.org/officeDocument/2006/math">
+                    <m:oMath>
+                      <m:sSub>
+                        <m:sSubPr>
+                          <m:ctrlPr>
+                            <a:rPr lang="en-US" sz="2000" b="0" i="1" smtClean="0">
+                              <a:latin typeface="Cambria Math" panose="02040503050406030204" pitchFamily="18" charset="0"/>
+                            </a:rPr>
+                          </m:ctrlPr>
+                        </m:sSubPr>
+                        <m:e>
+                          <m:r>
+                            <a:rPr lang="en-US" sz="2000" b="0" i="1" smtClean="0">
+                              <a:latin typeface="Cambria Math" panose="02040503050406030204" pitchFamily="18" charset="0"/>
+                            </a:rPr>
+                            <m:t>𝑡</m:t>
+                          </m:r>
+                        </m:e>
+                        <m:sub>
+                          <m:r>
+                            <a:rPr lang="en-US" sz="2000" b="0" i="1" smtClean="0">
+                              <a:latin typeface="Cambria Math" panose="02040503050406030204" pitchFamily="18" charset="0"/>
+                            </a:rPr>
+                            <m:t>2</m:t>
+                          </m:r>
+                        </m:sub>
+                      </m:sSub>
+                    </m:oMath>
+                  </m:oMathPara>
+                </a14:m>
+                <a:endParaRPr lang="en-IN" sz="2000" dirty="0"/>
+              </a:p>
+            </p:txBody>
+          </p:sp>
+        </mc:Choice>
+        <mc:Fallback>
+          <p:sp>
+            <p:nvSpPr>
+              <p:cNvPr id="84" name="TextBox 83">
+                <a:extLst>
+                  <a:ext uri="{FF2B5EF4-FFF2-40B4-BE49-F238E27FC236}">
+                    <a16:creationId xmlns:a16="http://schemas.microsoft.com/office/drawing/2014/main" id="{69CB71C4-494E-C259-8EF3-05371CBE7134}"/>
+                  </a:ext>
+                </a:extLst>
+              </p:cNvPr>
+              <p:cNvSpPr txBox="1">
+                <a:spLocks noRot="1" noChangeAspect="1" noMove="1" noResize="1" noEditPoints="1" noAdjustHandles="1" noChangeArrowheads="1" noChangeShapeType="1" noTextEdit="1"/>
+              </p:cNvSpPr>
+              <p:nvPr/>
+            </p:nvSpPr>
+            <p:spPr>
+              <a:xfrm>
+                <a:off x="4066884" y="2042656"/>
+                <a:ext cx="274562" cy="307777"/>
+              </a:xfrm>
+              <a:prstGeom prst="rect">
+                <a:avLst/>
+              </a:prstGeom>
+              <a:blipFill>
+                <a:blip r:embed="rId9"/>
+                <a:stretch>
+                  <a:fillRect l="-17778" r="-6667" b="-13725"/>
+                </a:stretch>
+              </a:blipFill>
+            </p:spPr>
+            <p:txBody>
+              <a:bodyPr/>
+              <a:lstStyle/>
+              <a:p>
+                <a:r>
+                  <a:rPr lang="en-IN">
+                    <a:noFill/>
+                  </a:rPr>
+                  <a:t> </a:t>
+                </a:r>
+              </a:p>
+            </p:txBody>
+          </p:sp>
+        </mc:Fallback>
+      </mc:AlternateContent>
+      <mc:AlternateContent xmlns:mc="http://schemas.openxmlformats.org/markup-compatibility/2006">
+        <mc:Choice xmlns:a14="http://schemas.microsoft.com/office/drawing/2010/main" Requires="a14">
+          <p:sp>
+            <p:nvSpPr>
+              <p:cNvPr id="86" name="TextBox 85">
+                <a:extLst>
+                  <a:ext uri="{FF2B5EF4-FFF2-40B4-BE49-F238E27FC236}">
+                    <a16:creationId xmlns:a16="http://schemas.microsoft.com/office/drawing/2014/main" id="{F513551C-B61D-792D-3F0B-8903AE05F3ED}"/>
+                  </a:ext>
+                </a:extLst>
+              </p:cNvPr>
+              <p:cNvSpPr txBox="1"/>
+              <p:nvPr/>
+            </p:nvSpPr>
+            <p:spPr>
+              <a:xfrm>
+                <a:off x="3232273" y="2734666"/>
+                <a:ext cx="274562" cy="307777"/>
+              </a:xfrm>
+              <a:prstGeom prst="rect">
+                <a:avLst/>
+              </a:prstGeom>
+              <a:noFill/>
+            </p:spPr>
+            <p:txBody>
+              <a:bodyPr wrap="none" lIns="0" tIns="0" rIns="0" bIns="0" rtlCol="0">
+                <a:spAutoFit/>
+              </a:bodyPr>
+              <a:lstStyle/>
+              <a:p>
+                <a:pPr/>
+                <a14:m>
+                  <m:oMathPara xmlns:m="http://schemas.openxmlformats.org/officeDocument/2006/math">
+                    <m:oMath>
+                      <m:sSub>
+                        <m:sSubPr>
+                          <m:ctrlPr>
+                            <a:rPr lang="en-US" sz="2000" b="0" i="1" smtClean="0">
+                              <a:latin typeface="Cambria Math" panose="02040503050406030204" pitchFamily="18" charset="0"/>
+                            </a:rPr>
+                          </m:ctrlPr>
+                        </m:sSubPr>
+                        <m:e>
+                          <m:r>
+                            <a:rPr lang="en-US" sz="2000" b="0" i="1" smtClean="0">
+                              <a:latin typeface="Cambria Math" panose="02040503050406030204" pitchFamily="18" charset="0"/>
+                            </a:rPr>
+                            <m:t>𝑡</m:t>
+                          </m:r>
+                        </m:e>
+                        <m:sub>
+                          <m:r>
+                            <a:rPr lang="en-US" sz="2000" b="0" i="1" smtClean="0">
+                              <a:latin typeface="Cambria Math" panose="02040503050406030204" pitchFamily="18" charset="0"/>
+                            </a:rPr>
+                            <m:t>3</m:t>
+                          </m:r>
+                        </m:sub>
+                      </m:sSub>
+                    </m:oMath>
+                  </m:oMathPara>
+                </a14:m>
+                <a:endParaRPr lang="en-IN" sz="2000" dirty="0"/>
+              </a:p>
+            </p:txBody>
+          </p:sp>
+        </mc:Choice>
+        <mc:Fallback>
+          <p:sp>
+            <p:nvSpPr>
+              <p:cNvPr id="86" name="TextBox 85">
+                <a:extLst>
+                  <a:ext uri="{FF2B5EF4-FFF2-40B4-BE49-F238E27FC236}">
+                    <a16:creationId xmlns:a16="http://schemas.microsoft.com/office/drawing/2014/main" id="{F513551C-B61D-792D-3F0B-8903AE05F3ED}"/>
+                  </a:ext>
+                </a:extLst>
+              </p:cNvPr>
+              <p:cNvSpPr txBox="1">
+                <a:spLocks noRot="1" noChangeAspect="1" noMove="1" noResize="1" noEditPoints="1" noAdjustHandles="1" noChangeArrowheads="1" noChangeShapeType="1" noTextEdit="1"/>
+              </p:cNvSpPr>
+              <p:nvPr/>
+            </p:nvSpPr>
+            <p:spPr>
+              <a:xfrm>
+                <a:off x="3232273" y="2734666"/>
+                <a:ext cx="274562" cy="307777"/>
+              </a:xfrm>
+              <a:prstGeom prst="rect">
+                <a:avLst/>
+              </a:prstGeom>
+              <a:blipFill>
+                <a:blip r:embed="rId10"/>
+                <a:stretch>
+                  <a:fillRect l="-17778" r="-6667" b="-16000"/>
+                </a:stretch>
+              </a:blipFill>
+            </p:spPr>
+            <p:txBody>
+              <a:bodyPr/>
+              <a:lstStyle/>
+              <a:p>
+                <a:r>
+                  <a:rPr lang="en-IN">
+                    <a:noFill/>
+                  </a:rPr>
+                  <a:t> </a:t>
+                </a:r>
+              </a:p>
+            </p:txBody>
+          </p:sp>
+        </mc:Fallback>
+      </mc:AlternateContent>
+    </p:spTree>
+    <p:extLst>
+      <p:ext uri="{BB962C8B-B14F-4D97-AF65-F5344CB8AC3E}">
+        <p14:creationId xmlns:p14="http://schemas.microsoft.com/office/powerpoint/2010/main" val="2770853916"/>
       </p:ext>
     </p:extLst>
   </p:cSld>
